--- a/IUEA_Teaching_Plan/decks/CML3111_Week07_Engineering.pptx
+++ b/IUEA_Teaching_Plan/decks/CML3111_Week07_Engineering.pptx
@@ -2,32 +2,32 @@
 <file path=ppt/presentation.xml><?xml version="1.0" encoding="utf-8"?>
 <p:presentation xmlns:p="http://schemas.openxmlformats.org/presentationml/2006/main">
   <p:sldMasterIdLst>
-    <p:sldMasterId xmlns:r="http://schemas.openxmlformats.org/officeDocument/2006/relationships" id="2147483648" r:id="Re3601049896645a2"/>
+    <p:sldMasterId xmlns:r="http://schemas.openxmlformats.org/officeDocument/2006/relationships" id="2147483648" r:id="R9f8d13a6a5fa41cf"/>
   </p:sldMasterIdLst>
   <p:notesMasterIdLst>
-    <p:notesMasterId xmlns:r="http://schemas.openxmlformats.org/officeDocument/2006/relationships" r:id="R3e2df4f249b147fc"/>
+    <p:notesMasterId xmlns:r="http://schemas.openxmlformats.org/officeDocument/2006/relationships" r:id="R71b7978815414aab"/>
   </p:notesMasterIdLst>
   <p:sldIdLst>
-    <p:sldId xmlns:r="http://schemas.openxmlformats.org/officeDocument/2006/relationships" id="256" r:id="R430efe0f8b8a4ada"/>
-    <p:sldId xmlns:r="http://schemas.openxmlformats.org/officeDocument/2006/relationships" id="257" r:id="Rb757642ed4ef44ae"/>
-    <p:sldId xmlns:r="http://schemas.openxmlformats.org/officeDocument/2006/relationships" id="258" r:id="R16b19245d70047e0"/>
-    <p:sldId xmlns:r="http://schemas.openxmlformats.org/officeDocument/2006/relationships" id="259" r:id="R7a390bd324b943a6"/>
-    <p:sldId xmlns:r="http://schemas.openxmlformats.org/officeDocument/2006/relationships" id="260" r:id="Re1e8895a0a7543fb"/>
-    <p:sldId xmlns:r="http://schemas.openxmlformats.org/officeDocument/2006/relationships" id="261" r:id="R4e60e47956a547ad"/>
-    <p:sldId xmlns:r="http://schemas.openxmlformats.org/officeDocument/2006/relationships" id="262" r:id="Rf4a763691b904358"/>
-    <p:sldId xmlns:r="http://schemas.openxmlformats.org/officeDocument/2006/relationships" id="263" r:id="R895e6dda074c4cef"/>
-    <p:sldId xmlns:r="http://schemas.openxmlformats.org/officeDocument/2006/relationships" id="264" r:id="R13acaaf88b4246d6"/>
-    <p:sldId xmlns:r="http://schemas.openxmlformats.org/officeDocument/2006/relationships" id="265" r:id="R08f5bf18d6334844"/>
-    <p:sldId xmlns:r="http://schemas.openxmlformats.org/officeDocument/2006/relationships" id="266" r:id="Rc06e310c646c4473"/>
-    <p:sldId xmlns:r="http://schemas.openxmlformats.org/officeDocument/2006/relationships" id="267" r:id="R909381647c164634"/>
-    <p:sldId xmlns:r="http://schemas.openxmlformats.org/officeDocument/2006/relationships" id="268" r:id="R0812ac89aaba45cb"/>
-    <p:sldId xmlns:r="http://schemas.openxmlformats.org/officeDocument/2006/relationships" id="269" r:id="Rb8eec7c29f3a49f6"/>
-    <p:sldId xmlns:r="http://schemas.openxmlformats.org/officeDocument/2006/relationships" id="270" r:id="Rc29e0852b1eb4d3a"/>
-    <p:sldId xmlns:r="http://schemas.openxmlformats.org/officeDocument/2006/relationships" id="271" r:id="R68019c4788e54cb9"/>
-    <p:sldId xmlns:r="http://schemas.openxmlformats.org/officeDocument/2006/relationships" id="272" r:id="R288271ee90dc4c4d"/>
-    <p:sldId xmlns:r="http://schemas.openxmlformats.org/officeDocument/2006/relationships" id="273" r:id="Ra4db1eea743e418b"/>
-    <p:sldId xmlns:r="http://schemas.openxmlformats.org/officeDocument/2006/relationships" id="274" r:id="Ra706e14c6d2442dd"/>
-    <p:sldId xmlns:r="http://schemas.openxmlformats.org/officeDocument/2006/relationships" id="275" r:id="Rd329b376827c47ad"/>
+    <p:sldId xmlns:r="http://schemas.openxmlformats.org/officeDocument/2006/relationships" id="256" r:id="Rbb3c44cbfc604eec"/>
+    <p:sldId xmlns:r="http://schemas.openxmlformats.org/officeDocument/2006/relationships" id="257" r:id="Raf962a78e72b4b17"/>
+    <p:sldId xmlns:r="http://schemas.openxmlformats.org/officeDocument/2006/relationships" id="258" r:id="Rc0ad778a9d2947a5"/>
+    <p:sldId xmlns:r="http://schemas.openxmlformats.org/officeDocument/2006/relationships" id="259" r:id="Rabd709954f2f41fe"/>
+    <p:sldId xmlns:r="http://schemas.openxmlformats.org/officeDocument/2006/relationships" id="260" r:id="R68ab98f067ea40bf"/>
+    <p:sldId xmlns:r="http://schemas.openxmlformats.org/officeDocument/2006/relationships" id="261" r:id="Re9968fb1a1fc46d9"/>
+    <p:sldId xmlns:r="http://schemas.openxmlformats.org/officeDocument/2006/relationships" id="262" r:id="R1adc407236904696"/>
+    <p:sldId xmlns:r="http://schemas.openxmlformats.org/officeDocument/2006/relationships" id="263" r:id="Rb55834fa15344b27"/>
+    <p:sldId xmlns:r="http://schemas.openxmlformats.org/officeDocument/2006/relationships" id="264" r:id="R97970c65720041d5"/>
+    <p:sldId xmlns:r="http://schemas.openxmlformats.org/officeDocument/2006/relationships" id="265" r:id="Ra20ffe5a2fa54d79"/>
+    <p:sldId xmlns:r="http://schemas.openxmlformats.org/officeDocument/2006/relationships" id="266" r:id="Rf9f7528e66fb4b43"/>
+    <p:sldId xmlns:r="http://schemas.openxmlformats.org/officeDocument/2006/relationships" id="267" r:id="R2b4e8ff42bbc4547"/>
+    <p:sldId xmlns:r="http://schemas.openxmlformats.org/officeDocument/2006/relationships" id="268" r:id="Rdf7662c7f8bd417b"/>
+    <p:sldId xmlns:r="http://schemas.openxmlformats.org/officeDocument/2006/relationships" id="269" r:id="R981839b90b8a4284"/>
+    <p:sldId xmlns:r="http://schemas.openxmlformats.org/officeDocument/2006/relationships" id="270" r:id="R3455094d96fe42dd"/>
+    <p:sldId xmlns:r="http://schemas.openxmlformats.org/officeDocument/2006/relationships" id="271" r:id="Rd1bedded4c194bc5"/>
+    <p:sldId xmlns:r="http://schemas.openxmlformats.org/officeDocument/2006/relationships" id="272" r:id="R9210c020c9b54824"/>
+    <p:sldId xmlns:r="http://schemas.openxmlformats.org/officeDocument/2006/relationships" id="273" r:id="Ra12ec48611ea40ec"/>
+    <p:sldId xmlns:r="http://schemas.openxmlformats.org/officeDocument/2006/relationships" id="274" r:id="Rd878ca51b0d249b7"/>
+    <p:sldId xmlns:r="http://schemas.openxmlformats.org/officeDocument/2006/relationships" id="275" r:id="R89f93e34a27a44b3"/>
   </p:sldIdLst>
   <p:sldSz cx="12191695" cy="6858000"/>
   <p:notesSz cx="6858000" cy="9144000"/>
@@ -481,7 +481,7 @@
           </a:p>
           <a:p xmlns:a="http://schemas.openxmlformats.org/drawingml/2006/main">
             <a:r>
-              <a:t>Build on the preceding week. Explain why this example is needed before running it.</a:t>
+              <a:t>Previous slide: the preceding week.</a:t>
             </a:r>
           </a:p>
           <a:p xmlns:a="http://schemas.openxmlformats.org/drawingml/2006/main">
@@ -506,17 +506,12 @@
           </a:p>
           <a:p xmlns:a="http://schemas.openxmlformats.org/drawingml/2006/main">
             <a:r>
-              <a:t>LECTURER DETAIL</a:t>
-            </a:r>
-          </a:p>
-          <a:p xmlns:a="http://schemas.openxmlformats.org/drawingml/2006/main">
-            <a:r>
-              <a:t>TEACHING PURPOSE</a:t>
-            </a:r>
-          </a:p>
-          <a:p xmlns:a="http://schemas.openxmlformats.org/drawingml/2006/main">
-            <a:r>
-              <a:t>Preparing for Practical Test 1</a:t>
+              <a:t>LECTURER CUE</a:t>
+            </a:r>
+          </a:p>
+          <a:p xmlns:a="http://schemas.openxmlformats.org/drawingml/2006/main">
+            <a:r>
+              <a:t>Read the specific public requirement shown on this slide. Explain the input, output and evidence before independent work; do not work the assessed answer for the class.</a:t>
             </a:r>
           </a:p>
           <a:p xmlns:a="http://schemas.openxmlformats.org/drawingml/2006/main">
@@ -526,12 +521,12 @@
           </a:p>
           <a:p xmlns:a="http://schemas.openxmlformats.org/drawingml/2006/main">
             <a:r>
-              <a:t>LECTURER CUE</a:t>
-            </a:r>
-          </a:p>
-          <a:p xmlns:a="http://schemas.openxmlformats.org/drawingml/2006/main">
-            <a:r>
-              <a:t>Read the specific public requirement shown on this slide. Explain the input, output and evidence before independent work; do not work the assessed answer for the class.</a:t>
+              <a:t>TEACHING MODE</a:t>
+            </a:r>
+          </a:p>
+          <a:p xmlns:a="http://schemas.openxmlformats.org/drawingml/2006/main">
+            <a:r>
+              <a:t>Demonstrate first. Read each new symbol aloud, trace the values and compare the shown output. Learners repeat worked examples individually after class.</a:t>
             </a:r>
           </a:p>
           <a:p xmlns:a="http://schemas.openxmlformats.org/drawingml/2006/main">
@@ -541,12 +536,12 @@
           </a:p>
           <a:p xmlns:a="http://schemas.openxmlformats.org/drawingml/2006/main">
             <a:r>
-              <a:t>TEST COLLECTION RULE</a:t>
-            </a:r>
-          </a:p>
-          <a:p xmlns:a="http://schemas.openxmlformats.org/drawingml/2006/main">
-            <a:r>
-              <a:t>This deck is for rehearsal before the timed assessment. Preserve the invigilated timetable and Part A snapshot. During Part B, type answers in the notebook cell headed ## My written evidence without executing code. Collect one complete .ipynb offline; later Google upload only transports the collected work. Do not require internet or AI during the test.</a:t>
+              <a:t>NEXT</a:t>
+            </a:r>
+          </a:p>
+          <a:p xmlns:a="http://schemas.openxmlformats.org/drawingml/2006/main">
+            <a:r>
+              <a:t>Today’s learning.</a:t>
             </a:r>
           </a:p>
           <a:p xmlns:a="http://schemas.openxmlformats.org/drawingml/2006/main">
@@ -556,42 +551,12 @@
           </a:p>
           <a:p xmlns:a="http://schemas.openxmlformats.org/drawingml/2006/main">
             <a:r>
-              <a:t>NEXT</a:t>
-            </a:r>
-          </a:p>
-          <a:p xmlns:a="http://schemas.openxmlformats.org/drawingml/2006/main">
-            <a:r>
-              <a:t>Today’s learning. Move on after a learner can explain the current example or required action.</a:t>
+              <a:t>REFERENCES</a:t>
             </a:r>
           </a:p>
           <a:p xmlns:a="http://schemas.openxmlformats.org/drawingml/2006/main">
             <a:r>
               <a:t/>
-            </a:r>
-          </a:p>
-          <a:p xmlns:a="http://schemas.openxmlformats.org/drawingml/2006/main">
-            <a:r>
-              <a:t>TEACHING MODE</a:t>
-            </a:r>
-          </a:p>
-          <a:p xmlns:a="http://schemas.openxmlformats.org/drawingml/2006/main">
-            <a:r>
-              <a:t>Demonstrate the example directly. Explain each new name, symbol and output. Use the revision example for an individual check after class; no live partner activity is required.</a:t>
-            </a:r>
-          </a:p>
-          <a:p xmlns:a="http://schemas.openxmlformats.org/drawingml/2006/main">
-            <a:r>
-              <a:t/>
-            </a:r>
-          </a:p>
-          <a:p xmlns:a="http://schemas.openxmlformats.org/drawingml/2006/main">
-            <a:r>
-              <a:t>NEXT</a:t>
-            </a:r>
-          </a:p>
-          <a:p xmlns:a="http://schemas.openxmlformats.org/drawingml/2006/main">
-            <a:r>
-              <a:t>Today’s learning.</a:t>
             </a:r>
           </a:p>
         </p:txBody>
@@ -681,7 +646,7 @@
           </a:p>
           <a:p xmlns:a="http://schemas.openxmlformats.org/drawingml/2006/main">
             <a:r>
-              <a:t>Build on Preparation checkpoint. Explain why this example is needed before running it.</a:t>
+              <a:t>Previous slide: Preparation checkpoint.</a:t>
             </a:r>
           </a:p>
           <a:p xmlns:a="http://schemas.openxmlformats.org/drawingml/2006/main">
@@ -726,17 +691,12 @@
           </a:p>
           <a:p xmlns:a="http://schemas.openxmlformats.org/drawingml/2006/main">
             <a:r>
-              <a:t>LECTURER DETAIL</a:t>
-            </a:r>
-          </a:p>
-          <a:p xmlns:a="http://schemas.openxmlformats.org/drawingml/2006/main">
-            <a:r>
-              <a:t>TEACHING PURPOSE</a:t>
-            </a:r>
-          </a:p>
-          <a:p xmlns:a="http://schemas.openxmlformats.org/drawingml/2006/main">
-            <a:r>
-              <a:t>Your evidence</a:t>
+              <a:t>LECTURER CUE</a:t>
+            </a:r>
+          </a:p>
+          <a:p xmlns:a="http://schemas.openxmlformats.org/drawingml/2006/main">
+            <a:r>
+              <a:t>Read the specific public requirement shown on this slide. Explain the input, output and evidence before independent work; do not work the assessed answer for the class.</a:t>
             </a:r>
           </a:p>
           <a:p xmlns:a="http://schemas.openxmlformats.org/drawingml/2006/main">
@@ -746,12 +706,12 @@
           </a:p>
           <a:p xmlns:a="http://schemas.openxmlformats.org/drawingml/2006/main">
             <a:r>
-              <a:t>CONNECT</a:t>
-            </a:r>
-          </a:p>
-          <a:p xmlns:a="http://schemas.openxmlformats.org/drawingml/2006/main">
-            <a:r>
-              <a:t>Build on the preceding slide: Preparation checkpoint.</a:t>
+              <a:t>TEACHING MODE</a:t>
+            </a:r>
+          </a:p>
+          <a:p xmlns:a="http://schemas.openxmlformats.org/drawingml/2006/main">
+            <a:r>
+              <a:t>Demonstrate first. Read each new symbol aloud, trace the values and compare the shown output. Learners repeat worked examples individually after class.</a:t>
             </a:r>
           </a:p>
           <a:p xmlns:a="http://schemas.openxmlformats.org/drawingml/2006/main">
@@ -761,12 +721,12 @@
           </a:p>
           <a:p xmlns:a="http://schemas.openxmlformats.org/drawingml/2006/main">
             <a:r>
-              <a:t>LECTURER CUE</a:t>
-            </a:r>
-          </a:p>
-          <a:p xmlns:a="http://schemas.openxmlformats.org/drawingml/2006/main">
-            <a:r>
-              <a:t>Read the specific public requirement shown on this slide. Explain the input, output and evidence before independent work; do not work the assessed answer for the class.</a:t>
+              <a:t>NEXT</a:t>
+            </a:r>
+          </a:p>
+          <a:p xmlns:a="http://schemas.openxmlformats.org/drawingml/2006/main">
+            <a:r>
+              <a:t>Practical Test 1.</a:t>
             </a:r>
           </a:p>
           <a:p xmlns:a="http://schemas.openxmlformats.org/drawingml/2006/main">
@@ -776,117 +736,12 @@
           </a:p>
           <a:p xmlns:a="http://schemas.openxmlformats.org/drawingml/2006/main">
             <a:r>
-              <a:t>EXPLAIN IN ORDINARY WORDS</a:t>
-            </a:r>
-          </a:p>
-          <a:p xmlns:a="http://schemas.openxmlformats.org/drawingml/2006/main">
-            <a:r>
-              <a:t>An observation describes the data. A finding answers a defined question with evidence. A recommendation adds an action, its justification and limits.</a:t>
+              <a:t>REFERENCES</a:t>
             </a:r>
           </a:p>
           <a:p xmlns:a="http://schemas.openxmlformats.org/drawingml/2006/main">
             <a:r>
               <a:t/>
-            </a:r>
-          </a:p>
-          <a:p xmlns:a="http://schemas.openxmlformats.org/drawingml/2006/main">
-            <a:r>
-              <a:t>CHECK AND EXPECTED ANSWER</a:t>
-            </a:r>
-          </a:p>
-          <a:p xmlns:a="http://schemas.openxmlformats.org/drawingml/2006/main">
-            <a:r>
-              <a:t>Does a difference between two groups prove one caused the other? No. Other differences or selection may explain it.</a:t>
-            </a:r>
-          </a:p>
-          <a:p xmlns:a="http://schemas.openxmlformats.org/drawingml/2006/main">
-            <a:r>
-              <a:t/>
-            </a:r>
-          </a:p>
-          <a:p xmlns:a="http://schemas.openxmlformats.org/drawingml/2006/main">
-            <a:r>
-              <a:t>IF LEARNERS ARE STUCK</a:t>
-            </a:r>
-          </a:p>
-          <a:p xmlns:a="http://schemas.openxmlformats.org/drawingml/2006/main">
-            <a:r>
-              <a:t>Ask for the population, time period, number and comparison. Then ask what additional evidence could change the recommendation.</a:t>
-            </a:r>
-          </a:p>
-          <a:p xmlns:a="http://schemas.openxmlformats.org/drawingml/2006/main">
-            <a:r>
-              <a:t/>
-            </a:r>
-          </a:p>
-          <a:p xmlns:a="http://schemas.openxmlformats.org/drawingml/2006/main">
-            <a:r>
-              <a:t>ASSIGNMENT HANDOVER</a:t>
-            </a:r>
-          </a:p>
-          <a:p xmlns:a="http://schemas.openxmlformats.org/drawingml/2006/main">
-            <a:r>
-              <a:t>Open the matching public student guide and show the exact starter filename, required outputs and upload set. Ask one learner to repeat what to submit and where. IUEA Student Registration Number is required freeform text; learners enter their own number. A saved repository is not a submitted form. Read the live deadline and keep the submission confirmation. Do not release an assessment that is still awaiting grading validation.</a:t>
-            </a:r>
-          </a:p>
-          <a:p xmlns:a="http://schemas.openxmlformats.org/drawingml/2006/main">
-            <a:r>
-              <a:t/>
-            </a:r>
-          </a:p>
-          <a:p xmlns:a="http://schemas.openxmlformats.org/drawingml/2006/main">
-            <a:r>
-              <a:t>TEST COLLECTION RULE</a:t>
-            </a:r>
-          </a:p>
-          <a:p xmlns:a="http://schemas.openxmlformats.org/drawingml/2006/main">
-            <a:r>
-              <a:t>This deck is for rehearsal before the timed assessment. Preserve the invigilated timetable and Part A snapshot. During Part B, type answers in the notebook cell headed ## My written evidence without executing code. Collect one complete .ipynb offline; later Google upload only transports the collected work. Do not require internet or AI during the test.</a:t>
-            </a:r>
-          </a:p>
-          <a:p xmlns:a="http://schemas.openxmlformats.org/drawingml/2006/main">
-            <a:r>
-              <a:t/>
-            </a:r>
-          </a:p>
-          <a:p xmlns:a="http://schemas.openxmlformats.org/drawingml/2006/main">
-            <a:r>
-              <a:t>NEXT</a:t>
-            </a:r>
-          </a:p>
-          <a:p xmlns:a="http://schemas.openxmlformats.org/drawingml/2006/main">
-            <a:r>
-              <a:t>Practical Test 1. Move on after a learner can explain the current example or required action.</a:t>
-            </a:r>
-          </a:p>
-          <a:p xmlns:a="http://schemas.openxmlformats.org/drawingml/2006/main">
-            <a:r>
-              <a:t/>
-            </a:r>
-          </a:p>
-          <a:p xmlns:a="http://schemas.openxmlformats.org/drawingml/2006/main">
-            <a:r>
-              <a:t>TEACHING MODE</a:t>
-            </a:r>
-          </a:p>
-          <a:p xmlns:a="http://schemas.openxmlformats.org/drawingml/2006/main">
-            <a:r>
-              <a:t>Demonstrate the example directly. Explain each new name, symbol and output. Use the revision example for an individual check after class; no live partner activity is required.</a:t>
-            </a:r>
-          </a:p>
-          <a:p xmlns:a="http://schemas.openxmlformats.org/drawingml/2006/main">
-            <a:r>
-              <a:t/>
-            </a:r>
-          </a:p>
-          <a:p xmlns:a="http://schemas.openxmlformats.org/drawingml/2006/main">
-            <a:r>
-              <a:t>NEXT</a:t>
-            </a:r>
-          </a:p>
-          <a:p xmlns:a="http://schemas.openxmlformats.org/drawingml/2006/main">
-            <a:r>
-              <a:t>Practical Test 1.</a:t>
             </a:r>
           </a:p>
         </p:txBody>
@@ -976,7 +831,7 @@
           </a:p>
           <a:p xmlns:a="http://schemas.openxmlformats.org/drawingml/2006/main">
             <a:r>
-              <a:t>Build on Your evidence. Explain why this example is needed before running it.</a:t>
+              <a:t>Previous slide: Your evidence.</a:t>
             </a:r>
           </a:p>
           <a:p xmlns:a="http://schemas.openxmlformats.org/drawingml/2006/main">
@@ -1031,17 +886,12 @@
           </a:p>
           <a:p xmlns:a="http://schemas.openxmlformats.org/drawingml/2006/main">
             <a:r>
-              <a:t>LECTURER DETAIL</a:t>
-            </a:r>
-          </a:p>
-          <a:p xmlns:a="http://schemas.openxmlformats.org/drawingml/2006/main">
-            <a:r>
-              <a:t>TEACHING PURPOSE</a:t>
-            </a:r>
-          </a:p>
-          <a:p xmlns:a="http://schemas.openxmlformats.org/drawingml/2006/main">
-            <a:r>
-              <a:t>Practical Test 1</a:t>
+              <a:t>LECTURER CUE</a:t>
+            </a:r>
+          </a:p>
+          <a:p xmlns:a="http://schemas.openxmlformats.org/drawingml/2006/main">
+            <a:r>
+              <a:t>Read the specific public requirement shown on this slide. Explain the input, output and evidence before independent work; do not work the assessed answer for the class.</a:t>
             </a:r>
           </a:p>
           <a:p xmlns:a="http://schemas.openxmlformats.org/drawingml/2006/main">
@@ -1051,12 +901,12 @@
           </a:p>
           <a:p xmlns:a="http://schemas.openxmlformats.org/drawingml/2006/main">
             <a:r>
-              <a:t>CONNECT</a:t>
-            </a:r>
-          </a:p>
-          <a:p xmlns:a="http://schemas.openxmlformats.org/drawingml/2006/main">
-            <a:r>
-              <a:t>Build on the preceding slide: Your evidence.</a:t>
+              <a:t>TEACHING MODE</a:t>
+            </a:r>
+          </a:p>
+          <a:p xmlns:a="http://schemas.openxmlformats.org/drawingml/2006/main">
+            <a:r>
+              <a:t>Demonstrate first. Read each new symbol aloud, trace the values and compare the shown output. Learners repeat worked examples individually after class.</a:t>
             </a:r>
           </a:p>
           <a:p xmlns:a="http://schemas.openxmlformats.org/drawingml/2006/main">
@@ -1066,12 +916,12 @@
           </a:p>
           <a:p xmlns:a="http://schemas.openxmlformats.org/drawingml/2006/main">
             <a:r>
-              <a:t>LECTURER CUE</a:t>
-            </a:r>
-          </a:p>
-          <a:p xmlns:a="http://schemas.openxmlformats.org/drawingml/2006/main">
-            <a:r>
-              <a:t>Read the specific public requirement shown on this slide. Explain the input, output and evidence before independent work; do not work the assessed answer for the class.</a:t>
+              <a:t>NEXT</a:t>
+            </a:r>
+          </a:p>
+          <a:p xmlns:a="http://schemas.openxmlformats.org/drawingml/2006/main">
+            <a:r>
+              <a:t>Practical Test 1 continued.</a:t>
             </a:r>
           </a:p>
           <a:p xmlns:a="http://schemas.openxmlformats.org/drawingml/2006/main">
@@ -1081,102 +931,12 @@
           </a:p>
           <a:p xmlns:a="http://schemas.openxmlformats.org/drawingml/2006/main">
             <a:r>
-              <a:t>EXPLAIN IN ORDINARY WORDS</a:t>
-            </a:r>
-          </a:p>
-          <a:p xmlns:a="http://schemas.openxmlformats.org/drawingml/2006/main">
-            <a:r>
-              <a:t>A function is a named set of instructions. def defines it; a call runs it with inputs. Parameters are input names, arguments are supplied values, and return sends the result back.</a:t>
+              <a:t>REFERENCES</a:t>
             </a:r>
           </a:p>
           <a:p xmlns:a="http://schemas.openxmlformats.org/drawingml/2006/main">
             <a:r>
               <a:t/>
-            </a:r>
-          </a:p>
-          <a:p xmlns:a="http://schemas.openxmlformats.org/drawingml/2006/main">
-            <a:r>
-              <a:t>CHECK AND EXPECTED ANSWER</a:t>
-            </a:r>
-          </a:p>
-          <a:p xmlns:a="http://schemas.openxmlformats.org/drawingml/2006/main">
-            <a:r>
-              <a:t>Does print(8) return the number 8 to the caller? No; it displays 8 and returns None. A function needing a numeric result should return it.</a:t>
-            </a:r>
-          </a:p>
-          <a:p xmlns:a="http://schemas.openxmlformats.org/drawingml/2006/main">
-            <a:r>
-              <a:t/>
-            </a:r>
-          </a:p>
-          <a:p xmlns:a="http://schemas.openxmlformats.org/drawingml/2006/main">
-            <a:r>
-              <a:t>IF LEARNERS ARE STUCK</a:t>
-            </a:r>
-          </a:p>
-          <a:p xmlns:a="http://schemas.openxmlformats.org/drawingml/2006/main">
-            <a:r>
-              <a:t>Trace one call: bind input names, run the indented body, reach return, then put the returned result back into the calling expression.</a:t>
-            </a:r>
-          </a:p>
-          <a:p xmlns:a="http://schemas.openxmlformats.org/drawingml/2006/main">
-            <a:r>
-              <a:t/>
-            </a:r>
-          </a:p>
-          <a:p xmlns:a="http://schemas.openxmlformats.org/drawingml/2006/main">
-            <a:r>
-              <a:t>TEST COLLECTION RULE</a:t>
-            </a:r>
-          </a:p>
-          <a:p xmlns:a="http://schemas.openxmlformats.org/drawingml/2006/main">
-            <a:r>
-              <a:t>This deck is for rehearsal before the timed assessment. Preserve the invigilated timetable and Part A snapshot. During Part B, type answers in the notebook cell headed ## My written evidence without executing code. Collect one complete .ipynb offline; later Google upload only transports the collected work. Do not require internet or AI during the test.</a:t>
-            </a:r>
-          </a:p>
-          <a:p xmlns:a="http://schemas.openxmlformats.org/drawingml/2006/main">
-            <a:r>
-              <a:t/>
-            </a:r>
-          </a:p>
-          <a:p xmlns:a="http://schemas.openxmlformats.org/drawingml/2006/main">
-            <a:r>
-              <a:t>NEXT</a:t>
-            </a:r>
-          </a:p>
-          <a:p xmlns:a="http://schemas.openxmlformats.org/drawingml/2006/main">
-            <a:r>
-              <a:t>Practical Test 1 continued. Move on after a learner can explain the current example or required action.</a:t>
-            </a:r>
-          </a:p>
-          <a:p xmlns:a="http://schemas.openxmlformats.org/drawingml/2006/main">
-            <a:r>
-              <a:t/>
-            </a:r>
-          </a:p>
-          <a:p xmlns:a="http://schemas.openxmlformats.org/drawingml/2006/main">
-            <a:r>
-              <a:t>TEACHING MODE</a:t>
-            </a:r>
-          </a:p>
-          <a:p xmlns:a="http://schemas.openxmlformats.org/drawingml/2006/main">
-            <a:r>
-              <a:t>Demonstrate the example directly. Explain each new name, symbol and output. Use the revision example for an individual check after class; no live partner activity is required.</a:t>
-            </a:r>
-          </a:p>
-          <a:p xmlns:a="http://schemas.openxmlformats.org/drawingml/2006/main">
-            <a:r>
-              <a:t/>
-            </a:r>
-          </a:p>
-          <a:p xmlns:a="http://schemas.openxmlformats.org/drawingml/2006/main">
-            <a:r>
-              <a:t>NEXT</a:t>
-            </a:r>
-          </a:p>
-          <a:p xmlns:a="http://schemas.openxmlformats.org/drawingml/2006/main">
-            <a:r>
-              <a:t>Practical Test 1 continued.</a:t>
             </a:r>
           </a:p>
         </p:txBody>
@@ -1266,7 +1026,7 @@
           </a:p>
           <a:p xmlns:a="http://schemas.openxmlformats.org/drawingml/2006/main">
             <a:r>
-              <a:t>Build on Practical Test 1. Explain why this example is needed before running it.</a:t>
+              <a:t>Previous slide: Practical Test 1.</a:t>
             </a:r>
           </a:p>
           <a:p xmlns:a="http://schemas.openxmlformats.org/drawingml/2006/main">
@@ -1321,17 +1081,12 @@
           </a:p>
           <a:p xmlns:a="http://schemas.openxmlformats.org/drawingml/2006/main">
             <a:r>
-              <a:t>LECTURER DETAIL</a:t>
-            </a:r>
-          </a:p>
-          <a:p xmlns:a="http://schemas.openxmlformats.org/drawingml/2006/main">
-            <a:r>
-              <a:t>TEACHING PURPOSE</a:t>
-            </a:r>
-          </a:p>
-          <a:p xmlns:a="http://schemas.openxmlformats.org/drawingml/2006/main">
-            <a:r>
-              <a:t>Practical Test 1 continued</a:t>
+              <a:t>LECTURER CUE</a:t>
+            </a:r>
+          </a:p>
+          <a:p xmlns:a="http://schemas.openxmlformats.org/drawingml/2006/main">
+            <a:r>
+              <a:t>Read the specific public requirement shown on this slide. Explain the input, output and evidence before independent work; do not work the assessed answer for the class.</a:t>
             </a:r>
           </a:p>
           <a:p xmlns:a="http://schemas.openxmlformats.org/drawingml/2006/main">
@@ -1341,12 +1096,12 @@
           </a:p>
           <a:p xmlns:a="http://schemas.openxmlformats.org/drawingml/2006/main">
             <a:r>
-              <a:t>CONNECT</a:t>
-            </a:r>
-          </a:p>
-          <a:p xmlns:a="http://schemas.openxmlformats.org/drawingml/2006/main">
-            <a:r>
-              <a:t>Build on the preceding slide: Practical Test 1.</a:t>
+              <a:t>TEACHING MODE</a:t>
+            </a:r>
+          </a:p>
+          <a:p xmlns:a="http://schemas.openxmlformats.org/drawingml/2006/main">
+            <a:r>
+              <a:t>Demonstrate first. Read each new symbol aloud, trace the values and compare the shown output. Learners repeat worked examples individually after class.</a:t>
             </a:r>
           </a:p>
           <a:p xmlns:a="http://schemas.openxmlformats.org/drawingml/2006/main">
@@ -1356,12 +1111,12 @@
           </a:p>
           <a:p xmlns:a="http://schemas.openxmlformats.org/drawingml/2006/main">
             <a:r>
-              <a:t>LECTURER CUE</a:t>
-            </a:r>
-          </a:p>
-          <a:p xmlns:a="http://schemas.openxmlformats.org/drawingml/2006/main">
-            <a:r>
-              <a:t>Read the specific public requirement shown on this slide. Explain the input, output and evidence before independent work; do not work the assessed answer for the class.</a:t>
+              <a:t>NEXT</a:t>
+            </a:r>
+          </a:p>
+          <a:p xmlns:a="http://schemas.openxmlformats.org/drawingml/2006/main">
+            <a:r>
+              <a:t>Practical Test 1 continued.</a:t>
             </a:r>
           </a:p>
           <a:p xmlns:a="http://schemas.openxmlformats.org/drawingml/2006/main">
@@ -1371,102 +1126,12 @@
           </a:p>
           <a:p xmlns:a="http://schemas.openxmlformats.org/drawingml/2006/main">
             <a:r>
-              <a:t>EXPLAIN IN ORDINARY WORDS</a:t>
-            </a:r>
-          </a:p>
-          <a:p xmlns:a="http://schemas.openxmlformats.org/drawingml/2006/main">
-            <a:r>
-              <a:t>A cleaning decision needs evidence, a stated rule and a before/after check. Similar rows may be genuine repeated events. Reconciliation compares totals built under the same definitions.</a:t>
+              <a:t>REFERENCES</a:t>
             </a:r>
           </a:p>
           <a:p xmlns:a="http://schemas.openxmlformats.org/drawingml/2006/main">
             <a:r>
               <a:t/>
-            </a:r>
-          </a:p>
-          <a:p xmlns:a="http://schemas.openxmlformats.org/drawingml/2006/main">
-            <a:r>
-              <a:t>CHECK AND EXPECTED ANSWER</a:t>
-            </a:r>
-          </a:p>
-          <a:p xmlns:a="http://schemas.openxmlformats.org/drawingml/2006/main">
-            <a:r>
-              <a:t>May we delete every repeated amount? No. Check the row identifier and the table grain first.</a:t>
-            </a:r>
-          </a:p>
-          <a:p xmlns:a="http://schemas.openxmlformats.org/drawingml/2006/main">
-            <a:r>
-              <a:t/>
-            </a:r>
-          </a:p>
-          <a:p xmlns:a="http://schemas.openxmlformats.org/drawingml/2006/main">
-            <a:r>
-              <a:t>IF LEARNERS ARE STUCK</a:t>
-            </a:r>
-          </a:p>
-          <a:p xmlns:a="http://schemas.openxmlformats.org/drawingml/2006/main">
-            <a:r>
-              <a:t>Keep raw data, record counts before and after each action, then explain any remaining difference instead of forcing totals to agree.</a:t>
-            </a:r>
-          </a:p>
-          <a:p xmlns:a="http://schemas.openxmlformats.org/drawingml/2006/main">
-            <a:r>
-              <a:t/>
-            </a:r>
-          </a:p>
-          <a:p xmlns:a="http://schemas.openxmlformats.org/drawingml/2006/main">
-            <a:r>
-              <a:t>TEST COLLECTION RULE</a:t>
-            </a:r>
-          </a:p>
-          <a:p xmlns:a="http://schemas.openxmlformats.org/drawingml/2006/main">
-            <a:r>
-              <a:t>This deck is for rehearsal before the timed assessment. Preserve the invigilated timetable and Part A snapshot. During Part B, type answers in the notebook cell headed ## My written evidence without executing code. Collect one complete .ipynb offline; later Google upload only transports the collected work. Do not require internet or AI during the test.</a:t>
-            </a:r>
-          </a:p>
-          <a:p xmlns:a="http://schemas.openxmlformats.org/drawingml/2006/main">
-            <a:r>
-              <a:t/>
-            </a:r>
-          </a:p>
-          <a:p xmlns:a="http://schemas.openxmlformats.org/drawingml/2006/main">
-            <a:r>
-              <a:t>NEXT</a:t>
-            </a:r>
-          </a:p>
-          <a:p xmlns:a="http://schemas.openxmlformats.org/drawingml/2006/main">
-            <a:r>
-              <a:t>Practical Test 1 continued. Move on after a learner can explain the current example or required action.</a:t>
-            </a:r>
-          </a:p>
-          <a:p xmlns:a="http://schemas.openxmlformats.org/drawingml/2006/main">
-            <a:r>
-              <a:t/>
-            </a:r>
-          </a:p>
-          <a:p xmlns:a="http://schemas.openxmlformats.org/drawingml/2006/main">
-            <a:r>
-              <a:t>TEACHING MODE</a:t>
-            </a:r>
-          </a:p>
-          <a:p xmlns:a="http://schemas.openxmlformats.org/drawingml/2006/main">
-            <a:r>
-              <a:t>Demonstrate the example directly. Explain each new name, symbol and output. Use the revision example for an individual check after class; no live partner activity is required.</a:t>
-            </a:r>
-          </a:p>
-          <a:p xmlns:a="http://schemas.openxmlformats.org/drawingml/2006/main">
-            <a:r>
-              <a:t/>
-            </a:r>
-          </a:p>
-          <a:p xmlns:a="http://schemas.openxmlformats.org/drawingml/2006/main">
-            <a:r>
-              <a:t>NEXT</a:t>
-            </a:r>
-          </a:p>
-          <a:p xmlns:a="http://schemas.openxmlformats.org/drawingml/2006/main">
-            <a:r>
-              <a:t>Practical Test 1 continued.</a:t>
             </a:r>
           </a:p>
         </p:txBody>
@@ -1556,7 +1221,7 @@
           </a:p>
           <a:p xmlns:a="http://schemas.openxmlformats.org/drawingml/2006/main">
             <a:r>
-              <a:t>Build on Practical Test 1 continued. Explain why this example is needed before running it.</a:t>
+              <a:t>Previous slide: Practical Test 1 continued.</a:t>
             </a:r>
           </a:p>
           <a:p xmlns:a="http://schemas.openxmlformats.org/drawingml/2006/main">
@@ -1611,17 +1276,12 @@
           </a:p>
           <a:p xmlns:a="http://schemas.openxmlformats.org/drawingml/2006/main">
             <a:r>
-              <a:t>LECTURER DETAIL</a:t>
-            </a:r>
-          </a:p>
-          <a:p xmlns:a="http://schemas.openxmlformats.org/drawingml/2006/main">
-            <a:r>
-              <a:t>TEACHING PURPOSE</a:t>
-            </a:r>
-          </a:p>
-          <a:p xmlns:a="http://schemas.openxmlformats.org/drawingml/2006/main">
-            <a:r>
-              <a:t>Practical Test 1 continued</a:t>
+              <a:t>LECTURER CUE</a:t>
+            </a:r>
+          </a:p>
+          <a:p xmlns:a="http://schemas.openxmlformats.org/drawingml/2006/main">
+            <a:r>
+              <a:t>Read the specific public requirement shown on this slide. Explain the input, output and evidence before independent work; do not work the assessed answer for the class.</a:t>
             </a:r>
           </a:p>
           <a:p xmlns:a="http://schemas.openxmlformats.org/drawingml/2006/main">
@@ -1631,12 +1291,12 @@
           </a:p>
           <a:p xmlns:a="http://schemas.openxmlformats.org/drawingml/2006/main">
             <a:r>
-              <a:t>CONNECT</a:t>
-            </a:r>
-          </a:p>
-          <a:p xmlns:a="http://schemas.openxmlformats.org/drawingml/2006/main">
-            <a:r>
-              <a:t>Build on the preceding slide: Practical Test 1 continued.</a:t>
+              <a:t>TEACHING MODE</a:t>
+            </a:r>
+          </a:p>
+          <a:p xmlns:a="http://schemas.openxmlformats.org/drawingml/2006/main">
+            <a:r>
+              <a:t>Demonstrate first. Read each new symbol aloud, trace the values and compare the shown output. Learners repeat worked examples individually after class.</a:t>
             </a:r>
           </a:p>
           <a:p xmlns:a="http://schemas.openxmlformats.org/drawingml/2006/main">
@@ -1646,12 +1306,12 @@
           </a:p>
           <a:p xmlns:a="http://schemas.openxmlformats.org/drawingml/2006/main">
             <a:r>
-              <a:t>LECTURER CUE</a:t>
-            </a:r>
-          </a:p>
-          <a:p xmlns:a="http://schemas.openxmlformats.org/drawingml/2006/main">
-            <a:r>
-              <a:t>Read the specific public requirement shown on this slide. Explain the input, output and evidence before independent work; do not work the assessed answer for the class.</a:t>
+              <a:t>NEXT</a:t>
+            </a:r>
+          </a:p>
+          <a:p xmlns:a="http://schemas.openxmlformats.org/drawingml/2006/main">
+            <a:r>
+              <a:t>Practical Test 1 continued.</a:t>
             </a:r>
           </a:p>
           <a:p xmlns:a="http://schemas.openxmlformats.org/drawingml/2006/main">
@@ -1661,102 +1321,12 @@
           </a:p>
           <a:p xmlns:a="http://schemas.openxmlformats.org/drawingml/2006/main">
             <a:r>
-              <a:t>EXPLAIN IN ORDINARY WORDS</a:t>
-            </a:r>
-          </a:p>
-          <a:p xmlns:a="http://schemas.openxmlformats.org/drawingml/2006/main">
-            <a:r>
-              <a:t>A cleaning decision needs evidence, a stated rule and a before/after check. Similar rows may be genuine repeated events. Reconciliation compares totals built under the same definitions.</a:t>
+              <a:t>REFERENCES</a:t>
             </a:r>
           </a:p>
           <a:p xmlns:a="http://schemas.openxmlformats.org/drawingml/2006/main">
             <a:r>
               <a:t/>
-            </a:r>
-          </a:p>
-          <a:p xmlns:a="http://schemas.openxmlformats.org/drawingml/2006/main">
-            <a:r>
-              <a:t>CHECK AND EXPECTED ANSWER</a:t>
-            </a:r>
-          </a:p>
-          <a:p xmlns:a="http://schemas.openxmlformats.org/drawingml/2006/main">
-            <a:r>
-              <a:t>May we delete every repeated amount? No. Check the row identifier and the table grain first.</a:t>
-            </a:r>
-          </a:p>
-          <a:p xmlns:a="http://schemas.openxmlformats.org/drawingml/2006/main">
-            <a:r>
-              <a:t/>
-            </a:r>
-          </a:p>
-          <a:p xmlns:a="http://schemas.openxmlformats.org/drawingml/2006/main">
-            <a:r>
-              <a:t>IF LEARNERS ARE STUCK</a:t>
-            </a:r>
-          </a:p>
-          <a:p xmlns:a="http://schemas.openxmlformats.org/drawingml/2006/main">
-            <a:r>
-              <a:t>Keep raw data, record counts before and after each action, then explain any remaining difference instead of forcing totals to agree.</a:t>
-            </a:r>
-          </a:p>
-          <a:p xmlns:a="http://schemas.openxmlformats.org/drawingml/2006/main">
-            <a:r>
-              <a:t/>
-            </a:r>
-          </a:p>
-          <a:p xmlns:a="http://schemas.openxmlformats.org/drawingml/2006/main">
-            <a:r>
-              <a:t>TEST COLLECTION RULE</a:t>
-            </a:r>
-          </a:p>
-          <a:p xmlns:a="http://schemas.openxmlformats.org/drawingml/2006/main">
-            <a:r>
-              <a:t>This deck is for rehearsal before the timed assessment. Preserve the invigilated timetable and Part A snapshot. During Part B, type answers in the notebook cell headed ## My written evidence without executing code. Collect one complete .ipynb offline; later Google upload only transports the collected work. Do not require internet or AI during the test.</a:t>
-            </a:r>
-          </a:p>
-          <a:p xmlns:a="http://schemas.openxmlformats.org/drawingml/2006/main">
-            <a:r>
-              <a:t/>
-            </a:r>
-          </a:p>
-          <a:p xmlns:a="http://schemas.openxmlformats.org/drawingml/2006/main">
-            <a:r>
-              <a:t>NEXT</a:t>
-            </a:r>
-          </a:p>
-          <a:p xmlns:a="http://schemas.openxmlformats.org/drawingml/2006/main">
-            <a:r>
-              <a:t>Practical Test 1 continued. Move on after a learner can explain the current example or required action.</a:t>
-            </a:r>
-          </a:p>
-          <a:p xmlns:a="http://schemas.openxmlformats.org/drawingml/2006/main">
-            <a:r>
-              <a:t/>
-            </a:r>
-          </a:p>
-          <a:p xmlns:a="http://schemas.openxmlformats.org/drawingml/2006/main">
-            <a:r>
-              <a:t>TEACHING MODE</a:t>
-            </a:r>
-          </a:p>
-          <a:p xmlns:a="http://schemas.openxmlformats.org/drawingml/2006/main">
-            <a:r>
-              <a:t>Demonstrate the example directly. Explain each new name, symbol and output. Use the revision example for an individual check after class; no live partner activity is required.</a:t>
-            </a:r>
-          </a:p>
-          <a:p xmlns:a="http://schemas.openxmlformats.org/drawingml/2006/main">
-            <a:r>
-              <a:t/>
-            </a:r>
-          </a:p>
-          <a:p xmlns:a="http://schemas.openxmlformats.org/drawingml/2006/main">
-            <a:r>
-              <a:t>NEXT</a:t>
-            </a:r>
-          </a:p>
-          <a:p xmlns:a="http://schemas.openxmlformats.org/drawingml/2006/main">
-            <a:r>
-              <a:t>Practical Test 1 continued.</a:t>
             </a:r>
           </a:p>
         </p:txBody>
@@ -1846,7 +1416,7 @@
           </a:p>
           <a:p xmlns:a="http://schemas.openxmlformats.org/drawingml/2006/main">
             <a:r>
-              <a:t>Build on Practical Test 1 continued. Explain why this example is needed before running it.</a:t>
+              <a:t>Previous slide: Practical Test 1 continued.</a:t>
             </a:r>
           </a:p>
           <a:p xmlns:a="http://schemas.openxmlformats.org/drawingml/2006/main">
@@ -1901,17 +1471,12 @@
           </a:p>
           <a:p xmlns:a="http://schemas.openxmlformats.org/drawingml/2006/main">
             <a:r>
-              <a:t>LECTURER DETAIL</a:t>
-            </a:r>
-          </a:p>
-          <a:p xmlns:a="http://schemas.openxmlformats.org/drawingml/2006/main">
-            <a:r>
-              <a:t>TEACHING PURPOSE</a:t>
-            </a:r>
-          </a:p>
-          <a:p xmlns:a="http://schemas.openxmlformats.org/drawingml/2006/main">
-            <a:r>
-              <a:t>Practical Test 1 continued</a:t>
+              <a:t>LECTURER CUE</a:t>
+            </a:r>
+          </a:p>
+          <a:p xmlns:a="http://schemas.openxmlformats.org/drawingml/2006/main">
+            <a:r>
+              <a:t>Read the specific public requirement shown on this slide. Explain the input, output and evidence before independent work; do not work the assessed answer for the class.</a:t>
             </a:r>
           </a:p>
           <a:p xmlns:a="http://schemas.openxmlformats.org/drawingml/2006/main">
@@ -1921,12 +1486,12 @@
           </a:p>
           <a:p xmlns:a="http://schemas.openxmlformats.org/drawingml/2006/main">
             <a:r>
-              <a:t>CONNECT</a:t>
-            </a:r>
-          </a:p>
-          <a:p xmlns:a="http://schemas.openxmlformats.org/drawingml/2006/main">
-            <a:r>
-              <a:t>Build on the preceding slide: Practical Test 1 continued.</a:t>
+              <a:t>TEACHING MODE</a:t>
+            </a:r>
+          </a:p>
+          <a:p xmlns:a="http://schemas.openxmlformats.org/drawingml/2006/main">
+            <a:r>
+              <a:t>Demonstrate first. Read each new symbol aloud, trace the values and compare the shown output. Learners repeat worked examples individually after class.</a:t>
             </a:r>
           </a:p>
           <a:p xmlns:a="http://schemas.openxmlformats.org/drawingml/2006/main">
@@ -1936,12 +1501,12 @@
           </a:p>
           <a:p xmlns:a="http://schemas.openxmlformats.org/drawingml/2006/main">
             <a:r>
-              <a:t>LECTURER CUE</a:t>
-            </a:r>
-          </a:p>
-          <a:p xmlns:a="http://schemas.openxmlformats.org/drawingml/2006/main">
-            <a:r>
-              <a:t>Read the specific public requirement shown on this slide. Explain the input, output and evidence before independent work; do not work the assessed answer for the class.</a:t>
+              <a:t>NEXT</a:t>
+            </a:r>
+          </a:p>
+          <a:p xmlns:a="http://schemas.openxmlformats.org/drawingml/2006/main">
+            <a:r>
+              <a:t>Practical Test 1 continued.</a:t>
             </a:r>
           </a:p>
           <a:p xmlns:a="http://schemas.openxmlformats.org/drawingml/2006/main">
@@ -1951,102 +1516,12 @@
           </a:p>
           <a:p xmlns:a="http://schemas.openxmlformats.org/drawingml/2006/main">
             <a:r>
-              <a:t>EXPLAIN IN ORDINARY WORDS</a:t>
-            </a:r>
-          </a:p>
-          <a:p xmlns:a="http://schemas.openxmlformats.org/drawingml/2006/main">
-            <a:r>
-              <a:t>Read each quantity and unit before using a formula. Python calculates numbers but does not enforce physical units. Parentheses specify which operation happens first.</a:t>
+              <a:t>REFERENCES</a:t>
             </a:r>
           </a:p>
           <a:p xmlns:a="http://schemas.openxmlformats.org/drawingml/2006/main">
             <a:r>
               <a:t/>
-            </a:r>
-          </a:p>
-          <a:p xmlns:a="http://schemas.openxmlformats.org/drawingml/2006/main">
-            <a:r>
-              <a:t>CHECK AND EXPECTED ANSWER</a:t>
-            </a:r>
-          </a:p>
-          <a:p xmlns:a="http://schemas.openxmlformats.org/drawingml/2006/main">
-            <a:r>
-              <a:t>What is 5 m times 3 m? 15 square metres. What is 7/2 in Python? 3.5; 7//2 is 3.</a:t>
-            </a:r>
-          </a:p>
-          <a:p xmlns:a="http://schemas.openxmlformats.org/drawingml/2006/main">
-            <a:r>
-              <a:t/>
-            </a:r>
-          </a:p>
-          <a:p xmlns:a="http://schemas.openxmlformats.org/drawingml/2006/main">
-            <a:r>
-              <a:t>IF LEARNERS ARE STUCK</a:t>
-            </a:r>
-          </a:p>
-          <a:p xmlns:a="http://schemas.openxmlformats.org/drawingml/2006/main">
-            <a:r>
-              <a:t>Write the formula and units on paper, substitute small values, then translate it to Python. Check zero denominators and the issued sign convention.</a:t>
-            </a:r>
-          </a:p>
-          <a:p xmlns:a="http://schemas.openxmlformats.org/drawingml/2006/main">
-            <a:r>
-              <a:t/>
-            </a:r>
-          </a:p>
-          <a:p xmlns:a="http://schemas.openxmlformats.org/drawingml/2006/main">
-            <a:r>
-              <a:t>TEST COLLECTION RULE</a:t>
-            </a:r>
-          </a:p>
-          <a:p xmlns:a="http://schemas.openxmlformats.org/drawingml/2006/main">
-            <a:r>
-              <a:t>This deck is for rehearsal before the timed assessment. Preserve the invigilated timetable and Part A snapshot. During Part B, type answers in the notebook cell headed ## My written evidence without executing code. Collect one complete .ipynb offline; later Google upload only transports the collected work. Do not require internet or AI during the test.</a:t>
-            </a:r>
-          </a:p>
-          <a:p xmlns:a="http://schemas.openxmlformats.org/drawingml/2006/main">
-            <a:r>
-              <a:t/>
-            </a:r>
-          </a:p>
-          <a:p xmlns:a="http://schemas.openxmlformats.org/drawingml/2006/main">
-            <a:r>
-              <a:t>NEXT</a:t>
-            </a:r>
-          </a:p>
-          <a:p xmlns:a="http://schemas.openxmlformats.org/drawingml/2006/main">
-            <a:r>
-              <a:t>Practical Test 1 continued. Move on after a learner can explain the current example or required action.</a:t>
-            </a:r>
-          </a:p>
-          <a:p xmlns:a="http://schemas.openxmlformats.org/drawingml/2006/main">
-            <a:r>
-              <a:t/>
-            </a:r>
-          </a:p>
-          <a:p xmlns:a="http://schemas.openxmlformats.org/drawingml/2006/main">
-            <a:r>
-              <a:t>TEACHING MODE</a:t>
-            </a:r>
-          </a:p>
-          <a:p xmlns:a="http://schemas.openxmlformats.org/drawingml/2006/main">
-            <a:r>
-              <a:t>Demonstrate the example directly. Explain each new name, symbol and output. Use the revision example for an individual check after class; no live partner activity is required.</a:t>
-            </a:r>
-          </a:p>
-          <a:p xmlns:a="http://schemas.openxmlformats.org/drawingml/2006/main">
-            <a:r>
-              <a:t/>
-            </a:r>
-          </a:p>
-          <a:p xmlns:a="http://schemas.openxmlformats.org/drawingml/2006/main">
-            <a:r>
-              <a:t>NEXT</a:t>
-            </a:r>
-          </a:p>
-          <a:p xmlns:a="http://schemas.openxmlformats.org/drawingml/2006/main">
-            <a:r>
-              <a:t>Practical Test 1 continued.</a:t>
             </a:r>
           </a:p>
         </p:txBody>
@@ -2136,7 +1611,7 @@
           </a:p>
           <a:p xmlns:a="http://schemas.openxmlformats.org/drawingml/2006/main">
             <a:r>
-              <a:t>Build on Practical Test 1 continued. Explain why this example is needed before running it.</a:t>
+              <a:t>Previous slide: Practical Test 1 continued.</a:t>
             </a:r>
           </a:p>
           <a:p xmlns:a="http://schemas.openxmlformats.org/drawingml/2006/main">
@@ -2191,17 +1666,12 @@
           </a:p>
           <a:p xmlns:a="http://schemas.openxmlformats.org/drawingml/2006/main">
             <a:r>
-              <a:t>LECTURER DETAIL</a:t>
-            </a:r>
-          </a:p>
-          <a:p xmlns:a="http://schemas.openxmlformats.org/drawingml/2006/main">
-            <a:r>
-              <a:t>TEACHING PURPOSE</a:t>
-            </a:r>
-          </a:p>
-          <a:p xmlns:a="http://schemas.openxmlformats.org/drawingml/2006/main">
-            <a:r>
-              <a:t>Practical Test 1 continued</a:t>
+              <a:t>LECTURER CUE</a:t>
+            </a:r>
+          </a:p>
+          <a:p xmlns:a="http://schemas.openxmlformats.org/drawingml/2006/main">
+            <a:r>
+              <a:t>Read the specific public requirement shown on this slide. Explain the input, output and evidence before independent work; do not work the assessed answer for the class.</a:t>
             </a:r>
           </a:p>
           <a:p xmlns:a="http://schemas.openxmlformats.org/drawingml/2006/main">
@@ -2211,12 +1681,12 @@
           </a:p>
           <a:p xmlns:a="http://schemas.openxmlformats.org/drawingml/2006/main">
             <a:r>
-              <a:t>CONNECT</a:t>
-            </a:r>
-          </a:p>
-          <a:p xmlns:a="http://schemas.openxmlformats.org/drawingml/2006/main">
-            <a:r>
-              <a:t>Build on the preceding slide: Practical Test 1 continued.</a:t>
+              <a:t>TEACHING MODE</a:t>
+            </a:r>
+          </a:p>
+          <a:p xmlns:a="http://schemas.openxmlformats.org/drawingml/2006/main">
+            <a:r>
+              <a:t>Demonstrate first. Read each new symbol aloud, trace the values and compare the shown output. Learners repeat worked examples individually after class.</a:t>
             </a:r>
           </a:p>
           <a:p xmlns:a="http://schemas.openxmlformats.org/drawingml/2006/main">
@@ -2226,12 +1696,12 @@
           </a:p>
           <a:p xmlns:a="http://schemas.openxmlformats.org/drawingml/2006/main">
             <a:r>
-              <a:t>LECTURER CUE</a:t>
-            </a:r>
-          </a:p>
-          <a:p xmlns:a="http://schemas.openxmlformats.org/drawingml/2006/main">
-            <a:r>
-              <a:t>Read the specific public requirement shown on this slide. Explain the input, output and evidence before independent work; do not work the assessed answer for the class.</a:t>
+              <a:t>NEXT</a:t>
+            </a:r>
+          </a:p>
+          <a:p xmlns:a="http://schemas.openxmlformats.org/drawingml/2006/main">
+            <a:r>
+              <a:t>Practical Test 1 continued.</a:t>
             </a:r>
           </a:p>
           <a:p xmlns:a="http://schemas.openxmlformats.org/drawingml/2006/main">
@@ -2241,102 +1711,12 @@
           </a:p>
           <a:p xmlns:a="http://schemas.openxmlformats.org/drawingml/2006/main">
             <a:r>
-              <a:t>EXPLAIN IN ORDINARY WORDS</a:t>
-            </a:r>
-          </a:p>
-          <a:p xmlns:a="http://schemas.openxmlformats.org/drawingml/2006/main">
-            <a:r>
-              <a:t>Read each quantity and unit before using a formula. Python calculates numbers but does not enforce physical units. Parentheses specify which operation happens first.</a:t>
+              <a:t>REFERENCES</a:t>
             </a:r>
           </a:p>
           <a:p xmlns:a="http://schemas.openxmlformats.org/drawingml/2006/main">
             <a:r>
               <a:t/>
-            </a:r>
-          </a:p>
-          <a:p xmlns:a="http://schemas.openxmlformats.org/drawingml/2006/main">
-            <a:r>
-              <a:t>CHECK AND EXPECTED ANSWER</a:t>
-            </a:r>
-          </a:p>
-          <a:p xmlns:a="http://schemas.openxmlformats.org/drawingml/2006/main">
-            <a:r>
-              <a:t>What is 5 m times 3 m? 15 square metres. What is 7/2 in Python? 3.5; 7//2 is 3.</a:t>
-            </a:r>
-          </a:p>
-          <a:p xmlns:a="http://schemas.openxmlformats.org/drawingml/2006/main">
-            <a:r>
-              <a:t/>
-            </a:r>
-          </a:p>
-          <a:p xmlns:a="http://schemas.openxmlformats.org/drawingml/2006/main">
-            <a:r>
-              <a:t>IF LEARNERS ARE STUCK</a:t>
-            </a:r>
-          </a:p>
-          <a:p xmlns:a="http://schemas.openxmlformats.org/drawingml/2006/main">
-            <a:r>
-              <a:t>Write the formula and units on paper, substitute small values, then translate it to Python. Check zero denominators and the issued sign convention.</a:t>
-            </a:r>
-          </a:p>
-          <a:p xmlns:a="http://schemas.openxmlformats.org/drawingml/2006/main">
-            <a:r>
-              <a:t/>
-            </a:r>
-          </a:p>
-          <a:p xmlns:a="http://schemas.openxmlformats.org/drawingml/2006/main">
-            <a:r>
-              <a:t>TEST COLLECTION RULE</a:t>
-            </a:r>
-          </a:p>
-          <a:p xmlns:a="http://schemas.openxmlformats.org/drawingml/2006/main">
-            <a:r>
-              <a:t>This deck is for rehearsal before the timed assessment. Preserve the invigilated timetable and Part A snapshot. During Part B, type answers in the notebook cell headed ## My written evidence without executing code. Collect one complete .ipynb offline; later Google upload only transports the collected work. Do not require internet or AI during the test.</a:t>
-            </a:r>
-          </a:p>
-          <a:p xmlns:a="http://schemas.openxmlformats.org/drawingml/2006/main">
-            <a:r>
-              <a:t/>
-            </a:r>
-          </a:p>
-          <a:p xmlns:a="http://schemas.openxmlformats.org/drawingml/2006/main">
-            <a:r>
-              <a:t>NEXT</a:t>
-            </a:r>
-          </a:p>
-          <a:p xmlns:a="http://schemas.openxmlformats.org/drawingml/2006/main">
-            <a:r>
-              <a:t>Practical Test 1 continued. Move on after a learner can explain the current example or required action.</a:t>
-            </a:r>
-          </a:p>
-          <a:p xmlns:a="http://schemas.openxmlformats.org/drawingml/2006/main">
-            <a:r>
-              <a:t/>
-            </a:r>
-          </a:p>
-          <a:p xmlns:a="http://schemas.openxmlformats.org/drawingml/2006/main">
-            <a:r>
-              <a:t>TEACHING MODE</a:t>
-            </a:r>
-          </a:p>
-          <a:p xmlns:a="http://schemas.openxmlformats.org/drawingml/2006/main">
-            <a:r>
-              <a:t>Demonstrate the example directly. Explain each new name, symbol and output. Use the revision example for an individual check after class; no live partner activity is required.</a:t>
-            </a:r>
-          </a:p>
-          <a:p xmlns:a="http://schemas.openxmlformats.org/drawingml/2006/main">
-            <a:r>
-              <a:t/>
-            </a:r>
-          </a:p>
-          <a:p xmlns:a="http://schemas.openxmlformats.org/drawingml/2006/main">
-            <a:r>
-              <a:t>NEXT</a:t>
-            </a:r>
-          </a:p>
-          <a:p xmlns:a="http://schemas.openxmlformats.org/drawingml/2006/main">
-            <a:r>
-              <a:t>Practical Test 1 continued.</a:t>
             </a:r>
           </a:p>
         </p:txBody>
@@ -2426,7 +1806,7 @@
           </a:p>
           <a:p xmlns:a="http://schemas.openxmlformats.org/drawingml/2006/main">
             <a:r>
-              <a:t>Build on Practical Test 1 continued. Explain why this example is needed before running it.</a:t>
+              <a:t>Previous slide: Practical Test 1 continued.</a:t>
             </a:r>
           </a:p>
           <a:p xmlns:a="http://schemas.openxmlformats.org/drawingml/2006/main">
@@ -2481,17 +1861,12 @@
           </a:p>
           <a:p xmlns:a="http://schemas.openxmlformats.org/drawingml/2006/main">
             <a:r>
-              <a:t>LECTURER DETAIL</a:t>
-            </a:r>
-          </a:p>
-          <a:p xmlns:a="http://schemas.openxmlformats.org/drawingml/2006/main">
-            <a:r>
-              <a:t>TEACHING PURPOSE</a:t>
-            </a:r>
-          </a:p>
-          <a:p xmlns:a="http://schemas.openxmlformats.org/drawingml/2006/main">
-            <a:r>
-              <a:t>Practical Test 1 continued</a:t>
+              <a:t>LECTURER CUE</a:t>
+            </a:r>
+          </a:p>
+          <a:p xmlns:a="http://schemas.openxmlformats.org/drawingml/2006/main">
+            <a:r>
+              <a:t>Read the specific public requirement shown on this slide. Explain the input, output and evidence before independent work; do not work the assessed answer for the class.</a:t>
             </a:r>
           </a:p>
           <a:p xmlns:a="http://schemas.openxmlformats.org/drawingml/2006/main">
@@ -2501,12 +1876,12 @@
           </a:p>
           <a:p xmlns:a="http://schemas.openxmlformats.org/drawingml/2006/main">
             <a:r>
-              <a:t>CONNECT</a:t>
-            </a:r>
-          </a:p>
-          <a:p xmlns:a="http://schemas.openxmlformats.org/drawingml/2006/main">
-            <a:r>
-              <a:t>Build on the preceding slide: Practical Test 1 continued.</a:t>
+              <a:t>TEACHING MODE</a:t>
+            </a:r>
+          </a:p>
+          <a:p xmlns:a="http://schemas.openxmlformats.org/drawingml/2006/main">
+            <a:r>
+              <a:t>Demonstrate first. Read each new symbol aloud, trace the values and compare the shown output. Learners repeat worked examples individually after class.</a:t>
             </a:r>
           </a:p>
           <a:p xmlns:a="http://schemas.openxmlformats.org/drawingml/2006/main">
@@ -2516,12 +1891,12 @@
           </a:p>
           <a:p xmlns:a="http://schemas.openxmlformats.org/drawingml/2006/main">
             <a:r>
-              <a:t>LECTURER CUE</a:t>
-            </a:r>
-          </a:p>
-          <a:p xmlns:a="http://schemas.openxmlformats.org/drawingml/2006/main">
-            <a:r>
-              <a:t>Read the specific public requirement shown on this slide. Explain the input, output and evidence before independent work; do not work the assessed answer for the class.</a:t>
+              <a:t>NEXT</a:t>
+            </a:r>
+          </a:p>
+          <a:p xmlns:a="http://schemas.openxmlformats.org/drawingml/2006/main">
+            <a:r>
+              <a:t>Practical Test 1 continued.</a:t>
             </a:r>
           </a:p>
           <a:p xmlns:a="http://schemas.openxmlformats.org/drawingml/2006/main">
@@ -2531,102 +1906,12 @@
           </a:p>
           <a:p xmlns:a="http://schemas.openxmlformats.org/drawingml/2006/main">
             <a:r>
-              <a:t>EXPLAIN IN ORDINARY WORDS</a:t>
-            </a:r>
-          </a:p>
-          <a:p xmlns:a="http://schemas.openxmlformats.org/drawingml/2006/main">
-            <a:r>
-              <a:t>A notebook contains code cells and explanatory text cells. The runtime remembers values from cells that actually ran, which may differ from their visual order.</a:t>
+              <a:t>REFERENCES</a:t>
             </a:r>
           </a:p>
           <a:p xmlns:a="http://schemas.openxmlformats.org/drawingml/2006/main">
             <a:r>
               <a:t/>
-            </a:r>
-          </a:p>
-          <a:p xmlns:a="http://schemas.openxmlformats.org/drawingml/2006/main">
-            <a:r>
-              <a:t>CHECK AND EXPECTED ANSWER</a:t>
-            </a:r>
-          </a:p>
-          <a:p xmlns:a="http://schemas.openxmlformats.org/drawingml/2006/main">
-            <a:r>
-              <a:t>Does editing a cell update a value already stored in memory? No; the cell must run.</a:t>
-            </a:r>
-          </a:p>
-          <a:p xmlns:a="http://schemas.openxmlformats.org/drawingml/2006/main">
-            <a:r>
-              <a:t/>
-            </a:r>
-          </a:p>
-          <a:p xmlns:a="http://schemas.openxmlformats.org/drawingml/2006/main">
-            <a:r>
-              <a:t>IF LEARNERS ARE STUCK</a:t>
-            </a:r>
-          </a:p>
-          <a:p xmlns:a="http://schemas.openxmlformats.org/drawingml/2006/main">
-            <a:r>
-              <a:t>Outside an assessment restriction, restart and run from the top after loading data. Fix the first error before later cells; save the successful notebook.</a:t>
-            </a:r>
-          </a:p>
-          <a:p xmlns:a="http://schemas.openxmlformats.org/drawingml/2006/main">
-            <a:r>
-              <a:t/>
-            </a:r>
-          </a:p>
-          <a:p xmlns:a="http://schemas.openxmlformats.org/drawingml/2006/main">
-            <a:r>
-              <a:t>TEST COLLECTION RULE</a:t>
-            </a:r>
-          </a:p>
-          <a:p xmlns:a="http://schemas.openxmlformats.org/drawingml/2006/main">
-            <a:r>
-              <a:t>This deck is for rehearsal before the timed assessment. Preserve the invigilated timetable and Part A snapshot. During Part B, type answers in the notebook cell headed ## My written evidence without executing code. Collect one complete .ipynb offline; later Google upload only transports the collected work. Do not require internet or AI during the test.</a:t>
-            </a:r>
-          </a:p>
-          <a:p xmlns:a="http://schemas.openxmlformats.org/drawingml/2006/main">
-            <a:r>
-              <a:t/>
-            </a:r>
-          </a:p>
-          <a:p xmlns:a="http://schemas.openxmlformats.org/drawingml/2006/main">
-            <a:r>
-              <a:t>NEXT</a:t>
-            </a:r>
-          </a:p>
-          <a:p xmlns:a="http://schemas.openxmlformats.org/drawingml/2006/main">
-            <a:r>
-              <a:t>Practical Test 1 continued. Move on after a learner can explain the current example or required action.</a:t>
-            </a:r>
-          </a:p>
-          <a:p xmlns:a="http://schemas.openxmlformats.org/drawingml/2006/main">
-            <a:r>
-              <a:t/>
-            </a:r>
-          </a:p>
-          <a:p xmlns:a="http://schemas.openxmlformats.org/drawingml/2006/main">
-            <a:r>
-              <a:t>TEACHING MODE</a:t>
-            </a:r>
-          </a:p>
-          <a:p xmlns:a="http://schemas.openxmlformats.org/drawingml/2006/main">
-            <a:r>
-              <a:t>Demonstrate the example directly. Explain each new name, symbol and output. Use the revision example for an individual check after class; no live partner activity is required.</a:t>
-            </a:r>
-          </a:p>
-          <a:p xmlns:a="http://schemas.openxmlformats.org/drawingml/2006/main">
-            <a:r>
-              <a:t/>
-            </a:r>
-          </a:p>
-          <a:p xmlns:a="http://schemas.openxmlformats.org/drawingml/2006/main">
-            <a:r>
-              <a:t>NEXT</a:t>
-            </a:r>
-          </a:p>
-          <a:p xmlns:a="http://schemas.openxmlformats.org/drawingml/2006/main">
-            <a:r>
-              <a:t>Practical Test 1 continued.</a:t>
             </a:r>
           </a:p>
         </p:txBody>
@@ -2716,7 +2001,7 @@
           </a:p>
           <a:p xmlns:a="http://schemas.openxmlformats.org/drawingml/2006/main">
             <a:r>
-              <a:t>Build on Practical Test 1 continued. Explain why this example is needed before running it.</a:t>
+              <a:t>Previous slide: Practical Test 1 continued.</a:t>
             </a:r>
           </a:p>
           <a:p xmlns:a="http://schemas.openxmlformats.org/drawingml/2006/main">
@@ -2771,17 +2056,12 @@
           </a:p>
           <a:p xmlns:a="http://schemas.openxmlformats.org/drawingml/2006/main">
             <a:r>
-              <a:t>LECTURER DETAIL</a:t>
-            </a:r>
-          </a:p>
-          <a:p xmlns:a="http://schemas.openxmlformats.org/drawingml/2006/main">
-            <a:r>
-              <a:t>TEACHING PURPOSE</a:t>
-            </a:r>
-          </a:p>
-          <a:p xmlns:a="http://schemas.openxmlformats.org/drawingml/2006/main">
-            <a:r>
-              <a:t>Practical Test 1 continued</a:t>
+              <a:t>LECTURER CUE</a:t>
+            </a:r>
+          </a:p>
+          <a:p xmlns:a="http://schemas.openxmlformats.org/drawingml/2006/main">
+            <a:r>
+              <a:t>Read the specific public requirement shown on this slide. Explain the input, output and evidence before independent work; do not work the assessed answer for the class.</a:t>
             </a:r>
           </a:p>
           <a:p xmlns:a="http://schemas.openxmlformats.org/drawingml/2006/main">
@@ -2791,12 +2071,12 @@
           </a:p>
           <a:p xmlns:a="http://schemas.openxmlformats.org/drawingml/2006/main">
             <a:r>
-              <a:t>CONNECT</a:t>
-            </a:r>
-          </a:p>
-          <a:p xmlns:a="http://schemas.openxmlformats.org/drawingml/2006/main">
-            <a:r>
-              <a:t>Build on the preceding slide: Practical Test 1 continued.</a:t>
+              <a:t>TEACHING MODE</a:t>
+            </a:r>
+          </a:p>
+          <a:p xmlns:a="http://schemas.openxmlformats.org/drawingml/2006/main">
+            <a:r>
+              <a:t>Demonstrate first. Read each new symbol aloud, trace the values and compare the shown output. Learners repeat worked examples individually after class.</a:t>
             </a:r>
           </a:p>
           <a:p xmlns:a="http://schemas.openxmlformats.org/drawingml/2006/main">
@@ -2806,12 +2086,12 @@
           </a:p>
           <a:p xmlns:a="http://schemas.openxmlformats.org/drawingml/2006/main">
             <a:r>
-              <a:t>LECTURER CUE</a:t>
-            </a:r>
-          </a:p>
-          <a:p xmlns:a="http://schemas.openxmlformats.org/drawingml/2006/main">
-            <a:r>
-              <a:t>Read the specific public requirement shown on this slide. Explain the input, output and evidence before independent work; do not work the assessed answer for the class.</a:t>
+              <a:t>NEXT</a:t>
+            </a:r>
+          </a:p>
+          <a:p xmlns:a="http://schemas.openxmlformats.org/drawingml/2006/main">
+            <a:r>
+              <a:t>Practical Test 1 continued.</a:t>
             </a:r>
           </a:p>
           <a:p xmlns:a="http://schemas.openxmlformats.org/drawingml/2006/main">
@@ -2821,102 +2101,12 @@
           </a:p>
           <a:p xmlns:a="http://schemas.openxmlformats.org/drawingml/2006/main">
             <a:r>
-              <a:t>EXPLAIN IN ORDINARY WORDS</a:t>
-            </a:r>
-          </a:p>
-          <a:p xmlns:a="http://schemas.openxmlformats.org/drawingml/2006/main">
-            <a:r>
-              <a:t>First remove models that fail the stated error or speed limits. Then apply the stated ranking and tie-break rules to eligible models. The smallest error alone need not decide.</a:t>
+              <a:t>REFERENCES</a:t>
             </a:r>
           </a:p>
           <a:p xmlns:a="http://schemas.openxmlformats.org/drawingml/2006/main">
             <a:r>
               <a:t/>
-            </a:r>
-          </a:p>
-          <a:p xmlns:a="http://schemas.openxmlformats.org/drawingml/2006/main">
-            <a:r>
-              <a:t>CHECK AND EXPECTED ANSWER</a:t>
-            </a:r>
-          </a:p>
-          <a:p xmlns:a="http://schemas.openxmlformats.org/drawingml/2006/main">
-            <a:r>
-              <a:t>If a model has the lowest error but exceeds the maximum latency, is it eligible? No.</a:t>
-            </a:r>
-          </a:p>
-          <a:p xmlns:a="http://schemas.openxmlformats.org/drawingml/2006/main">
-            <a:r>
-              <a:t/>
-            </a:r>
-          </a:p>
-          <a:p xmlns:a="http://schemas.openxmlformats.org/drawingml/2006/main">
-            <a:r>
-              <a:t>IF LEARNERS ARE STUCK</a:t>
-            </a:r>
-          </a:p>
-          <a:p xmlns:a="http://schemas.openxmlformats.org/drawingml/2006/main">
-            <a:r>
-              <a:t>Write an eligibility column and a separate ranking column. Check the exact boundary rule before sorting.</a:t>
-            </a:r>
-          </a:p>
-          <a:p xmlns:a="http://schemas.openxmlformats.org/drawingml/2006/main">
-            <a:r>
-              <a:t/>
-            </a:r>
-          </a:p>
-          <a:p xmlns:a="http://schemas.openxmlformats.org/drawingml/2006/main">
-            <a:r>
-              <a:t>TEST COLLECTION RULE</a:t>
-            </a:r>
-          </a:p>
-          <a:p xmlns:a="http://schemas.openxmlformats.org/drawingml/2006/main">
-            <a:r>
-              <a:t>This deck is for rehearsal before the timed assessment. Preserve the invigilated timetable and Part A snapshot. During Part B, type answers in the notebook cell headed ## My written evidence without executing code. Collect one complete .ipynb offline; later Google upload only transports the collected work. Do not require internet or AI during the test.</a:t>
-            </a:r>
-          </a:p>
-          <a:p xmlns:a="http://schemas.openxmlformats.org/drawingml/2006/main">
-            <a:r>
-              <a:t/>
-            </a:r>
-          </a:p>
-          <a:p xmlns:a="http://schemas.openxmlformats.org/drawingml/2006/main">
-            <a:r>
-              <a:t>NEXT</a:t>
-            </a:r>
-          </a:p>
-          <a:p xmlns:a="http://schemas.openxmlformats.org/drawingml/2006/main">
-            <a:r>
-              <a:t>Practical Test 1 continued. Move on after a learner can explain the current example or required action.</a:t>
-            </a:r>
-          </a:p>
-          <a:p xmlns:a="http://schemas.openxmlformats.org/drawingml/2006/main">
-            <a:r>
-              <a:t/>
-            </a:r>
-          </a:p>
-          <a:p xmlns:a="http://schemas.openxmlformats.org/drawingml/2006/main">
-            <a:r>
-              <a:t>TEACHING MODE</a:t>
-            </a:r>
-          </a:p>
-          <a:p xmlns:a="http://schemas.openxmlformats.org/drawingml/2006/main">
-            <a:r>
-              <a:t>Demonstrate the example directly. Explain each new name, symbol and output. Use the revision example for an individual check after class; no live partner activity is required.</a:t>
-            </a:r>
-          </a:p>
-          <a:p xmlns:a="http://schemas.openxmlformats.org/drawingml/2006/main">
-            <a:r>
-              <a:t/>
-            </a:r>
-          </a:p>
-          <a:p xmlns:a="http://schemas.openxmlformats.org/drawingml/2006/main">
-            <a:r>
-              <a:t>NEXT</a:t>
-            </a:r>
-          </a:p>
-          <a:p xmlns:a="http://schemas.openxmlformats.org/drawingml/2006/main">
-            <a:r>
-              <a:t>Practical Test 1 continued.</a:t>
             </a:r>
           </a:p>
         </p:txBody>
@@ -3006,7 +2196,7 @@
           </a:p>
           <a:p xmlns:a="http://schemas.openxmlformats.org/drawingml/2006/main">
             <a:r>
-              <a:t>Build on Practical Test 1 continued. Explain why this example is needed before running it.</a:t>
+              <a:t>Previous slide: Practical Test 1 continued.</a:t>
             </a:r>
           </a:p>
           <a:p xmlns:a="http://schemas.openxmlformats.org/drawingml/2006/main">
@@ -3061,17 +2251,12 @@
           </a:p>
           <a:p xmlns:a="http://schemas.openxmlformats.org/drawingml/2006/main">
             <a:r>
-              <a:t>LECTURER DETAIL</a:t>
-            </a:r>
-          </a:p>
-          <a:p xmlns:a="http://schemas.openxmlformats.org/drawingml/2006/main">
-            <a:r>
-              <a:t>TEACHING PURPOSE</a:t>
-            </a:r>
-          </a:p>
-          <a:p xmlns:a="http://schemas.openxmlformats.org/drawingml/2006/main">
-            <a:r>
-              <a:t>Practical Test 1 continued</a:t>
+              <a:t>LECTURER CUE</a:t>
+            </a:r>
+          </a:p>
+          <a:p xmlns:a="http://schemas.openxmlformats.org/drawingml/2006/main">
+            <a:r>
+              <a:t>Read the specific public requirement shown on this slide. Explain the input, output and evidence before independent work; do not work the assessed answer for the class.</a:t>
             </a:r>
           </a:p>
           <a:p xmlns:a="http://schemas.openxmlformats.org/drawingml/2006/main">
@@ -3081,12 +2266,12 @@
           </a:p>
           <a:p xmlns:a="http://schemas.openxmlformats.org/drawingml/2006/main">
             <a:r>
-              <a:t>CONNECT</a:t>
-            </a:r>
-          </a:p>
-          <a:p xmlns:a="http://schemas.openxmlformats.org/drawingml/2006/main">
-            <a:r>
-              <a:t>Build on the preceding slide: Practical Test 1 continued.</a:t>
+              <a:t>TEACHING MODE</a:t>
+            </a:r>
+          </a:p>
+          <a:p xmlns:a="http://schemas.openxmlformats.org/drawingml/2006/main">
+            <a:r>
+              <a:t>Demonstrate first. Read each new symbol aloud, trace the values and compare the shown output. Learners repeat worked examples individually after class.</a:t>
             </a:r>
           </a:p>
           <a:p xmlns:a="http://schemas.openxmlformats.org/drawingml/2006/main">
@@ -3096,12 +2281,12 @@
           </a:p>
           <a:p xmlns:a="http://schemas.openxmlformats.org/drawingml/2006/main">
             <a:r>
-              <a:t>LECTURER CUE</a:t>
-            </a:r>
-          </a:p>
-          <a:p xmlns:a="http://schemas.openxmlformats.org/drawingml/2006/main">
-            <a:r>
-              <a:t>Read the specific public requirement shown on this slide. Explain the input, output and evidence before independent work; do not work the assessed answer for the class.</a:t>
+              <a:t>NEXT</a:t>
+            </a:r>
+          </a:p>
+          <a:p xmlns:a="http://schemas.openxmlformats.org/drawingml/2006/main">
+            <a:r>
+              <a:t>Practical Test 1 submission.</a:t>
             </a:r>
           </a:p>
           <a:p xmlns:a="http://schemas.openxmlformats.org/drawingml/2006/main">
@@ -3111,102 +2296,12 @@
           </a:p>
           <a:p xmlns:a="http://schemas.openxmlformats.org/drawingml/2006/main">
             <a:r>
-              <a:t>EXPLAIN IN ORDINARY WORDS</a:t>
-            </a:r>
-          </a:p>
-          <a:p xmlns:a="http://schemas.openxmlformats.org/drawingml/2006/main">
-            <a:r>
-              <a:t>A list keeps items in order. Python positions start at zero. In [2,4,6], position 0 contains 2 and position 2 contains 6. A slice excludes its stop position.</a:t>
+              <a:t>REFERENCES</a:t>
             </a:r>
           </a:p>
           <a:p xmlns:a="http://schemas.openxmlformats.org/drawingml/2006/main">
             <a:r>
               <a:t/>
-            </a:r>
-          </a:p>
-          <a:p xmlns:a="http://schemas.openxmlformats.org/drawingml/2006/main">
-            <a:r>
-              <a:t>CHECK AND EXPECTED ANSWER</a:t>
-            </a:r>
-          </a:p>
-          <a:p xmlns:a="http://schemas.openxmlformats.org/drawingml/2006/main">
-            <a:r>
-              <a:t>What is [2,4,6][1]? 4. Is there a position 3? No.</a:t>
-            </a:r>
-          </a:p>
-          <a:p xmlns:a="http://schemas.openxmlformats.org/drawingml/2006/main">
-            <a:r>
-              <a:t/>
-            </a:r>
-          </a:p>
-          <a:p xmlns:a="http://schemas.openxmlformats.org/drawingml/2006/main">
-            <a:r>
-              <a:t>IF LEARNERS ARE STUCK</a:t>
-            </a:r>
-          </a:p>
-          <a:p xmlns:a="http://schemas.openxmlformats.org/drawingml/2006/main">
-            <a:r>
-              <a:t>Draw three numbered boxes starting at zero. Keep the position separate from the value stored in it.</a:t>
-            </a:r>
-          </a:p>
-          <a:p xmlns:a="http://schemas.openxmlformats.org/drawingml/2006/main">
-            <a:r>
-              <a:t/>
-            </a:r>
-          </a:p>
-          <a:p xmlns:a="http://schemas.openxmlformats.org/drawingml/2006/main">
-            <a:r>
-              <a:t>TEST COLLECTION RULE</a:t>
-            </a:r>
-          </a:p>
-          <a:p xmlns:a="http://schemas.openxmlformats.org/drawingml/2006/main">
-            <a:r>
-              <a:t>This deck is for rehearsal before the timed assessment. Preserve the invigilated timetable and Part A snapshot. During Part B, type answers in the notebook cell headed ## My written evidence without executing code. Collect one complete .ipynb offline; later Google upload only transports the collected work. Do not require internet or AI during the test.</a:t>
-            </a:r>
-          </a:p>
-          <a:p xmlns:a="http://schemas.openxmlformats.org/drawingml/2006/main">
-            <a:r>
-              <a:t/>
-            </a:r>
-          </a:p>
-          <a:p xmlns:a="http://schemas.openxmlformats.org/drawingml/2006/main">
-            <a:r>
-              <a:t>NEXT</a:t>
-            </a:r>
-          </a:p>
-          <a:p xmlns:a="http://schemas.openxmlformats.org/drawingml/2006/main">
-            <a:r>
-              <a:t>Practical Test 1 submission. Move on after a learner can explain the current example or required action.</a:t>
-            </a:r>
-          </a:p>
-          <a:p xmlns:a="http://schemas.openxmlformats.org/drawingml/2006/main">
-            <a:r>
-              <a:t/>
-            </a:r>
-          </a:p>
-          <a:p xmlns:a="http://schemas.openxmlformats.org/drawingml/2006/main">
-            <a:r>
-              <a:t>TEACHING MODE</a:t>
-            </a:r>
-          </a:p>
-          <a:p xmlns:a="http://schemas.openxmlformats.org/drawingml/2006/main">
-            <a:r>
-              <a:t>Demonstrate the example directly. Explain each new name, symbol and output. Use the revision example for an individual check after class; no live partner activity is required.</a:t>
-            </a:r>
-          </a:p>
-          <a:p xmlns:a="http://schemas.openxmlformats.org/drawingml/2006/main">
-            <a:r>
-              <a:t/>
-            </a:r>
-          </a:p>
-          <a:p xmlns:a="http://schemas.openxmlformats.org/drawingml/2006/main">
-            <a:r>
-              <a:t>NEXT</a:t>
-            </a:r>
-          </a:p>
-          <a:p xmlns:a="http://schemas.openxmlformats.org/drawingml/2006/main">
-            <a:r>
-              <a:t>Practical Test 1 submission.</a:t>
             </a:r>
           </a:p>
         </p:txBody>
@@ -3296,7 +2391,7 @@
           </a:p>
           <a:p xmlns:a="http://schemas.openxmlformats.org/drawingml/2006/main">
             <a:r>
-              <a:t>Build on Practical Test 1 continued. Explain why this example is needed before running it.</a:t>
+              <a:t>Previous slide: Practical Test 1 continued.</a:t>
             </a:r>
           </a:p>
           <a:p xmlns:a="http://schemas.openxmlformats.org/drawingml/2006/main">
@@ -3351,17 +2446,12 @@
           </a:p>
           <a:p xmlns:a="http://schemas.openxmlformats.org/drawingml/2006/main">
             <a:r>
-              <a:t>LECTURER DETAIL</a:t>
-            </a:r>
-          </a:p>
-          <a:p xmlns:a="http://schemas.openxmlformats.org/drawingml/2006/main">
-            <a:r>
-              <a:t>TEACHING PURPOSE</a:t>
-            </a:r>
-          </a:p>
-          <a:p xmlns:a="http://schemas.openxmlformats.org/drawingml/2006/main">
-            <a:r>
-              <a:t>Practical Test 1 submission</a:t>
+              <a:t>LECTURER CUE</a:t>
+            </a:r>
+          </a:p>
+          <a:p xmlns:a="http://schemas.openxmlformats.org/drawingml/2006/main">
+            <a:r>
+              <a:t>Read the specific public requirement shown on this slide. Explain the input, output and evidence before independent work; do not work the assessed answer for the class.</a:t>
             </a:r>
           </a:p>
           <a:p xmlns:a="http://schemas.openxmlformats.org/drawingml/2006/main">
@@ -3371,12 +2461,12 @@
           </a:p>
           <a:p xmlns:a="http://schemas.openxmlformats.org/drawingml/2006/main">
             <a:r>
-              <a:t>CONNECT</a:t>
-            </a:r>
-          </a:p>
-          <a:p xmlns:a="http://schemas.openxmlformats.org/drawingml/2006/main">
-            <a:r>
-              <a:t>Build on the preceding slide: Practical Test 1 continued.</a:t>
+              <a:t>TEACHING MODE</a:t>
+            </a:r>
+          </a:p>
+          <a:p xmlns:a="http://schemas.openxmlformats.org/drawingml/2006/main">
+            <a:r>
+              <a:t>Demonstrate first. Read each new symbol aloud, trace the values and compare the shown output. Learners repeat worked examples individually after class.</a:t>
             </a:r>
           </a:p>
           <a:p xmlns:a="http://schemas.openxmlformats.org/drawingml/2006/main">
@@ -3386,12 +2476,12 @@
           </a:p>
           <a:p xmlns:a="http://schemas.openxmlformats.org/drawingml/2006/main">
             <a:r>
-              <a:t>LECTURER CUE</a:t>
-            </a:r>
-          </a:p>
-          <a:p xmlns:a="http://schemas.openxmlformats.org/drawingml/2006/main">
-            <a:r>
-              <a:t>Read the specific public requirement shown on this slide. Explain the input, output and evidence before independent work; do not work the assessed answer for the class.</a:t>
+              <a:t>NEXT</a:t>
+            </a:r>
+          </a:p>
+          <a:p xmlns:a="http://schemas.openxmlformats.org/drawingml/2006/main">
+            <a:r>
+              <a:t>Before you leave.</a:t>
             </a:r>
           </a:p>
           <a:p xmlns:a="http://schemas.openxmlformats.org/drawingml/2006/main">
@@ -3401,117 +2491,12 @@
           </a:p>
           <a:p xmlns:a="http://schemas.openxmlformats.org/drawingml/2006/main">
             <a:r>
-              <a:t>EXPLAIN IN ORDINARY WORDS</a:t>
-            </a:r>
-          </a:p>
-          <a:p xmlns:a="http://schemas.openxmlformats.org/drawingml/2006/main">
-            <a:r>
-              <a:t>A list keeps items in order. Python positions start at zero. In [2,4,6], position 0 contains 2 and position 2 contains 6. A slice excludes its stop position.</a:t>
+              <a:t>REFERENCES</a:t>
             </a:r>
           </a:p>
           <a:p xmlns:a="http://schemas.openxmlformats.org/drawingml/2006/main">
             <a:r>
               <a:t/>
-            </a:r>
-          </a:p>
-          <a:p xmlns:a="http://schemas.openxmlformats.org/drawingml/2006/main">
-            <a:r>
-              <a:t>CHECK AND EXPECTED ANSWER</a:t>
-            </a:r>
-          </a:p>
-          <a:p xmlns:a="http://schemas.openxmlformats.org/drawingml/2006/main">
-            <a:r>
-              <a:t>What is [2,4,6][1]? 4. Is there a position 3? No.</a:t>
-            </a:r>
-          </a:p>
-          <a:p xmlns:a="http://schemas.openxmlformats.org/drawingml/2006/main">
-            <a:r>
-              <a:t/>
-            </a:r>
-          </a:p>
-          <a:p xmlns:a="http://schemas.openxmlformats.org/drawingml/2006/main">
-            <a:r>
-              <a:t>IF LEARNERS ARE STUCK</a:t>
-            </a:r>
-          </a:p>
-          <a:p xmlns:a="http://schemas.openxmlformats.org/drawingml/2006/main">
-            <a:r>
-              <a:t>Draw three numbered boxes starting at zero. Keep the position separate from the value stored in it.</a:t>
-            </a:r>
-          </a:p>
-          <a:p xmlns:a="http://schemas.openxmlformats.org/drawingml/2006/main">
-            <a:r>
-              <a:t/>
-            </a:r>
-          </a:p>
-          <a:p xmlns:a="http://schemas.openxmlformats.org/drawingml/2006/main">
-            <a:r>
-              <a:t>ASSIGNMENT HANDOVER</a:t>
-            </a:r>
-          </a:p>
-          <a:p xmlns:a="http://schemas.openxmlformats.org/drawingml/2006/main">
-            <a:r>
-              <a:t>Open the matching public student guide and show the exact starter filename, required outputs and upload set. Ask one learner to repeat what to submit and where. IUEA Student Registration Number is required freeform text; learners enter their own number. A saved repository is not a submitted form. Read the live deadline and keep the submission confirmation. Do not release an assessment that is still awaiting grading validation.</a:t>
-            </a:r>
-          </a:p>
-          <a:p xmlns:a="http://schemas.openxmlformats.org/drawingml/2006/main">
-            <a:r>
-              <a:t/>
-            </a:r>
-          </a:p>
-          <a:p xmlns:a="http://schemas.openxmlformats.org/drawingml/2006/main">
-            <a:r>
-              <a:t>TEST COLLECTION RULE</a:t>
-            </a:r>
-          </a:p>
-          <a:p xmlns:a="http://schemas.openxmlformats.org/drawingml/2006/main">
-            <a:r>
-              <a:t>This deck is for rehearsal before the timed assessment. Preserve the invigilated timetable and Part A snapshot. During Part B, type answers in the notebook cell headed ## My written evidence without executing code. Collect one complete .ipynb offline; later Google upload only transports the collected work. Do not require internet or AI during the test.</a:t>
-            </a:r>
-          </a:p>
-          <a:p xmlns:a="http://schemas.openxmlformats.org/drawingml/2006/main">
-            <a:r>
-              <a:t/>
-            </a:r>
-          </a:p>
-          <a:p xmlns:a="http://schemas.openxmlformats.org/drawingml/2006/main">
-            <a:r>
-              <a:t>NEXT</a:t>
-            </a:r>
-          </a:p>
-          <a:p xmlns:a="http://schemas.openxmlformats.org/drawingml/2006/main">
-            <a:r>
-              <a:t>Before you leave. Move on after a learner can explain the current example or required action.</a:t>
-            </a:r>
-          </a:p>
-          <a:p xmlns:a="http://schemas.openxmlformats.org/drawingml/2006/main">
-            <a:r>
-              <a:t/>
-            </a:r>
-          </a:p>
-          <a:p xmlns:a="http://schemas.openxmlformats.org/drawingml/2006/main">
-            <a:r>
-              <a:t>TEACHING MODE</a:t>
-            </a:r>
-          </a:p>
-          <a:p xmlns:a="http://schemas.openxmlformats.org/drawingml/2006/main">
-            <a:r>
-              <a:t>Demonstrate the example directly. Explain each new name, symbol and output. Use the revision example for an individual check after class; no live partner activity is required.</a:t>
-            </a:r>
-          </a:p>
-          <a:p xmlns:a="http://schemas.openxmlformats.org/drawingml/2006/main">
-            <a:r>
-              <a:t/>
-            </a:r>
-          </a:p>
-          <a:p xmlns:a="http://schemas.openxmlformats.org/drawingml/2006/main">
-            <a:r>
-              <a:t>NEXT</a:t>
-            </a:r>
-          </a:p>
-          <a:p xmlns:a="http://schemas.openxmlformats.org/drawingml/2006/main">
-            <a:r>
-              <a:t>Before you leave.</a:t>
             </a:r>
           </a:p>
         </p:txBody>
@@ -3601,7 +2586,7 @@
           </a:p>
           <a:p xmlns:a="http://schemas.openxmlformats.org/drawingml/2006/main">
             <a:r>
-              <a:t>Build on Preparing for Practical Test 1. Explain why this example is needed before running it.</a:t>
+              <a:t>Previous slide: Preparing for Practical Test 1.</a:t>
             </a:r>
           </a:p>
           <a:p xmlns:a="http://schemas.openxmlformats.org/drawingml/2006/main">
@@ -3636,17 +2621,12 @@
           </a:p>
           <a:p xmlns:a="http://schemas.openxmlformats.org/drawingml/2006/main">
             <a:r>
-              <a:t>LECTURER DETAIL</a:t>
-            </a:r>
-          </a:p>
-          <a:p xmlns:a="http://schemas.openxmlformats.org/drawingml/2006/main">
-            <a:r>
-              <a:t>TEACHING PURPOSE</a:t>
-            </a:r>
-          </a:p>
-          <a:p xmlns:a="http://schemas.openxmlformats.org/drawingml/2006/main">
-            <a:r>
-              <a:t>Today’s learning</a:t>
+              <a:t>LECTURER CUE</a:t>
+            </a:r>
+          </a:p>
+          <a:p xmlns:a="http://schemas.openxmlformats.org/drawingml/2006/main">
+            <a:r>
+              <a:t>Read the specific public requirement shown on this slide. Explain the input, output and evidence before independent work; do not work the assessed answer for the class.</a:t>
             </a:r>
           </a:p>
           <a:p xmlns:a="http://schemas.openxmlformats.org/drawingml/2006/main">
@@ -3656,12 +2636,12 @@
           </a:p>
           <a:p xmlns:a="http://schemas.openxmlformats.org/drawingml/2006/main">
             <a:r>
-              <a:t>CONNECT</a:t>
-            </a:r>
-          </a:p>
-          <a:p xmlns:a="http://schemas.openxmlformats.org/drawingml/2006/main">
-            <a:r>
-              <a:t>Build on the preceding slide: Preparing for Practical Test 1.</a:t>
+              <a:t>TEACHING MODE</a:t>
+            </a:r>
+          </a:p>
+          <a:p xmlns:a="http://schemas.openxmlformats.org/drawingml/2006/main">
+            <a:r>
+              <a:t>Demonstrate first. Read each new symbol aloud, trace the values and compare the shown output. Learners repeat worked examples individually after class.</a:t>
             </a:r>
           </a:p>
           <a:p xmlns:a="http://schemas.openxmlformats.org/drawingml/2006/main">
@@ -3671,12 +2651,12 @@
           </a:p>
           <a:p xmlns:a="http://schemas.openxmlformats.org/drawingml/2006/main">
             <a:r>
-              <a:t>LECTURER CUE</a:t>
-            </a:r>
-          </a:p>
-          <a:p xmlns:a="http://schemas.openxmlformats.org/drawingml/2006/main">
-            <a:r>
-              <a:t>Read the specific public requirement shown on this slide. Explain the input, output and evidence before independent work; do not work the assessed answer for the class.</a:t>
+              <a:t>NEXT</a:t>
+            </a:r>
+          </a:p>
+          <a:p xmlns:a="http://schemas.openxmlformats.org/drawingml/2006/main">
+            <a:r>
+              <a:t>Connection to the previous lesson.</a:t>
             </a:r>
           </a:p>
           <a:p xmlns:a="http://schemas.openxmlformats.org/drawingml/2006/main">
@@ -3686,102 +2666,12 @@
           </a:p>
           <a:p xmlns:a="http://schemas.openxmlformats.org/drawingml/2006/main">
             <a:r>
-              <a:t>EXPLAIN IN ORDINARY WORDS</a:t>
-            </a:r>
-          </a:p>
-          <a:p xmlns:a="http://schemas.openxmlformats.org/drawingml/2006/main">
-            <a:r>
-              <a:t>A notebook contains code cells and explanatory text cells. The runtime remembers values from cells that actually ran, which may differ from their visual order.</a:t>
+              <a:t>REFERENCES</a:t>
             </a:r>
           </a:p>
           <a:p xmlns:a="http://schemas.openxmlformats.org/drawingml/2006/main">
             <a:r>
               <a:t/>
-            </a:r>
-          </a:p>
-          <a:p xmlns:a="http://schemas.openxmlformats.org/drawingml/2006/main">
-            <a:r>
-              <a:t>CHECK AND EXPECTED ANSWER</a:t>
-            </a:r>
-          </a:p>
-          <a:p xmlns:a="http://schemas.openxmlformats.org/drawingml/2006/main">
-            <a:r>
-              <a:t>Does editing a cell update a value already stored in memory? No; the cell must run.</a:t>
-            </a:r>
-          </a:p>
-          <a:p xmlns:a="http://schemas.openxmlformats.org/drawingml/2006/main">
-            <a:r>
-              <a:t/>
-            </a:r>
-          </a:p>
-          <a:p xmlns:a="http://schemas.openxmlformats.org/drawingml/2006/main">
-            <a:r>
-              <a:t>IF LEARNERS ARE STUCK</a:t>
-            </a:r>
-          </a:p>
-          <a:p xmlns:a="http://schemas.openxmlformats.org/drawingml/2006/main">
-            <a:r>
-              <a:t>Outside an assessment restriction, restart and run from the top after loading data. Fix the first error before later cells; save the successful notebook.</a:t>
-            </a:r>
-          </a:p>
-          <a:p xmlns:a="http://schemas.openxmlformats.org/drawingml/2006/main">
-            <a:r>
-              <a:t/>
-            </a:r>
-          </a:p>
-          <a:p xmlns:a="http://schemas.openxmlformats.org/drawingml/2006/main">
-            <a:r>
-              <a:t>TEST COLLECTION RULE</a:t>
-            </a:r>
-          </a:p>
-          <a:p xmlns:a="http://schemas.openxmlformats.org/drawingml/2006/main">
-            <a:r>
-              <a:t>This deck is for rehearsal before the timed assessment. Preserve the invigilated timetable and Part A snapshot. During Part B, type answers in the notebook cell headed ## My written evidence without executing code. Collect one complete .ipynb offline; later Google upload only transports the collected work. Do not require internet or AI during the test.</a:t>
-            </a:r>
-          </a:p>
-          <a:p xmlns:a="http://schemas.openxmlformats.org/drawingml/2006/main">
-            <a:r>
-              <a:t/>
-            </a:r>
-          </a:p>
-          <a:p xmlns:a="http://schemas.openxmlformats.org/drawingml/2006/main">
-            <a:r>
-              <a:t>NEXT</a:t>
-            </a:r>
-          </a:p>
-          <a:p xmlns:a="http://schemas.openxmlformats.org/drawingml/2006/main">
-            <a:r>
-              <a:t>Recall and a first attempt. Move on after a learner can explain the current example or required action.</a:t>
-            </a:r>
-          </a:p>
-          <a:p xmlns:a="http://schemas.openxmlformats.org/drawingml/2006/main">
-            <a:r>
-              <a:t/>
-            </a:r>
-          </a:p>
-          <a:p xmlns:a="http://schemas.openxmlformats.org/drawingml/2006/main">
-            <a:r>
-              <a:t>TEACHING MODE</a:t>
-            </a:r>
-          </a:p>
-          <a:p xmlns:a="http://schemas.openxmlformats.org/drawingml/2006/main">
-            <a:r>
-              <a:t>Demonstrate the example directly. Explain each new name, symbol and output. Use the revision example for an individual check after class; no live partner activity is required.</a:t>
-            </a:r>
-          </a:p>
-          <a:p xmlns:a="http://schemas.openxmlformats.org/drawingml/2006/main">
-            <a:r>
-              <a:t/>
-            </a:r>
-          </a:p>
-          <a:p xmlns:a="http://schemas.openxmlformats.org/drawingml/2006/main">
-            <a:r>
-              <a:t>NEXT</a:t>
-            </a:r>
-          </a:p>
-          <a:p xmlns:a="http://schemas.openxmlformats.org/drawingml/2006/main">
-            <a:r>
-              <a:t>Connection to the previous lesson.</a:t>
             </a:r>
           </a:p>
         </p:txBody>
@@ -3871,7 +2761,7 @@
           </a:p>
           <a:p xmlns:a="http://schemas.openxmlformats.org/drawingml/2006/main">
             <a:r>
-              <a:t>Build on Practical Test 1 submission. Explain why this example is needed before running it.</a:t>
+              <a:t>Previous slide: Practical Test 1 submission.</a:t>
             </a:r>
           </a:p>
           <a:p xmlns:a="http://schemas.openxmlformats.org/drawingml/2006/main">
@@ -3906,17 +2796,12 @@
           </a:p>
           <a:p xmlns:a="http://schemas.openxmlformats.org/drawingml/2006/main">
             <a:r>
-              <a:t>LECTURER DETAIL</a:t>
-            </a:r>
-          </a:p>
-          <a:p xmlns:a="http://schemas.openxmlformats.org/drawingml/2006/main">
-            <a:r>
-              <a:t>TEACHING PURPOSE</a:t>
-            </a:r>
-          </a:p>
-          <a:p xmlns:a="http://schemas.openxmlformats.org/drawingml/2006/main">
-            <a:r>
-              <a:t>Before you leave</a:t>
+              <a:t>LECTURER CUE</a:t>
+            </a:r>
+          </a:p>
+          <a:p xmlns:a="http://schemas.openxmlformats.org/drawingml/2006/main">
+            <a:r>
+              <a:t>Read the specific public requirement shown on this slide. Explain the input, output and evidence before independent work; do not work the assessed answer for the class.</a:t>
             </a:r>
           </a:p>
           <a:p xmlns:a="http://schemas.openxmlformats.org/drawingml/2006/main">
@@ -3926,12 +2811,12 @@
           </a:p>
           <a:p xmlns:a="http://schemas.openxmlformats.org/drawingml/2006/main">
             <a:r>
-              <a:t>CONNECT</a:t>
-            </a:r>
-          </a:p>
-          <a:p xmlns:a="http://schemas.openxmlformats.org/drawingml/2006/main">
-            <a:r>
-              <a:t>Build on the preceding slide: Practical Test 1 submission.</a:t>
+              <a:t>TEACHING MODE</a:t>
+            </a:r>
+          </a:p>
+          <a:p xmlns:a="http://schemas.openxmlformats.org/drawingml/2006/main">
+            <a:r>
+              <a:t>Demonstrate first. Read each new symbol aloud, trace the values and compare the shown output. Learners repeat worked examples individually after class.</a:t>
             </a:r>
           </a:p>
           <a:p xmlns:a="http://schemas.openxmlformats.org/drawingml/2006/main">
@@ -3941,12 +2826,12 @@
           </a:p>
           <a:p xmlns:a="http://schemas.openxmlformats.org/drawingml/2006/main">
             <a:r>
-              <a:t>LECTURER CUE</a:t>
-            </a:r>
-          </a:p>
-          <a:p xmlns:a="http://schemas.openxmlformats.org/drawingml/2006/main">
-            <a:r>
-              <a:t>Read the specific public requirement shown on this slide. Explain the input, output and evidence before independent work; do not work the assessed answer for the class.</a:t>
+              <a:t>NEXT</a:t>
+            </a:r>
+          </a:p>
+          <a:p xmlns:a="http://schemas.openxmlformats.org/drawingml/2006/main">
+            <a:r>
+              <a:t>independent revision and the issued task.</a:t>
             </a:r>
           </a:p>
           <a:p xmlns:a="http://schemas.openxmlformats.org/drawingml/2006/main">
@@ -3956,87 +2841,12 @@
           </a:p>
           <a:p xmlns:a="http://schemas.openxmlformats.org/drawingml/2006/main">
             <a:r>
-              <a:t>EXPLAIN IN ORDINARY WORDS</a:t>
-            </a:r>
-          </a:p>
-          <a:p xmlns:a="http://schemas.openxmlformats.org/drawingml/2006/main">
-            <a:r>
-              <a:t>A notebook contains code cells and explanatory text cells. The runtime remembers values from cells that actually ran, which may differ from their visual order.</a:t>
+              <a:t>REFERENCES</a:t>
             </a:r>
           </a:p>
           <a:p xmlns:a="http://schemas.openxmlformats.org/drawingml/2006/main">
             <a:r>
               <a:t/>
-            </a:r>
-          </a:p>
-          <a:p xmlns:a="http://schemas.openxmlformats.org/drawingml/2006/main">
-            <a:r>
-              <a:t>CHECK AND EXPECTED ANSWER</a:t>
-            </a:r>
-          </a:p>
-          <a:p xmlns:a="http://schemas.openxmlformats.org/drawingml/2006/main">
-            <a:r>
-              <a:t>Does editing a cell update a value already stored in memory? No; the cell must run.</a:t>
-            </a:r>
-          </a:p>
-          <a:p xmlns:a="http://schemas.openxmlformats.org/drawingml/2006/main">
-            <a:r>
-              <a:t/>
-            </a:r>
-          </a:p>
-          <a:p xmlns:a="http://schemas.openxmlformats.org/drawingml/2006/main">
-            <a:r>
-              <a:t>IF LEARNERS ARE STUCK</a:t>
-            </a:r>
-          </a:p>
-          <a:p xmlns:a="http://schemas.openxmlformats.org/drawingml/2006/main">
-            <a:r>
-              <a:t>Outside an assessment restriction, restart and run from the top after loading data. Fix the first error before later cells; save the successful notebook.</a:t>
-            </a:r>
-          </a:p>
-          <a:p xmlns:a="http://schemas.openxmlformats.org/drawingml/2006/main">
-            <a:r>
-              <a:t/>
-            </a:r>
-          </a:p>
-          <a:p xmlns:a="http://schemas.openxmlformats.org/drawingml/2006/main">
-            <a:r>
-              <a:t>TEST COLLECTION RULE</a:t>
-            </a:r>
-          </a:p>
-          <a:p xmlns:a="http://schemas.openxmlformats.org/drawingml/2006/main">
-            <a:r>
-              <a:t>This deck is for rehearsal before the timed assessment. Preserve the invigilated timetable and Part A snapshot. During Part B, type answers in the notebook cell headed ## My written evidence without executing code. Collect one complete .ipynb offline; later Google upload only transports the collected work. Do not require internet or AI during the test.</a:t>
-            </a:r>
-          </a:p>
-          <a:p xmlns:a="http://schemas.openxmlformats.org/drawingml/2006/main">
-            <a:r>
-              <a:t/>
-            </a:r>
-          </a:p>
-          <a:p xmlns:a="http://schemas.openxmlformats.org/drawingml/2006/main">
-            <a:r>
-              <a:t>TEACHING MODE</a:t>
-            </a:r>
-          </a:p>
-          <a:p xmlns:a="http://schemas.openxmlformats.org/drawingml/2006/main">
-            <a:r>
-              <a:t>Demonstrate the example directly. Explain each new name, symbol and output. Use the revision example for an individual check after class; no live partner activity is required.</a:t>
-            </a:r>
-          </a:p>
-          <a:p xmlns:a="http://schemas.openxmlformats.org/drawingml/2006/main">
-            <a:r>
-              <a:t/>
-            </a:r>
-          </a:p>
-          <a:p xmlns:a="http://schemas.openxmlformats.org/drawingml/2006/main">
-            <a:r>
-              <a:t>NEXT</a:t>
-            </a:r>
-          </a:p>
-          <a:p xmlns:a="http://schemas.openxmlformats.org/drawingml/2006/main">
-            <a:r>
-              <a:t>independent revision and the issued task.</a:t>
             </a:r>
           </a:p>
         </p:txBody>
@@ -4126,7 +2936,7 @@
           </a:p>
           <a:p xmlns:a="http://schemas.openxmlformats.org/drawingml/2006/main">
             <a:r>
-              <a:t>Build on Today’s learning. Explain why this example is needed before running it.</a:t>
+              <a:t>Previous slide: Today’s learning.</a:t>
             </a:r>
           </a:p>
           <a:p xmlns:a="http://schemas.openxmlformats.org/drawingml/2006/main">
@@ -4151,17 +2961,12 @@
           </a:p>
           <a:p xmlns:a="http://schemas.openxmlformats.org/drawingml/2006/main">
             <a:r>
-              <a:t>LECTURER DETAIL</a:t>
-            </a:r>
-          </a:p>
-          <a:p xmlns:a="http://schemas.openxmlformats.org/drawingml/2006/main">
-            <a:r>
-              <a:t>TEACHING PURPOSE</a:t>
-            </a:r>
-          </a:p>
-          <a:p xmlns:a="http://schemas.openxmlformats.org/drawingml/2006/main">
-            <a:r>
-              <a:t>Recall and a first attempt</a:t>
+              <a:t>LECTURER CUE</a:t>
+            </a:r>
+          </a:p>
+          <a:p xmlns:a="http://schemas.openxmlformats.org/drawingml/2006/main">
+            <a:r>
+              <a:t>Read the specific public requirement shown on this slide. Explain the input, output and evidence before independent work; do not work the assessed answer for the class.</a:t>
             </a:r>
           </a:p>
           <a:p xmlns:a="http://schemas.openxmlformats.org/drawingml/2006/main">
@@ -4171,12 +2976,12 @@
           </a:p>
           <a:p xmlns:a="http://schemas.openxmlformats.org/drawingml/2006/main">
             <a:r>
-              <a:t>CONNECT</a:t>
-            </a:r>
-          </a:p>
-          <a:p xmlns:a="http://schemas.openxmlformats.org/drawingml/2006/main">
-            <a:r>
-              <a:t>Build on the preceding slide: Today’s learning.</a:t>
+              <a:t>TEACHING MODE</a:t>
+            </a:r>
+          </a:p>
+          <a:p xmlns:a="http://schemas.openxmlformats.org/drawingml/2006/main">
+            <a:r>
+              <a:t>Demonstrate first. Read each new symbol aloud, trace the values and compare the shown output. Learners repeat worked examples individually after class.</a:t>
             </a:r>
           </a:p>
           <a:p xmlns:a="http://schemas.openxmlformats.org/drawingml/2006/main">
@@ -4186,12 +2991,12 @@
           </a:p>
           <a:p xmlns:a="http://schemas.openxmlformats.org/drawingml/2006/main">
             <a:r>
-              <a:t>LECTURER CUE</a:t>
-            </a:r>
-          </a:p>
-          <a:p xmlns:a="http://schemas.openxmlformats.org/drawingml/2006/main">
-            <a:r>
-              <a:t>Read the specific public requirement shown on this slide. Explain the input, output and evidence before independent work; do not work the assessed answer for the class.</a:t>
+              <a:t>NEXT</a:t>
+            </a:r>
+          </a:p>
+          <a:p xmlns:a="http://schemas.openxmlformats.org/drawingml/2006/main">
+            <a:r>
+              <a:t>Rehearse before test day.</a:t>
             </a:r>
           </a:p>
           <a:p xmlns:a="http://schemas.openxmlformats.org/drawingml/2006/main">
@@ -4201,102 +3006,12 @@
           </a:p>
           <a:p xmlns:a="http://schemas.openxmlformats.org/drawingml/2006/main">
             <a:r>
-              <a:t>EXPLAIN IN ORDINARY WORDS</a:t>
-            </a:r>
-          </a:p>
-          <a:p xmlns:a="http://schemas.openxmlformats.org/drawingml/2006/main">
-            <a:r>
-              <a:t>Name the positive class first. Actual is what happened; predicted is the model decision. Precision asks how many predicted positives were right. Recall asks how many actual positives were found.</a:t>
+              <a:t>REFERENCES</a:t>
             </a:r>
           </a:p>
           <a:p xmlns:a="http://schemas.openxmlformats.org/drawingml/2006/main">
             <a:r>
               <a:t/>
-            </a:r>
-          </a:p>
-          <a:p xmlns:a="http://schemas.openxmlformats.org/drawingml/2006/main">
-            <a:r>
-              <a:t>CHECK AND EXPECTED ANSWER</a:t>
-            </a:r>
-          </a:p>
-          <a:p xmlns:a="http://schemas.openxmlformats.org/drawingml/2006/main">
-            <a:r>
-              <a:t>With TP=2, FP=1, FN=2: precision=2/3 and recall=2/4. A missed actual positive is a false negative.</a:t>
-            </a:r>
-          </a:p>
-          <a:p xmlns:a="http://schemas.openxmlformats.org/drawingml/2006/main">
-            <a:r>
-              <a:t/>
-            </a:r>
-          </a:p>
-          <a:p xmlns:a="http://schemas.openxmlformats.org/drawingml/2006/main">
-            <a:r>
-              <a:t>IF LEARNERS ARE STUCK</a:t>
-            </a:r>
-          </a:p>
-          <a:p xmlns:a="http://schemas.openxmlformats.org/drawingml/2006/main">
-            <a:r>
-              <a:t>Draw actual/predicted headings. Place one case at a time before calculating a fraction. Explain the task rule for a zero denominator.</a:t>
-            </a:r>
-          </a:p>
-          <a:p xmlns:a="http://schemas.openxmlformats.org/drawingml/2006/main">
-            <a:r>
-              <a:t/>
-            </a:r>
-          </a:p>
-          <a:p xmlns:a="http://schemas.openxmlformats.org/drawingml/2006/main">
-            <a:r>
-              <a:t>TEST COLLECTION RULE</a:t>
-            </a:r>
-          </a:p>
-          <a:p xmlns:a="http://schemas.openxmlformats.org/drawingml/2006/main">
-            <a:r>
-              <a:t>This deck is for rehearsal before the timed assessment. Preserve the invigilated timetable and Part A snapshot. During Part B, type answers in the notebook cell headed ## My written evidence without executing code. Collect one complete .ipynb offline; later Google upload only transports the collected work. Do not require internet or AI during the test.</a:t>
-            </a:r>
-          </a:p>
-          <a:p xmlns:a="http://schemas.openxmlformats.org/drawingml/2006/main">
-            <a:r>
-              <a:t/>
-            </a:r>
-          </a:p>
-          <a:p xmlns:a="http://schemas.openxmlformats.org/drawingml/2006/main">
-            <a:r>
-              <a:t>NEXT</a:t>
-            </a:r>
-          </a:p>
-          <a:p xmlns:a="http://schemas.openxmlformats.org/drawingml/2006/main">
-            <a:r>
-              <a:t>Rehearse before test day. Move on after a learner can explain the current example or required action.</a:t>
-            </a:r>
-          </a:p>
-          <a:p xmlns:a="http://schemas.openxmlformats.org/drawingml/2006/main">
-            <a:r>
-              <a:t/>
-            </a:r>
-          </a:p>
-          <a:p xmlns:a="http://schemas.openxmlformats.org/drawingml/2006/main">
-            <a:r>
-              <a:t>TEACHING MODE</a:t>
-            </a:r>
-          </a:p>
-          <a:p xmlns:a="http://schemas.openxmlformats.org/drawingml/2006/main">
-            <a:r>
-              <a:t>Demonstrate the example directly. Explain each new name, symbol and output. Use the revision example for an individual check after class; no live partner activity is required.</a:t>
-            </a:r>
-          </a:p>
-          <a:p xmlns:a="http://schemas.openxmlformats.org/drawingml/2006/main">
-            <a:r>
-              <a:t/>
-            </a:r>
-          </a:p>
-          <a:p xmlns:a="http://schemas.openxmlformats.org/drawingml/2006/main">
-            <a:r>
-              <a:t>NEXT</a:t>
-            </a:r>
-          </a:p>
-          <a:p xmlns:a="http://schemas.openxmlformats.org/drawingml/2006/main">
-            <a:r>
-              <a:t>Rehearse before test day.</a:t>
             </a:r>
           </a:p>
         </p:txBody>
@@ -4386,7 +3101,7 @@
           </a:p>
           <a:p xmlns:a="http://schemas.openxmlformats.org/drawingml/2006/main">
             <a:r>
-              <a:t>Build on Connection to the previous lesson. Explain why this example is needed before running it.</a:t>
+              <a:t>Previous slide: Connection to the previous lesson.</a:t>
             </a:r>
           </a:p>
           <a:p xmlns:a="http://schemas.openxmlformats.org/drawingml/2006/main">
@@ -4431,17 +3146,12 @@
           </a:p>
           <a:p xmlns:a="http://schemas.openxmlformats.org/drawingml/2006/main">
             <a:r>
-              <a:t>LECTURER DETAIL</a:t>
-            </a:r>
-          </a:p>
-          <a:p xmlns:a="http://schemas.openxmlformats.org/drawingml/2006/main">
-            <a:r>
-              <a:t>TEACHING PURPOSE</a:t>
-            </a:r>
-          </a:p>
-          <a:p xmlns:a="http://schemas.openxmlformats.org/drawingml/2006/main">
-            <a:r>
-              <a:t>Rehearse before test day</a:t>
+              <a:t>LECTURER CUE</a:t>
+            </a:r>
+          </a:p>
+          <a:p xmlns:a="http://schemas.openxmlformats.org/drawingml/2006/main">
+            <a:r>
+              <a:t>Read the specific public requirement shown on this slide. Explain the input, output and evidence before independent work; do not work the assessed answer for the class.</a:t>
             </a:r>
           </a:p>
           <a:p xmlns:a="http://schemas.openxmlformats.org/drawingml/2006/main">
@@ -4451,12 +3161,12 @@
           </a:p>
           <a:p xmlns:a="http://schemas.openxmlformats.org/drawingml/2006/main">
             <a:r>
-              <a:t>CONNECT</a:t>
-            </a:r>
-          </a:p>
-          <a:p xmlns:a="http://schemas.openxmlformats.org/drawingml/2006/main">
-            <a:r>
-              <a:t>Build on the preceding slide: Recall and a first attempt.</a:t>
+              <a:t>TEACHING MODE</a:t>
+            </a:r>
+          </a:p>
+          <a:p xmlns:a="http://schemas.openxmlformats.org/drawingml/2006/main">
+            <a:r>
+              <a:t>Demonstrate first. Read each new symbol aloud, trace the values and compare the shown output. Learners repeat worked examples individually after class.</a:t>
             </a:r>
           </a:p>
           <a:p xmlns:a="http://schemas.openxmlformats.org/drawingml/2006/main">
@@ -4466,12 +3176,12 @@
           </a:p>
           <a:p xmlns:a="http://schemas.openxmlformats.org/drawingml/2006/main">
             <a:r>
-              <a:t>LECTURER CUE</a:t>
-            </a:r>
-          </a:p>
-          <a:p xmlns:a="http://schemas.openxmlformats.org/drawingml/2006/main">
-            <a:r>
-              <a:t>Read the specific public requirement shown on this slide. Explain the input, output and evidence before independent work; do not work the assessed answer for the class.</a:t>
+              <a:t>NEXT</a:t>
+            </a:r>
+          </a:p>
+          <a:p xmlns:a="http://schemas.openxmlformats.org/drawingml/2006/main">
+            <a:r>
+              <a:t>Save the complete notebook.</a:t>
             </a:r>
           </a:p>
           <a:p xmlns:a="http://schemas.openxmlformats.org/drawingml/2006/main">
@@ -4481,102 +3191,12 @@
           </a:p>
           <a:p xmlns:a="http://schemas.openxmlformats.org/drawingml/2006/main">
             <a:r>
-              <a:t>EXPLAIN IN ORDINARY WORDS</a:t>
-            </a:r>
-          </a:p>
-          <a:p xmlns:a="http://schemas.openxmlformats.org/drawingml/2006/main">
-            <a:r>
-              <a:t>A notebook contains code cells and explanatory text cells. The runtime remembers values from cells that actually ran, which may differ from their visual order.</a:t>
+              <a:t>REFERENCES</a:t>
             </a:r>
           </a:p>
           <a:p xmlns:a="http://schemas.openxmlformats.org/drawingml/2006/main">
             <a:r>
               <a:t/>
-            </a:r>
-          </a:p>
-          <a:p xmlns:a="http://schemas.openxmlformats.org/drawingml/2006/main">
-            <a:r>
-              <a:t>CHECK AND EXPECTED ANSWER</a:t>
-            </a:r>
-          </a:p>
-          <a:p xmlns:a="http://schemas.openxmlformats.org/drawingml/2006/main">
-            <a:r>
-              <a:t>Does editing a cell update a value already stored in memory? No; the cell must run.</a:t>
-            </a:r>
-          </a:p>
-          <a:p xmlns:a="http://schemas.openxmlformats.org/drawingml/2006/main">
-            <a:r>
-              <a:t/>
-            </a:r>
-          </a:p>
-          <a:p xmlns:a="http://schemas.openxmlformats.org/drawingml/2006/main">
-            <a:r>
-              <a:t>IF LEARNERS ARE STUCK</a:t>
-            </a:r>
-          </a:p>
-          <a:p xmlns:a="http://schemas.openxmlformats.org/drawingml/2006/main">
-            <a:r>
-              <a:t>Outside an assessment restriction, restart and run from the top after loading data. Fix the first error before later cells; save the successful notebook.</a:t>
-            </a:r>
-          </a:p>
-          <a:p xmlns:a="http://schemas.openxmlformats.org/drawingml/2006/main">
-            <a:r>
-              <a:t/>
-            </a:r>
-          </a:p>
-          <a:p xmlns:a="http://schemas.openxmlformats.org/drawingml/2006/main">
-            <a:r>
-              <a:t>TEST COLLECTION RULE</a:t>
-            </a:r>
-          </a:p>
-          <a:p xmlns:a="http://schemas.openxmlformats.org/drawingml/2006/main">
-            <a:r>
-              <a:t>This deck is for rehearsal before the timed assessment. Preserve the invigilated timetable and Part A snapshot. During Part B, type answers in the notebook cell headed ## My written evidence without executing code. Collect one complete .ipynb offline; later Google upload only transports the collected work. Do not require internet or AI during the test.</a:t>
-            </a:r>
-          </a:p>
-          <a:p xmlns:a="http://schemas.openxmlformats.org/drawingml/2006/main">
-            <a:r>
-              <a:t/>
-            </a:r>
-          </a:p>
-          <a:p xmlns:a="http://schemas.openxmlformats.org/drawingml/2006/main">
-            <a:r>
-              <a:t>NEXT</a:t>
-            </a:r>
-          </a:p>
-          <a:p xmlns:a="http://schemas.openxmlformats.org/drawingml/2006/main">
-            <a:r>
-              <a:t>Save the complete notebook. Move on after a learner can explain the current example or required action.</a:t>
-            </a:r>
-          </a:p>
-          <a:p xmlns:a="http://schemas.openxmlformats.org/drawingml/2006/main">
-            <a:r>
-              <a:t/>
-            </a:r>
-          </a:p>
-          <a:p xmlns:a="http://schemas.openxmlformats.org/drawingml/2006/main">
-            <a:r>
-              <a:t>TEACHING MODE</a:t>
-            </a:r>
-          </a:p>
-          <a:p xmlns:a="http://schemas.openxmlformats.org/drawingml/2006/main">
-            <a:r>
-              <a:t>Demonstrate the example directly. Explain each new name, symbol and output. Use the revision example for an individual check after class; no live partner activity is required.</a:t>
-            </a:r>
-          </a:p>
-          <a:p xmlns:a="http://schemas.openxmlformats.org/drawingml/2006/main">
-            <a:r>
-              <a:t/>
-            </a:r>
-          </a:p>
-          <a:p xmlns:a="http://schemas.openxmlformats.org/drawingml/2006/main">
-            <a:r>
-              <a:t>NEXT</a:t>
-            </a:r>
-          </a:p>
-          <a:p xmlns:a="http://schemas.openxmlformats.org/drawingml/2006/main">
-            <a:r>
-              <a:t>Save the complete notebook.</a:t>
             </a:r>
           </a:p>
         </p:txBody>
@@ -4666,7 +3286,7 @@
           </a:p>
           <a:p xmlns:a="http://schemas.openxmlformats.org/drawingml/2006/main">
             <a:r>
-              <a:t>Build on Rehearse before test day. Explain why this example is needed before running it.</a:t>
+              <a:t>Previous slide: Rehearse before test day.</a:t>
             </a:r>
           </a:p>
           <a:p xmlns:a="http://schemas.openxmlformats.org/drawingml/2006/main">
@@ -4711,17 +3331,12 @@
           </a:p>
           <a:p xmlns:a="http://schemas.openxmlformats.org/drawingml/2006/main">
             <a:r>
-              <a:t>LECTURER DETAIL</a:t>
-            </a:r>
-          </a:p>
-          <a:p xmlns:a="http://schemas.openxmlformats.org/drawingml/2006/main">
-            <a:r>
-              <a:t>TEACHING PURPOSE</a:t>
-            </a:r>
-          </a:p>
-          <a:p xmlns:a="http://schemas.openxmlformats.org/drawingml/2006/main">
-            <a:r>
-              <a:t>Save the complete notebook</a:t>
+              <a:t>LECTURER CUE</a:t>
+            </a:r>
+          </a:p>
+          <a:p xmlns:a="http://schemas.openxmlformats.org/drawingml/2006/main">
+            <a:r>
+              <a:t>Read the specific public requirement shown on this slide. Explain the input, output and evidence before independent work; do not work the assessed answer for the class.</a:t>
             </a:r>
           </a:p>
           <a:p xmlns:a="http://schemas.openxmlformats.org/drawingml/2006/main">
@@ -4731,12 +3346,12 @@
           </a:p>
           <a:p xmlns:a="http://schemas.openxmlformats.org/drawingml/2006/main">
             <a:r>
-              <a:t>CONNECT</a:t>
-            </a:r>
-          </a:p>
-          <a:p xmlns:a="http://schemas.openxmlformats.org/drawingml/2006/main">
-            <a:r>
-              <a:t>Build on the preceding slide: Rehearse before test day.</a:t>
+              <a:t>TEACHING MODE</a:t>
+            </a:r>
+          </a:p>
+          <a:p xmlns:a="http://schemas.openxmlformats.org/drawingml/2006/main">
+            <a:r>
+              <a:t>Demonstrate first. Read each new symbol aloud, trace the values and compare the shown output. Learners repeat worked examples individually after class.</a:t>
             </a:r>
           </a:p>
           <a:p xmlns:a="http://schemas.openxmlformats.org/drawingml/2006/main">
@@ -4746,12 +3361,12 @@
           </a:p>
           <a:p xmlns:a="http://schemas.openxmlformats.org/drawingml/2006/main">
             <a:r>
-              <a:t>LECTURER CUE</a:t>
-            </a:r>
-          </a:p>
-          <a:p xmlns:a="http://schemas.openxmlformats.org/drawingml/2006/main">
-            <a:r>
-              <a:t>Read the specific public requirement shown on this slide. Explain the input, output and evidence before independent work; do not work the assessed answer for the class.</a:t>
+              <a:t>NEXT</a:t>
+            </a:r>
+          </a:p>
+          <a:p xmlns:a="http://schemas.openxmlformats.org/drawingml/2006/main">
+            <a:r>
+              <a:t>Follow the published test procedure.</a:t>
             </a:r>
           </a:p>
           <a:p xmlns:a="http://schemas.openxmlformats.org/drawingml/2006/main">
@@ -4761,102 +3376,12 @@
           </a:p>
           <a:p xmlns:a="http://schemas.openxmlformats.org/drawingml/2006/main">
             <a:r>
-              <a:t>EXPLAIN IN ORDINARY WORDS</a:t>
-            </a:r>
-          </a:p>
-          <a:p xmlns:a="http://schemas.openxmlformats.org/drawingml/2006/main">
-            <a:r>
-              <a:t>A notebook contains code cells and explanatory text cells. The runtime remembers values from cells that actually ran, which may differ from their visual order.</a:t>
+              <a:t>REFERENCES</a:t>
             </a:r>
           </a:p>
           <a:p xmlns:a="http://schemas.openxmlformats.org/drawingml/2006/main">
             <a:r>
               <a:t/>
-            </a:r>
-          </a:p>
-          <a:p xmlns:a="http://schemas.openxmlformats.org/drawingml/2006/main">
-            <a:r>
-              <a:t>CHECK AND EXPECTED ANSWER</a:t>
-            </a:r>
-          </a:p>
-          <a:p xmlns:a="http://schemas.openxmlformats.org/drawingml/2006/main">
-            <a:r>
-              <a:t>Does editing a cell update a value already stored in memory? No; the cell must run.</a:t>
-            </a:r>
-          </a:p>
-          <a:p xmlns:a="http://schemas.openxmlformats.org/drawingml/2006/main">
-            <a:r>
-              <a:t/>
-            </a:r>
-          </a:p>
-          <a:p xmlns:a="http://schemas.openxmlformats.org/drawingml/2006/main">
-            <a:r>
-              <a:t>IF LEARNERS ARE STUCK</a:t>
-            </a:r>
-          </a:p>
-          <a:p xmlns:a="http://schemas.openxmlformats.org/drawingml/2006/main">
-            <a:r>
-              <a:t>Outside an assessment restriction, restart and run from the top after loading data. Fix the first error before later cells; save the successful notebook.</a:t>
-            </a:r>
-          </a:p>
-          <a:p xmlns:a="http://schemas.openxmlformats.org/drawingml/2006/main">
-            <a:r>
-              <a:t/>
-            </a:r>
-          </a:p>
-          <a:p xmlns:a="http://schemas.openxmlformats.org/drawingml/2006/main">
-            <a:r>
-              <a:t>TEST COLLECTION RULE</a:t>
-            </a:r>
-          </a:p>
-          <a:p xmlns:a="http://schemas.openxmlformats.org/drawingml/2006/main">
-            <a:r>
-              <a:t>This deck is for rehearsal before the timed assessment. Preserve the invigilated timetable and Part A snapshot. During Part B, type answers in the notebook cell headed ## My written evidence without executing code. Collect one complete .ipynb offline; later Google upload only transports the collected work. Do not require internet or AI during the test.</a:t>
-            </a:r>
-          </a:p>
-          <a:p xmlns:a="http://schemas.openxmlformats.org/drawingml/2006/main">
-            <a:r>
-              <a:t/>
-            </a:r>
-          </a:p>
-          <a:p xmlns:a="http://schemas.openxmlformats.org/drawingml/2006/main">
-            <a:r>
-              <a:t>NEXT</a:t>
-            </a:r>
-          </a:p>
-          <a:p xmlns:a="http://schemas.openxmlformats.org/drawingml/2006/main">
-            <a:r>
-              <a:t>Follow the published test procedure. Move on after a learner can explain the current example or required action.</a:t>
-            </a:r>
-          </a:p>
-          <a:p xmlns:a="http://schemas.openxmlformats.org/drawingml/2006/main">
-            <a:r>
-              <a:t/>
-            </a:r>
-          </a:p>
-          <a:p xmlns:a="http://schemas.openxmlformats.org/drawingml/2006/main">
-            <a:r>
-              <a:t>TEACHING MODE</a:t>
-            </a:r>
-          </a:p>
-          <a:p xmlns:a="http://schemas.openxmlformats.org/drawingml/2006/main">
-            <a:r>
-              <a:t>Demonstrate the example directly. Explain each new name, symbol and output. Use the revision example for an individual check after class; no live partner activity is required.</a:t>
-            </a:r>
-          </a:p>
-          <a:p xmlns:a="http://schemas.openxmlformats.org/drawingml/2006/main">
-            <a:r>
-              <a:t/>
-            </a:r>
-          </a:p>
-          <a:p xmlns:a="http://schemas.openxmlformats.org/drawingml/2006/main">
-            <a:r>
-              <a:t>NEXT</a:t>
-            </a:r>
-          </a:p>
-          <a:p xmlns:a="http://schemas.openxmlformats.org/drawingml/2006/main">
-            <a:r>
-              <a:t>Follow the published test procedure.</a:t>
             </a:r>
           </a:p>
         </p:txBody>
@@ -4946,7 +3471,7 @@
           </a:p>
           <a:p xmlns:a="http://schemas.openxmlformats.org/drawingml/2006/main">
             <a:r>
-              <a:t>Build on Save the complete notebook. Explain why this example is needed before running it.</a:t>
+              <a:t>Previous slide: Save the complete notebook.</a:t>
             </a:r>
           </a:p>
           <a:p xmlns:a="http://schemas.openxmlformats.org/drawingml/2006/main">
@@ -4991,17 +3516,12 @@
           </a:p>
           <a:p xmlns:a="http://schemas.openxmlformats.org/drawingml/2006/main">
             <a:r>
-              <a:t>LECTURER DETAIL</a:t>
-            </a:r>
-          </a:p>
-          <a:p xmlns:a="http://schemas.openxmlformats.org/drawingml/2006/main">
-            <a:r>
-              <a:t>TEACHING PURPOSE</a:t>
-            </a:r>
-          </a:p>
-          <a:p xmlns:a="http://schemas.openxmlformats.org/drawingml/2006/main">
-            <a:r>
-              <a:t>Follow the published test procedure</a:t>
+              <a:t>LECTURER CUE</a:t>
+            </a:r>
+          </a:p>
+          <a:p xmlns:a="http://schemas.openxmlformats.org/drawingml/2006/main">
+            <a:r>
+              <a:t>Read the specific public requirement shown on this slide. Explain the input, output and evidence before independent work; do not work the assessed answer for the class.</a:t>
             </a:r>
           </a:p>
           <a:p xmlns:a="http://schemas.openxmlformats.org/drawingml/2006/main">
@@ -5011,12 +3531,12 @@
           </a:p>
           <a:p xmlns:a="http://schemas.openxmlformats.org/drawingml/2006/main">
             <a:r>
-              <a:t>CONNECT</a:t>
-            </a:r>
-          </a:p>
-          <a:p xmlns:a="http://schemas.openxmlformats.org/drawingml/2006/main">
-            <a:r>
-              <a:t>Build on the preceding slide: Save the complete notebook.</a:t>
+              <a:t>TEACHING MODE</a:t>
+            </a:r>
+          </a:p>
+          <a:p xmlns:a="http://schemas.openxmlformats.org/drawingml/2006/main">
+            <a:r>
+              <a:t>Demonstrate first. Read each new symbol aloud, trace the values and compare the shown output. Learners repeat worked examples individually after class.</a:t>
             </a:r>
           </a:p>
           <a:p xmlns:a="http://schemas.openxmlformats.org/drawingml/2006/main">
@@ -5026,12 +3546,12 @@
           </a:p>
           <a:p xmlns:a="http://schemas.openxmlformats.org/drawingml/2006/main">
             <a:r>
-              <a:t>LECTURER CUE</a:t>
-            </a:r>
-          </a:p>
-          <a:p xmlns:a="http://schemas.openxmlformats.org/drawingml/2006/main">
-            <a:r>
-              <a:t>Read the specific public requirement shown on this slide. Explain the input, output and evidence before independent work; do not work the assessed answer for the class.</a:t>
+              <a:t>NEXT</a:t>
+            </a:r>
+          </a:p>
+          <a:p xmlns:a="http://schemas.openxmlformats.org/drawingml/2006/main">
+            <a:r>
+              <a:t>Practice before test day.</a:t>
             </a:r>
           </a:p>
           <a:p xmlns:a="http://schemas.openxmlformats.org/drawingml/2006/main">
@@ -5041,57 +3561,12 @@
           </a:p>
           <a:p xmlns:a="http://schemas.openxmlformats.org/drawingml/2006/main">
             <a:r>
-              <a:t>TEST COLLECTION RULE</a:t>
-            </a:r>
-          </a:p>
-          <a:p xmlns:a="http://schemas.openxmlformats.org/drawingml/2006/main">
-            <a:r>
-              <a:t>This deck is for rehearsal before the timed assessment. Preserve the invigilated timetable and Part A snapshot. During Part B, type answers in the notebook cell headed ## My written evidence without executing code. Collect one complete .ipynb offline; later Google upload only transports the collected work. Do not require internet or AI during the test.</a:t>
+              <a:t>REFERENCES</a:t>
             </a:r>
           </a:p>
           <a:p xmlns:a="http://schemas.openxmlformats.org/drawingml/2006/main">
             <a:r>
               <a:t/>
-            </a:r>
-          </a:p>
-          <a:p xmlns:a="http://schemas.openxmlformats.org/drawingml/2006/main">
-            <a:r>
-              <a:t>NEXT</a:t>
-            </a:r>
-          </a:p>
-          <a:p xmlns:a="http://schemas.openxmlformats.org/drawingml/2006/main">
-            <a:r>
-              <a:t>Practice before test day. Move on after a learner can explain the current example or required action.</a:t>
-            </a:r>
-          </a:p>
-          <a:p xmlns:a="http://schemas.openxmlformats.org/drawingml/2006/main">
-            <a:r>
-              <a:t/>
-            </a:r>
-          </a:p>
-          <a:p xmlns:a="http://schemas.openxmlformats.org/drawingml/2006/main">
-            <a:r>
-              <a:t>TEACHING MODE</a:t>
-            </a:r>
-          </a:p>
-          <a:p xmlns:a="http://schemas.openxmlformats.org/drawingml/2006/main">
-            <a:r>
-              <a:t>Demonstrate the example directly. Explain each new name, symbol and output. Use the revision example for an individual check after class; no live partner activity is required.</a:t>
-            </a:r>
-          </a:p>
-          <a:p xmlns:a="http://schemas.openxmlformats.org/drawingml/2006/main">
-            <a:r>
-              <a:t/>
-            </a:r>
-          </a:p>
-          <a:p xmlns:a="http://schemas.openxmlformats.org/drawingml/2006/main">
-            <a:r>
-              <a:t>NEXT</a:t>
-            </a:r>
-          </a:p>
-          <a:p xmlns:a="http://schemas.openxmlformats.org/drawingml/2006/main">
-            <a:r>
-              <a:t>Practice before test day.</a:t>
             </a:r>
           </a:p>
         </p:txBody>
@@ -5181,7 +3656,7 @@
           </a:p>
           <a:p xmlns:a="http://schemas.openxmlformats.org/drawingml/2006/main">
             <a:r>
-              <a:t>Build on Follow the published test procedure. Explain why this example is needed before running it.</a:t>
+              <a:t>Previous slide: Follow the published test procedure.</a:t>
             </a:r>
           </a:p>
           <a:p xmlns:a="http://schemas.openxmlformats.org/drawingml/2006/main">
@@ -5196,6 +3671,61 @@
           </a:p>
           <a:p xmlns:a="http://schemas.openxmlformats.org/drawingml/2006/main">
             <a:r>
+              <a:t>Read the code in this order:</a:t>
+            </a:r>
+          </a:p>
+          <a:p xmlns:a="http://schemas.openxmlformats.org/drawingml/2006/main">
+            <a:r>
+              <a:t>values = [3, 5, 7]</a:t>
+            </a:r>
+          </a:p>
+          <a:p xmlns:a="http://schemas.openxmlformats.org/drawingml/2006/main">
+            <a:r>
+              <a:t>print(len(values))</a:t>
+            </a:r>
+          </a:p>
+          <a:p xmlns:a="http://schemas.openxmlformats.org/drawingml/2006/main">
+            <a:r>
+              <a:t>print(sum(values) / len(values))</a:t>
+            </a:r>
+          </a:p>
+          <a:p xmlns:a="http://schemas.openxmlformats.org/drawingml/2006/main">
+            <a:r>
+              <a:t/>
+            </a:r>
+          </a:p>
+          <a:p xmlns:a="http://schemas.openxmlformats.org/drawingml/2006/main">
+            <a:r>
+              <a:t>print displays a value below the cell.</a:t>
+            </a:r>
+          </a:p>
+          <a:p xmlns:a="http://schemas.openxmlformats.org/drawingml/2006/main">
+            <a:r>
+              <a:t/>
+            </a:r>
+          </a:p>
+          <a:p xmlns:a="http://schemas.openxmlformats.org/drawingml/2006/main">
+            <a:r>
+              <a:t>Square brackets create a list or select an item.</a:t>
+            </a:r>
+          </a:p>
+          <a:p xmlns:a="http://schemas.openxmlformats.org/drawingml/2006/main">
+            <a:r>
+              <a:t/>
+            </a:r>
+          </a:p>
+          <a:p xmlns:a="http://schemas.openxmlformats.org/drawingml/2006/main">
+            <a:r>
+              <a:t>= assigns the value on the right to the name on the left.</a:t>
+            </a:r>
+          </a:p>
+          <a:p xmlns:a="http://schemas.openxmlformats.org/drawingml/2006/main">
+            <a:r>
+              <a:t/>
+            </a:r>
+          </a:p>
+          <a:p xmlns:a="http://schemas.openxmlformats.org/drawingml/2006/main">
+            <a:r>
               <a:t>Read top to bottom. Run the complete example in the matching practice notebook.</a:t>
             </a:r>
           </a:p>
@@ -5206,17 +3736,12 @@
           </a:p>
           <a:p xmlns:a="http://schemas.openxmlformats.org/drawingml/2006/main">
             <a:r>
-              <a:t>LECTURER DETAIL</a:t>
-            </a:r>
-          </a:p>
-          <a:p xmlns:a="http://schemas.openxmlformats.org/drawingml/2006/main">
-            <a:r>
-              <a:t>TEACHING PURPOSE</a:t>
-            </a:r>
-          </a:p>
-          <a:p xmlns:a="http://schemas.openxmlformats.org/drawingml/2006/main">
-            <a:r>
-              <a:t>Practice before test day</a:t>
+              <a:t>LECTURER CUE</a:t>
+            </a:r>
+          </a:p>
+          <a:p xmlns:a="http://schemas.openxmlformats.org/drawingml/2006/main">
+            <a:r>
+              <a:t>Read the specific public requirement shown on this slide. Explain the input, output and evidence before independent work; do not work the assessed answer for the class.</a:t>
             </a:r>
           </a:p>
           <a:p xmlns:a="http://schemas.openxmlformats.org/drawingml/2006/main">
@@ -5226,12 +3751,12 @@
           </a:p>
           <a:p xmlns:a="http://schemas.openxmlformats.org/drawingml/2006/main">
             <a:r>
-              <a:t>CONNECT</a:t>
-            </a:r>
-          </a:p>
-          <a:p xmlns:a="http://schemas.openxmlformats.org/drawingml/2006/main">
-            <a:r>
-              <a:t>Build on the preceding slide: Follow the published test procedure.</a:t>
+              <a:t>TEACHING MODE</a:t>
+            </a:r>
+          </a:p>
+          <a:p xmlns:a="http://schemas.openxmlformats.org/drawingml/2006/main">
+            <a:r>
+              <a:t>Demonstrate first. Read each new symbol aloud, trace the values and compare the shown output. Learners repeat worked examples individually after class.</a:t>
             </a:r>
           </a:p>
           <a:p xmlns:a="http://schemas.openxmlformats.org/drawingml/2006/main">
@@ -5241,12 +3766,12 @@
           </a:p>
           <a:p xmlns:a="http://schemas.openxmlformats.org/drawingml/2006/main">
             <a:r>
-              <a:t>LECTURER CUE</a:t>
-            </a:r>
-          </a:p>
-          <a:p xmlns:a="http://schemas.openxmlformats.org/drawingml/2006/main">
-            <a:r>
-              <a:t>Read the specific public requirement shown on this slide. Explain the input, output and evidence before independent work; do not work the assessed answer for the class.</a:t>
+              <a:t>NEXT</a:t>
+            </a:r>
+          </a:p>
+          <a:p xmlns:a="http://schemas.openxmlformats.org/drawingml/2006/main">
+            <a:r>
+              <a:t>Test session.</a:t>
             </a:r>
           </a:p>
           <a:p xmlns:a="http://schemas.openxmlformats.org/drawingml/2006/main">
@@ -5256,132 +3781,12 @@
           </a:p>
           <a:p xmlns:a="http://schemas.openxmlformats.org/drawingml/2006/main">
             <a:r>
-              <a:t>EXPLAIN IN ORDINARY WORDS</a:t>
-            </a:r>
-          </a:p>
-          <a:p xmlns:a="http://schemas.openxmlformats.org/drawingml/2006/main">
-            <a:r>
-              <a:t>A list keeps items in order. Python positions start at zero. In [2,4,6], position 0 contains 2 and position 2 contains 6. A slice excludes its stop position.</a:t>
+              <a:t>REFERENCES</a:t>
             </a:r>
           </a:p>
           <a:p xmlns:a="http://schemas.openxmlformats.org/drawingml/2006/main">
             <a:r>
               <a:t/>
-            </a:r>
-          </a:p>
-          <a:p xmlns:a="http://schemas.openxmlformats.org/drawingml/2006/main">
-            <a:r>
-              <a:t>CHECK AND EXPECTED ANSWER</a:t>
-            </a:r>
-          </a:p>
-          <a:p xmlns:a="http://schemas.openxmlformats.org/drawingml/2006/main">
-            <a:r>
-              <a:t>What is [2,4,6][1]? 4. Is there a position 3? No.</a:t>
-            </a:r>
-          </a:p>
-          <a:p xmlns:a="http://schemas.openxmlformats.org/drawingml/2006/main">
-            <a:r>
-              <a:t/>
-            </a:r>
-          </a:p>
-          <a:p xmlns:a="http://schemas.openxmlformats.org/drawingml/2006/main">
-            <a:r>
-              <a:t>IF LEARNERS ARE STUCK</a:t>
-            </a:r>
-          </a:p>
-          <a:p xmlns:a="http://schemas.openxmlformats.org/drawingml/2006/main">
-            <a:r>
-              <a:t>Draw three numbered boxes starting at zero. Keep the position separate from the value stored in it.</a:t>
-            </a:r>
-          </a:p>
-          <a:p xmlns:a="http://schemas.openxmlformats.org/drawingml/2006/main">
-            <a:r>
-              <a:t/>
-            </a:r>
-          </a:p>
-          <a:p xmlns:a="http://schemas.openxmlformats.org/drawingml/2006/main">
-            <a:r>
-              <a:t>WALK THROUGH THIS CODE</a:t>
-            </a:r>
-          </a:p>
-          <a:p xmlns:a="http://schemas.openxmlformats.org/drawingml/2006/main">
-            <a:r>
-              <a:t>print displays a value below the cell.</a:t>
-            </a:r>
-          </a:p>
-          <a:p xmlns:a="http://schemas.openxmlformats.org/drawingml/2006/main">
-            <a:r>
-              <a:t>Square brackets create a list or select an item.</a:t>
-            </a:r>
-          </a:p>
-          <a:p xmlns:a="http://schemas.openxmlformats.org/drawingml/2006/main">
-            <a:r>
-              <a:t>= assigns the value on the right to the name on the left.</a:t>
-            </a:r>
-          </a:p>
-          <a:p xmlns:a="http://schemas.openxmlformats.org/drawingml/2006/main">
-            <a:r>
-              <a:t>Read the displayed lines in order, with the preceding code block if this example continues. Ask for the next value before running. The complete matching example is in guided_practice.ipynb; do not type a fragment into a new empty notebook.</a:t>
-            </a:r>
-          </a:p>
-          <a:p xmlns:a="http://schemas.openxmlformats.org/drawingml/2006/main">
-            <a:r>
-              <a:t/>
-            </a:r>
-          </a:p>
-          <a:p xmlns:a="http://schemas.openxmlformats.org/drawingml/2006/main">
-            <a:r>
-              <a:t>TEST COLLECTION RULE</a:t>
-            </a:r>
-          </a:p>
-          <a:p xmlns:a="http://schemas.openxmlformats.org/drawingml/2006/main">
-            <a:r>
-              <a:t>This deck is for rehearsal before the timed assessment. Preserve the invigilated timetable and Part A snapshot. During Part B, type answers in the notebook cell headed ## My written evidence without executing code. Collect one complete .ipynb offline; later Google upload only transports the collected work. Do not require internet or AI during the test.</a:t>
-            </a:r>
-          </a:p>
-          <a:p xmlns:a="http://schemas.openxmlformats.org/drawingml/2006/main">
-            <a:r>
-              <a:t/>
-            </a:r>
-          </a:p>
-          <a:p xmlns:a="http://schemas.openxmlformats.org/drawingml/2006/main">
-            <a:r>
-              <a:t>NEXT</a:t>
-            </a:r>
-          </a:p>
-          <a:p xmlns:a="http://schemas.openxmlformats.org/drawingml/2006/main">
-            <a:r>
-              <a:t>Before the timed test. Move on after a learner can explain the current example or required action.</a:t>
-            </a:r>
-          </a:p>
-          <a:p xmlns:a="http://schemas.openxmlformats.org/drawingml/2006/main">
-            <a:r>
-              <a:t/>
-            </a:r>
-          </a:p>
-          <a:p xmlns:a="http://schemas.openxmlformats.org/drawingml/2006/main">
-            <a:r>
-              <a:t>TEACHING MODE</a:t>
-            </a:r>
-          </a:p>
-          <a:p xmlns:a="http://schemas.openxmlformats.org/drawingml/2006/main">
-            <a:r>
-              <a:t>Demonstrate the example directly. Explain each new name, symbol and output. Use the revision example for an individual check after class; no live partner activity is required.</a:t>
-            </a:r>
-          </a:p>
-          <a:p xmlns:a="http://schemas.openxmlformats.org/drawingml/2006/main">
-            <a:r>
-              <a:t/>
-            </a:r>
-          </a:p>
-          <a:p xmlns:a="http://schemas.openxmlformats.org/drawingml/2006/main">
-            <a:r>
-              <a:t>NEXT</a:t>
-            </a:r>
-          </a:p>
-          <a:p xmlns:a="http://schemas.openxmlformats.org/drawingml/2006/main">
-            <a:r>
-              <a:t>Test session.</a:t>
             </a:r>
           </a:p>
         </p:txBody>
@@ -5471,7 +3876,7 @@
           </a:p>
           <a:p xmlns:a="http://schemas.openxmlformats.org/drawingml/2006/main">
             <a:r>
-              <a:t>Build on Practice before test day. Explain why this example is needed before running it.</a:t>
+              <a:t>Previous slide: Practice before test day.</a:t>
             </a:r>
           </a:p>
           <a:p xmlns:a="http://schemas.openxmlformats.org/drawingml/2006/main">
@@ -5526,17 +3931,12 @@
           </a:p>
           <a:p xmlns:a="http://schemas.openxmlformats.org/drawingml/2006/main">
             <a:r>
-              <a:t>LECTURER DETAIL</a:t>
-            </a:r>
-          </a:p>
-          <a:p xmlns:a="http://schemas.openxmlformats.org/drawingml/2006/main">
-            <a:r>
-              <a:t>TEACHING PURPOSE</a:t>
-            </a:r>
-          </a:p>
-          <a:p xmlns:a="http://schemas.openxmlformats.org/drawingml/2006/main">
-            <a:r>
-              <a:t>Test session</a:t>
+              <a:t>LECTURER CUE</a:t>
+            </a:r>
+          </a:p>
+          <a:p xmlns:a="http://schemas.openxmlformats.org/drawingml/2006/main">
+            <a:r>
+              <a:t>Read the specific public requirement shown on this slide. Explain the input, output and evidence before independent work; do not work the assessed answer for the class.</a:t>
             </a:r>
           </a:p>
           <a:p xmlns:a="http://schemas.openxmlformats.org/drawingml/2006/main">
@@ -5546,12 +3946,12 @@
           </a:p>
           <a:p xmlns:a="http://schemas.openxmlformats.org/drawingml/2006/main">
             <a:r>
-              <a:t>CONNECT</a:t>
-            </a:r>
-          </a:p>
-          <a:p xmlns:a="http://schemas.openxmlformats.org/drawingml/2006/main">
-            <a:r>
-              <a:t>Build on the preceding slide: What the activity shows.</a:t>
+              <a:t>TEACHING MODE</a:t>
+            </a:r>
+          </a:p>
+          <a:p xmlns:a="http://schemas.openxmlformats.org/drawingml/2006/main">
+            <a:r>
+              <a:t>Demonstrate first. Read each new symbol aloud, trace the values and compare the shown output. Learners repeat worked examples individually after class.</a:t>
             </a:r>
           </a:p>
           <a:p xmlns:a="http://schemas.openxmlformats.org/drawingml/2006/main">
@@ -5561,12 +3961,12 @@
           </a:p>
           <a:p xmlns:a="http://schemas.openxmlformats.org/drawingml/2006/main">
             <a:r>
-              <a:t>LECTURER CUE</a:t>
-            </a:r>
-          </a:p>
-          <a:p xmlns:a="http://schemas.openxmlformats.org/drawingml/2006/main">
-            <a:r>
-              <a:t>Read the specific public requirement shown on this slide. Explain the input, output and evidence before independent work; do not work the assessed answer for the class.</a:t>
+              <a:t>NEXT</a:t>
+            </a:r>
+          </a:p>
+          <a:p xmlns:a="http://schemas.openxmlformats.org/drawingml/2006/main">
+            <a:r>
+              <a:t>Preparation checkpoint.</a:t>
             </a:r>
           </a:p>
           <a:p xmlns:a="http://schemas.openxmlformats.org/drawingml/2006/main">
@@ -5576,117 +3976,12 @@
           </a:p>
           <a:p xmlns:a="http://schemas.openxmlformats.org/drawingml/2006/main">
             <a:r>
-              <a:t>EXPLAIN IN ORDINARY WORDS</a:t>
-            </a:r>
-          </a:p>
-          <a:p xmlns:a="http://schemas.openxmlformats.org/drawingml/2006/main">
-            <a:r>
-              <a:t>A list keeps items in order. Python positions start at zero. In [2,4,6], position 0 contains 2 and position 2 contains 6. A slice excludes its stop position.</a:t>
+              <a:t>REFERENCES</a:t>
             </a:r>
           </a:p>
           <a:p xmlns:a="http://schemas.openxmlformats.org/drawingml/2006/main">
             <a:r>
               <a:t/>
-            </a:r>
-          </a:p>
-          <a:p xmlns:a="http://schemas.openxmlformats.org/drawingml/2006/main">
-            <a:r>
-              <a:t>CHECK AND EXPECTED ANSWER</a:t>
-            </a:r>
-          </a:p>
-          <a:p xmlns:a="http://schemas.openxmlformats.org/drawingml/2006/main">
-            <a:r>
-              <a:t>What is [2,4,6][1]? 4. Is there a position 3? No.</a:t>
-            </a:r>
-          </a:p>
-          <a:p xmlns:a="http://schemas.openxmlformats.org/drawingml/2006/main">
-            <a:r>
-              <a:t/>
-            </a:r>
-          </a:p>
-          <a:p xmlns:a="http://schemas.openxmlformats.org/drawingml/2006/main">
-            <a:r>
-              <a:t>IF LEARNERS ARE STUCK</a:t>
-            </a:r>
-          </a:p>
-          <a:p xmlns:a="http://schemas.openxmlformats.org/drawingml/2006/main">
-            <a:r>
-              <a:t>Draw three numbered boxes starting at zero. Keep the position separate from the value stored in it.</a:t>
-            </a:r>
-          </a:p>
-          <a:p xmlns:a="http://schemas.openxmlformats.org/drawingml/2006/main">
-            <a:r>
-              <a:t/>
-            </a:r>
-          </a:p>
-          <a:p xmlns:a="http://schemas.openxmlformats.org/drawingml/2006/main">
-            <a:r>
-              <a:t>ASSIGNMENT HANDOVER</a:t>
-            </a:r>
-          </a:p>
-          <a:p xmlns:a="http://schemas.openxmlformats.org/drawingml/2006/main">
-            <a:r>
-              <a:t>Open the matching public student guide and show the exact starter filename, required outputs and upload set. Ask one learner to repeat what to submit and where. IUEA Student Registration Number is required freeform text; learners enter their own number. A saved repository is not a submitted form. Read the live deadline and keep the submission confirmation. Do not release an assessment that is still awaiting grading validation.</a:t>
-            </a:r>
-          </a:p>
-          <a:p xmlns:a="http://schemas.openxmlformats.org/drawingml/2006/main">
-            <a:r>
-              <a:t/>
-            </a:r>
-          </a:p>
-          <a:p xmlns:a="http://schemas.openxmlformats.org/drawingml/2006/main">
-            <a:r>
-              <a:t>TEST COLLECTION RULE</a:t>
-            </a:r>
-          </a:p>
-          <a:p xmlns:a="http://schemas.openxmlformats.org/drawingml/2006/main">
-            <a:r>
-              <a:t>This deck is for rehearsal before the timed assessment. Preserve the invigilated timetable and Part A snapshot. During Part B, type answers in the notebook cell headed ## My written evidence without executing code. Collect one complete .ipynb offline; later Google upload only transports the collected work. Do not require internet or AI during the test.</a:t>
-            </a:r>
-          </a:p>
-          <a:p xmlns:a="http://schemas.openxmlformats.org/drawingml/2006/main">
-            <a:r>
-              <a:t/>
-            </a:r>
-          </a:p>
-          <a:p xmlns:a="http://schemas.openxmlformats.org/drawingml/2006/main">
-            <a:r>
-              <a:t>NEXT</a:t>
-            </a:r>
-          </a:p>
-          <a:p xmlns:a="http://schemas.openxmlformats.org/drawingml/2006/main">
-            <a:r>
-              <a:t>Preparation checkpoint. Move on after a learner can explain the current example or required action.</a:t>
-            </a:r>
-          </a:p>
-          <a:p xmlns:a="http://schemas.openxmlformats.org/drawingml/2006/main">
-            <a:r>
-              <a:t/>
-            </a:r>
-          </a:p>
-          <a:p xmlns:a="http://schemas.openxmlformats.org/drawingml/2006/main">
-            <a:r>
-              <a:t>TEACHING MODE</a:t>
-            </a:r>
-          </a:p>
-          <a:p xmlns:a="http://schemas.openxmlformats.org/drawingml/2006/main">
-            <a:r>
-              <a:t>Demonstrate the example directly. Explain each new name, symbol and output. Use the revision example for an individual check after class; no live partner activity is required.</a:t>
-            </a:r>
-          </a:p>
-          <a:p xmlns:a="http://schemas.openxmlformats.org/drawingml/2006/main">
-            <a:r>
-              <a:t/>
-            </a:r>
-          </a:p>
-          <a:p xmlns:a="http://schemas.openxmlformats.org/drawingml/2006/main">
-            <a:r>
-              <a:t>NEXT</a:t>
-            </a:r>
-          </a:p>
-          <a:p xmlns:a="http://schemas.openxmlformats.org/drawingml/2006/main">
-            <a:r>
-              <a:t>Preparation checkpoint.</a:t>
             </a:r>
           </a:p>
         </p:txBody>
@@ -5776,7 +4071,7 @@
           </a:p>
           <a:p xmlns:a="http://schemas.openxmlformats.org/drawingml/2006/main">
             <a:r>
-              <a:t>Build on Test session. Explain why this example is needed before running it.</a:t>
+              <a:t>Previous slide: Test session.</a:t>
             </a:r>
           </a:p>
           <a:p xmlns:a="http://schemas.openxmlformats.org/drawingml/2006/main">
@@ -5811,17 +4106,12 @@
           </a:p>
           <a:p xmlns:a="http://schemas.openxmlformats.org/drawingml/2006/main">
             <a:r>
-              <a:t>LECTURER DETAIL</a:t>
-            </a:r>
-          </a:p>
-          <a:p xmlns:a="http://schemas.openxmlformats.org/drawingml/2006/main">
-            <a:r>
-              <a:t>TEACHING PURPOSE</a:t>
-            </a:r>
-          </a:p>
-          <a:p xmlns:a="http://schemas.openxmlformats.org/drawingml/2006/main">
-            <a:r>
-              <a:t>Preparation checkpoint</a:t>
+              <a:t>LECTURER CUE</a:t>
+            </a:r>
+          </a:p>
+          <a:p xmlns:a="http://schemas.openxmlformats.org/drawingml/2006/main">
+            <a:r>
+              <a:t>Read the specific public requirement shown on this slide. Explain the input, output and evidence before independent work; do not work the assessed answer for the class.</a:t>
             </a:r>
           </a:p>
           <a:p xmlns:a="http://schemas.openxmlformats.org/drawingml/2006/main">
@@ -5831,12 +4121,12 @@
           </a:p>
           <a:p xmlns:a="http://schemas.openxmlformats.org/drawingml/2006/main">
             <a:r>
-              <a:t>CONNECT</a:t>
-            </a:r>
-          </a:p>
-          <a:p xmlns:a="http://schemas.openxmlformats.org/drawingml/2006/main">
-            <a:r>
-              <a:t>Build on the preceding slide: Test session.</a:t>
+              <a:t>TEACHING MODE</a:t>
+            </a:r>
+          </a:p>
+          <a:p xmlns:a="http://schemas.openxmlformats.org/drawingml/2006/main">
+            <a:r>
+              <a:t>Demonstrate first. Read each new symbol aloud, trace the values and compare the shown output. Learners repeat worked examples individually after class.</a:t>
             </a:r>
           </a:p>
           <a:p xmlns:a="http://schemas.openxmlformats.org/drawingml/2006/main">
@@ -5846,12 +4136,12 @@
           </a:p>
           <a:p xmlns:a="http://schemas.openxmlformats.org/drawingml/2006/main">
             <a:r>
-              <a:t>LECTURER CUE</a:t>
-            </a:r>
-          </a:p>
-          <a:p xmlns:a="http://schemas.openxmlformats.org/drawingml/2006/main">
-            <a:r>
-              <a:t>Read the specific public requirement shown on this slide. Explain the input, output and evidence before independent work; do not work the assessed answer for the class.</a:t>
+              <a:t>NEXT</a:t>
+            </a:r>
+          </a:p>
+          <a:p xmlns:a="http://schemas.openxmlformats.org/drawingml/2006/main">
+            <a:r>
+              <a:t>Your evidence.</a:t>
             </a:r>
           </a:p>
           <a:p xmlns:a="http://schemas.openxmlformats.org/drawingml/2006/main">
@@ -5861,57 +4151,12 @@
           </a:p>
           <a:p xmlns:a="http://schemas.openxmlformats.org/drawingml/2006/main">
             <a:r>
-              <a:t>TEST COLLECTION RULE</a:t>
-            </a:r>
-          </a:p>
-          <a:p xmlns:a="http://schemas.openxmlformats.org/drawingml/2006/main">
-            <a:r>
-              <a:t>This deck is for rehearsal before the timed assessment. Preserve the invigilated timetable and Part A snapshot. During Part B, type answers in the notebook cell headed ## My written evidence without executing code. Collect one complete .ipynb offline; later Google upload only transports the collected work. Do not require internet or AI during the test.</a:t>
+              <a:t>REFERENCES</a:t>
             </a:r>
           </a:p>
           <a:p xmlns:a="http://schemas.openxmlformats.org/drawingml/2006/main">
             <a:r>
               <a:t/>
-            </a:r>
-          </a:p>
-          <a:p xmlns:a="http://schemas.openxmlformats.org/drawingml/2006/main">
-            <a:r>
-              <a:t>NEXT</a:t>
-            </a:r>
-          </a:p>
-          <a:p xmlns:a="http://schemas.openxmlformats.org/drawingml/2006/main">
-            <a:r>
-              <a:t>Your evidence. Move on after a learner can explain the current example or required action.</a:t>
-            </a:r>
-          </a:p>
-          <a:p xmlns:a="http://schemas.openxmlformats.org/drawingml/2006/main">
-            <a:r>
-              <a:t/>
-            </a:r>
-          </a:p>
-          <a:p xmlns:a="http://schemas.openxmlformats.org/drawingml/2006/main">
-            <a:r>
-              <a:t>TEACHING MODE</a:t>
-            </a:r>
-          </a:p>
-          <a:p xmlns:a="http://schemas.openxmlformats.org/drawingml/2006/main">
-            <a:r>
-              <a:t>Demonstrate the example directly. Explain each new name, symbol and output. Use the revision example for an individual check after class; no live partner activity is required.</a:t>
-            </a:r>
-          </a:p>
-          <a:p xmlns:a="http://schemas.openxmlformats.org/drawingml/2006/main">
-            <a:r>
-              <a:t/>
-            </a:r>
-          </a:p>
-          <a:p xmlns:a="http://schemas.openxmlformats.org/drawingml/2006/main">
-            <a:r>
-              <a:t>NEXT</a:t>
-            </a:r>
-          </a:p>
-          <a:p xmlns:a="http://schemas.openxmlformats.org/drawingml/2006/main">
-            <a:r>
-              <a:t>Your evidence.</a:t>
             </a:r>
           </a:p>
         </p:txBody>
@@ -5958,7 +4203,7 @@
           <p:cNvPr id="4" name="Accent rule">
             <a:extLst xmlns:a="http://schemas.openxmlformats.org/drawingml/2006/main">
               <a:ext uri="{FF2B5EF4-FFF2-40B4-BE49-F238E27FC236}">
-                <a16:creationId xmlns:a16="http://schemas.microsoft.com/office/drawing/2014/main" id="{F19ABCB3-8DFA-40E6-B127-1BBEAEC81677}"/>
+                <a16:creationId xmlns:a16="http://schemas.microsoft.com/office/drawing/2014/main" id="{6B46BF6D-A376-40C4-89CE-60B999FC17D2}"/>
               </a:ext>
             </a:extLst>
           </p:cNvPr>
@@ -5989,7 +4234,7 @@
           <p:cNvPr id="2" name="Title">
             <a:extLst xmlns:a="http://schemas.openxmlformats.org/drawingml/2006/main">
               <a:ext uri="{FF2B5EF4-FFF2-40B4-BE49-F238E27FC236}">
-                <a16:creationId xmlns:a16="http://schemas.microsoft.com/office/drawing/2014/main" id="{3E8C3E57-06F1-4629-861D-D14E37236AB7}"/>
+                <a16:creationId xmlns:a16="http://schemas.microsoft.com/office/drawing/2014/main" id="{6FE3BF09-9289-4B27-92FA-F2EE1036884D}"/>
               </a:ext>
             </a:extLst>
           </p:cNvPr>
@@ -6136,7 +4381,7 @@
           <p:cNvPr id="3" name="Subtitle">
             <a:extLst xmlns:a="http://schemas.openxmlformats.org/drawingml/2006/main">
               <a:ext uri="{FF2B5EF4-FFF2-40B4-BE49-F238E27FC236}">
-                <a16:creationId xmlns:a16="http://schemas.microsoft.com/office/drawing/2014/main" id="{9EDE8342-A254-4AB2-8EA5-15CF9759FB0A}"/>
+                <a16:creationId xmlns:a16="http://schemas.microsoft.com/office/drawing/2014/main" id="{D024BBCE-5A24-4DBD-AF8B-54ACA0D29017}"/>
               </a:ext>
             </a:extLst>
           </p:cNvPr>
@@ -6300,7 +4545,7 @@
           <p:cNvPr id="3" name="Accent rule">
             <a:extLst xmlns:a="http://schemas.openxmlformats.org/drawingml/2006/main">
               <a:ext uri="{FF2B5EF4-FFF2-40B4-BE49-F238E27FC236}">
-                <a16:creationId xmlns:a16="http://schemas.microsoft.com/office/drawing/2014/main" id="{78BA1318-4D9C-4257-B429-AE219D6EAFF6}"/>
+                <a16:creationId xmlns:a16="http://schemas.microsoft.com/office/drawing/2014/main" id="{2C40EB91-B360-44DA-BFB5-7AC928051A4B}"/>
               </a:ext>
             </a:extLst>
           </p:cNvPr>
@@ -6331,7 +4576,7 @@
           <p:cNvPr id="2" name="Section title">
             <a:extLst xmlns:a="http://schemas.openxmlformats.org/drawingml/2006/main">
               <a:ext uri="{FF2B5EF4-FFF2-40B4-BE49-F238E27FC236}">
-                <a16:creationId xmlns:a16="http://schemas.microsoft.com/office/drawing/2014/main" id="{91268993-45F2-4FEC-81C9-13C428359840}"/>
+                <a16:creationId xmlns:a16="http://schemas.microsoft.com/office/drawing/2014/main" id="{FA8D27F1-8A9F-49ED-8BB7-78F802DD8BF2}"/>
               </a:ext>
             </a:extLst>
           </p:cNvPr>
@@ -6495,7 +4740,7 @@
           <p:cNvPr id="4" name="Accent rule">
             <a:extLst xmlns:a="http://schemas.openxmlformats.org/drawingml/2006/main">
               <a:ext uri="{FF2B5EF4-FFF2-40B4-BE49-F238E27FC236}">
-                <a16:creationId xmlns:a16="http://schemas.microsoft.com/office/drawing/2014/main" id="{618FD12C-B6FF-446A-A19B-97C065FA5D2C}"/>
+                <a16:creationId xmlns:a16="http://schemas.microsoft.com/office/drawing/2014/main" id="{C2A5B35A-9C50-437B-8B50-CD00A1CC8F55}"/>
               </a:ext>
             </a:extLst>
           </p:cNvPr>
@@ -6526,7 +4771,7 @@
           <p:cNvPr id="2" name="Title">
             <a:extLst xmlns:a="http://schemas.openxmlformats.org/drawingml/2006/main">
               <a:ext uri="{FF2B5EF4-FFF2-40B4-BE49-F238E27FC236}">
-                <a16:creationId xmlns:a16="http://schemas.microsoft.com/office/drawing/2014/main" id="{4FDD08FF-8E02-4C88-B6D1-2089097685D9}"/>
+                <a16:creationId xmlns:a16="http://schemas.microsoft.com/office/drawing/2014/main" id="{AF873FF2-B6AD-4122-A1F1-7C48EB9E4C83}"/>
               </a:ext>
             </a:extLst>
           </p:cNvPr>
@@ -6673,7 +4918,7 @@
           <p:cNvPr id="3" name="Body">
             <a:extLst xmlns:a="http://schemas.openxmlformats.org/drawingml/2006/main">
               <a:ext uri="{FF2B5EF4-FFF2-40B4-BE49-F238E27FC236}">
-                <a16:creationId xmlns:a16="http://schemas.microsoft.com/office/drawing/2014/main" id="{E80EE6B3-9125-4197-982E-369FE8ABAA4C}"/>
+                <a16:creationId xmlns:a16="http://schemas.microsoft.com/office/drawing/2014/main" id="{F0A48B61-B821-40A1-99CD-55E99EB03FF9}"/>
               </a:ext>
             </a:extLst>
           </p:cNvPr>
@@ -6837,7 +5082,7 @@
           <p:cNvPr id="5" name="Accent rule">
             <a:extLst xmlns:a="http://schemas.openxmlformats.org/drawingml/2006/main">
               <a:ext uri="{FF2B5EF4-FFF2-40B4-BE49-F238E27FC236}">
-                <a16:creationId xmlns:a16="http://schemas.microsoft.com/office/drawing/2014/main" id="{0BD02974-EDB2-450C-9D7F-60AE7C53A774}"/>
+                <a16:creationId xmlns:a16="http://schemas.microsoft.com/office/drawing/2014/main" id="{F7313491-1EB5-4C93-8A74-B28816FDD07B}"/>
               </a:ext>
             </a:extLst>
           </p:cNvPr>
@@ -6868,7 +5113,7 @@
           <p:cNvPr id="2" name="Title">
             <a:extLst xmlns:a="http://schemas.openxmlformats.org/drawingml/2006/main">
               <a:ext uri="{FF2B5EF4-FFF2-40B4-BE49-F238E27FC236}">
-                <a16:creationId xmlns:a16="http://schemas.microsoft.com/office/drawing/2014/main" id="{75774AC4-0A7B-47DA-86E8-DD687603A420}"/>
+                <a16:creationId xmlns:a16="http://schemas.microsoft.com/office/drawing/2014/main" id="{B36D9A8D-EF8A-4C5F-A8EF-A3067755A6C9}"/>
               </a:ext>
             </a:extLst>
           </p:cNvPr>
@@ -7015,7 +5260,7 @@
           <p:cNvPr id="3" name="Left column">
             <a:extLst xmlns:a="http://schemas.openxmlformats.org/drawingml/2006/main">
               <a:ext uri="{FF2B5EF4-FFF2-40B4-BE49-F238E27FC236}">
-                <a16:creationId xmlns:a16="http://schemas.microsoft.com/office/drawing/2014/main" id="{94437AA5-4596-48DC-929B-896F50901F75}"/>
+                <a16:creationId xmlns:a16="http://schemas.microsoft.com/office/drawing/2014/main" id="{0C3B8AAA-2211-4013-868F-C9AF614EEC17}"/>
               </a:ext>
             </a:extLst>
           </p:cNvPr>
@@ -7162,7 +5407,7 @@
           <p:cNvPr id="4" name="Right column">
             <a:extLst xmlns:a="http://schemas.openxmlformats.org/drawingml/2006/main">
               <a:ext uri="{FF2B5EF4-FFF2-40B4-BE49-F238E27FC236}">
-                <a16:creationId xmlns:a16="http://schemas.microsoft.com/office/drawing/2014/main" id="{E61D3613-0E2C-4C50-BD55-56379238076F}"/>
+                <a16:creationId xmlns:a16="http://schemas.microsoft.com/office/drawing/2014/main" id="{823867C8-E9AD-42F2-9574-4E291DCA93C5}"/>
               </a:ext>
             </a:extLst>
           </p:cNvPr>
@@ -7326,7 +5571,7 @@
           <p:cNvPr id="4" name="Accent rule">
             <a:extLst xmlns:a="http://schemas.openxmlformats.org/drawingml/2006/main">
               <a:ext uri="{FF2B5EF4-FFF2-40B4-BE49-F238E27FC236}">
-                <a16:creationId xmlns:a16="http://schemas.microsoft.com/office/drawing/2014/main" id="{5AEF2D4D-323B-4096-B427-EEB4A2E2665B}"/>
+                <a16:creationId xmlns:a16="http://schemas.microsoft.com/office/drawing/2014/main" id="{D14C5E3C-0615-456B-81A9-504DB21FA160}"/>
               </a:ext>
             </a:extLst>
           </p:cNvPr>
@@ -7357,7 +5602,7 @@
           <p:cNvPr id="2" name="Title">
             <a:extLst xmlns:a="http://schemas.openxmlformats.org/drawingml/2006/main">
               <a:ext uri="{FF2B5EF4-FFF2-40B4-BE49-F238E27FC236}">
-                <a16:creationId xmlns:a16="http://schemas.microsoft.com/office/drawing/2014/main" id="{A13F2529-1854-45CE-925E-EBD54B8666F1}"/>
+                <a16:creationId xmlns:a16="http://schemas.microsoft.com/office/drawing/2014/main" id="{8DCD16F6-3331-4F64-87B6-09B84B695730}"/>
               </a:ext>
             </a:extLst>
           </p:cNvPr>
@@ -7504,7 +5749,7 @@
           <p:cNvPr id="3" name="Left column">
             <a:extLst xmlns:a="http://schemas.openxmlformats.org/drawingml/2006/main">
               <a:ext uri="{FF2B5EF4-FFF2-40B4-BE49-F238E27FC236}">
-                <a16:creationId xmlns:a16="http://schemas.microsoft.com/office/drawing/2014/main" id="{32A37CFB-AA1F-43B3-815C-3B69CF9DA4CA}"/>
+                <a16:creationId xmlns:a16="http://schemas.microsoft.com/office/drawing/2014/main" id="{F08A9023-729C-4F28-B47D-196DC5C2DC76}"/>
               </a:ext>
             </a:extLst>
           </p:cNvPr>
@@ -7689,12 +5934,12 @@
   </p:cSld>
   <p:clrMap bg1="lt1" tx1="dk1" bg2="lt2" tx2="dk2" accent1="accent1" accent2="accent2" accent3="accent3" accent4="accent4" accent5="accent5" accent6="accent6" hlink="hlink" folHlink="folHlink"/>
   <p:sldLayoutIdLst>
-    <p:sldLayoutId xmlns:r="http://schemas.openxmlformats.org/officeDocument/2006/relationships" id="2147483649" r:id="R50540c2108c6422b"/>
-    <p:sldLayoutId xmlns:r="http://schemas.openxmlformats.org/officeDocument/2006/relationships" id="2147483650" r:id="R06fc03c2ed3041aa"/>
-    <p:sldLayoutId xmlns:r="http://schemas.openxmlformats.org/officeDocument/2006/relationships" id="2147483651" r:id="Rd8a27ab3ae454d20"/>
-    <p:sldLayoutId xmlns:r="http://schemas.openxmlformats.org/officeDocument/2006/relationships" id="2147483652" r:id="Rabb5ccbfab3341b5"/>
-    <p:sldLayoutId xmlns:r="http://schemas.openxmlformats.org/officeDocument/2006/relationships" id="2147483653" r:id="R2ecf978f746d41e9"/>
-    <p:sldLayoutId xmlns:r="http://schemas.openxmlformats.org/officeDocument/2006/relationships" id="2147483654" r:id="R69a62d4d7ae243c3"/>
+    <p:sldLayoutId xmlns:r="http://schemas.openxmlformats.org/officeDocument/2006/relationships" id="2147483649" r:id="R91a0f525b0db456e"/>
+    <p:sldLayoutId xmlns:r="http://schemas.openxmlformats.org/officeDocument/2006/relationships" id="2147483650" r:id="Ra3bc7a53bd0b4037"/>
+    <p:sldLayoutId xmlns:r="http://schemas.openxmlformats.org/officeDocument/2006/relationships" id="2147483651" r:id="Rf397a24ea3b042a2"/>
+    <p:sldLayoutId xmlns:r="http://schemas.openxmlformats.org/officeDocument/2006/relationships" id="2147483652" r:id="Re23288a7265444e2"/>
+    <p:sldLayoutId xmlns:r="http://schemas.openxmlformats.org/officeDocument/2006/relationships" id="2147483653" r:id="Ra0817ad42ae7454e"/>
+    <p:sldLayoutId xmlns:r="http://schemas.openxmlformats.org/officeDocument/2006/relationships" id="2147483654" r:id="R9b71b2b153b843ae"/>
   </p:sldLayoutIdLst>
   <p:txStyles>
     <p:titleStyle>
@@ -8249,7 +6494,7 @@
           <p:nvPr/>
         </p:nvPicPr>
         <p:blipFill>
-          <a:blip xmlns:r="http://schemas.openxmlformats.org/officeDocument/2006/relationships" xmlns:a="http://schemas.openxmlformats.org/drawingml/2006/main" r:embed="R8379c6dfc6f44481"/>
+          <a:blip xmlns:r="http://schemas.openxmlformats.org/officeDocument/2006/relationships" xmlns:a="http://schemas.openxmlformats.org/drawingml/2006/main" r:embed="Rd0c08d28b0ed4187"/>
           <a:stretch xmlns:a="http://schemas.openxmlformats.org/drawingml/2006/main"/>
         </p:blipFill>
         <p:spPr>
@@ -8267,7 +6512,7 @@
           <p:cNvPr id="2" name="">
             <a:extLst xmlns:a="http://schemas.openxmlformats.org/drawingml/2006/main">
               <a:ext uri="{FF2B5EF4-FFF2-40B4-BE49-F238E27FC236}">
-                <a16:creationId xmlns:a16="http://schemas.microsoft.com/office/drawing/2014/main" id="{A00EF6F8-46DC-4615-8025-117741DF4150}"/>
+                <a16:creationId xmlns:a16="http://schemas.microsoft.com/office/drawing/2014/main" id="{42D826E4-9DE3-48A6-ACEE-23FCAEF5C50A}"/>
               </a:ext>
             </a:extLst>
           </p:cNvPr>
@@ -8297,7 +6542,7 @@
           <p:cNvPr id="3" name="">
             <a:extLst xmlns:a="http://schemas.openxmlformats.org/drawingml/2006/main">
               <a:ext uri="{FF2B5EF4-FFF2-40B4-BE49-F238E27FC236}">
-                <a16:creationId xmlns:a16="http://schemas.microsoft.com/office/drawing/2014/main" id="{E12E7180-0BDF-4975-B871-0725A6CC33FE}"/>
+                <a16:creationId xmlns:a16="http://schemas.microsoft.com/office/drawing/2014/main" id="{7A6AD04F-4728-44E3-9111-2C078324B4D7}"/>
               </a:ext>
             </a:extLst>
           </p:cNvPr>
@@ -8354,7 +6599,7 @@
           <p:cNvPr id="4" name="">
             <a:extLst xmlns:a="http://schemas.openxmlformats.org/drawingml/2006/main">
               <a:ext uri="{FF2B5EF4-FFF2-40B4-BE49-F238E27FC236}">
-                <a16:creationId xmlns:a16="http://schemas.microsoft.com/office/drawing/2014/main" id="{9378AC75-AA94-42E7-B5DB-3FA6152096F9}"/>
+                <a16:creationId xmlns:a16="http://schemas.microsoft.com/office/drawing/2014/main" id="{C0A9397F-7B7B-44FE-831E-6DA5A2667C07}"/>
               </a:ext>
             </a:extLst>
           </p:cNvPr>
@@ -8411,7 +6656,7 @@
           <p:cNvPr id="5" name="">
             <a:extLst xmlns:a="http://schemas.openxmlformats.org/drawingml/2006/main">
               <a:ext uri="{FF2B5EF4-FFF2-40B4-BE49-F238E27FC236}">
-                <a16:creationId xmlns:a16="http://schemas.microsoft.com/office/drawing/2014/main" id="{99D2B634-EF5B-43B4-8527-3C139375D7A4}"/>
+                <a16:creationId xmlns:a16="http://schemas.microsoft.com/office/drawing/2014/main" id="{D0E2EAC7-FBFF-4E7F-B769-EF584D0BBD26}"/>
               </a:ext>
             </a:extLst>
           </p:cNvPr>
@@ -8468,7 +6713,7 @@
           <p:cNvPr id="6" name="">
             <a:extLst xmlns:a="http://schemas.openxmlformats.org/drawingml/2006/main">
               <a:ext uri="{FF2B5EF4-FFF2-40B4-BE49-F238E27FC236}">
-                <a16:creationId xmlns:a16="http://schemas.microsoft.com/office/drawing/2014/main" id="{8D79FF2A-A8B7-4F9D-82F7-448F4E10DC10}"/>
+                <a16:creationId xmlns:a16="http://schemas.microsoft.com/office/drawing/2014/main" id="{F3CED856-6DD7-4E1B-A0F0-A77C393C908D}"/>
               </a:ext>
             </a:extLst>
           </p:cNvPr>
@@ -8546,7 +6791,7 @@
     </p:spTree>
     <p:extLst>
       <p:ext uri="{BB962C8B-B14F-4D97-AF65-F5344CB8AC3E}">
-        <p14:creationId xmlns:p14="http://schemas.microsoft.com/office/powerpoint/2010/main" val="1413251771"/>
+        <p14:creationId xmlns:p14="http://schemas.microsoft.com/office/powerpoint/2010/main" val="2113520783"/>
       </p:ext>
     </p:extLst>
   </p:cSld>
@@ -8577,7 +6822,7 @@
           <p:cNvPr id="11" name="">
             <a:extLst xmlns:a="http://schemas.openxmlformats.org/drawingml/2006/main">
               <a:ext uri="{FF2B5EF4-FFF2-40B4-BE49-F238E27FC236}">
-                <a16:creationId xmlns:a16="http://schemas.microsoft.com/office/drawing/2014/main" id="{C56151C9-E8D1-48BB-A441-34B8769E6735}"/>
+                <a16:creationId xmlns:a16="http://schemas.microsoft.com/office/drawing/2014/main" id="{1819A094-8541-4AC5-BD8D-99618964A0B3}"/>
               </a:ext>
             </a:extLst>
           </p:cNvPr>
@@ -8607,7 +6852,7 @@
           <p:cNvPr id="2" name="">
             <a:extLst xmlns:a="http://schemas.openxmlformats.org/drawingml/2006/main">
               <a:ext uri="{FF2B5EF4-FFF2-40B4-BE49-F238E27FC236}">
-                <a16:creationId xmlns:a16="http://schemas.microsoft.com/office/drawing/2014/main" id="{E9F344FE-2DC0-4689-BFF6-B9C914C678D0}"/>
+                <a16:creationId xmlns:a16="http://schemas.microsoft.com/office/drawing/2014/main" id="{45BEF488-565A-4772-9669-8840C457A8B2}"/>
               </a:ext>
             </a:extLst>
           </p:cNvPr>
@@ -8664,7 +6909,7 @@
           <p:cNvPr id="3" name="">
             <a:extLst xmlns:a="http://schemas.openxmlformats.org/drawingml/2006/main">
               <a:ext uri="{FF2B5EF4-FFF2-40B4-BE49-F238E27FC236}">
-                <a16:creationId xmlns:a16="http://schemas.microsoft.com/office/drawing/2014/main" id="{0DBA3C7A-547F-4C8D-9FBF-FCE402104505}"/>
+                <a16:creationId xmlns:a16="http://schemas.microsoft.com/office/drawing/2014/main" id="{688982A4-FAF0-4AC1-8996-8FEF76306778}"/>
               </a:ext>
             </a:extLst>
           </p:cNvPr>
@@ -8721,7 +6966,7 @@
           <p:cNvPr id="4" name="">
             <a:extLst xmlns:a="http://schemas.openxmlformats.org/drawingml/2006/main">
               <a:ext uri="{FF2B5EF4-FFF2-40B4-BE49-F238E27FC236}">
-                <a16:creationId xmlns:a16="http://schemas.microsoft.com/office/drawing/2014/main" id="{0AE0FA90-D1B4-40C9-94D0-7D7543369A12}"/>
+                <a16:creationId xmlns:a16="http://schemas.microsoft.com/office/drawing/2014/main" id="{7202E80B-4488-4DF9-880A-0FB3A9189923}"/>
               </a:ext>
             </a:extLst>
           </p:cNvPr>
@@ -8778,7 +7023,7 @@
           <p:cNvPr id="5" name="">
             <a:extLst xmlns:a="http://schemas.openxmlformats.org/drawingml/2006/main">
               <a:ext uri="{FF2B5EF4-FFF2-40B4-BE49-F238E27FC236}">
-                <a16:creationId xmlns:a16="http://schemas.microsoft.com/office/drawing/2014/main" id="{D4F8384B-601D-4DD8-AF49-1D2F23D9E936}"/>
+                <a16:creationId xmlns:a16="http://schemas.microsoft.com/office/drawing/2014/main" id="{13331728-15F1-4F91-8D78-C93C9B01BB0B}"/>
               </a:ext>
             </a:extLst>
           </p:cNvPr>
@@ -8835,7 +7080,7 @@
           <p:cNvPr id="6" name="">
             <a:extLst xmlns:a="http://schemas.openxmlformats.org/drawingml/2006/main">
               <a:ext uri="{FF2B5EF4-FFF2-40B4-BE49-F238E27FC236}">
-                <a16:creationId xmlns:a16="http://schemas.microsoft.com/office/drawing/2014/main" id="{34FE5986-499D-4FFD-A0A7-0B20A6AA2C50}"/>
+                <a16:creationId xmlns:a16="http://schemas.microsoft.com/office/drawing/2014/main" id="{B14EBB99-DA7A-4D98-B19B-15B291FC3F00}"/>
               </a:ext>
             </a:extLst>
           </p:cNvPr>
@@ -8892,7 +7137,7 @@
           <p:cNvPr id="7" name="">
             <a:extLst xmlns:a="http://schemas.openxmlformats.org/drawingml/2006/main">
               <a:ext uri="{FF2B5EF4-FFF2-40B4-BE49-F238E27FC236}">
-                <a16:creationId xmlns:a16="http://schemas.microsoft.com/office/drawing/2014/main" id="{2526EE7D-9CF9-4A71-A831-CC9ABEC76AA8}"/>
+                <a16:creationId xmlns:a16="http://schemas.microsoft.com/office/drawing/2014/main" id="{57716912-62CE-4BD3-97C3-D6401441B86C}"/>
               </a:ext>
             </a:extLst>
           </p:cNvPr>
@@ -8949,7 +7194,7 @@
           <p:cNvPr id="8" name="">
             <a:extLst xmlns:a="http://schemas.openxmlformats.org/drawingml/2006/main">
               <a:ext uri="{FF2B5EF4-FFF2-40B4-BE49-F238E27FC236}">
-                <a16:creationId xmlns:a16="http://schemas.microsoft.com/office/drawing/2014/main" id="{51BC5D1A-F6A7-4B8D-824A-6BB77751D5E2}"/>
+                <a16:creationId xmlns:a16="http://schemas.microsoft.com/office/drawing/2014/main" id="{3FBAFB94-F93C-43FB-B127-5783B9729F3F}"/>
               </a:ext>
             </a:extLst>
           </p:cNvPr>
@@ -9006,7 +7251,7 @@
           <p:cNvPr id="9" name="">
             <a:extLst xmlns:a="http://schemas.openxmlformats.org/drawingml/2006/main">
               <a:ext uri="{FF2B5EF4-FFF2-40B4-BE49-F238E27FC236}">
-                <a16:creationId xmlns:a16="http://schemas.microsoft.com/office/drawing/2014/main" id="{06339518-228A-4CC4-AABA-9AABEEAD86AC}"/>
+                <a16:creationId xmlns:a16="http://schemas.microsoft.com/office/drawing/2014/main" id="{C81E5E88-ABCD-4D34-BE36-0F5FF5BD195F}"/>
               </a:ext>
             </a:extLst>
           </p:cNvPr>
@@ -9063,7 +7308,7 @@
           <p:cNvPr id="10" name="">
             <a:extLst xmlns:a="http://schemas.openxmlformats.org/drawingml/2006/main">
               <a:ext uri="{FF2B5EF4-FFF2-40B4-BE49-F238E27FC236}">
-                <a16:creationId xmlns:a16="http://schemas.microsoft.com/office/drawing/2014/main" id="{888B848F-B7C7-4EB6-9ED0-503061FAE83B}"/>
+                <a16:creationId xmlns:a16="http://schemas.microsoft.com/office/drawing/2014/main" id="{04A2E66F-CF70-4F2C-A005-A6696E318B8F}"/>
               </a:ext>
             </a:extLst>
           </p:cNvPr>
@@ -9118,7 +7363,7 @@
     </p:spTree>
     <p:extLst>
       <p:ext uri="{BB962C8B-B14F-4D97-AF65-F5344CB8AC3E}">
-        <p14:creationId xmlns:p14="http://schemas.microsoft.com/office/powerpoint/2010/main" val="1684165811"/>
+        <p14:creationId xmlns:p14="http://schemas.microsoft.com/office/powerpoint/2010/main" val="1639484957"/>
       </p:ext>
     </p:extLst>
   </p:cSld>
@@ -9149,7 +7394,7 @@
           <p:cNvPr id="13" name="">
             <a:extLst xmlns:a="http://schemas.openxmlformats.org/drawingml/2006/main">
               <a:ext uri="{FF2B5EF4-FFF2-40B4-BE49-F238E27FC236}">
-                <a16:creationId xmlns:a16="http://schemas.microsoft.com/office/drawing/2014/main" id="{CFC57088-D864-45A5-8FF6-C3372A5EEEE2}"/>
+                <a16:creationId xmlns:a16="http://schemas.microsoft.com/office/drawing/2014/main" id="{C5A4F67D-20C1-4DC8-9E63-76CC9DC9F7CA}"/>
               </a:ext>
             </a:extLst>
           </p:cNvPr>
@@ -9179,7 +7424,7 @@
           <p:cNvPr id="2" name="">
             <a:extLst xmlns:a="http://schemas.openxmlformats.org/drawingml/2006/main">
               <a:ext uri="{FF2B5EF4-FFF2-40B4-BE49-F238E27FC236}">
-                <a16:creationId xmlns:a16="http://schemas.microsoft.com/office/drawing/2014/main" id="{1CBA893C-E9A6-4C26-BDF3-C3B81CEFAEFB}"/>
+                <a16:creationId xmlns:a16="http://schemas.microsoft.com/office/drawing/2014/main" id="{523898D3-599D-48D6-99B8-98863A49CF43}"/>
               </a:ext>
             </a:extLst>
           </p:cNvPr>
@@ -9236,7 +7481,7 @@
           <p:cNvPr id="3" name="">
             <a:extLst xmlns:a="http://schemas.openxmlformats.org/drawingml/2006/main">
               <a:ext uri="{FF2B5EF4-FFF2-40B4-BE49-F238E27FC236}">
-                <a16:creationId xmlns:a16="http://schemas.microsoft.com/office/drawing/2014/main" id="{B552CBA9-9C0F-4853-9F0F-16AC5547FC24}"/>
+                <a16:creationId xmlns:a16="http://schemas.microsoft.com/office/drawing/2014/main" id="{2B1C1FA0-3F64-434A-BF14-DE77DF0A4B9D}"/>
               </a:ext>
             </a:extLst>
           </p:cNvPr>
@@ -9293,7 +7538,7 @@
           <p:cNvPr id="4" name="">
             <a:extLst xmlns:a="http://schemas.openxmlformats.org/drawingml/2006/main">
               <a:ext uri="{FF2B5EF4-FFF2-40B4-BE49-F238E27FC236}">
-                <a16:creationId xmlns:a16="http://schemas.microsoft.com/office/drawing/2014/main" id="{0AB376F6-35E1-40F2-B5C8-919C93E750FC}"/>
+                <a16:creationId xmlns:a16="http://schemas.microsoft.com/office/drawing/2014/main" id="{3F28A44E-C02A-45F0-A8AF-20F822B99905}"/>
               </a:ext>
             </a:extLst>
           </p:cNvPr>
@@ -9350,7 +7595,7 @@
           <p:cNvPr id="5" name="">
             <a:extLst xmlns:a="http://schemas.openxmlformats.org/drawingml/2006/main">
               <a:ext uri="{FF2B5EF4-FFF2-40B4-BE49-F238E27FC236}">
-                <a16:creationId xmlns:a16="http://schemas.microsoft.com/office/drawing/2014/main" id="{DE096360-5769-4855-BD5F-568694A696E8}"/>
+                <a16:creationId xmlns:a16="http://schemas.microsoft.com/office/drawing/2014/main" id="{1CB19FD0-601C-427D-9C51-3D1AA845F945}"/>
               </a:ext>
             </a:extLst>
           </p:cNvPr>
@@ -9407,7 +7652,7 @@
           <p:cNvPr id="6" name="">
             <a:extLst xmlns:a="http://schemas.openxmlformats.org/drawingml/2006/main">
               <a:ext uri="{FF2B5EF4-FFF2-40B4-BE49-F238E27FC236}">
-                <a16:creationId xmlns:a16="http://schemas.microsoft.com/office/drawing/2014/main" id="{75D23A68-6304-48AC-BA67-1E1860700E59}"/>
+                <a16:creationId xmlns:a16="http://schemas.microsoft.com/office/drawing/2014/main" id="{BDE325C2-2EF5-461C-BFCE-E309AB8FA381}"/>
               </a:ext>
             </a:extLst>
           </p:cNvPr>
@@ -9464,7 +7709,7 @@
           <p:cNvPr id="7" name="">
             <a:extLst xmlns:a="http://schemas.openxmlformats.org/drawingml/2006/main">
               <a:ext uri="{FF2B5EF4-FFF2-40B4-BE49-F238E27FC236}">
-                <a16:creationId xmlns:a16="http://schemas.microsoft.com/office/drawing/2014/main" id="{5885E32B-141F-44F7-A1D3-337741F0E61A}"/>
+                <a16:creationId xmlns:a16="http://schemas.microsoft.com/office/drawing/2014/main" id="{2BA00F8E-F61C-4827-A5FA-EEF6E921449B}"/>
               </a:ext>
             </a:extLst>
           </p:cNvPr>
@@ -9521,7 +7766,7 @@
           <p:cNvPr id="8" name="">
             <a:extLst xmlns:a="http://schemas.openxmlformats.org/drawingml/2006/main">
               <a:ext uri="{FF2B5EF4-FFF2-40B4-BE49-F238E27FC236}">
-                <a16:creationId xmlns:a16="http://schemas.microsoft.com/office/drawing/2014/main" id="{BA53244D-C01F-40BC-A723-BE7BC4AC6CEB}"/>
+                <a16:creationId xmlns:a16="http://schemas.microsoft.com/office/drawing/2014/main" id="{A320ED4B-2124-41DD-84B4-9E6F06F3C6D3}"/>
               </a:ext>
             </a:extLst>
           </p:cNvPr>
@@ -9578,7 +7823,7 @@
           <p:cNvPr id="9" name="">
             <a:extLst xmlns:a="http://schemas.openxmlformats.org/drawingml/2006/main">
               <a:ext uri="{FF2B5EF4-FFF2-40B4-BE49-F238E27FC236}">
-                <a16:creationId xmlns:a16="http://schemas.microsoft.com/office/drawing/2014/main" id="{716EAE65-FC84-4DF1-89CA-03094C60059D}"/>
+                <a16:creationId xmlns:a16="http://schemas.microsoft.com/office/drawing/2014/main" id="{E403A692-8463-44B1-8794-0B4F6FBC8FEB}"/>
               </a:ext>
             </a:extLst>
           </p:cNvPr>
@@ -9635,7 +7880,7 @@
           <p:cNvPr id="10" name="">
             <a:extLst xmlns:a="http://schemas.openxmlformats.org/drawingml/2006/main">
               <a:ext uri="{FF2B5EF4-FFF2-40B4-BE49-F238E27FC236}">
-                <a16:creationId xmlns:a16="http://schemas.microsoft.com/office/drawing/2014/main" id="{AA00458B-A1F2-4073-BBFA-820FB85C803B}"/>
+                <a16:creationId xmlns:a16="http://schemas.microsoft.com/office/drawing/2014/main" id="{A9F60B5E-BDD4-47E9-A212-F5178121F41A}"/>
               </a:ext>
             </a:extLst>
           </p:cNvPr>
@@ -9692,7 +7937,7 @@
           <p:cNvPr id="11" name="">
             <a:extLst xmlns:a="http://schemas.openxmlformats.org/drawingml/2006/main">
               <a:ext uri="{FF2B5EF4-FFF2-40B4-BE49-F238E27FC236}">
-                <a16:creationId xmlns:a16="http://schemas.microsoft.com/office/drawing/2014/main" id="{4594E6CD-5F49-42D9-8E82-78EFDDC28531}"/>
+                <a16:creationId xmlns:a16="http://schemas.microsoft.com/office/drawing/2014/main" id="{DE8B0C09-1A02-43FA-B691-46DFB5E7B7E8}"/>
               </a:ext>
             </a:extLst>
           </p:cNvPr>
@@ -9749,7 +7994,7 @@
           <p:cNvPr id="12" name="">
             <a:extLst xmlns:a="http://schemas.openxmlformats.org/drawingml/2006/main">
               <a:ext uri="{FF2B5EF4-FFF2-40B4-BE49-F238E27FC236}">
-                <a16:creationId xmlns:a16="http://schemas.microsoft.com/office/drawing/2014/main" id="{CB4CD0AE-659D-4499-BC41-5E787AC395C0}"/>
+                <a16:creationId xmlns:a16="http://schemas.microsoft.com/office/drawing/2014/main" id="{D08D4584-3BE3-495D-8A11-780BD5867399}"/>
               </a:ext>
             </a:extLst>
           </p:cNvPr>
@@ -9804,7 +8049,7 @@
     </p:spTree>
     <p:extLst>
       <p:ext uri="{BB962C8B-B14F-4D97-AF65-F5344CB8AC3E}">
-        <p14:creationId xmlns:p14="http://schemas.microsoft.com/office/powerpoint/2010/main" val="6831787"/>
+        <p14:creationId xmlns:p14="http://schemas.microsoft.com/office/powerpoint/2010/main" val="1727086150"/>
       </p:ext>
     </p:extLst>
   </p:cSld>
@@ -9835,7 +8080,7 @@
           <p:cNvPr id="13" name="">
             <a:extLst xmlns:a="http://schemas.openxmlformats.org/drawingml/2006/main">
               <a:ext uri="{FF2B5EF4-FFF2-40B4-BE49-F238E27FC236}">
-                <a16:creationId xmlns:a16="http://schemas.microsoft.com/office/drawing/2014/main" id="{76708D0E-DF29-41C2-9292-06B6AAF2B3E2}"/>
+                <a16:creationId xmlns:a16="http://schemas.microsoft.com/office/drawing/2014/main" id="{7BBB9EB8-80EB-4624-B4BD-48AFCEF48819}"/>
               </a:ext>
             </a:extLst>
           </p:cNvPr>
@@ -9865,7 +8110,7 @@
           <p:cNvPr id="2" name="">
             <a:extLst xmlns:a="http://schemas.openxmlformats.org/drawingml/2006/main">
               <a:ext uri="{FF2B5EF4-FFF2-40B4-BE49-F238E27FC236}">
-                <a16:creationId xmlns:a16="http://schemas.microsoft.com/office/drawing/2014/main" id="{0A7868DF-F7CC-485D-827B-8F7B35AD3EA3}"/>
+                <a16:creationId xmlns:a16="http://schemas.microsoft.com/office/drawing/2014/main" id="{AB118115-147E-4D9B-BD23-D51E3F76A85B}"/>
               </a:ext>
             </a:extLst>
           </p:cNvPr>
@@ -9922,7 +8167,7 @@
           <p:cNvPr id="3" name="">
             <a:extLst xmlns:a="http://schemas.openxmlformats.org/drawingml/2006/main">
               <a:ext uri="{FF2B5EF4-FFF2-40B4-BE49-F238E27FC236}">
-                <a16:creationId xmlns:a16="http://schemas.microsoft.com/office/drawing/2014/main" id="{ABB00287-BDF4-40FA-B1F8-AD2A2D9A293C}"/>
+                <a16:creationId xmlns:a16="http://schemas.microsoft.com/office/drawing/2014/main" id="{D57F6349-F992-440A-ABF5-5A6EA1C88141}"/>
               </a:ext>
             </a:extLst>
           </p:cNvPr>
@@ -9979,7 +8224,7 @@
           <p:cNvPr id="4" name="">
             <a:extLst xmlns:a="http://schemas.openxmlformats.org/drawingml/2006/main">
               <a:ext uri="{FF2B5EF4-FFF2-40B4-BE49-F238E27FC236}">
-                <a16:creationId xmlns:a16="http://schemas.microsoft.com/office/drawing/2014/main" id="{A82C834A-70AE-4EB2-BC87-B038EF37CB56}"/>
+                <a16:creationId xmlns:a16="http://schemas.microsoft.com/office/drawing/2014/main" id="{8824B36A-7775-4ACB-A63E-ABEFAE01F064}"/>
               </a:ext>
             </a:extLst>
           </p:cNvPr>
@@ -10036,7 +8281,7 @@
           <p:cNvPr id="5" name="">
             <a:extLst xmlns:a="http://schemas.openxmlformats.org/drawingml/2006/main">
               <a:ext uri="{FF2B5EF4-FFF2-40B4-BE49-F238E27FC236}">
-                <a16:creationId xmlns:a16="http://schemas.microsoft.com/office/drawing/2014/main" id="{0012BCD3-418C-4171-9725-E0079D323B1A}"/>
+                <a16:creationId xmlns:a16="http://schemas.microsoft.com/office/drawing/2014/main" id="{BF20F019-0FE9-4CCE-A423-7ECCE2BC5D68}"/>
               </a:ext>
             </a:extLst>
           </p:cNvPr>
@@ -10093,7 +8338,7 @@
           <p:cNvPr id="6" name="">
             <a:extLst xmlns:a="http://schemas.openxmlformats.org/drawingml/2006/main">
               <a:ext uri="{FF2B5EF4-FFF2-40B4-BE49-F238E27FC236}">
-                <a16:creationId xmlns:a16="http://schemas.microsoft.com/office/drawing/2014/main" id="{13552070-FB25-4067-A286-74AB4443C9AB}"/>
+                <a16:creationId xmlns:a16="http://schemas.microsoft.com/office/drawing/2014/main" id="{CAAC68A3-D18B-4124-AA79-A29D72568835}"/>
               </a:ext>
             </a:extLst>
           </p:cNvPr>
@@ -10150,7 +8395,7 @@
           <p:cNvPr id="7" name="">
             <a:extLst xmlns:a="http://schemas.openxmlformats.org/drawingml/2006/main">
               <a:ext uri="{FF2B5EF4-FFF2-40B4-BE49-F238E27FC236}">
-                <a16:creationId xmlns:a16="http://schemas.microsoft.com/office/drawing/2014/main" id="{0BA9EF04-FF1D-41DE-B24F-52F10FC4AF2F}"/>
+                <a16:creationId xmlns:a16="http://schemas.microsoft.com/office/drawing/2014/main" id="{AD6687CA-0735-4016-B3FE-6D23AE9261EE}"/>
               </a:ext>
             </a:extLst>
           </p:cNvPr>
@@ -10207,7 +8452,7 @@
           <p:cNvPr id="8" name="">
             <a:extLst xmlns:a="http://schemas.openxmlformats.org/drawingml/2006/main">
               <a:ext uri="{FF2B5EF4-FFF2-40B4-BE49-F238E27FC236}">
-                <a16:creationId xmlns:a16="http://schemas.microsoft.com/office/drawing/2014/main" id="{7F7DFB0C-17AD-4985-A8DE-D4C4292F8A4D}"/>
+                <a16:creationId xmlns:a16="http://schemas.microsoft.com/office/drawing/2014/main" id="{00549CDB-3491-4F2F-9C78-582C198D28FA}"/>
               </a:ext>
             </a:extLst>
           </p:cNvPr>
@@ -10264,7 +8509,7 @@
           <p:cNvPr id="9" name="">
             <a:extLst xmlns:a="http://schemas.openxmlformats.org/drawingml/2006/main">
               <a:ext uri="{FF2B5EF4-FFF2-40B4-BE49-F238E27FC236}">
-                <a16:creationId xmlns:a16="http://schemas.microsoft.com/office/drawing/2014/main" id="{DF178EA2-3929-4DBF-ABFE-999324DFED1E}"/>
+                <a16:creationId xmlns:a16="http://schemas.microsoft.com/office/drawing/2014/main" id="{1BED1E5C-1F3E-4CBA-BC22-D1320566B9A7}"/>
               </a:ext>
             </a:extLst>
           </p:cNvPr>
@@ -10321,7 +8566,7 @@
           <p:cNvPr id="10" name="">
             <a:extLst xmlns:a="http://schemas.openxmlformats.org/drawingml/2006/main">
               <a:ext uri="{FF2B5EF4-FFF2-40B4-BE49-F238E27FC236}">
-                <a16:creationId xmlns:a16="http://schemas.microsoft.com/office/drawing/2014/main" id="{BB60C19C-B180-4DF5-8F7B-815A4ECE494C}"/>
+                <a16:creationId xmlns:a16="http://schemas.microsoft.com/office/drawing/2014/main" id="{F450FF4E-4931-4E42-BE26-CA4B7D44A424}"/>
               </a:ext>
             </a:extLst>
           </p:cNvPr>
@@ -10378,7 +8623,7 @@
           <p:cNvPr id="11" name="">
             <a:extLst xmlns:a="http://schemas.openxmlformats.org/drawingml/2006/main">
               <a:ext uri="{FF2B5EF4-FFF2-40B4-BE49-F238E27FC236}">
-                <a16:creationId xmlns:a16="http://schemas.microsoft.com/office/drawing/2014/main" id="{256DF3B6-9A4A-4263-8A97-489C87984386}"/>
+                <a16:creationId xmlns:a16="http://schemas.microsoft.com/office/drawing/2014/main" id="{00748970-003F-4521-B032-CB7CF76BD7A8}"/>
               </a:ext>
             </a:extLst>
           </p:cNvPr>
@@ -10435,7 +8680,7 @@
           <p:cNvPr id="12" name="">
             <a:extLst xmlns:a="http://schemas.openxmlformats.org/drawingml/2006/main">
               <a:ext uri="{FF2B5EF4-FFF2-40B4-BE49-F238E27FC236}">
-                <a16:creationId xmlns:a16="http://schemas.microsoft.com/office/drawing/2014/main" id="{F6A9432C-E246-432A-B071-8EB2C6C1C853}"/>
+                <a16:creationId xmlns:a16="http://schemas.microsoft.com/office/drawing/2014/main" id="{397979F3-F46B-49AE-ACBB-689E523EC17A}"/>
               </a:ext>
             </a:extLst>
           </p:cNvPr>
@@ -10490,7 +8735,7 @@
     </p:spTree>
     <p:extLst>
       <p:ext uri="{BB962C8B-B14F-4D97-AF65-F5344CB8AC3E}">
-        <p14:creationId xmlns:p14="http://schemas.microsoft.com/office/powerpoint/2010/main" val="278375401"/>
+        <p14:creationId xmlns:p14="http://schemas.microsoft.com/office/powerpoint/2010/main" val="187555864"/>
       </p:ext>
     </p:extLst>
   </p:cSld>
@@ -10521,7 +8766,7 @@
           <p:cNvPr id="13" name="">
             <a:extLst xmlns:a="http://schemas.openxmlformats.org/drawingml/2006/main">
               <a:ext uri="{FF2B5EF4-FFF2-40B4-BE49-F238E27FC236}">
-                <a16:creationId xmlns:a16="http://schemas.microsoft.com/office/drawing/2014/main" id="{F7056462-6A05-4916-8A0C-676B896437C8}"/>
+                <a16:creationId xmlns:a16="http://schemas.microsoft.com/office/drawing/2014/main" id="{09EE5AF1-5434-4A17-A720-0F92025FF95D}"/>
               </a:ext>
             </a:extLst>
           </p:cNvPr>
@@ -10551,7 +8796,7 @@
           <p:cNvPr id="2" name="">
             <a:extLst xmlns:a="http://schemas.openxmlformats.org/drawingml/2006/main">
               <a:ext uri="{FF2B5EF4-FFF2-40B4-BE49-F238E27FC236}">
-                <a16:creationId xmlns:a16="http://schemas.microsoft.com/office/drawing/2014/main" id="{70F16F7E-B586-402F-BFB3-55C74629F2A0}"/>
+                <a16:creationId xmlns:a16="http://schemas.microsoft.com/office/drawing/2014/main" id="{29A08E74-CBEE-43E6-AE72-BE3006E57BA9}"/>
               </a:ext>
             </a:extLst>
           </p:cNvPr>
@@ -10608,7 +8853,7 @@
           <p:cNvPr id="3" name="">
             <a:extLst xmlns:a="http://schemas.openxmlformats.org/drawingml/2006/main">
               <a:ext uri="{FF2B5EF4-FFF2-40B4-BE49-F238E27FC236}">
-                <a16:creationId xmlns:a16="http://schemas.microsoft.com/office/drawing/2014/main" id="{B9AD8B76-BFCE-45AF-BF8A-08EF0F95E2E1}"/>
+                <a16:creationId xmlns:a16="http://schemas.microsoft.com/office/drawing/2014/main" id="{A3D3E824-739C-42BA-9E72-34A4F63970AB}"/>
               </a:ext>
             </a:extLst>
           </p:cNvPr>
@@ -10665,7 +8910,7 @@
           <p:cNvPr id="4" name="">
             <a:extLst xmlns:a="http://schemas.openxmlformats.org/drawingml/2006/main">
               <a:ext uri="{FF2B5EF4-FFF2-40B4-BE49-F238E27FC236}">
-                <a16:creationId xmlns:a16="http://schemas.microsoft.com/office/drawing/2014/main" id="{C4A6CA37-AC82-48C2-A863-EDDB984FF50E}"/>
+                <a16:creationId xmlns:a16="http://schemas.microsoft.com/office/drawing/2014/main" id="{09ED9570-73B3-493A-9AEF-36C90F13513E}"/>
               </a:ext>
             </a:extLst>
           </p:cNvPr>
@@ -10722,7 +8967,7 @@
           <p:cNvPr id="5" name="">
             <a:extLst xmlns:a="http://schemas.openxmlformats.org/drawingml/2006/main">
               <a:ext uri="{FF2B5EF4-FFF2-40B4-BE49-F238E27FC236}">
-                <a16:creationId xmlns:a16="http://schemas.microsoft.com/office/drawing/2014/main" id="{59E3418B-6FE0-4BF3-A7D7-58B47B99707B}"/>
+                <a16:creationId xmlns:a16="http://schemas.microsoft.com/office/drawing/2014/main" id="{2B4409CF-E3DD-4940-9DD1-9E26A4845507}"/>
               </a:ext>
             </a:extLst>
           </p:cNvPr>
@@ -10779,7 +9024,7 @@
           <p:cNvPr id="6" name="">
             <a:extLst xmlns:a="http://schemas.openxmlformats.org/drawingml/2006/main">
               <a:ext uri="{FF2B5EF4-FFF2-40B4-BE49-F238E27FC236}">
-                <a16:creationId xmlns:a16="http://schemas.microsoft.com/office/drawing/2014/main" id="{F645D369-A8D3-4570-A0D8-088F9A0C0652}"/>
+                <a16:creationId xmlns:a16="http://schemas.microsoft.com/office/drawing/2014/main" id="{C9334A65-4CCF-4353-A31D-7E7CDA008E9B}"/>
               </a:ext>
             </a:extLst>
           </p:cNvPr>
@@ -10836,7 +9081,7 @@
           <p:cNvPr id="7" name="">
             <a:extLst xmlns:a="http://schemas.openxmlformats.org/drawingml/2006/main">
               <a:ext uri="{FF2B5EF4-FFF2-40B4-BE49-F238E27FC236}">
-                <a16:creationId xmlns:a16="http://schemas.microsoft.com/office/drawing/2014/main" id="{B7A03139-5C97-43B6-A57D-A85048BAE116}"/>
+                <a16:creationId xmlns:a16="http://schemas.microsoft.com/office/drawing/2014/main" id="{0BAAE7BD-F289-4518-8D9D-20AC55DA3E14}"/>
               </a:ext>
             </a:extLst>
           </p:cNvPr>
@@ -10893,7 +9138,7 @@
           <p:cNvPr id="8" name="">
             <a:extLst xmlns:a="http://schemas.openxmlformats.org/drawingml/2006/main">
               <a:ext uri="{FF2B5EF4-FFF2-40B4-BE49-F238E27FC236}">
-                <a16:creationId xmlns:a16="http://schemas.microsoft.com/office/drawing/2014/main" id="{E8712200-7EF8-4D95-A881-9EF38D4CC5DB}"/>
+                <a16:creationId xmlns:a16="http://schemas.microsoft.com/office/drawing/2014/main" id="{614E4C90-5CCC-40CF-A74C-C1ECCBA92F1D}"/>
               </a:ext>
             </a:extLst>
           </p:cNvPr>
@@ -10950,7 +9195,7 @@
           <p:cNvPr id="9" name="">
             <a:extLst xmlns:a="http://schemas.openxmlformats.org/drawingml/2006/main">
               <a:ext uri="{FF2B5EF4-FFF2-40B4-BE49-F238E27FC236}">
-                <a16:creationId xmlns:a16="http://schemas.microsoft.com/office/drawing/2014/main" id="{282B419F-88AC-473E-A687-5B65B38E0357}"/>
+                <a16:creationId xmlns:a16="http://schemas.microsoft.com/office/drawing/2014/main" id="{9180EC1B-85DF-4C14-96E4-DD9F29ACA403}"/>
               </a:ext>
             </a:extLst>
           </p:cNvPr>
@@ -11007,7 +9252,7 @@
           <p:cNvPr id="10" name="">
             <a:extLst xmlns:a="http://schemas.openxmlformats.org/drawingml/2006/main">
               <a:ext uri="{FF2B5EF4-FFF2-40B4-BE49-F238E27FC236}">
-                <a16:creationId xmlns:a16="http://schemas.microsoft.com/office/drawing/2014/main" id="{F4C0C377-C069-447D-99FB-7E52EC3D3C10}"/>
+                <a16:creationId xmlns:a16="http://schemas.microsoft.com/office/drawing/2014/main" id="{FFEB9148-BA1A-41A7-A05E-6D495A042168}"/>
               </a:ext>
             </a:extLst>
           </p:cNvPr>
@@ -11064,7 +9309,7 @@
           <p:cNvPr id="11" name="">
             <a:extLst xmlns:a="http://schemas.openxmlformats.org/drawingml/2006/main">
               <a:ext uri="{FF2B5EF4-FFF2-40B4-BE49-F238E27FC236}">
-                <a16:creationId xmlns:a16="http://schemas.microsoft.com/office/drawing/2014/main" id="{31662D82-8FE3-476E-80A7-91ACCA789F17}"/>
+                <a16:creationId xmlns:a16="http://schemas.microsoft.com/office/drawing/2014/main" id="{516D7EE4-82AD-4FAB-84E4-1366A906FCF1}"/>
               </a:ext>
             </a:extLst>
           </p:cNvPr>
@@ -11121,7 +9366,7 @@
           <p:cNvPr id="12" name="">
             <a:extLst xmlns:a="http://schemas.openxmlformats.org/drawingml/2006/main">
               <a:ext uri="{FF2B5EF4-FFF2-40B4-BE49-F238E27FC236}">
-                <a16:creationId xmlns:a16="http://schemas.microsoft.com/office/drawing/2014/main" id="{3583EAAA-ED78-48FD-A7D3-FA7CD446CFB3}"/>
+                <a16:creationId xmlns:a16="http://schemas.microsoft.com/office/drawing/2014/main" id="{F2EBE4BE-A690-4B85-9921-EC8BBC2D27BE}"/>
               </a:ext>
             </a:extLst>
           </p:cNvPr>
@@ -11176,7 +9421,7 @@
     </p:spTree>
     <p:extLst>
       <p:ext uri="{BB962C8B-B14F-4D97-AF65-F5344CB8AC3E}">
-        <p14:creationId xmlns:p14="http://schemas.microsoft.com/office/powerpoint/2010/main" val="1508457361"/>
+        <p14:creationId xmlns:p14="http://schemas.microsoft.com/office/powerpoint/2010/main" val="1585964901"/>
       </p:ext>
     </p:extLst>
   </p:cSld>
@@ -11207,7 +9452,7 @@
           <p:cNvPr id="13" name="">
             <a:extLst xmlns:a="http://schemas.openxmlformats.org/drawingml/2006/main">
               <a:ext uri="{FF2B5EF4-FFF2-40B4-BE49-F238E27FC236}">
-                <a16:creationId xmlns:a16="http://schemas.microsoft.com/office/drawing/2014/main" id="{9B15F3C3-92EC-44AB-9DC4-4B81EDDA4792}"/>
+                <a16:creationId xmlns:a16="http://schemas.microsoft.com/office/drawing/2014/main" id="{73558CB1-F452-4E1A-81D7-16EC2B7F1417}"/>
               </a:ext>
             </a:extLst>
           </p:cNvPr>
@@ -11237,7 +9482,7 @@
           <p:cNvPr id="2" name="">
             <a:extLst xmlns:a="http://schemas.openxmlformats.org/drawingml/2006/main">
               <a:ext uri="{FF2B5EF4-FFF2-40B4-BE49-F238E27FC236}">
-                <a16:creationId xmlns:a16="http://schemas.microsoft.com/office/drawing/2014/main" id="{DED5211F-A899-44DD-A62F-EA6722CBA529}"/>
+                <a16:creationId xmlns:a16="http://schemas.microsoft.com/office/drawing/2014/main" id="{91DD8F53-B44A-4F6B-930E-9136716ECE4A}"/>
               </a:ext>
             </a:extLst>
           </p:cNvPr>
@@ -11294,7 +9539,7 @@
           <p:cNvPr id="3" name="">
             <a:extLst xmlns:a="http://schemas.openxmlformats.org/drawingml/2006/main">
               <a:ext uri="{FF2B5EF4-FFF2-40B4-BE49-F238E27FC236}">
-                <a16:creationId xmlns:a16="http://schemas.microsoft.com/office/drawing/2014/main" id="{62842730-2E06-410C-8C72-E7734F3E4B5C}"/>
+                <a16:creationId xmlns:a16="http://schemas.microsoft.com/office/drawing/2014/main" id="{82D2E430-36B0-4D63-8E7C-051DD5C06C01}"/>
               </a:ext>
             </a:extLst>
           </p:cNvPr>
@@ -11351,7 +9596,7 @@
           <p:cNvPr id="4" name="">
             <a:extLst xmlns:a="http://schemas.openxmlformats.org/drawingml/2006/main">
               <a:ext uri="{FF2B5EF4-FFF2-40B4-BE49-F238E27FC236}">
-                <a16:creationId xmlns:a16="http://schemas.microsoft.com/office/drawing/2014/main" id="{49586AF8-3011-4770-B224-1D762D04B85C}"/>
+                <a16:creationId xmlns:a16="http://schemas.microsoft.com/office/drawing/2014/main" id="{F35D830F-63FF-4433-98EC-5F5F1DB1EBE1}"/>
               </a:ext>
             </a:extLst>
           </p:cNvPr>
@@ -11408,7 +9653,7 @@
           <p:cNvPr id="5" name="">
             <a:extLst xmlns:a="http://schemas.openxmlformats.org/drawingml/2006/main">
               <a:ext uri="{FF2B5EF4-FFF2-40B4-BE49-F238E27FC236}">
-                <a16:creationId xmlns:a16="http://schemas.microsoft.com/office/drawing/2014/main" id="{EF73B558-F598-4905-B643-8D386CB0EFC0}"/>
+                <a16:creationId xmlns:a16="http://schemas.microsoft.com/office/drawing/2014/main" id="{CACE2E4A-DF86-4EEE-9BA0-7B70807E9157}"/>
               </a:ext>
             </a:extLst>
           </p:cNvPr>
@@ -11465,7 +9710,7 @@
           <p:cNvPr id="6" name="">
             <a:extLst xmlns:a="http://schemas.openxmlformats.org/drawingml/2006/main">
               <a:ext uri="{FF2B5EF4-FFF2-40B4-BE49-F238E27FC236}">
-                <a16:creationId xmlns:a16="http://schemas.microsoft.com/office/drawing/2014/main" id="{ED5FDD0C-F611-44FA-A335-222D86DE6D3D}"/>
+                <a16:creationId xmlns:a16="http://schemas.microsoft.com/office/drawing/2014/main" id="{CB7D135C-EBE0-40E0-9373-E4D36165CF22}"/>
               </a:ext>
             </a:extLst>
           </p:cNvPr>
@@ -11522,7 +9767,7 @@
           <p:cNvPr id="7" name="">
             <a:extLst xmlns:a="http://schemas.openxmlformats.org/drawingml/2006/main">
               <a:ext uri="{FF2B5EF4-FFF2-40B4-BE49-F238E27FC236}">
-                <a16:creationId xmlns:a16="http://schemas.microsoft.com/office/drawing/2014/main" id="{83839146-1581-417C-908A-72C98681F3D1}"/>
+                <a16:creationId xmlns:a16="http://schemas.microsoft.com/office/drawing/2014/main" id="{CBC12036-6FD3-4C2D-A8D5-B11CA3817D5C}"/>
               </a:ext>
             </a:extLst>
           </p:cNvPr>
@@ -11579,7 +9824,7 @@
           <p:cNvPr id="8" name="">
             <a:extLst xmlns:a="http://schemas.openxmlformats.org/drawingml/2006/main">
               <a:ext uri="{FF2B5EF4-FFF2-40B4-BE49-F238E27FC236}">
-                <a16:creationId xmlns:a16="http://schemas.microsoft.com/office/drawing/2014/main" id="{CFF3492F-FDB9-41DD-B104-B6BB1148BD4B}"/>
+                <a16:creationId xmlns:a16="http://schemas.microsoft.com/office/drawing/2014/main" id="{E949A355-EF86-4A0F-87DD-B55EAFA3CDEE}"/>
               </a:ext>
             </a:extLst>
           </p:cNvPr>
@@ -11636,7 +9881,7 @@
           <p:cNvPr id="9" name="">
             <a:extLst xmlns:a="http://schemas.openxmlformats.org/drawingml/2006/main">
               <a:ext uri="{FF2B5EF4-FFF2-40B4-BE49-F238E27FC236}">
-                <a16:creationId xmlns:a16="http://schemas.microsoft.com/office/drawing/2014/main" id="{582B8AFE-DFE3-47C8-AA10-A0074F4305D2}"/>
+                <a16:creationId xmlns:a16="http://schemas.microsoft.com/office/drawing/2014/main" id="{EBBC157D-ED1E-4B64-9E2A-7E94E588FE10}"/>
               </a:ext>
             </a:extLst>
           </p:cNvPr>
@@ -11693,7 +9938,7 @@
           <p:cNvPr id="10" name="">
             <a:extLst xmlns:a="http://schemas.openxmlformats.org/drawingml/2006/main">
               <a:ext uri="{FF2B5EF4-FFF2-40B4-BE49-F238E27FC236}">
-                <a16:creationId xmlns:a16="http://schemas.microsoft.com/office/drawing/2014/main" id="{D77A5F21-768C-4452-8F63-FD537537DCBC}"/>
+                <a16:creationId xmlns:a16="http://schemas.microsoft.com/office/drawing/2014/main" id="{9AED5DFF-66E6-4798-B8AC-5E871DAE29A2}"/>
               </a:ext>
             </a:extLst>
           </p:cNvPr>
@@ -11750,7 +9995,7 @@
           <p:cNvPr id="11" name="">
             <a:extLst xmlns:a="http://schemas.openxmlformats.org/drawingml/2006/main">
               <a:ext uri="{FF2B5EF4-FFF2-40B4-BE49-F238E27FC236}">
-                <a16:creationId xmlns:a16="http://schemas.microsoft.com/office/drawing/2014/main" id="{6F80E3E3-C312-45DD-8696-0D5B2A08DC93}"/>
+                <a16:creationId xmlns:a16="http://schemas.microsoft.com/office/drawing/2014/main" id="{0A300BDA-5870-4EAF-841F-EB3847498751}"/>
               </a:ext>
             </a:extLst>
           </p:cNvPr>
@@ -11807,7 +10052,7 @@
           <p:cNvPr id="12" name="">
             <a:extLst xmlns:a="http://schemas.openxmlformats.org/drawingml/2006/main">
               <a:ext uri="{FF2B5EF4-FFF2-40B4-BE49-F238E27FC236}">
-                <a16:creationId xmlns:a16="http://schemas.microsoft.com/office/drawing/2014/main" id="{6136FFD5-9BAB-4A8E-A324-EB2522A4C6FC}"/>
+                <a16:creationId xmlns:a16="http://schemas.microsoft.com/office/drawing/2014/main" id="{65E59282-9F5B-402C-82EE-2D7C5ADEFD3C}"/>
               </a:ext>
             </a:extLst>
           </p:cNvPr>
@@ -11862,7 +10107,7 @@
     </p:spTree>
     <p:extLst>
       <p:ext uri="{BB962C8B-B14F-4D97-AF65-F5344CB8AC3E}">
-        <p14:creationId xmlns:p14="http://schemas.microsoft.com/office/powerpoint/2010/main" val="1879609970"/>
+        <p14:creationId xmlns:p14="http://schemas.microsoft.com/office/powerpoint/2010/main" val="1886274122"/>
       </p:ext>
     </p:extLst>
   </p:cSld>
@@ -11893,7 +10138,7 @@
           <p:cNvPr id="13" name="">
             <a:extLst xmlns:a="http://schemas.openxmlformats.org/drawingml/2006/main">
               <a:ext uri="{FF2B5EF4-FFF2-40B4-BE49-F238E27FC236}">
-                <a16:creationId xmlns:a16="http://schemas.microsoft.com/office/drawing/2014/main" id="{047B7108-D545-4368-8C6B-070B3AF7E959}"/>
+                <a16:creationId xmlns:a16="http://schemas.microsoft.com/office/drawing/2014/main" id="{8E867965-F72B-4E7D-938A-06D5134B834A}"/>
               </a:ext>
             </a:extLst>
           </p:cNvPr>
@@ -11923,7 +10168,7 @@
           <p:cNvPr id="2" name="">
             <a:extLst xmlns:a="http://schemas.openxmlformats.org/drawingml/2006/main">
               <a:ext uri="{FF2B5EF4-FFF2-40B4-BE49-F238E27FC236}">
-                <a16:creationId xmlns:a16="http://schemas.microsoft.com/office/drawing/2014/main" id="{B6320E5F-87F1-4ACE-9C16-9D3CAFD8C340}"/>
+                <a16:creationId xmlns:a16="http://schemas.microsoft.com/office/drawing/2014/main" id="{780326CC-EB99-4BA9-AE2A-34D8FF50EC63}"/>
               </a:ext>
             </a:extLst>
           </p:cNvPr>
@@ -11980,7 +10225,7 @@
           <p:cNvPr id="3" name="">
             <a:extLst xmlns:a="http://schemas.openxmlformats.org/drawingml/2006/main">
               <a:ext uri="{FF2B5EF4-FFF2-40B4-BE49-F238E27FC236}">
-                <a16:creationId xmlns:a16="http://schemas.microsoft.com/office/drawing/2014/main" id="{8DACB2EB-4FEA-40F4-8327-D42066581074}"/>
+                <a16:creationId xmlns:a16="http://schemas.microsoft.com/office/drawing/2014/main" id="{CBFCFF62-0E83-40FF-8ACD-0BF45DEA923C}"/>
               </a:ext>
             </a:extLst>
           </p:cNvPr>
@@ -12037,7 +10282,7 @@
           <p:cNvPr id="4" name="">
             <a:extLst xmlns:a="http://schemas.openxmlformats.org/drawingml/2006/main">
               <a:ext uri="{FF2B5EF4-FFF2-40B4-BE49-F238E27FC236}">
-                <a16:creationId xmlns:a16="http://schemas.microsoft.com/office/drawing/2014/main" id="{68542BF8-0D60-4BA0-982F-959A25107790}"/>
+                <a16:creationId xmlns:a16="http://schemas.microsoft.com/office/drawing/2014/main" id="{BD96A307-D5A4-49D9-BBF7-829491801370}"/>
               </a:ext>
             </a:extLst>
           </p:cNvPr>
@@ -12094,7 +10339,7 @@
           <p:cNvPr id="5" name="">
             <a:extLst xmlns:a="http://schemas.openxmlformats.org/drawingml/2006/main">
               <a:ext uri="{FF2B5EF4-FFF2-40B4-BE49-F238E27FC236}">
-                <a16:creationId xmlns:a16="http://schemas.microsoft.com/office/drawing/2014/main" id="{6953228D-7371-485A-9FC8-9741C49F48AD}"/>
+                <a16:creationId xmlns:a16="http://schemas.microsoft.com/office/drawing/2014/main" id="{BDEDEFF5-03E9-42C0-9A15-71AF2A422EFD}"/>
               </a:ext>
             </a:extLst>
           </p:cNvPr>
@@ -12151,7 +10396,7 @@
           <p:cNvPr id="6" name="">
             <a:extLst xmlns:a="http://schemas.openxmlformats.org/drawingml/2006/main">
               <a:ext uri="{FF2B5EF4-FFF2-40B4-BE49-F238E27FC236}">
-                <a16:creationId xmlns:a16="http://schemas.microsoft.com/office/drawing/2014/main" id="{515E6B11-822F-4C34-BE4E-82AD0EC97D2B}"/>
+                <a16:creationId xmlns:a16="http://schemas.microsoft.com/office/drawing/2014/main" id="{77DE7878-9516-4FE8-BC6F-9B4C38CA490C}"/>
               </a:ext>
             </a:extLst>
           </p:cNvPr>
@@ -12208,7 +10453,7 @@
           <p:cNvPr id="7" name="">
             <a:extLst xmlns:a="http://schemas.openxmlformats.org/drawingml/2006/main">
               <a:ext uri="{FF2B5EF4-FFF2-40B4-BE49-F238E27FC236}">
-                <a16:creationId xmlns:a16="http://schemas.microsoft.com/office/drawing/2014/main" id="{1E23CA67-8AC9-43A9-930D-4D66682EB0BA}"/>
+                <a16:creationId xmlns:a16="http://schemas.microsoft.com/office/drawing/2014/main" id="{75704038-403E-45D8-AD4E-027EADF488C9}"/>
               </a:ext>
             </a:extLst>
           </p:cNvPr>
@@ -12265,7 +10510,7 @@
           <p:cNvPr id="8" name="">
             <a:extLst xmlns:a="http://schemas.openxmlformats.org/drawingml/2006/main">
               <a:ext uri="{FF2B5EF4-FFF2-40B4-BE49-F238E27FC236}">
-                <a16:creationId xmlns:a16="http://schemas.microsoft.com/office/drawing/2014/main" id="{BCCF277D-56A7-4CE9-9346-34EA3A9254D8}"/>
+                <a16:creationId xmlns:a16="http://schemas.microsoft.com/office/drawing/2014/main" id="{4866A4C8-7A8A-4763-BDDB-61E7A6581606}"/>
               </a:ext>
             </a:extLst>
           </p:cNvPr>
@@ -12322,7 +10567,7 @@
           <p:cNvPr id="9" name="">
             <a:extLst xmlns:a="http://schemas.openxmlformats.org/drawingml/2006/main">
               <a:ext uri="{FF2B5EF4-FFF2-40B4-BE49-F238E27FC236}">
-                <a16:creationId xmlns:a16="http://schemas.microsoft.com/office/drawing/2014/main" id="{73D75C81-9107-4B71-A36B-EB58C9FA7934}"/>
+                <a16:creationId xmlns:a16="http://schemas.microsoft.com/office/drawing/2014/main" id="{46859CEF-FF0A-49DA-8939-18E531D2BEFC}"/>
               </a:ext>
             </a:extLst>
           </p:cNvPr>
@@ -12379,7 +10624,7 @@
           <p:cNvPr id="10" name="">
             <a:extLst xmlns:a="http://schemas.openxmlformats.org/drawingml/2006/main">
               <a:ext uri="{FF2B5EF4-FFF2-40B4-BE49-F238E27FC236}">
-                <a16:creationId xmlns:a16="http://schemas.microsoft.com/office/drawing/2014/main" id="{4A2AB61E-6044-408D-BC71-EE5869BDE685}"/>
+                <a16:creationId xmlns:a16="http://schemas.microsoft.com/office/drawing/2014/main" id="{5EE34255-87BF-4163-9400-E4FE404B9881}"/>
               </a:ext>
             </a:extLst>
           </p:cNvPr>
@@ -12436,7 +10681,7 @@
           <p:cNvPr id="11" name="">
             <a:extLst xmlns:a="http://schemas.openxmlformats.org/drawingml/2006/main">
               <a:ext uri="{FF2B5EF4-FFF2-40B4-BE49-F238E27FC236}">
-                <a16:creationId xmlns:a16="http://schemas.microsoft.com/office/drawing/2014/main" id="{6826D4BF-1937-4C54-BC16-62188C26CAB4}"/>
+                <a16:creationId xmlns:a16="http://schemas.microsoft.com/office/drawing/2014/main" id="{B69F9EC6-E5E0-4792-B569-49EC610B8A7A}"/>
               </a:ext>
             </a:extLst>
           </p:cNvPr>
@@ -12493,7 +10738,7 @@
           <p:cNvPr id="12" name="">
             <a:extLst xmlns:a="http://schemas.openxmlformats.org/drawingml/2006/main">
               <a:ext uri="{FF2B5EF4-FFF2-40B4-BE49-F238E27FC236}">
-                <a16:creationId xmlns:a16="http://schemas.microsoft.com/office/drawing/2014/main" id="{AA87F92B-0363-492F-9EC6-5EC94E5AFAB9}"/>
+                <a16:creationId xmlns:a16="http://schemas.microsoft.com/office/drawing/2014/main" id="{FD01DEFC-0DBA-462C-8D43-C42606D471CA}"/>
               </a:ext>
             </a:extLst>
           </p:cNvPr>
@@ -12548,7 +10793,7 @@
     </p:spTree>
     <p:extLst>
       <p:ext uri="{BB962C8B-B14F-4D97-AF65-F5344CB8AC3E}">
-        <p14:creationId xmlns:p14="http://schemas.microsoft.com/office/powerpoint/2010/main" val="246713422"/>
+        <p14:creationId xmlns:p14="http://schemas.microsoft.com/office/powerpoint/2010/main" val="105073489"/>
       </p:ext>
     </p:extLst>
   </p:cSld>
@@ -12579,7 +10824,7 @@
           <p:cNvPr id="13" name="">
             <a:extLst xmlns:a="http://schemas.openxmlformats.org/drawingml/2006/main">
               <a:ext uri="{FF2B5EF4-FFF2-40B4-BE49-F238E27FC236}">
-                <a16:creationId xmlns:a16="http://schemas.microsoft.com/office/drawing/2014/main" id="{57D93396-B531-4677-B3A1-2DE50F40BC1B}"/>
+                <a16:creationId xmlns:a16="http://schemas.microsoft.com/office/drawing/2014/main" id="{81F8198F-6587-459A-BB5F-4F83A589FB6A}"/>
               </a:ext>
             </a:extLst>
           </p:cNvPr>
@@ -12609,7 +10854,7 @@
           <p:cNvPr id="2" name="">
             <a:extLst xmlns:a="http://schemas.openxmlformats.org/drawingml/2006/main">
               <a:ext uri="{FF2B5EF4-FFF2-40B4-BE49-F238E27FC236}">
-                <a16:creationId xmlns:a16="http://schemas.microsoft.com/office/drawing/2014/main" id="{218A386D-958F-48CD-BD81-1BE32FE40B26}"/>
+                <a16:creationId xmlns:a16="http://schemas.microsoft.com/office/drawing/2014/main" id="{AC16F0B3-3EF8-4159-A90E-71536EA0747B}"/>
               </a:ext>
             </a:extLst>
           </p:cNvPr>
@@ -12666,7 +10911,7 @@
           <p:cNvPr id="3" name="">
             <a:extLst xmlns:a="http://schemas.openxmlformats.org/drawingml/2006/main">
               <a:ext uri="{FF2B5EF4-FFF2-40B4-BE49-F238E27FC236}">
-                <a16:creationId xmlns:a16="http://schemas.microsoft.com/office/drawing/2014/main" id="{62817BB3-75E2-43D2-8CBD-D8674AD322A1}"/>
+                <a16:creationId xmlns:a16="http://schemas.microsoft.com/office/drawing/2014/main" id="{A7291F04-D156-476B-9932-A672A1C599A9}"/>
               </a:ext>
             </a:extLst>
           </p:cNvPr>
@@ -12723,7 +10968,7 @@
           <p:cNvPr id="4" name="">
             <a:extLst xmlns:a="http://schemas.openxmlformats.org/drawingml/2006/main">
               <a:ext uri="{FF2B5EF4-FFF2-40B4-BE49-F238E27FC236}">
-                <a16:creationId xmlns:a16="http://schemas.microsoft.com/office/drawing/2014/main" id="{C7A91836-0304-4AEE-9FA3-970FE23475DB}"/>
+                <a16:creationId xmlns:a16="http://schemas.microsoft.com/office/drawing/2014/main" id="{0B25D242-4818-4318-828E-F9046744E7DA}"/>
               </a:ext>
             </a:extLst>
           </p:cNvPr>
@@ -12780,7 +11025,7 @@
           <p:cNvPr id="5" name="">
             <a:extLst xmlns:a="http://schemas.openxmlformats.org/drawingml/2006/main">
               <a:ext uri="{FF2B5EF4-FFF2-40B4-BE49-F238E27FC236}">
-                <a16:creationId xmlns:a16="http://schemas.microsoft.com/office/drawing/2014/main" id="{0815315A-5F84-4691-B941-98905CEDCAF0}"/>
+                <a16:creationId xmlns:a16="http://schemas.microsoft.com/office/drawing/2014/main" id="{FD1DD8DA-9AC3-4C9B-89E2-558572C9D42C}"/>
               </a:ext>
             </a:extLst>
           </p:cNvPr>
@@ -12837,7 +11082,7 @@
           <p:cNvPr id="6" name="">
             <a:extLst xmlns:a="http://schemas.openxmlformats.org/drawingml/2006/main">
               <a:ext uri="{FF2B5EF4-FFF2-40B4-BE49-F238E27FC236}">
-                <a16:creationId xmlns:a16="http://schemas.microsoft.com/office/drawing/2014/main" id="{2AF07114-4598-4DE1-B325-CE1FAD86EB2E}"/>
+                <a16:creationId xmlns:a16="http://schemas.microsoft.com/office/drawing/2014/main" id="{A048964E-ED16-493A-87A3-693B3FEA193F}"/>
               </a:ext>
             </a:extLst>
           </p:cNvPr>
@@ -12894,7 +11139,7 @@
           <p:cNvPr id="7" name="">
             <a:extLst xmlns:a="http://schemas.openxmlformats.org/drawingml/2006/main">
               <a:ext uri="{FF2B5EF4-FFF2-40B4-BE49-F238E27FC236}">
-                <a16:creationId xmlns:a16="http://schemas.microsoft.com/office/drawing/2014/main" id="{83904657-1FA4-429A-8F4B-02BDAB2C9E45}"/>
+                <a16:creationId xmlns:a16="http://schemas.microsoft.com/office/drawing/2014/main" id="{FBA7A511-2A0F-4A1D-B27D-AC05D5BCD659}"/>
               </a:ext>
             </a:extLst>
           </p:cNvPr>
@@ -12951,7 +11196,7 @@
           <p:cNvPr id="8" name="">
             <a:extLst xmlns:a="http://schemas.openxmlformats.org/drawingml/2006/main">
               <a:ext uri="{FF2B5EF4-FFF2-40B4-BE49-F238E27FC236}">
-                <a16:creationId xmlns:a16="http://schemas.microsoft.com/office/drawing/2014/main" id="{17DACD71-916C-4125-BAEC-12413CACB49C}"/>
+                <a16:creationId xmlns:a16="http://schemas.microsoft.com/office/drawing/2014/main" id="{FFACB781-7A01-43B1-88E0-A9648D4648B0}"/>
               </a:ext>
             </a:extLst>
           </p:cNvPr>
@@ -13008,7 +11253,7 @@
           <p:cNvPr id="9" name="">
             <a:extLst xmlns:a="http://schemas.openxmlformats.org/drawingml/2006/main">
               <a:ext uri="{FF2B5EF4-FFF2-40B4-BE49-F238E27FC236}">
-                <a16:creationId xmlns:a16="http://schemas.microsoft.com/office/drawing/2014/main" id="{D1CF90C7-79E0-46B3-9E9B-24BEF5642BD3}"/>
+                <a16:creationId xmlns:a16="http://schemas.microsoft.com/office/drawing/2014/main" id="{DB6123E9-C525-49B1-9DF6-CBFDD0A32952}"/>
               </a:ext>
             </a:extLst>
           </p:cNvPr>
@@ -13065,7 +11310,7 @@
           <p:cNvPr id="10" name="">
             <a:extLst xmlns:a="http://schemas.openxmlformats.org/drawingml/2006/main">
               <a:ext uri="{FF2B5EF4-FFF2-40B4-BE49-F238E27FC236}">
-                <a16:creationId xmlns:a16="http://schemas.microsoft.com/office/drawing/2014/main" id="{1C5114FD-87DF-46CD-94D6-4858AEAE436E}"/>
+                <a16:creationId xmlns:a16="http://schemas.microsoft.com/office/drawing/2014/main" id="{B9B30C6E-D4E5-4655-8339-55F53F5D7720}"/>
               </a:ext>
             </a:extLst>
           </p:cNvPr>
@@ -13122,7 +11367,7 @@
           <p:cNvPr id="11" name="">
             <a:extLst xmlns:a="http://schemas.openxmlformats.org/drawingml/2006/main">
               <a:ext uri="{FF2B5EF4-FFF2-40B4-BE49-F238E27FC236}">
-                <a16:creationId xmlns:a16="http://schemas.microsoft.com/office/drawing/2014/main" id="{4FDFE4CF-3BCF-4DAA-8038-326B11AA8CFA}"/>
+                <a16:creationId xmlns:a16="http://schemas.microsoft.com/office/drawing/2014/main" id="{185EF3DA-30F9-44CA-A283-D6601C9355FE}"/>
               </a:ext>
             </a:extLst>
           </p:cNvPr>
@@ -13179,7 +11424,7 @@
           <p:cNvPr id="12" name="">
             <a:extLst xmlns:a="http://schemas.openxmlformats.org/drawingml/2006/main">
               <a:ext uri="{FF2B5EF4-FFF2-40B4-BE49-F238E27FC236}">
-                <a16:creationId xmlns:a16="http://schemas.microsoft.com/office/drawing/2014/main" id="{B24ACF31-F750-4151-A3B8-9800DA8D2146}"/>
+                <a16:creationId xmlns:a16="http://schemas.microsoft.com/office/drawing/2014/main" id="{09F131BB-C359-4293-B665-CC5173428BDE}"/>
               </a:ext>
             </a:extLst>
           </p:cNvPr>
@@ -13234,7 +11479,7 @@
     </p:spTree>
     <p:extLst>
       <p:ext uri="{BB962C8B-B14F-4D97-AF65-F5344CB8AC3E}">
-        <p14:creationId xmlns:p14="http://schemas.microsoft.com/office/powerpoint/2010/main" val="1156210548"/>
+        <p14:creationId xmlns:p14="http://schemas.microsoft.com/office/powerpoint/2010/main" val="247025393"/>
       </p:ext>
     </p:extLst>
   </p:cSld>
@@ -13265,7 +11510,7 @@
           <p:cNvPr id="13" name="">
             <a:extLst xmlns:a="http://schemas.openxmlformats.org/drawingml/2006/main">
               <a:ext uri="{FF2B5EF4-FFF2-40B4-BE49-F238E27FC236}">
-                <a16:creationId xmlns:a16="http://schemas.microsoft.com/office/drawing/2014/main" id="{24279D1B-2DD3-47DE-B01F-A9FCE0AC6B1E}"/>
+                <a16:creationId xmlns:a16="http://schemas.microsoft.com/office/drawing/2014/main" id="{6E630BCB-3E00-4668-8923-231FC5DE7523}"/>
               </a:ext>
             </a:extLst>
           </p:cNvPr>
@@ -13295,7 +11540,7 @@
           <p:cNvPr id="2" name="">
             <a:extLst xmlns:a="http://schemas.openxmlformats.org/drawingml/2006/main">
               <a:ext uri="{FF2B5EF4-FFF2-40B4-BE49-F238E27FC236}">
-                <a16:creationId xmlns:a16="http://schemas.microsoft.com/office/drawing/2014/main" id="{6286580C-3E9C-433A-8905-3F94C295CFEC}"/>
+                <a16:creationId xmlns:a16="http://schemas.microsoft.com/office/drawing/2014/main" id="{7CA6B1C5-27D5-464E-94E6-E58A9CC680D8}"/>
               </a:ext>
             </a:extLst>
           </p:cNvPr>
@@ -13352,7 +11597,7 @@
           <p:cNvPr id="3" name="">
             <a:extLst xmlns:a="http://schemas.openxmlformats.org/drawingml/2006/main">
               <a:ext uri="{FF2B5EF4-FFF2-40B4-BE49-F238E27FC236}">
-                <a16:creationId xmlns:a16="http://schemas.microsoft.com/office/drawing/2014/main" id="{97CC55E3-D799-4BFF-9BF1-A4B15FE5C67E}"/>
+                <a16:creationId xmlns:a16="http://schemas.microsoft.com/office/drawing/2014/main" id="{9217FD93-2DAF-4F0D-82A9-5AF2B556E675}"/>
               </a:ext>
             </a:extLst>
           </p:cNvPr>
@@ -13409,7 +11654,7 @@
           <p:cNvPr id="4" name="">
             <a:extLst xmlns:a="http://schemas.openxmlformats.org/drawingml/2006/main">
               <a:ext uri="{FF2B5EF4-FFF2-40B4-BE49-F238E27FC236}">
-                <a16:creationId xmlns:a16="http://schemas.microsoft.com/office/drawing/2014/main" id="{05FB30B8-7A79-4977-9E64-01BBCBA8B883}"/>
+                <a16:creationId xmlns:a16="http://schemas.microsoft.com/office/drawing/2014/main" id="{7D3E884E-83FD-4FBE-B4FA-DD98276D5C0E}"/>
               </a:ext>
             </a:extLst>
           </p:cNvPr>
@@ -13466,7 +11711,7 @@
           <p:cNvPr id="5" name="">
             <a:extLst xmlns:a="http://schemas.openxmlformats.org/drawingml/2006/main">
               <a:ext uri="{FF2B5EF4-FFF2-40B4-BE49-F238E27FC236}">
-                <a16:creationId xmlns:a16="http://schemas.microsoft.com/office/drawing/2014/main" id="{A4C98A7F-6597-47FB-A3D1-E21532663A29}"/>
+                <a16:creationId xmlns:a16="http://schemas.microsoft.com/office/drawing/2014/main" id="{F9EDE4D9-6FC4-4A9B-91F6-863466D23373}"/>
               </a:ext>
             </a:extLst>
           </p:cNvPr>
@@ -13523,7 +11768,7 @@
           <p:cNvPr id="6" name="">
             <a:extLst xmlns:a="http://schemas.openxmlformats.org/drawingml/2006/main">
               <a:ext uri="{FF2B5EF4-FFF2-40B4-BE49-F238E27FC236}">
-                <a16:creationId xmlns:a16="http://schemas.microsoft.com/office/drawing/2014/main" id="{145D6DC9-4DCC-4B70-BD04-8BC8E24CFB83}"/>
+                <a16:creationId xmlns:a16="http://schemas.microsoft.com/office/drawing/2014/main" id="{026DBD6D-1C72-4241-9B67-25AA666739A8}"/>
               </a:ext>
             </a:extLst>
           </p:cNvPr>
@@ -13580,7 +11825,7 @@
           <p:cNvPr id="7" name="">
             <a:extLst xmlns:a="http://schemas.openxmlformats.org/drawingml/2006/main">
               <a:ext uri="{FF2B5EF4-FFF2-40B4-BE49-F238E27FC236}">
-                <a16:creationId xmlns:a16="http://schemas.microsoft.com/office/drawing/2014/main" id="{60AA0F64-5D38-40E4-B56E-97011D1848D6}"/>
+                <a16:creationId xmlns:a16="http://schemas.microsoft.com/office/drawing/2014/main" id="{40C3C1EE-FDA4-4BB3-A868-6EEE2815D8E1}"/>
               </a:ext>
             </a:extLst>
           </p:cNvPr>
@@ -13637,7 +11882,7 @@
           <p:cNvPr id="8" name="">
             <a:extLst xmlns:a="http://schemas.openxmlformats.org/drawingml/2006/main">
               <a:ext uri="{FF2B5EF4-FFF2-40B4-BE49-F238E27FC236}">
-                <a16:creationId xmlns:a16="http://schemas.microsoft.com/office/drawing/2014/main" id="{74BFBA30-D277-4336-8681-0761A618D5DF}"/>
+                <a16:creationId xmlns:a16="http://schemas.microsoft.com/office/drawing/2014/main" id="{777E40EB-3DB9-44DC-BFF5-DAC48F80FBF7}"/>
               </a:ext>
             </a:extLst>
           </p:cNvPr>
@@ -13694,7 +11939,7 @@
           <p:cNvPr id="9" name="">
             <a:extLst xmlns:a="http://schemas.openxmlformats.org/drawingml/2006/main">
               <a:ext uri="{FF2B5EF4-FFF2-40B4-BE49-F238E27FC236}">
-                <a16:creationId xmlns:a16="http://schemas.microsoft.com/office/drawing/2014/main" id="{CDD03F94-0EE8-4F56-B7DA-F074E1F64C95}"/>
+                <a16:creationId xmlns:a16="http://schemas.microsoft.com/office/drawing/2014/main" id="{60D0F776-57CF-48FE-BA9E-B3390F18491A}"/>
               </a:ext>
             </a:extLst>
           </p:cNvPr>
@@ -13751,7 +11996,7 @@
           <p:cNvPr id="10" name="">
             <a:extLst xmlns:a="http://schemas.openxmlformats.org/drawingml/2006/main">
               <a:ext uri="{FF2B5EF4-FFF2-40B4-BE49-F238E27FC236}">
-                <a16:creationId xmlns:a16="http://schemas.microsoft.com/office/drawing/2014/main" id="{F154CD1C-6813-4EBD-9D4E-0540DE5BCD9B}"/>
+                <a16:creationId xmlns:a16="http://schemas.microsoft.com/office/drawing/2014/main" id="{16859D0B-68C4-408E-A103-5A479F5EC419}"/>
               </a:ext>
             </a:extLst>
           </p:cNvPr>
@@ -13808,7 +12053,7 @@
           <p:cNvPr id="11" name="">
             <a:extLst xmlns:a="http://schemas.openxmlformats.org/drawingml/2006/main">
               <a:ext uri="{FF2B5EF4-FFF2-40B4-BE49-F238E27FC236}">
-                <a16:creationId xmlns:a16="http://schemas.microsoft.com/office/drawing/2014/main" id="{549B39BD-EDF5-483C-B48A-666F0FE37A0C}"/>
+                <a16:creationId xmlns:a16="http://schemas.microsoft.com/office/drawing/2014/main" id="{5435D8AD-DE5E-457A-AA46-AE79DCD188DF}"/>
               </a:ext>
             </a:extLst>
           </p:cNvPr>
@@ -13865,7 +12110,7 @@
           <p:cNvPr id="12" name="">
             <a:extLst xmlns:a="http://schemas.openxmlformats.org/drawingml/2006/main">
               <a:ext uri="{FF2B5EF4-FFF2-40B4-BE49-F238E27FC236}">
-                <a16:creationId xmlns:a16="http://schemas.microsoft.com/office/drawing/2014/main" id="{1D2DC6A8-4EC2-42C2-B16A-583E61D32C9B}"/>
+                <a16:creationId xmlns:a16="http://schemas.microsoft.com/office/drawing/2014/main" id="{1FC5BA4F-E456-43E2-B36F-D00F138BFB04}"/>
               </a:ext>
             </a:extLst>
           </p:cNvPr>
@@ -13920,7 +12165,7 @@
     </p:spTree>
     <p:extLst>
       <p:ext uri="{BB962C8B-B14F-4D97-AF65-F5344CB8AC3E}">
-        <p14:creationId xmlns:p14="http://schemas.microsoft.com/office/powerpoint/2010/main" val="472290220"/>
+        <p14:creationId xmlns:p14="http://schemas.microsoft.com/office/powerpoint/2010/main" val="652048988"/>
       </p:ext>
     </p:extLst>
   </p:cSld>
@@ -13951,7 +12196,7 @@
           <p:cNvPr id="13" name="">
             <a:extLst xmlns:a="http://schemas.openxmlformats.org/drawingml/2006/main">
               <a:ext uri="{FF2B5EF4-FFF2-40B4-BE49-F238E27FC236}">
-                <a16:creationId xmlns:a16="http://schemas.microsoft.com/office/drawing/2014/main" id="{C0EAB00F-01C4-4567-9B04-9BC109843845}"/>
+                <a16:creationId xmlns:a16="http://schemas.microsoft.com/office/drawing/2014/main" id="{36053A3D-C764-4410-B857-5CA5304EFD5F}"/>
               </a:ext>
             </a:extLst>
           </p:cNvPr>
@@ -13981,7 +12226,7 @@
           <p:cNvPr id="2" name="">
             <a:extLst xmlns:a="http://schemas.openxmlformats.org/drawingml/2006/main">
               <a:ext uri="{FF2B5EF4-FFF2-40B4-BE49-F238E27FC236}">
-                <a16:creationId xmlns:a16="http://schemas.microsoft.com/office/drawing/2014/main" id="{FFCD814C-F523-42D6-9DEB-E01FC2521614}"/>
+                <a16:creationId xmlns:a16="http://schemas.microsoft.com/office/drawing/2014/main" id="{B040E0A6-8805-4887-B2BC-1E269552CCFD}"/>
               </a:ext>
             </a:extLst>
           </p:cNvPr>
@@ -14038,7 +12283,7 @@
           <p:cNvPr id="3" name="">
             <a:extLst xmlns:a="http://schemas.openxmlformats.org/drawingml/2006/main">
               <a:ext uri="{FF2B5EF4-FFF2-40B4-BE49-F238E27FC236}">
-                <a16:creationId xmlns:a16="http://schemas.microsoft.com/office/drawing/2014/main" id="{7A15F189-F7FF-40FC-9B08-25D62BF1D63A}"/>
+                <a16:creationId xmlns:a16="http://schemas.microsoft.com/office/drawing/2014/main" id="{4BA70535-E681-45A1-992C-0D9B2F3D0235}"/>
               </a:ext>
             </a:extLst>
           </p:cNvPr>
@@ -14095,7 +12340,7 @@
           <p:cNvPr id="4" name="">
             <a:extLst xmlns:a="http://schemas.openxmlformats.org/drawingml/2006/main">
               <a:ext uri="{FF2B5EF4-FFF2-40B4-BE49-F238E27FC236}">
-                <a16:creationId xmlns:a16="http://schemas.microsoft.com/office/drawing/2014/main" id="{58E03627-4CE1-432B-816F-8505B96B4301}"/>
+                <a16:creationId xmlns:a16="http://schemas.microsoft.com/office/drawing/2014/main" id="{3DE8DAC1-B649-4C74-BF9E-57D33DACED64}"/>
               </a:ext>
             </a:extLst>
           </p:cNvPr>
@@ -14152,7 +12397,7 @@
           <p:cNvPr id="5" name="">
             <a:extLst xmlns:a="http://schemas.openxmlformats.org/drawingml/2006/main">
               <a:ext uri="{FF2B5EF4-FFF2-40B4-BE49-F238E27FC236}">
-                <a16:creationId xmlns:a16="http://schemas.microsoft.com/office/drawing/2014/main" id="{A1078256-9EC1-4ADC-A701-EB9819AA170F}"/>
+                <a16:creationId xmlns:a16="http://schemas.microsoft.com/office/drawing/2014/main" id="{70133F97-596A-4D2D-905C-3E40551BF8B7}"/>
               </a:ext>
             </a:extLst>
           </p:cNvPr>
@@ -14209,7 +12454,7 @@
           <p:cNvPr id="6" name="">
             <a:extLst xmlns:a="http://schemas.openxmlformats.org/drawingml/2006/main">
               <a:ext uri="{FF2B5EF4-FFF2-40B4-BE49-F238E27FC236}">
-                <a16:creationId xmlns:a16="http://schemas.microsoft.com/office/drawing/2014/main" id="{FCB7132E-EE46-4A36-B5DF-C29B01C10F18}"/>
+                <a16:creationId xmlns:a16="http://schemas.microsoft.com/office/drawing/2014/main" id="{A890CBF3-D4EE-49FC-ACC3-9815C39157B3}"/>
               </a:ext>
             </a:extLst>
           </p:cNvPr>
@@ -14266,7 +12511,7 @@
           <p:cNvPr id="7" name="">
             <a:extLst xmlns:a="http://schemas.openxmlformats.org/drawingml/2006/main">
               <a:ext uri="{FF2B5EF4-FFF2-40B4-BE49-F238E27FC236}">
-                <a16:creationId xmlns:a16="http://schemas.microsoft.com/office/drawing/2014/main" id="{8E3ECBE8-5DA7-45DB-9C3A-229AF1CBF402}"/>
+                <a16:creationId xmlns:a16="http://schemas.microsoft.com/office/drawing/2014/main" id="{A60AE735-4538-4AF6-A909-DF3A8C160604}"/>
               </a:ext>
             </a:extLst>
           </p:cNvPr>
@@ -14323,7 +12568,7 @@
           <p:cNvPr id="8" name="">
             <a:extLst xmlns:a="http://schemas.openxmlformats.org/drawingml/2006/main">
               <a:ext uri="{FF2B5EF4-FFF2-40B4-BE49-F238E27FC236}">
-                <a16:creationId xmlns:a16="http://schemas.microsoft.com/office/drawing/2014/main" id="{365E13CF-942C-4B76-B5EA-E9DFC0606B74}"/>
+                <a16:creationId xmlns:a16="http://schemas.microsoft.com/office/drawing/2014/main" id="{24B0D894-F7BD-45CA-8061-C28A5D299EB8}"/>
               </a:ext>
             </a:extLst>
           </p:cNvPr>
@@ -14380,7 +12625,7 @@
           <p:cNvPr id="9" name="">
             <a:extLst xmlns:a="http://schemas.openxmlformats.org/drawingml/2006/main">
               <a:ext uri="{FF2B5EF4-FFF2-40B4-BE49-F238E27FC236}">
-                <a16:creationId xmlns:a16="http://schemas.microsoft.com/office/drawing/2014/main" id="{62E8D0FC-970B-49CC-89E4-A6A8B0115B60}"/>
+                <a16:creationId xmlns:a16="http://schemas.microsoft.com/office/drawing/2014/main" id="{F9CC04BC-B3B0-4F9E-BC43-2374D4F7566D}"/>
               </a:ext>
             </a:extLst>
           </p:cNvPr>
@@ -14437,7 +12682,7 @@
           <p:cNvPr id="10" name="">
             <a:extLst xmlns:a="http://schemas.openxmlformats.org/drawingml/2006/main">
               <a:ext uri="{FF2B5EF4-FFF2-40B4-BE49-F238E27FC236}">
-                <a16:creationId xmlns:a16="http://schemas.microsoft.com/office/drawing/2014/main" id="{EFBB0CC0-82BE-486D-9A44-54564ABFC8EA}"/>
+                <a16:creationId xmlns:a16="http://schemas.microsoft.com/office/drawing/2014/main" id="{C6495D78-E53E-4C9F-974C-31A39180FB1A}"/>
               </a:ext>
             </a:extLst>
           </p:cNvPr>
@@ -14494,7 +12739,7 @@
           <p:cNvPr id="11" name="">
             <a:extLst xmlns:a="http://schemas.openxmlformats.org/drawingml/2006/main">
               <a:ext uri="{FF2B5EF4-FFF2-40B4-BE49-F238E27FC236}">
-                <a16:creationId xmlns:a16="http://schemas.microsoft.com/office/drawing/2014/main" id="{D55D0008-DA96-4CB8-8020-C872748296DA}"/>
+                <a16:creationId xmlns:a16="http://schemas.microsoft.com/office/drawing/2014/main" id="{551F17D5-05ED-45B2-8DB3-F0C7D21CF32C}"/>
               </a:ext>
             </a:extLst>
           </p:cNvPr>
@@ -14551,7 +12796,7 @@
           <p:cNvPr id="12" name="">
             <a:extLst xmlns:a="http://schemas.openxmlformats.org/drawingml/2006/main">
               <a:ext uri="{FF2B5EF4-FFF2-40B4-BE49-F238E27FC236}">
-                <a16:creationId xmlns:a16="http://schemas.microsoft.com/office/drawing/2014/main" id="{A6D76B18-6F15-49FD-B1A4-621307D83679}"/>
+                <a16:creationId xmlns:a16="http://schemas.microsoft.com/office/drawing/2014/main" id="{85279A72-2AC8-407A-A2C3-7AD15EA1E855}"/>
               </a:ext>
             </a:extLst>
           </p:cNvPr>
@@ -14606,7 +12851,7 @@
     </p:spTree>
     <p:extLst>
       <p:ext uri="{BB962C8B-B14F-4D97-AF65-F5344CB8AC3E}">
-        <p14:creationId xmlns:p14="http://schemas.microsoft.com/office/powerpoint/2010/main" val="1155049271"/>
+        <p14:creationId xmlns:p14="http://schemas.microsoft.com/office/powerpoint/2010/main" val="567512339"/>
       </p:ext>
     </p:extLst>
   </p:cSld>
@@ -14637,7 +12882,7 @@
           <p:cNvPr id="16" name="">
             <a:extLst xmlns:a="http://schemas.openxmlformats.org/drawingml/2006/main">
               <a:ext uri="{FF2B5EF4-FFF2-40B4-BE49-F238E27FC236}">
-                <a16:creationId xmlns:a16="http://schemas.microsoft.com/office/drawing/2014/main" id="{9082E3B1-E7CF-4B8A-B8CF-6A53F833D628}"/>
+                <a16:creationId xmlns:a16="http://schemas.microsoft.com/office/drawing/2014/main" id="{5A7C8755-33B4-44AB-BEC4-890676A204CF}"/>
               </a:ext>
             </a:extLst>
           </p:cNvPr>
@@ -14667,7 +12912,7 @@
           <p:cNvPr id="2" name="">
             <a:extLst xmlns:a="http://schemas.openxmlformats.org/drawingml/2006/main">
               <a:ext uri="{FF2B5EF4-FFF2-40B4-BE49-F238E27FC236}">
-                <a16:creationId xmlns:a16="http://schemas.microsoft.com/office/drawing/2014/main" id="{DD75D5A8-A278-4CAA-97EA-B020637F2539}"/>
+                <a16:creationId xmlns:a16="http://schemas.microsoft.com/office/drawing/2014/main" id="{1D429A5A-13FD-45E3-ADAA-0D796DC5A733}"/>
               </a:ext>
             </a:extLst>
           </p:cNvPr>
@@ -14724,7 +12969,7 @@
           <p:cNvPr id="3" name="">
             <a:extLst xmlns:a="http://schemas.openxmlformats.org/drawingml/2006/main">
               <a:ext uri="{FF2B5EF4-FFF2-40B4-BE49-F238E27FC236}">
-                <a16:creationId xmlns:a16="http://schemas.microsoft.com/office/drawing/2014/main" id="{C53A3AA9-55CC-424C-A9EE-1BA212C1B96F}"/>
+                <a16:creationId xmlns:a16="http://schemas.microsoft.com/office/drawing/2014/main" id="{9714E24A-CFA9-4FD5-82DA-8977A5E5046F}"/>
               </a:ext>
             </a:extLst>
           </p:cNvPr>
@@ -14781,7 +13026,7 @@
           <p:cNvPr id="4" name="">
             <a:extLst xmlns:a="http://schemas.openxmlformats.org/drawingml/2006/main">
               <a:ext uri="{FF2B5EF4-FFF2-40B4-BE49-F238E27FC236}">
-                <a16:creationId xmlns:a16="http://schemas.microsoft.com/office/drawing/2014/main" id="{0A77F590-23AD-464B-8EC9-3B2402071D0B}"/>
+                <a16:creationId xmlns:a16="http://schemas.microsoft.com/office/drawing/2014/main" id="{676AF341-895A-459F-87E5-73A0D8712AAD}"/>
               </a:ext>
             </a:extLst>
           </p:cNvPr>
@@ -14838,7 +13083,7 @@
           <p:cNvPr id="5" name="">
             <a:extLst xmlns:a="http://schemas.openxmlformats.org/drawingml/2006/main">
               <a:ext uri="{FF2B5EF4-FFF2-40B4-BE49-F238E27FC236}">
-                <a16:creationId xmlns:a16="http://schemas.microsoft.com/office/drawing/2014/main" id="{49EAC703-109B-4010-A19B-444923248C10}"/>
+                <a16:creationId xmlns:a16="http://schemas.microsoft.com/office/drawing/2014/main" id="{A2F4BA81-BD9D-4452-AC31-95D6223CFACD}"/>
               </a:ext>
             </a:extLst>
           </p:cNvPr>
@@ -14895,7 +13140,7 @@
           <p:cNvPr id="6" name="">
             <a:extLst xmlns:a="http://schemas.openxmlformats.org/drawingml/2006/main">
               <a:ext uri="{FF2B5EF4-FFF2-40B4-BE49-F238E27FC236}">
-                <a16:creationId xmlns:a16="http://schemas.microsoft.com/office/drawing/2014/main" id="{268E8BD4-2660-43D2-8EB0-1951611E8C09}"/>
+                <a16:creationId xmlns:a16="http://schemas.microsoft.com/office/drawing/2014/main" id="{3CABCD85-7527-48D7-93C3-FDDBE85A9860}"/>
               </a:ext>
             </a:extLst>
           </p:cNvPr>
@@ -14952,7 +13197,7 @@
           <p:cNvPr id="7" name="">
             <a:extLst xmlns:a="http://schemas.openxmlformats.org/drawingml/2006/main">
               <a:ext uri="{FF2B5EF4-FFF2-40B4-BE49-F238E27FC236}">
-                <a16:creationId xmlns:a16="http://schemas.microsoft.com/office/drawing/2014/main" id="{683DEFF5-C145-4F88-B409-0119424A98D0}"/>
+                <a16:creationId xmlns:a16="http://schemas.microsoft.com/office/drawing/2014/main" id="{A9DD2CF2-3623-43D3-B12B-DFA08DC84EBD}"/>
               </a:ext>
             </a:extLst>
           </p:cNvPr>
@@ -15009,7 +13254,7 @@
           <p:cNvPr id="8" name="">
             <a:extLst xmlns:a="http://schemas.openxmlformats.org/drawingml/2006/main">
               <a:ext uri="{FF2B5EF4-FFF2-40B4-BE49-F238E27FC236}">
-                <a16:creationId xmlns:a16="http://schemas.microsoft.com/office/drawing/2014/main" id="{A5508D8A-3E7C-4C20-A10E-4DC9743C78E9}"/>
+                <a16:creationId xmlns:a16="http://schemas.microsoft.com/office/drawing/2014/main" id="{C40DBAAB-A49A-4A3C-8F66-E59DB0EAA285}"/>
               </a:ext>
             </a:extLst>
           </p:cNvPr>
@@ -15066,7 +13311,7 @@
           <p:cNvPr id="9" name="">
             <a:extLst xmlns:a="http://schemas.openxmlformats.org/drawingml/2006/main">
               <a:ext uri="{FF2B5EF4-FFF2-40B4-BE49-F238E27FC236}">
-                <a16:creationId xmlns:a16="http://schemas.microsoft.com/office/drawing/2014/main" id="{0C4134E5-F840-4D6A-AB72-BB3315222071}"/>
+                <a16:creationId xmlns:a16="http://schemas.microsoft.com/office/drawing/2014/main" id="{EDA78710-B35A-4D1B-B104-D83935C20A97}"/>
               </a:ext>
             </a:extLst>
           </p:cNvPr>
@@ -15123,7 +13368,7 @@
           <p:cNvPr id="10" name="">
             <a:extLst xmlns:a="http://schemas.openxmlformats.org/drawingml/2006/main">
               <a:ext uri="{FF2B5EF4-FFF2-40B4-BE49-F238E27FC236}">
-                <a16:creationId xmlns:a16="http://schemas.microsoft.com/office/drawing/2014/main" id="{988C1CCE-D433-475A-8539-38CF33A02979}"/>
+                <a16:creationId xmlns:a16="http://schemas.microsoft.com/office/drawing/2014/main" id="{ACC4628D-2065-4CAA-9E86-BB6AB6F1D1C8}"/>
               </a:ext>
             </a:extLst>
           </p:cNvPr>
@@ -15180,7 +13425,7 @@
           <p:cNvPr id="11" name="">
             <a:extLst xmlns:a="http://schemas.openxmlformats.org/drawingml/2006/main">
               <a:ext uri="{FF2B5EF4-FFF2-40B4-BE49-F238E27FC236}">
-                <a16:creationId xmlns:a16="http://schemas.microsoft.com/office/drawing/2014/main" id="{6E8AB978-BD94-449E-9D02-4A265E482572}"/>
+                <a16:creationId xmlns:a16="http://schemas.microsoft.com/office/drawing/2014/main" id="{0B26598F-C580-42D2-ABC8-46205C6C7B0B}"/>
               </a:ext>
             </a:extLst>
           </p:cNvPr>
@@ -15237,7 +13482,7 @@
           <p:cNvPr id="12" name="">
             <a:extLst xmlns:a="http://schemas.openxmlformats.org/drawingml/2006/main">
               <a:ext uri="{FF2B5EF4-FFF2-40B4-BE49-F238E27FC236}">
-                <a16:creationId xmlns:a16="http://schemas.microsoft.com/office/drawing/2014/main" id="{EE92D008-DE98-4C84-90B8-81BE5EE1A519}"/>
+                <a16:creationId xmlns:a16="http://schemas.microsoft.com/office/drawing/2014/main" id="{BE3FEE76-BA4B-4121-BB20-7632B6785BFE}"/>
               </a:ext>
             </a:extLst>
           </p:cNvPr>
@@ -15267,7 +13512,7 @@
           <p:cNvPr id="13" name="">
             <a:extLst xmlns:a="http://schemas.openxmlformats.org/drawingml/2006/main">
               <a:ext uri="{FF2B5EF4-FFF2-40B4-BE49-F238E27FC236}">
-                <a16:creationId xmlns:a16="http://schemas.microsoft.com/office/drawing/2014/main" id="{4838E228-8CEC-43AD-AEC6-570D2348EF2A}"/>
+                <a16:creationId xmlns:a16="http://schemas.microsoft.com/office/drawing/2014/main" id="{95426A5D-86B8-4F26-82EA-528C197833A1}"/>
               </a:ext>
             </a:extLst>
           </p:cNvPr>
@@ -15313,7 +13558,7 @@
                 <a:latin typeface="Calibri"/>
                 <a:ea typeface="Calibri"/>
                 <a:cs typeface="Calibri"/>
-                <a:hlinkClick xmlns:r="http://schemas.openxmlformats.org/officeDocument/2006/relationships" r:id="R88afcfb4d3df45c7"/>
+                <a:hlinkClick xmlns:r="http://schemas.openxmlformats.org/officeDocument/2006/relationships" r:id="R5bfb66f7fbea4ca4"/>
               </a:rPr>
               <a:t>Open TEST1 assignment form</a:t>
             </a:r>
@@ -15325,7 +13570,7 @@
           <p:cNvPr id="14" name="">
             <a:extLst xmlns:a="http://schemas.openxmlformats.org/drawingml/2006/main">
               <a:ext uri="{FF2B5EF4-FFF2-40B4-BE49-F238E27FC236}">
-                <a16:creationId xmlns:a16="http://schemas.microsoft.com/office/drawing/2014/main" id="{1BE535D3-A2DC-4D97-BE0E-CC7982C3039E}"/>
+                <a16:creationId xmlns:a16="http://schemas.microsoft.com/office/drawing/2014/main" id="{D7B82CE8-81F8-4366-A912-3DFC5E5411DD}"/>
               </a:ext>
             </a:extLst>
           </p:cNvPr>
@@ -15382,7 +13627,7 @@
           <p:cNvPr id="15" name="">
             <a:extLst xmlns:a="http://schemas.openxmlformats.org/drawingml/2006/main">
               <a:ext uri="{FF2B5EF4-FFF2-40B4-BE49-F238E27FC236}">
-                <a16:creationId xmlns:a16="http://schemas.microsoft.com/office/drawing/2014/main" id="{70E25D39-8D79-4DBF-9E34-6CC52429DC06}"/>
+                <a16:creationId xmlns:a16="http://schemas.microsoft.com/office/drawing/2014/main" id="{CD87D853-6303-4837-A6F5-2BC2A50FA45F}"/>
               </a:ext>
             </a:extLst>
           </p:cNvPr>
@@ -15437,7 +13682,7 @@
     </p:spTree>
     <p:extLst>
       <p:ext uri="{BB962C8B-B14F-4D97-AF65-F5344CB8AC3E}">
-        <p14:creationId xmlns:p14="http://schemas.microsoft.com/office/powerpoint/2010/main" val="512938124"/>
+        <p14:creationId xmlns:p14="http://schemas.microsoft.com/office/powerpoint/2010/main" val="810804078"/>
       </p:ext>
     </p:extLst>
   </p:cSld>
@@ -15468,7 +13713,7 @@
           <p:cNvPr id="10" name="">
             <a:extLst xmlns:a="http://schemas.openxmlformats.org/drawingml/2006/main">
               <a:ext uri="{FF2B5EF4-FFF2-40B4-BE49-F238E27FC236}">
-                <a16:creationId xmlns:a16="http://schemas.microsoft.com/office/drawing/2014/main" id="{C138790B-B94C-45DC-B823-EA565A945101}"/>
+                <a16:creationId xmlns:a16="http://schemas.microsoft.com/office/drawing/2014/main" id="{68BE401C-757F-48A2-8F01-5FF07CEE0CA0}"/>
               </a:ext>
             </a:extLst>
           </p:cNvPr>
@@ -15498,7 +13743,7 @@
           <p:cNvPr id="2" name="">
             <a:extLst xmlns:a="http://schemas.openxmlformats.org/drawingml/2006/main">
               <a:ext uri="{FF2B5EF4-FFF2-40B4-BE49-F238E27FC236}">
-                <a16:creationId xmlns:a16="http://schemas.microsoft.com/office/drawing/2014/main" id="{8D3E277A-7D1A-423B-9448-E47835AE2224}"/>
+                <a16:creationId xmlns:a16="http://schemas.microsoft.com/office/drawing/2014/main" id="{CAD43FA7-DC2B-43F7-B0DA-F6A1C71F7EBF}"/>
               </a:ext>
             </a:extLst>
           </p:cNvPr>
@@ -15555,7 +13800,7 @@
           <p:cNvPr id="3" name="">
             <a:extLst xmlns:a="http://schemas.openxmlformats.org/drawingml/2006/main">
               <a:ext uri="{FF2B5EF4-FFF2-40B4-BE49-F238E27FC236}">
-                <a16:creationId xmlns:a16="http://schemas.microsoft.com/office/drawing/2014/main" id="{57D7A772-3D3D-4791-BFE5-A8B6E89D9D7C}"/>
+                <a16:creationId xmlns:a16="http://schemas.microsoft.com/office/drawing/2014/main" id="{6D452AF7-764F-4EBB-A578-40F5439ECDA8}"/>
               </a:ext>
             </a:extLst>
           </p:cNvPr>
@@ -15612,7 +13857,7 @@
           <p:cNvPr id="4" name="">
             <a:extLst xmlns:a="http://schemas.openxmlformats.org/drawingml/2006/main">
               <a:ext uri="{FF2B5EF4-FFF2-40B4-BE49-F238E27FC236}">
-                <a16:creationId xmlns:a16="http://schemas.microsoft.com/office/drawing/2014/main" id="{72C0B2E0-4078-4A41-96EE-B72B41ED8245}"/>
+                <a16:creationId xmlns:a16="http://schemas.microsoft.com/office/drawing/2014/main" id="{E9D5121A-1DF8-47EC-8475-9A24AF474392}"/>
               </a:ext>
             </a:extLst>
           </p:cNvPr>
@@ -15642,7 +13887,7 @@
           <p:cNvPr id="5" name="">
             <a:extLst xmlns:a="http://schemas.openxmlformats.org/drawingml/2006/main">
               <a:ext uri="{FF2B5EF4-FFF2-40B4-BE49-F238E27FC236}">
-                <a16:creationId xmlns:a16="http://schemas.microsoft.com/office/drawing/2014/main" id="{073FA60D-C2AF-43C8-B1E6-B1CEA19064C9}"/>
+                <a16:creationId xmlns:a16="http://schemas.microsoft.com/office/drawing/2014/main" id="{578568BE-FCA3-45CB-A819-F5E3E8299A9A}"/>
               </a:ext>
             </a:extLst>
           </p:cNvPr>
@@ -15699,7 +13944,7 @@
           <p:cNvPr id="6" name="">
             <a:extLst xmlns:a="http://schemas.openxmlformats.org/drawingml/2006/main">
               <a:ext uri="{FF2B5EF4-FFF2-40B4-BE49-F238E27FC236}">
-                <a16:creationId xmlns:a16="http://schemas.microsoft.com/office/drawing/2014/main" id="{FD3FD36D-1D0E-4405-8AD8-F0A78FC94FEB}"/>
+                <a16:creationId xmlns:a16="http://schemas.microsoft.com/office/drawing/2014/main" id="{6CC282C1-53A7-4420-8097-C1496643EAD0}"/>
               </a:ext>
             </a:extLst>
           </p:cNvPr>
@@ -15784,7 +14029,7 @@
           <p:cNvPr id="7" name="">
             <a:extLst xmlns:a="http://schemas.openxmlformats.org/drawingml/2006/main">
               <a:ext uri="{FF2B5EF4-FFF2-40B4-BE49-F238E27FC236}">
-                <a16:creationId xmlns:a16="http://schemas.microsoft.com/office/drawing/2014/main" id="{A8A41ABC-EBCA-4CD9-9B03-A47878A7304D}"/>
+                <a16:creationId xmlns:a16="http://schemas.microsoft.com/office/drawing/2014/main" id="{3BD106A5-5F85-4E12-8FB8-9390A46232F3}"/>
               </a:ext>
             </a:extLst>
           </p:cNvPr>
@@ -15841,7 +14086,7 @@
           <p:cNvPr id="8" name="">
             <a:extLst xmlns:a="http://schemas.openxmlformats.org/drawingml/2006/main">
               <a:ext uri="{FF2B5EF4-FFF2-40B4-BE49-F238E27FC236}">
-                <a16:creationId xmlns:a16="http://schemas.microsoft.com/office/drawing/2014/main" id="{5DFD526B-4A89-4C38-9069-7955993D9450}"/>
+                <a16:creationId xmlns:a16="http://schemas.microsoft.com/office/drawing/2014/main" id="{B00BDE71-BA33-4416-B43A-9C1E66E8F4CA}"/>
               </a:ext>
             </a:extLst>
           </p:cNvPr>
@@ -15898,7 +14143,7 @@
           <p:cNvPr id="9" name="">
             <a:extLst xmlns:a="http://schemas.openxmlformats.org/drawingml/2006/main">
               <a:ext uri="{FF2B5EF4-FFF2-40B4-BE49-F238E27FC236}">
-                <a16:creationId xmlns:a16="http://schemas.microsoft.com/office/drawing/2014/main" id="{48522360-B5A7-4FB1-A844-C86A151433B6}"/>
+                <a16:creationId xmlns:a16="http://schemas.microsoft.com/office/drawing/2014/main" id="{EE2858D3-BFC4-4B20-B66C-D7B0CAFA354A}"/>
               </a:ext>
             </a:extLst>
           </p:cNvPr>
@@ -15953,7 +14198,7 @@
     </p:spTree>
     <p:extLst>
       <p:ext uri="{BB962C8B-B14F-4D97-AF65-F5344CB8AC3E}">
-        <p14:creationId xmlns:p14="http://schemas.microsoft.com/office/powerpoint/2010/main" val="1601114801"/>
+        <p14:creationId xmlns:p14="http://schemas.microsoft.com/office/powerpoint/2010/main" val="932972112"/>
       </p:ext>
     </p:extLst>
   </p:cSld>
@@ -15984,7 +14229,7 @@
           <p:cNvPr id="7" name="">
             <a:extLst xmlns:a="http://schemas.openxmlformats.org/drawingml/2006/main">
               <a:ext uri="{FF2B5EF4-FFF2-40B4-BE49-F238E27FC236}">
-                <a16:creationId xmlns:a16="http://schemas.microsoft.com/office/drawing/2014/main" id="{65276680-F8E2-48DE-87EB-6CC7A71E48DA}"/>
+                <a16:creationId xmlns:a16="http://schemas.microsoft.com/office/drawing/2014/main" id="{5B6FA372-DBE7-4925-9CD4-9B29982D6B14}"/>
               </a:ext>
             </a:extLst>
           </p:cNvPr>
@@ -16041,7 +14286,7 @@
           <p:cNvPr id="2" name="">
             <a:extLst xmlns:a="http://schemas.openxmlformats.org/drawingml/2006/main">
               <a:ext uri="{FF2B5EF4-FFF2-40B4-BE49-F238E27FC236}">
-                <a16:creationId xmlns:a16="http://schemas.microsoft.com/office/drawing/2014/main" id="{4D72942F-10DE-492F-AD35-15204E5ED6B2}"/>
+                <a16:creationId xmlns:a16="http://schemas.microsoft.com/office/drawing/2014/main" id="{F317DBF2-8D1E-4FCD-A82F-6380AC2D0C71}"/>
               </a:ext>
             </a:extLst>
           </p:cNvPr>
@@ -16098,7 +14343,7 @@
           <p:cNvPr id="3" name="">
             <a:extLst xmlns:a="http://schemas.openxmlformats.org/drawingml/2006/main">
               <a:ext uri="{FF2B5EF4-FFF2-40B4-BE49-F238E27FC236}">
-                <a16:creationId xmlns:a16="http://schemas.microsoft.com/office/drawing/2014/main" id="{2B96840E-FC66-4274-8A34-23583F299500}"/>
+                <a16:creationId xmlns:a16="http://schemas.microsoft.com/office/drawing/2014/main" id="{F95BE6B9-E581-4A3B-AF01-532194B72709}"/>
               </a:ext>
             </a:extLst>
           </p:cNvPr>
@@ -16155,7 +14400,7 @@
           <p:cNvPr id="4" name="">
             <a:extLst xmlns:a="http://schemas.openxmlformats.org/drawingml/2006/main">
               <a:ext uri="{FF2B5EF4-FFF2-40B4-BE49-F238E27FC236}">
-                <a16:creationId xmlns:a16="http://schemas.microsoft.com/office/drawing/2014/main" id="{1261CF9D-B6BB-4070-A5A2-E89F74D17BD1}"/>
+                <a16:creationId xmlns:a16="http://schemas.microsoft.com/office/drawing/2014/main" id="{E50EADA8-5E0A-4D14-B48B-9FD7DF9D3696}"/>
               </a:ext>
             </a:extLst>
           </p:cNvPr>
@@ -16240,7 +14485,7 @@
           <p:cNvPr id="5" name="">
             <a:extLst xmlns:a="http://schemas.openxmlformats.org/drawingml/2006/main">
               <a:ext uri="{FF2B5EF4-FFF2-40B4-BE49-F238E27FC236}">
-                <a16:creationId xmlns:a16="http://schemas.microsoft.com/office/drawing/2014/main" id="{C24F010A-46B5-4CCB-99EE-22FCF46BE4DA}"/>
+                <a16:creationId xmlns:a16="http://schemas.microsoft.com/office/drawing/2014/main" id="{07524098-018A-4472-AB85-D7D0B06E0EEF}"/>
               </a:ext>
             </a:extLst>
           </p:cNvPr>
@@ -16297,7 +14542,7 @@
           <p:cNvPr id="6" name="">
             <a:extLst xmlns:a="http://schemas.openxmlformats.org/drawingml/2006/main">
               <a:ext uri="{FF2B5EF4-FFF2-40B4-BE49-F238E27FC236}">
-                <a16:creationId xmlns:a16="http://schemas.microsoft.com/office/drawing/2014/main" id="{AEFB25DF-E0D6-4A97-85D8-14F589E99B27}"/>
+                <a16:creationId xmlns:a16="http://schemas.microsoft.com/office/drawing/2014/main" id="{2200F817-64E2-45EF-A9DE-5ABAB551544A}"/>
               </a:ext>
             </a:extLst>
           </p:cNvPr>
@@ -16352,7 +14597,7 @@
     </p:spTree>
     <p:extLst>
       <p:ext uri="{BB962C8B-B14F-4D97-AF65-F5344CB8AC3E}">
-        <p14:creationId xmlns:p14="http://schemas.microsoft.com/office/powerpoint/2010/main" val="758958830"/>
+        <p14:creationId xmlns:p14="http://schemas.microsoft.com/office/powerpoint/2010/main" val="1414892683"/>
       </p:ext>
     </p:extLst>
   </p:cSld>
@@ -16383,7 +14628,7 @@
           <p:cNvPr id="7" name="">
             <a:extLst xmlns:a="http://schemas.openxmlformats.org/drawingml/2006/main">
               <a:ext uri="{FF2B5EF4-FFF2-40B4-BE49-F238E27FC236}">
-                <a16:creationId xmlns:a16="http://schemas.microsoft.com/office/drawing/2014/main" id="{A9B107A7-3409-47C7-B7F5-DF0B0D72A2BD}"/>
+                <a16:creationId xmlns:a16="http://schemas.microsoft.com/office/drawing/2014/main" id="{27D5A194-55F3-44D9-8E1E-46863889B69D}"/>
               </a:ext>
             </a:extLst>
           </p:cNvPr>
@@ -16413,7 +14658,7 @@
           <p:cNvPr id="2" name="">
             <a:extLst xmlns:a="http://schemas.openxmlformats.org/drawingml/2006/main">
               <a:ext uri="{FF2B5EF4-FFF2-40B4-BE49-F238E27FC236}">
-                <a16:creationId xmlns:a16="http://schemas.microsoft.com/office/drawing/2014/main" id="{F21BF7B8-8D4D-4F7E-BC5A-63CB068FF249}"/>
+                <a16:creationId xmlns:a16="http://schemas.microsoft.com/office/drawing/2014/main" id="{7B940AD2-F4B1-4E62-80DF-62992519E8A3}"/>
               </a:ext>
             </a:extLst>
           </p:cNvPr>
@@ -16470,7 +14715,7 @@
           <p:cNvPr id="3" name="">
             <a:extLst xmlns:a="http://schemas.openxmlformats.org/drawingml/2006/main">
               <a:ext uri="{FF2B5EF4-FFF2-40B4-BE49-F238E27FC236}">
-                <a16:creationId xmlns:a16="http://schemas.microsoft.com/office/drawing/2014/main" id="{07D7B8E0-1632-47E3-93AE-89416A8C12C2}"/>
+                <a16:creationId xmlns:a16="http://schemas.microsoft.com/office/drawing/2014/main" id="{F26A512B-47E3-42A4-9BD4-2792B3DC8388}"/>
               </a:ext>
             </a:extLst>
           </p:cNvPr>
@@ -16527,7 +14772,7 @@
           <p:cNvPr id="4" name="">
             <a:extLst xmlns:a="http://schemas.openxmlformats.org/drawingml/2006/main">
               <a:ext uri="{FF2B5EF4-FFF2-40B4-BE49-F238E27FC236}">
-                <a16:creationId xmlns:a16="http://schemas.microsoft.com/office/drawing/2014/main" id="{5033B087-BA34-4D55-9C51-C1C8D6943BD8}"/>
+                <a16:creationId xmlns:a16="http://schemas.microsoft.com/office/drawing/2014/main" id="{AEC55F5A-4C35-4501-BD1F-889CC6A2DAEB}"/>
               </a:ext>
             </a:extLst>
           </p:cNvPr>
@@ -16557,7 +14802,7 @@
           <p:cNvPr id="5" name="">
             <a:extLst xmlns:a="http://schemas.openxmlformats.org/drawingml/2006/main">
               <a:ext uri="{FF2B5EF4-FFF2-40B4-BE49-F238E27FC236}">
-                <a16:creationId xmlns:a16="http://schemas.microsoft.com/office/drawing/2014/main" id="{7F9E86A0-5586-4781-A5C8-20E7A0291143}"/>
+                <a16:creationId xmlns:a16="http://schemas.microsoft.com/office/drawing/2014/main" id="{E741F15C-4555-43E9-A210-FD3CA80B5157}"/>
               </a:ext>
             </a:extLst>
           </p:cNvPr>
@@ -16614,7 +14859,7 @@
           <p:cNvPr id="6" name="">
             <a:extLst xmlns:a="http://schemas.openxmlformats.org/drawingml/2006/main">
               <a:ext uri="{FF2B5EF4-FFF2-40B4-BE49-F238E27FC236}">
-                <a16:creationId xmlns:a16="http://schemas.microsoft.com/office/drawing/2014/main" id="{E776DEF8-C922-4ABD-A44B-FF7B56F81453}"/>
+                <a16:creationId xmlns:a16="http://schemas.microsoft.com/office/drawing/2014/main" id="{272EC2C5-D22A-41F5-B328-FEFF6ED714AE}"/>
               </a:ext>
             </a:extLst>
           </p:cNvPr>
@@ -16669,7 +14914,7 @@
     </p:spTree>
     <p:extLst>
       <p:ext uri="{BB962C8B-B14F-4D97-AF65-F5344CB8AC3E}">
-        <p14:creationId xmlns:p14="http://schemas.microsoft.com/office/powerpoint/2010/main" val="2026150630"/>
+        <p14:creationId xmlns:p14="http://schemas.microsoft.com/office/powerpoint/2010/main" val="1850595399"/>
       </p:ext>
     </p:extLst>
   </p:cSld>
@@ -16700,7 +14945,7 @@
           <p:cNvPr id="11" name="">
             <a:extLst xmlns:a="http://schemas.openxmlformats.org/drawingml/2006/main">
               <a:ext uri="{FF2B5EF4-FFF2-40B4-BE49-F238E27FC236}">
-                <a16:creationId xmlns:a16="http://schemas.microsoft.com/office/drawing/2014/main" id="{D0F1AA85-ED2F-4E6E-BA48-9C7DA44F5EEC}"/>
+                <a16:creationId xmlns:a16="http://schemas.microsoft.com/office/drawing/2014/main" id="{4C6726A6-7C64-475D-ACA7-7DEA11C31714}"/>
               </a:ext>
             </a:extLst>
           </p:cNvPr>
@@ -16730,7 +14975,7 @@
           <p:cNvPr id="2" name="">
             <a:extLst xmlns:a="http://schemas.openxmlformats.org/drawingml/2006/main">
               <a:ext uri="{FF2B5EF4-FFF2-40B4-BE49-F238E27FC236}">
-                <a16:creationId xmlns:a16="http://schemas.microsoft.com/office/drawing/2014/main" id="{8DD014FB-81DA-4974-A8D9-5E26E25E7B25}"/>
+                <a16:creationId xmlns:a16="http://schemas.microsoft.com/office/drawing/2014/main" id="{5E15CFD1-35DC-45DF-9427-A46AEAAF9979}"/>
               </a:ext>
             </a:extLst>
           </p:cNvPr>
@@ -16787,7 +15032,7 @@
           <p:cNvPr id="3" name="">
             <a:extLst xmlns:a="http://schemas.openxmlformats.org/drawingml/2006/main">
               <a:ext uri="{FF2B5EF4-FFF2-40B4-BE49-F238E27FC236}">
-                <a16:creationId xmlns:a16="http://schemas.microsoft.com/office/drawing/2014/main" id="{F3081D22-F8B4-4C93-BF3D-C3DC75602F3B}"/>
+                <a16:creationId xmlns:a16="http://schemas.microsoft.com/office/drawing/2014/main" id="{775CCF6F-1318-41CC-AC4A-BB4E50B92438}"/>
               </a:ext>
             </a:extLst>
           </p:cNvPr>
@@ -16844,7 +15089,7 @@
           <p:cNvPr id="4" name="">
             <a:extLst xmlns:a="http://schemas.openxmlformats.org/drawingml/2006/main">
               <a:ext uri="{FF2B5EF4-FFF2-40B4-BE49-F238E27FC236}">
-                <a16:creationId xmlns:a16="http://schemas.microsoft.com/office/drawing/2014/main" id="{941D9B97-23CC-4486-A5F0-C7ED0D0E66A2}"/>
+                <a16:creationId xmlns:a16="http://schemas.microsoft.com/office/drawing/2014/main" id="{F20F8A8B-B984-46AF-AAC0-D332C4D4A9CC}"/>
               </a:ext>
             </a:extLst>
           </p:cNvPr>
@@ -16901,7 +15146,7 @@
           <p:cNvPr id="5" name="">
             <a:extLst xmlns:a="http://schemas.openxmlformats.org/drawingml/2006/main">
               <a:ext uri="{FF2B5EF4-FFF2-40B4-BE49-F238E27FC236}">
-                <a16:creationId xmlns:a16="http://schemas.microsoft.com/office/drawing/2014/main" id="{29B7AFBE-99CF-4221-AC37-0254A0472479}"/>
+                <a16:creationId xmlns:a16="http://schemas.microsoft.com/office/drawing/2014/main" id="{5A7DCFE3-9C76-4082-978E-2CFA627E9699}"/>
               </a:ext>
             </a:extLst>
           </p:cNvPr>
@@ -16958,7 +15203,7 @@
           <p:cNvPr id="6" name="">
             <a:extLst xmlns:a="http://schemas.openxmlformats.org/drawingml/2006/main">
               <a:ext uri="{FF2B5EF4-FFF2-40B4-BE49-F238E27FC236}">
-                <a16:creationId xmlns:a16="http://schemas.microsoft.com/office/drawing/2014/main" id="{271B855D-2B67-488A-BB0F-A4E11305B471}"/>
+                <a16:creationId xmlns:a16="http://schemas.microsoft.com/office/drawing/2014/main" id="{2EBB3D10-DBF2-44B5-90AB-47CBE63ACE76}"/>
               </a:ext>
             </a:extLst>
           </p:cNvPr>
@@ -17015,7 +15260,7 @@
           <p:cNvPr id="7" name="">
             <a:extLst xmlns:a="http://schemas.openxmlformats.org/drawingml/2006/main">
               <a:ext uri="{FF2B5EF4-FFF2-40B4-BE49-F238E27FC236}">
-                <a16:creationId xmlns:a16="http://schemas.microsoft.com/office/drawing/2014/main" id="{FCD6F78A-A6E6-4D2B-8F64-474228861125}"/>
+                <a16:creationId xmlns:a16="http://schemas.microsoft.com/office/drawing/2014/main" id="{70B27C69-A590-4EE0-87A6-516FB58CB122}"/>
               </a:ext>
             </a:extLst>
           </p:cNvPr>
@@ -17072,7 +15317,7 @@
           <p:cNvPr id="8" name="">
             <a:extLst xmlns:a="http://schemas.openxmlformats.org/drawingml/2006/main">
               <a:ext uri="{FF2B5EF4-FFF2-40B4-BE49-F238E27FC236}">
-                <a16:creationId xmlns:a16="http://schemas.microsoft.com/office/drawing/2014/main" id="{B57F94F0-A238-4A0B-B43C-82FFEFB74D32}"/>
+                <a16:creationId xmlns:a16="http://schemas.microsoft.com/office/drawing/2014/main" id="{42A84E53-F509-4100-96F7-17B2302381F3}"/>
               </a:ext>
             </a:extLst>
           </p:cNvPr>
@@ -17129,7 +15374,7 @@
           <p:cNvPr id="9" name="">
             <a:extLst xmlns:a="http://schemas.openxmlformats.org/drawingml/2006/main">
               <a:ext uri="{FF2B5EF4-FFF2-40B4-BE49-F238E27FC236}">
-                <a16:creationId xmlns:a16="http://schemas.microsoft.com/office/drawing/2014/main" id="{10E3AF95-8D90-4DA6-9BE9-0BBA4F5D455C}"/>
+                <a16:creationId xmlns:a16="http://schemas.microsoft.com/office/drawing/2014/main" id="{3344A53A-DC9C-4B7A-95B3-552D2F1AE167}"/>
               </a:ext>
             </a:extLst>
           </p:cNvPr>
@@ -17186,7 +15431,7 @@
           <p:cNvPr id="10" name="">
             <a:extLst xmlns:a="http://schemas.openxmlformats.org/drawingml/2006/main">
               <a:ext uri="{FF2B5EF4-FFF2-40B4-BE49-F238E27FC236}">
-                <a16:creationId xmlns:a16="http://schemas.microsoft.com/office/drawing/2014/main" id="{E18691B1-4B4B-4B6D-B177-52713ABF9831}"/>
+                <a16:creationId xmlns:a16="http://schemas.microsoft.com/office/drawing/2014/main" id="{268C5A2B-A2F9-4F49-98F8-9987365D8871}"/>
               </a:ext>
             </a:extLst>
           </p:cNvPr>
@@ -17241,7 +15486,7 @@
     </p:spTree>
     <p:extLst>
       <p:ext uri="{BB962C8B-B14F-4D97-AF65-F5344CB8AC3E}">
-        <p14:creationId xmlns:p14="http://schemas.microsoft.com/office/powerpoint/2010/main" val="1045165107"/>
+        <p14:creationId xmlns:p14="http://schemas.microsoft.com/office/powerpoint/2010/main" val="1144335419"/>
       </p:ext>
     </p:extLst>
   </p:cSld>
@@ -17272,7 +15517,7 @@
           <p:cNvPr id="11" name="">
             <a:extLst xmlns:a="http://schemas.openxmlformats.org/drawingml/2006/main">
               <a:ext uri="{FF2B5EF4-FFF2-40B4-BE49-F238E27FC236}">
-                <a16:creationId xmlns:a16="http://schemas.microsoft.com/office/drawing/2014/main" id="{0B4C939B-AAC1-455A-8DF2-75C1967E9BD8}"/>
+                <a16:creationId xmlns:a16="http://schemas.microsoft.com/office/drawing/2014/main" id="{11A75AE8-10C6-46A7-9213-5E3D74D4DE3A}"/>
               </a:ext>
             </a:extLst>
           </p:cNvPr>
@@ -17302,7 +15547,7 @@
           <p:cNvPr id="2" name="">
             <a:extLst xmlns:a="http://schemas.openxmlformats.org/drawingml/2006/main">
               <a:ext uri="{FF2B5EF4-FFF2-40B4-BE49-F238E27FC236}">
-                <a16:creationId xmlns:a16="http://schemas.microsoft.com/office/drawing/2014/main" id="{40957AEE-92C0-4F25-A82B-2466086C8706}"/>
+                <a16:creationId xmlns:a16="http://schemas.microsoft.com/office/drawing/2014/main" id="{6BD138A6-7F97-4839-88FF-34B67E022D1A}"/>
               </a:ext>
             </a:extLst>
           </p:cNvPr>
@@ -17359,7 +15604,7 @@
           <p:cNvPr id="3" name="">
             <a:extLst xmlns:a="http://schemas.openxmlformats.org/drawingml/2006/main">
               <a:ext uri="{FF2B5EF4-FFF2-40B4-BE49-F238E27FC236}">
-                <a16:creationId xmlns:a16="http://schemas.microsoft.com/office/drawing/2014/main" id="{6667229E-593B-4611-9CD5-086845539AA7}"/>
+                <a16:creationId xmlns:a16="http://schemas.microsoft.com/office/drawing/2014/main" id="{E1A4A534-C701-4CFA-82B6-A9010EC09846}"/>
               </a:ext>
             </a:extLst>
           </p:cNvPr>
@@ -17416,7 +15661,7 @@
           <p:cNvPr id="4" name="">
             <a:extLst xmlns:a="http://schemas.openxmlformats.org/drawingml/2006/main">
               <a:ext uri="{FF2B5EF4-FFF2-40B4-BE49-F238E27FC236}">
-                <a16:creationId xmlns:a16="http://schemas.microsoft.com/office/drawing/2014/main" id="{782BC4B4-2CFF-4CB2-8C77-A132ABB4AC58}"/>
+                <a16:creationId xmlns:a16="http://schemas.microsoft.com/office/drawing/2014/main" id="{031925E6-40C8-4A9B-994E-4329DE922589}"/>
               </a:ext>
             </a:extLst>
           </p:cNvPr>
@@ -17473,7 +15718,7 @@
           <p:cNvPr id="5" name="">
             <a:extLst xmlns:a="http://schemas.openxmlformats.org/drawingml/2006/main">
               <a:ext uri="{FF2B5EF4-FFF2-40B4-BE49-F238E27FC236}">
-                <a16:creationId xmlns:a16="http://schemas.microsoft.com/office/drawing/2014/main" id="{D9CE8CAA-5D6B-447E-8AF3-4D86B08C16BE}"/>
+                <a16:creationId xmlns:a16="http://schemas.microsoft.com/office/drawing/2014/main" id="{2F881D78-4553-4B5F-9FD6-421782CD438D}"/>
               </a:ext>
             </a:extLst>
           </p:cNvPr>
@@ -17530,7 +15775,7 @@
           <p:cNvPr id="6" name="">
             <a:extLst xmlns:a="http://schemas.openxmlformats.org/drawingml/2006/main">
               <a:ext uri="{FF2B5EF4-FFF2-40B4-BE49-F238E27FC236}">
-                <a16:creationId xmlns:a16="http://schemas.microsoft.com/office/drawing/2014/main" id="{C139755F-5C86-4A3E-84D0-58B04D02F616}"/>
+                <a16:creationId xmlns:a16="http://schemas.microsoft.com/office/drawing/2014/main" id="{1C42A77F-1408-43E6-AFB7-C694A31647FB}"/>
               </a:ext>
             </a:extLst>
           </p:cNvPr>
@@ -17587,7 +15832,7 @@
           <p:cNvPr id="7" name="">
             <a:extLst xmlns:a="http://schemas.openxmlformats.org/drawingml/2006/main">
               <a:ext uri="{FF2B5EF4-FFF2-40B4-BE49-F238E27FC236}">
-                <a16:creationId xmlns:a16="http://schemas.microsoft.com/office/drawing/2014/main" id="{9F2F975F-2EE2-4195-865D-A75F5ABBC852}"/>
+                <a16:creationId xmlns:a16="http://schemas.microsoft.com/office/drawing/2014/main" id="{6ABB1321-4C56-4B73-9BB9-659A9FAE50A2}"/>
               </a:ext>
             </a:extLst>
           </p:cNvPr>
@@ -17644,7 +15889,7 @@
           <p:cNvPr id="8" name="">
             <a:extLst xmlns:a="http://schemas.openxmlformats.org/drawingml/2006/main">
               <a:ext uri="{FF2B5EF4-FFF2-40B4-BE49-F238E27FC236}">
-                <a16:creationId xmlns:a16="http://schemas.microsoft.com/office/drawing/2014/main" id="{13ABF4BF-EFCA-4DBD-8BC9-912782D2539D}"/>
+                <a16:creationId xmlns:a16="http://schemas.microsoft.com/office/drawing/2014/main" id="{324DC810-8F3B-4E40-BA6B-023C6109306E}"/>
               </a:ext>
             </a:extLst>
           </p:cNvPr>
@@ -17701,7 +15946,7 @@
           <p:cNvPr id="9" name="">
             <a:extLst xmlns:a="http://schemas.openxmlformats.org/drawingml/2006/main">
               <a:ext uri="{FF2B5EF4-FFF2-40B4-BE49-F238E27FC236}">
-                <a16:creationId xmlns:a16="http://schemas.microsoft.com/office/drawing/2014/main" id="{5BA21591-90EC-430A-934C-B6A6EA19382D}"/>
+                <a16:creationId xmlns:a16="http://schemas.microsoft.com/office/drawing/2014/main" id="{47096F65-EC9D-4841-9436-1DD4FCA10BF1}"/>
               </a:ext>
             </a:extLst>
           </p:cNvPr>
@@ -17758,7 +16003,7 @@
           <p:cNvPr id="10" name="">
             <a:extLst xmlns:a="http://schemas.openxmlformats.org/drawingml/2006/main">
               <a:ext uri="{FF2B5EF4-FFF2-40B4-BE49-F238E27FC236}">
-                <a16:creationId xmlns:a16="http://schemas.microsoft.com/office/drawing/2014/main" id="{BCA94A9E-9E4B-44D0-9FB4-F507D81504A6}"/>
+                <a16:creationId xmlns:a16="http://schemas.microsoft.com/office/drawing/2014/main" id="{F9AE27E3-3499-4CB1-ABBE-3E2CD9DD046A}"/>
               </a:ext>
             </a:extLst>
           </p:cNvPr>
@@ -17813,7 +16058,7 @@
     </p:spTree>
     <p:extLst>
       <p:ext uri="{BB962C8B-B14F-4D97-AF65-F5344CB8AC3E}">
-        <p14:creationId xmlns:p14="http://schemas.microsoft.com/office/powerpoint/2010/main" val="763671765"/>
+        <p14:creationId xmlns:p14="http://schemas.microsoft.com/office/powerpoint/2010/main" val="701534726"/>
       </p:ext>
     </p:extLst>
   </p:cSld>
@@ -17844,7 +16089,7 @@
           <p:cNvPr id="11" name="">
             <a:extLst xmlns:a="http://schemas.openxmlformats.org/drawingml/2006/main">
               <a:ext uri="{FF2B5EF4-FFF2-40B4-BE49-F238E27FC236}">
-                <a16:creationId xmlns:a16="http://schemas.microsoft.com/office/drawing/2014/main" id="{05B664C2-27B6-41BC-BD32-20DC04E8A99C}"/>
+                <a16:creationId xmlns:a16="http://schemas.microsoft.com/office/drawing/2014/main" id="{0E430324-C6AC-4520-8E78-AD222E9FEE97}"/>
               </a:ext>
             </a:extLst>
           </p:cNvPr>
@@ -17874,7 +16119,7 @@
           <p:cNvPr id="2" name="">
             <a:extLst xmlns:a="http://schemas.openxmlformats.org/drawingml/2006/main">
               <a:ext uri="{FF2B5EF4-FFF2-40B4-BE49-F238E27FC236}">
-                <a16:creationId xmlns:a16="http://schemas.microsoft.com/office/drawing/2014/main" id="{0752016D-8412-4F82-B6C0-AE4391B10A25}"/>
+                <a16:creationId xmlns:a16="http://schemas.microsoft.com/office/drawing/2014/main" id="{DFCA451B-FC8C-4481-98BA-3CF4A5A227F9}"/>
               </a:ext>
             </a:extLst>
           </p:cNvPr>
@@ -17931,7 +16176,7 @@
           <p:cNvPr id="3" name="">
             <a:extLst xmlns:a="http://schemas.openxmlformats.org/drawingml/2006/main">
               <a:ext uri="{FF2B5EF4-FFF2-40B4-BE49-F238E27FC236}">
-                <a16:creationId xmlns:a16="http://schemas.microsoft.com/office/drawing/2014/main" id="{46E89F2E-0D19-4DA0-BF84-3D3E3CB6925B}"/>
+                <a16:creationId xmlns:a16="http://schemas.microsoft.com/office/drawing/2014/main" id="{208E9B70-73D1-43BD-81EA-F21C3AA2340B}"/>
               </a:ext>
             </a:extLst>
           </p:cNvPr>
@@ -17988,7 +16233,7 @@
           <p:cNvPr id="4" name="">
             <a:extLst xmlns:a="http://schemas.openxmlformats.org/drawingml/2006/main">
               <a:ext uri="{FF2B5EF4-FFF2-40B4-BE49-F238E27FC236}">
-                <a16:creationId xmlns:a16="http://schemas.microsoft.com/office/drawing/2014/main" id="{DFAA40E2-7DF4-4C14-AAC7-D68FBCAC8262}"/>
+                <a16:creationId xmlns:a16="http://schemas.microsoft.com/office/drawing/2014/main" id="{64EC240B-7D29-46A9-BE8D-14D3D0E6427D}"/>
               </a:ext>
             </a:extLst>
           </p:cNvPr>
@@ -18045,7 +16290,7 @@
           <p:cNvPr id="5" name="">
             <a:extLst xmlns:a="http://schemas.openxmlformats.org/drawingml/2006/main">
               <a:ext uri="{FF2B5EF4-FFF2-40B4-BE49-F238E27FC236}">
-                <a16:creationId xmlns:a16="http://schemas.microsoft.com/office/drawing/2014/main" id="{66F6BE0A-CF16-44D2-B0AB-BD243E15C26B}"/>
+                <a16:creationId xmlns:a16="http://schemas.microsoft.com/office/drawing/2014/main" id="{86EF30D4-CB2F-42A5-9EB0-D2319F1290EE}"/>
               </a:ext>
             </a:extLst>
           </p:cNvPr>
@@ -18102,7 +16347,7 @@
           <p:cNvPr id="6" name="">
             <a:extLst xmlns:a="http://schemas.openxmlformats.org/drawingml/2006/main">
               <a:ext uri="{FF2B5EF4-FFF2-40B4-BE49-F238E27FC236}">
-                <a16:creationId xmlns:a16="http://schemas.microsoft.com/office/drawing/2014/main" id="{CD4BB8AE-975D-48D5-9EEE-FBEA638876A1}"/>
+                <a16:creationId xmlns:a16="http://schemas.microsoft.com/office/drawing/2014/main" id="{DE89B6B1-81FF-496F-B8AC-14A779C2475E}"/>
               </a:ext>
             </a:extLst>
           </p:cNvPr>
@@ -18159,7 +16404,7 @@
           <p:cNvPr id="7" name="">
             <a:extLst xmlns:a="http://schemas.openxmlformats.org/drawingml/2006/main">
               <a:ext uri="{FF2B5EF4-FFF2-40B4-BE49-F238E27FC236}">
-                <a16:creationId xmlns:a16="http://schemas.microsoft.com/office/drawing/2014/main" id="{88F17B54-EC66-4771-AF92-57F06CE26B92}"/>
+                <a16:creationId xmlns:a16="http://schemas.microsoft.com/office/drawing/2014/main" id="{487C1742-3FD1-4605-93F1-0F8405DC1FD0}"/>
               </a:ext>
             </a:extLst>
           </p:cNvPr>
@@ -18216,7 +16461,7 @@
           <p:cNvPr id="8" name="">
             <a:extLst xmlns:a="http://schemas.openxmlformats.org/drawingml/2006/main">
               <a:ext uri="{FF2B5EF4-FFF2-40B4-BE49-F238E27FC236}">
-                <a16:creationId xmlns:a16="http://schemas.microsoft.com/office/drawing/2014/main" id="{9DAB19F0-0B21-41C0-9C94-9C16F1B9AD68}"/>
+                <a16:creationId xmlns:a16="http://schemas.microsoft.com/office/drawing/2014/main" id="{F08B8EBB-33DB-4E8F-9747-919A907D491F}"/>
               </a:ext>
             </a:extLst>
           </p:cNvPr>
@@ -18273,7 +16518,7 @@
           <p:cNvPr id="9" name="">
             <a:extLst xmlns:a="http://schemas.openxmlformats.org/drawingml/2006/main">
               <a:ext uri="{FF2B5EF4-FFF2-40B4-BE49-F238E27FC236}">
-                <a16:creationId xmlns:a16="http://schemas.microsoft.com/office/drawing/2014/main" id="{2245709F-C7AD-4837-A3F9-B76E3FBB9B82}"/>
+                <a16:creationId xmlns:a16="http://schemas.microsoft.com/office/drawing/2014/main" id="{159A460E-FAFA-462E-A2A3-0C6DDA2B9659}"/>
               </a:ext>
             </a:extLst>
           </p:cNvPr>
@@ -18330,7 +16575,7 @@
           <p:cNvPr id="10" name="">
             <a:extLst xmlns:a="http://schemas.openxmlformats.org/drawingml/2006/main">
               <a:ext uri="{FF2B5EF4-FFF2-40B4-BE49-F238E27FC236}">
-                <a16:creationId xmlns:a16="http://schemas.microsoft.com/office/drawing/2014/main" id="{63995168-3B9C-49E8-BF01-C4B90328ED5A}"/>
+                <a16:creationId xmlns:a16="http://schemas.microsoft.com/office/drawing/2014/main" id="{9F0A9A46-4131-4833-AEC7-4B6691CF8CF4}"/>
               </a:ext>
             </a:extLst>
           </p:cNvPr>
@@ -18385,7 +16630,7 @@
     </p:spTree>
     <p:extLst>
       <p:ext uri="{BB962C8B-B14F-4D97-AF65-F5344CB8AC3E}">
-        <p14:creationId xmlns:p14="http://schemas.microsoft.com/office/powerpoint/2010/main" val="197618479"/>
+        <p14:creationId xmlns:p14="http://schemas.microsoft.com/office/powerpoint/2010/main" val="1853416966"/>
       </p:ext>
     </p:extLst>
   </p:cSld>
@@ -18416,7 +16661,7 @@
           <p:cNvPr id="12" name="">
             <a:extLst xmlns:a="http://schemas.openxmlformats.org/drawingml/2006/main">
               <a:ext uri="{FF2B5EF4-FFF2-40B4-BE49-F238E27FC236}">
-                <a16:creationId xmlns:a16="http://schemas.microsoft.com/office/drawing/2014/main" id="{A91B054B-4179-4E5D-A676-5B2671E76D20}"/>
+                <a16:creationId xmlns:a16="http://schemas.microsoft.com/office/drawing/2014/main" id="{9DE221FC-14D9-4C95-A7C8-04DE404E00CA}"/>
               </a:ext>
             </a:extLst>
           </p:cNvPr>
@@ -18446,7 +16691,7 @@
           <p:cNvPr id="2" name="">
             <a:extLst xmlns:a="http://schemas.openxmlformats.org/drawingml/2006/main">
               <a:ext uri="{FF2B5EF4-FFF2-40B4-BE49-F238E27FC236}">
-                <a16:creationId xmlns:a16="http://schemas.microsoft.com/office/drawing/2014/main" id="{34801B12-FB97-4D7F-8F14-FCF63030E1FF}"/>
+                <a16:creationId xmlns:a16="http://schemas.microsoft.com/office/drawing/2014/main" id="{8AEB96CE-3B8B-453C-B42C-B989E693EE88}"/>
               </a:ext>
             </a:extLst>
           </p:cNvPr>
@@ -18503,7 +16748,7 @@
           <p:cNvPr id="3" name="">
             <a:extLst xmlns:a="http://schemas.openxmlformats.org/drawingml/2006/main">
               <a:ext uri="{FF2B5EF4-FFF2-40B4-BE49-F238E27FC236}">
-                <a16:creationId xmlns:a16="http://schemas.microsoft.com/office/drawing/2014/main" id="{90F02B3F-4C50-4F87-A3A4-3CD0883056BB}"/>
+                <a16:creationId xmlns:a16="http://schemas.microsoft.com/office/drawing/2014/main" id="{29027019-AB44-4785-8A55-E9DFEA40C72A}"/>
               </a:ext>
             </a:extLst>
           </p:cNvPr>
@@ -18560,7 +16805,7 @@
           <p:cNvPr id="4" name="">
             <a:extLst xmlns:a="http://schemas.openxmlformats.org/drawingml/2006/main">
               <a:ext uri="{FF2B5EF4-FFF2-40B4-BE49-F238E27FC236}">
-                <a16:creationId xmlns:a16="http://schemas.microsoft.com/office/drawing/2014/main" id="{D0D749AE-3CA3-4F0B-AC35-AABC5ED79EE0}"/>
+                <a16:creationId xmlns:a16="http://schemas.microsoft.com/office/drawing/2014/main" id="{64CBC92D-15E2-417D-89A2-1AA3E0C1A864}"/>
               </a:ext>
             </a:extLst>
           </p:cNvPr>
@@ -18590,7 +16835,7 @@
           <p:cNvPr id="5" name="">
             <a:extLst xmlns:a="http://schemas.openxmlformats.org/drawingml/2006/main">
               <a:ext uri="{FF2B5EF4-FFF2-40B4-BE49-F238E27FC236}">
-                <a16:creationId xmlns:a16="http://schemas.microsoft.com/office/drawing/2014/main" id="{D4A7A480-F7F0-4C65-AD17-FC189333D0FA}"/>
+                <a16:creationId xmlns:a16="http://schemas.microsoft.com/office/drawing/2014/main" id="{D0610739-6B82-46B7-BC32-748793EF4B4D}"/>
               </a:ext>
             </a:extLst>
           </p:cNvPr>
@@ -18693,7 +16938,7 @@
           <p:cNvPr id="6" name="">
             <a:extLst xmlns:a="http://schemas.openxmlformats.org/drawingml/2006/main">
               <a:ext uri="{FF2B5EF4-FFF2-40B4-BE49-F238E27FC236}">
-                <a16:creationId xmlns:a16="http://schemas.microsoft.com/office/drawing/2014/main" id="{18AFEECC-B93D-4577-921B-B782BD21FD51}"/>
+                <a16:creationId xmlns:a16="http://schemas.microsoft.com/office/drawing/2014/main" id="{8CA9FEE9-FA90-44EC-A1DB-14A5048D8ED5}"/>
               </a:ext>
             </a:extLst>
           </p:cNvPr>
@@ -18750,7 +16995,7 @@
           <p:cNvPr id="7" name="">
             <a:extLst xmlns:a="http://schemas.openxmlformats.org/drawingml/2006/main">
               <a:ext uri="{FF2B5EF4-FFF2-40B4-BE49-F238E27FC236}">
-                <a16:creationId xmlns:a16="http://schemas.microsoft.com/office/drawing/2014/main" id="{54E3A01F-10A0-478D-B660-DF0441B83242}"/>
+                <a16:creationId xmlns:a16="http://schemas.microsoft.com/office/drawing/2014/main" id="{D4D1206F-C577-427B-865B-66AF74DD6008}"/>
               </a:ext>
             </a:extLst>
           </p:cNvPr>
@@ -18807,7 +17052,7 @@
           <p:cNvPr id="8" name="">
             <a:extLst xmlns:a="http://schemas.openxmlformats.org/drawingml/2006/main">
               <a:ext uri="{FF2B5EF4-FFF2-40B4-BE49-F238E27FC236}">
-                <a16:creationId xmlns:a16="http://schemas.microsoft.com/office/drawing/2014/main" id="{C48CADB8-8683-4BF3-867F-865BD21F3A4D}"/>
+                <a16:creationId xmlns:a16="http://schemas.microsoft.com/office/drawing/2014/main" id="{5F607D17-FEF1-4864-9FCF-A220C0041512}"/>
               </a:ext>
             </a:extLst>
           </p:cNvPr>
@@ -18864,7 +17109,7 @@
           <p:cNvPr id="9" name="">
             <a:extLst xmlns:a="http://schemas.openxmlformats.org/drawingml/2006/main">
               <a:ext uri="{FF2B5EF4-FFF2-40B4-BE49-F238E27FC236}">
-                <a16:creationId xmlns:a16="http://schemas.microsoft.com/office/drawing/2014/main" id="{80AA60AF-0A00-4CB3-96CB-33EE7D816280}"/>
+                <a16:creationId xmlns:a16="http://schemas.microsoft.com/office/drawing/2014/main" id="{4006910C-8322-46CC-9861-52745F21DC86}"/>
               </a:ext>
             </a:extLst>
           </p:cNvPr>
@@ -18921,7 +17166,7 @@
           <p:cNvPr id="10" name="">
             <a:extLst xmlns:a="http://schemas.openxmlformats.org/drawingml/2006/main">
               <a:ext uri="{FF2B5EF4-FFF2-40B4-BE49-F238E27FC236}">
-                <a16:creationId xmlns:a16="http://schemas.microsoft.com/office/drawing/2014/main" id="{5302BDD6-EA17-414F-BDCC-8C23EFD374FF}"/>
+                <a16:creationId xmlns:a16="http://schemas.microsoft.com/office/drawing/2014/main" id="{3B48BCDE-9C5D-4A2F-A252-CD51304F5ED1}"/>
               </a:ext>
             </a:extLst>
           </p:cNvPr>
@@ -18978,7 +17223,7 @@
           <p:cNvPr id="11" name="">
             <a:extLst xmlns:a="http://schemas.openxmlformats.org/drawingml/2006/main">
               <a:ext uri="{FF2B5EF4-FFF2-40B4-BE49-F238E27FC236}">
-                <a16:creationId xmlns:a16="http://schemas.microsoft.com/office/drawing/2014/main" id="{88075BDE-1F75-46EA-8D71-44DBF37D8273}"/>
+                <a16:creationId xmlns:a16="http://schemas.microsoft.com/office/drawing/2014/main" id="{722818F6-F0EE-40D0-8CC1-6DB34F068056}"/>
               </a:ext>
             </a:extLst>
           </p:cNvPr>
@@ -19033,7 +17278,7 @@
     </p:spTree>
     <p:extLst>
       <p:ext uri="{BB962C8B-B14F-4D97-AF65-F5344CB8AC3E}">
-        <p14:creationId xmlns:p14="http://schemas.microsoft.com/office/powerpoint/2010/main" val="1814883220"/>
+        <p14:creationId xmlns:p14="http://schemas.microsoft.com/office/powerpoint/2010/main" val="1989879137"/>
       </p:ext>
     </p:extLst>
   </p:cSld>
@@ -19064,7 +17309,7 @@
           <p:cNvPr id="13" name="">
             <a:extLst xmlns:a="http://schemas.openxmlformats.org/drawingml/2006/main">
               <a:ext uri="{FF2B5EF4-FFF2-40B4-BE49-F238E27FC236}">
-                <a16:creationId xmlns:a16="http://schemas.microsoft.com/office/drawing/2014/main" id="{278E7D65-EA92-4870-A665-61CF1019E945}"/>
+                <a16:creationId xmlns:a16="http://schemas.microsoft.com/office/drawing/2014/main" id="{BCFD9A13-508A-4C70-A832-F78588E8260C}"/>
               </a:ext>
             </a:extLst>
           </p:cNvPr>
@@ -19094,7 +17339,7 @@
           <p:cNvPr id="2" name="">
             <a:extLst xmlns:a="http://schemas.openxmlformats.org/drawingml/2006/main">
               <a:ext uri="{FF2B5EF4-FFF2-40B4-BE49-F238E27FC236}">
-                <a16:creationId xmlns:a16="http://schemas.microsoft.com/office/drawing/2014/main" id="{B8BCA399-8CC4-41B2-9F18-98483E086057}"/>
+                <a16:creationId xmlns:a16="http://schemas.microsoft.com/office/drawing/2014/main" id="{85C573F8-A649-4F97-9CC1-55A25FC24DDE}"/>
               </a:ext>
             </a:extLst>
           </p:cNvPr>
@@ -19151,7 +17396,7 @@
           <p:cNvPr id="3" name="">
             <a:extLst xmlns:a="http://schemas.openxmlformats.org/drawingml/2006/main">
               <a:ext uri="{FF2B5EF4-FFF2-40B4-BE49-F238E27FC236}">
-                <a16:creationId xmlns:a16="http://schemas.microsoft.com/office/drawing/2014/main" id="{401D78D3-57C9-4E79-A921-C51BE3AFD69E}"/>
+                <a16:creationId xmlns:a16="http://schemas.microsoft.com/office/drawing/2014/main" id="{AAE4DC46-283A-406F-AC29-9E88BE7490A0}"/>
               </a:ext>
             </a:extLst>
           </p:cNvPr>
@@ -19208,7 +17453,7 @@
           <p:cNvPr id="4" name="">
             <a:extLst xmlns:a="http://schemas.openxmlformats.org/drawingml/2006/main">
               <a:ext uri="{FF2B5EF4-FFF2-40B4-BE49-F238E27FC236}">
-                <a16:creationId xmlns:a16="http://schemas.microsoft.com/office/drawing/2014/main" id="{1FD61221-7DBC-4C11-9323-899D617BD6A6}"/>
+                <a16:creationId xmlns:a16="http://schemas.microsoft.com/office/drawing/2014/main" id="{84958350-3E92-41F9-B675-78F76EC9D2D9}"/>
               </a:ext>
             </a:extLst>
           </p:cNvPr>
@@ -19265,7 +17510,7 @@
           <p:cNvPr id="5" name="">
             <a:extLst xmlns:a="http://schemas.openxmlformats.org/drawingml/2006/main">
               <a:ext uri="{FF2B5EF4-FFF2-40B4-BE49-F238E27FC236}">
-                <a16:creationId xmlns:a16="http://schemas.microsoft.com/office/drawing/2014/main" id="{3DA342C7-B6C2-44E4-A682-95FA0981BA23}"/>
+                <a16:creationId xmlns:a16="http://schemas.microsoft.com/office/drawing/2014/main" id="{802D3D3B-AAC0-4E89-8D59-94ECC19EC7C2}"/>
               </a:ext>
             </a:extLst>
           </p:cNvPr>
@@ -19322,7 +17567,7 @@
           <p:cNvPr id="6" name="">
             <a:extLst xmlns:a="http://schemas.openxmlformats.org/drawingml/2006/main">
               <a:ext uri="{FF2B5EF4-FFF2-40B4-BE49-F238E27FC236}">
-                <a16:creationId xmlns:a16="http://schemas.microsoft.com/office/drawing/2014/main" id="{C56B5099-F5F7-4295-8407-4CD4B025023D}"/>
+                <a16:creationId xmlns:a16="http://schemas.microsoft.com/office/drawing/2014/main" id="{1C5C7AF8-3798-40CD-BC36-4D57DCD3FE35}"/>
               </a:ext>
             </a:extLst>
           </p:cNvPr>
@@ -19379,7 +17624,7 @@
           <p:cNvPr id="7" name="">
             <a:extLst xmlns:a="http://schemas.openxmlformats.org/drawingml/2006/main">
               <a:ext uri="{FF2B5EF4-FFF2-40B4-BE49-F238E27FC236}">
-                <a16:creationId xmlns:a16="http://schemas.microsoft.com/office/drawing/2014/main" id="{A29E63BA-FE9E-404A-9055-68DC265C9945}"/>
+                <a16:creationId xmlns:a16="http://schemas.microsoft.com/office/drawing/2014/main" id="{0A79A805-E638-4506-821B-2D9BDC6B50E1}"/>
               </a:ext>
             </a:extLst>
           </p:cNvPr>
@@ -19436,7 +17681,7 @@
           <p:cNvPr id="8" name="">
             <a:extLst xmlns:a="http://schemas.openxmlformats.org/drawingml/2006/main">
               <a:ext uri="{FF2B5EF4-FFF2-40B4-BE49-F238E27FC236}">
-                <a16:creationId xmlns:a16="http://schemas.microsoft.com/office/drawing/2014/main" id="{C09EDDFA-DB3B-45AA-90FD-5577B1F97841}"/>
+                <a16:creationId xmlns:a16="http://schemas.microsoft.com/office/drawing/2014/main" id="{FE20D90D-0E0B-4B61-AC32-30C5018700C6}"/>
               </a:ext>
             </a:extLst>
           </p:cNvPr>
@@ -19493,7 +17738,7 @@
           <p:cNvPr id="9" name="">
             <a:extLst xmlns:a="http://schemas.openxmlformats.org/drawingml/2006/main">
               <a:ext uri="{FF2B5EF4-FFF2-40B4-BE49-F238E27FC236}">
-                <a16:creationId xmlns:a16="http://schemas.microsoft.com/office/drawing/2014/main" id="{A6EF0081-FAF7-4571-A3C9-541AB7D1E9DD}"/>
+                <a16:creationId xmlns:a16="http://schemas.microsoft.com/office/drawing/2014/main" id="{C3446B45-F23A-409B-AE55-F7A8979A2DFA}"/>
               </a:ext>
             </a:extLst>
           </p:cNvPr>
@@ -19550,7 +17795,7 @@
           <p:cNvPr id="10" name="">
             <a:extLst xmlns:a="http://schemas.openxmlformats.org/drawingml/2006/main">
               <a:ext uri="{FF2B5EF4-FFF2-40B4-BE49-F238E27FC236}">
-                <a16:creationId xmlns:a16="http://schemas.microsoft.com/office/drawing/2014/main" id="{17321794-54C4-4DC4-9BAC-38516583EF98}"/>
+                <a16:creationId xmlns:a16="http://schemas.microsoft.com/office/drawing/2014/main" id="{25027CDE-28C6-4B27-BBDF-C4C7A23A52F1}"/>
               </a:ext>
             </a:extLst>
           </p:cNvPr>
@@ -19607,7 +17852,7 @@
           <p:cNvPr id="11" name="">
             <a:extLst xmlns:a="http://schemas.openxmlformats.org/drawingml/2006/main">
               <a:ext uri="{FF2B5EF4-FFF2-40B4-BE49-F238E27FC236}">
-                <a16:creationId xmlns:a16="http://schemas.microsoft.com/office/drawing/2014/main" id="{858B9572-4F69-484E-B525-774A77CC6A0B}"/>
+                <a16:creationId xmlns:a16="http://schemas.microsoft.com/office/drawing/2014/main" id="{911012FD-05E8-4312-B1FB-D17E834FE08E}"/>
               </a:ext>
             </a:extLst>
           </p:cNvPr>
@@ -19664,7 +17909,7 @@
           <p:cNvPr id="12" name="">
             <a:extLst xmlns:a="http://schemas.openxmlformats.org/drawingml/2006/main">
               <a:ext uri="{FF2B5EF4-FFF2-40B4-BE49-F238E27FC236}">
-                <a16:creationId xmlns:a16="http://schemas.microsoft.com/office/drawing/2014/main" id="{64DF7A90-F381-4DD9-B2C8-69B80E3416FF}"/>
+                <a16:creationId xmlns:a16="http://schemas.microsoft.com/office/drawing/2014/main" id="{CC4B1128-7696-4C38-9531-DB64377F2711}"/>
               </a:ext>
             </a:extLst>
           </p:cNvPr>
@@ -19719,7 +17964,7 @@
     </p:spTree>
     <p:extLst>
       <p:ext uri="{BB962C8B-B14F-4D97-AF65-F5344CB8AC3E}">
-        <p14:creationId xmlns:p14="http://schemas.microsoft.com/office/powerpoint/2010/main" val="207419863"/>
+        <p14:creationId xmlns:p14="http://schemas.microsoft.com/office/powerpoint/2010/main" val="1588647307"/>
       </p:ext>
     </p:extLst>
   </p:cSld>
@@ -19750,7 +17995,7 @@
           <p:cNvPr id="9" name="">
             <a:extLst xmlns:a="http://schemas.openxmlformats.org/drawingml/2006/main">
               <a:ext uri="{FF2B5EF4-FFF2-40B4-BE49-F238E27FC236}">
-                <a16:creationId xmlns:a16="http://schemas.microsoft.com/office/drawing/2014/main" id="{E26C810D-F5C0-42C8-96BE-43E876DA61AE}"/>
+                <a16:creationId xmlns:a16="http://schemas.microsoft.com/office/drawing/2014/main" id="{FD7BCA28-F420-49F8-8861-CB6FA489AA53}"/>
               </a:ext>
             </a:extLst>
           </p:cNvPr>
@@ -19780,7 +18025,7 @@
           <p:cNvPr id="2" name="">
             <a:extLst xmlns:a="http://schemas.openxmlformats.org/drawingml/2006/main">
               <a:ext uri="{FF2B5EF4-FFF2-40B4-BE49-F238E27FC236}">
-                <a16:creationId xmlns:a16="http://schemas.microsoft.com/office/drawing/2014/main" id="{29DEF95A-441F-44DA-80CC-650B184559F5}"/>
+                <a16:creationId xmlns:a16="http://schemas.microsoft.com/office/drawing/2014/main" id="{07966399-51DB-477C-A5BC-D10CA3ACECA5}"/>
               </a:ext>
             </a:extLst>
           </p:cNvPr>
@@ -19837,7 +18082,7 @@
           <p:cNvPr id="3" name="">
             <a:extLst xmlns:a="http://schemas.openxmlformats.org/drawingml/2006/main">
               <a:ext uri="{FF2B5EF4-FFF2-40B4-BE49-F238E27FC236}">
-                <a16:creationId xmlns:a16="http://schemas.microsoft.com/office/drawing/2014/main" id="{392B70B0-9FE4-42EC-BDF8-AEEFAC448881}"/>
+                <a16:creationId xmlns:a16="http://schemas.microsoft.com/office/drawing/2014/main" id="{9F69B05A-7630-43F3-A75A-402B08158017}"/>
               </a:ext>
             </a:extLst>
           </p:cNvPr>
@@ -19894,7 +18139,7 @@
           <p:cNvPr id="4" name="">
             <a:extLst xmlns:a="http://schemas.openxmlformats.org/drawingml/2006/main">
               <a:ext uri="{FF2B5EF4-FFF2-40B4-BE49-F238E27FC236}">
-                <a16:creationId xmlns:a16="http://schemas.microsoft.com/office/drawing/2014/main" id="{6BDFA827-FB43-4A6E-9A03-5AB3900D9C99}"/>
+                <a16:creationId xmlns:a16="http://schemas.microsoft.com/office/drawing/2014/main" id="{2FCE5F2F-45D3-4807-9C7E-6AEB27CAAB03}"/>
               </a:ext>
             </a:extLst>
           </p:cNvPr>
@@ -19924,7 +18169,7 @@
           <p:cNvPr id="5" name="">
             <a:extLst xmlns:a="http://schemas.openxmlformats.org/drawingml/2006/main">
               <a:ext uri="{FF2B5EF4-FFF2-40B4-BE49-F238E27FC236}">
-                <a16:creationId xmlns:a16="http://schemas.microsoft.com/office/drawing/2014/main" id="{46E09359-C7F8-4838-A3BF-BDD4D2932E5D}"/>
+                <a16:creationId xmlns:a16="http://schemas.microsoft.com/office/drawing/2014/main" id="{90EB3E5B-B6B6-476A-9B9A-730669DFD6C6}"/>
               </a:ext>
             </a:extLst>
           </p:cNvPr>
@@ -19954,7 +18199,7 @@
           <p:cNvPr id="6" name="">
             <a:extLst xmlns:a="http://schemas.openxmlformats.org/drawingml/2006/main">
               <a:ext uri="{FF2B5EF4-FFF2-40B4-BE49-F238E27FC236}">
-                <a16:creationId xmlns:a16="http://schemas.microsoft.com/office/drawing/2014/main" id="{6BEE7C87-B569-45F7-A1C0-9F8F64865116}"/>
+                <a16:creationId xmlns:a16="http://schemas.microsoft.com/office/drawing/2014/main" id="{75550BD1-D3C0-4861-AAEC-96254D426127}"/>
               </a:ext>
             </a:extLst>
           </p:cNvPr>
@@ -20011,7 +18256,7 @@
           <p:cNvPr id="7" name="">
             <a:extLst xmlns:a="http://schemas.openxmlformats.org/drawingml/2006/main">
               <a:ext uri="{FF2B5EF4-FFF2-40B4-BE49-F238E27FC236}">
-                <a16:creationId xmlns:a16="http://schemas.microsoft.com/office/drawing/2014/main" id="{FC9363C1-87D6-4DFC-8140-51FDF126F6B4}"/>
+                <a16:creationId xmlns:a16="http://schemas.microsoft.com/office/drawing/2014/main" id="{CB62ECF0-5AAF-40AF-A5B8-D225E05BF890}"/>
               </a:ext>
             </a:extLst>
           </p:cNvPr>
@@ -20068,7 +18313,7 @@
           <p:cNvPr id="8" name="">
             <a:extLst xmlns:a="http://schemas.openxmlformats.org/drawingml/2006/main">
               <a:ext uri="{FF2B5EF4-FFF2-40B4-BE49-F238E27FC236}">
-                <a16:creationId xmlns:a16="http://schemas.microsoft.com/office/drawing/2014/main" id="{E3997ECD-87A6-4A79-A1A7-19E9207F67DB}"/>
+                <a16:creationId xmlns:a16="http://schemas.microsoft.com/office/drawing/2014/main" id="{DCE91F66-BFD4-4BBF-946F-140545486E97}"/>
               </a:ext>
             </a:extLst>
           </p:cNvPr>
@@ -20123,7 +18368,7 @@
     </p:spTree>
     <p:extLst>
       <p:ext uri="{BB962C8B-B14F-4D97-AF65-F5344CB8AC3E}">
-        <p14:creationId xmlns:p14="http://schemas.microsoft.com/office/powerpoint/2010/main" val="836284066"/>
+        <p14:creationId xmlns:p14="http://schemas.microsoft.com/office/powerpoint/2010/main" val="619445773"/>
       </p:ext>
     </p:extLst>
   </p:cSld>

--- a/IUEA_Teaching_Plan/decks/CML3111_Week07_Engineering.pptx
+++ b/IUEA_Teaching_Plan/decks/CML3111_Week07_Engineering.pptx
@@ -422,7 +422,7 @@
 </file>
 
 <file path=ppt/notesSlides/notesSlide1.xml><?xml version="1.0" encoding="utf-8"?>
-<p:notes xmlns:p="http://schemas.openxmlformats.org/presentationml/2006/main">
+<p:notes xmlns:a="http://schemas.openxmlformats.org/drawingml/2006/main" xmlns:p="http://schemas.openxmlformats.org/presentationml/2006/main">
   <p:cSld>
     <p:spTree>
       <p:nvGrpSpPr>
@@ -431,13 +431,13 @@
         <p:nvPr/>
       </p:nvGrpSpPr>
       <p:grpSpPr>
-        <a:xfrm xmlns:a="http://schemas.openxmlformats.org/drawingml/2006/main"/>
+        <a:xfrm/>
       </p:grpSpPr>
       <p:sp>
         <p:nvSpPr>
           <p:cNvPr id="2" name="Slide Image Placeholder 1"/>
           <p:cNvSpPr>
-            <a:spLocks xmlns:a="http://schemas.openxmlformats.org/drawingml/2006/main" noGrp="1"/>
+            <a:spLocks noGrp="1"/>
           </p:cNvSpPr>
           <p:nvPr>
             <p:ph type="sldImg" idx="0"/>
@@ -449,7 +449,7 @@
         <p:nvSpPr>
           <p:cNvPr id="3" name="Notes Placeholder 2"/>
           <p:cNvSpPr>
-            <a:spLocks xmlns:a="http://schemas.openxmlformats.org/drawingml/2006/main" noGrp="1"/>
+            <a:spLocks noGrp="1"/>
           </p:cNvSpPr>
           <p:nvPr>
             <p:ph type="body" idx="1"/>
@@ -457,106 +457,91 @@
         </p:nvSpPr>
         <p:spPr/>
         <p:txBody>
-          <a:bodyPr xmlns:a="http://schemas.openxmlformats.org/drawingml/2006/main"/>
-          <a:lstStyle xmlns:a="http://schemas.openxmlformats.org/drawingml/2006/main"/>
-          <a:p xmlns:a="http://schemas.openxmlformats.org/drawingml/2006/main">
-            <a:r>
-              <a:t>PURPOSE</a:t>
-            </a:r>
-          </a:p>
-          <a:p xmlns:a="http://schemas.openxmlformats.org/drawingml/2006/main">
+          <a:bodyPr/>
+          <a:lstStyle/>
+          <a:p>
             <a:r>
               <a:t>Preparing for Practical Test 1</a:t>
             </a:r>
           </a:p>
-          <a:p xmlns:a="http://schemas.openxmlformats.org/drawingml/2006/main">
+          <a:p>
+            <a:r>
+              <a:t>CML3111, Week 7, slide 1</a:t>
+            </a:r>
+          </a:p>
+          <a:p>
             <a:r>
               <a:t/>
             </a:r>
           </a:p>
-          <a:p xmlns:a="http://schemas.openxmlformats.org/drawingml/2006/main">
-            <a:r>
-              <a:t>CONNECT</a:t>
-            </a:r>
-          </a:p>
-          <a:p xmlns:a="http://schemas.openxmlformats.org/drawingml/2006/main">
-            <a:r>
-              <a:t>Previous slide: the preceding week.</a:t>
-            </a:r>
-          </a:p>
-          <a:p xmlns:a="http://schemas.openxmlformats.org/drawingml/2006/main">
+          <a:p>
+            <a:r>
+              <a:t>Explanation to give</a:t>
+            </a:r>
+          </a:p>
+          <a:p>
+            <a:r>
+              <a:t>This is preparation for Test 1. Rehearse opening and saving offline before the assessed period. During the test, follow the issued invigilation rules.</a:t>
+            </a:r>
+          </a:p>
+          <a:p>
             <a:r>
               <a:t/>
             </a:r>
           </a:p>
-          <a:p xmlns:a="http://schemas.openxmlformats.org/drawingml/2006/main">
-            <a:r>
-              <a:t>EXPLAIN</a:t>
-            </a:r>
-          </a:p>
-          <a:p xmlns:a="http://schemas.openxmlformats.org/drawingml/2006/main">
+          <a:p>
+            <a:r>
+              <a:t>Worked illustration / lecturer answer</a:t>
+            </a:r>
+          </a:p>
+          <a:p>
+            <a:r>
+              <a:t>The published schedule has 15 minutes of setup, 120 of practical work, 25 of typed reasoning without code execution and 20 of collection.</a:t>
+            </a:r>
+          </a:p>
+          <a:p>
+            <a:r>
+              <a:t/>
+            </a:r>
+          </a:p>
+          <a:p>
+            <a:r>
+              <a:t>Misconception to address</a:t>
+            </a:r>
+          </a:p>
+          <a:p>
+            <a:r>
+              <a:t>Use this as an orientation to the lesson. Terms and syntax will be unpacked on their own slides; students do not need to know them in advance.</a:t>
+            </a:r>
+          </a:p>
+          <a:p>
+            <a:r>
+              <a:t/>
+            </a:r>
+          </a:p>
+          <a:p>
+            <a:r>
+              <a:t>On this slide</a:t>
+            </a:r>
+          </a:p>
+          <a:p>
             <a:r>
               <a:t>Communications, Electrical, Mechatronics and Robotics Engineering</a:t>
             </a:r>
           </a:p>
-          <a:p xmlns:a="http://schemas.openxmlformats.org/drawingml/2006/main">
+          <a:p>
             <a:r>
               <a:t/>
             </a:r>
           </a:p>
-          <a:p xmlns:a="http://schemas.openxmlformats.org/drawingml/2006/main">
-            <a:r>
-              <a:t>LECTURER CUE</a:t>
-            </a:r>
-          </a:p>
-          <a:p xmlns:a="http://schemas.openxmlformats.org/drawingml/2006/main">
-            <a:r>
-              <a:t>Read the specific public requirement shown on this slide. Explain the input, output and evidence before independent work; do not work the assessed answer for the class.</a:t>
-            </a:r>
-          </a:p>
-          <a:p xmlns:a="http://schemas.openxmlformats.org/drawingml/2006/main">
-            <a:r>
-              <a:t/>
-            </a:r>
-          </a:p>
-          <a:p xmlns:a="http://schemas.openxmlformats.org/drawingml/2006/main">
-            <a:r>
-              <a:t>TEACHING MODE</a:t>
-            </a:r>
-          </a:p>
-          <a:p xmlns:a="http://schemas.openxmlformats.org/drawingml/2006/main">
-            <a:r>
-              <a:t>Demonstrate first. Read each new symbol aloud, trace the values and compare the shown output. Learners repeat worked examples individually after class.</a:t>
-            </a:r>
-          </a:p>
-          <a:p xmlns:a="http://schemas.openxmlformats.org/drawingml/2006/main">
-            <a:r>
-              <a:t/>
-            </a:r>
-          </a:p>
-          <a:p xmlns:a="http://schemas.openxmlformats.org/drawingml/2006/main">
-            <a:r>
-              <a:t>NEXT</a:t>
-            </a:r>
-          </a:p>
-          <a:p xmlns:a="http://schemas.openxmlformats.org/drawingml/2006/main">
-            <a:r>
-              <a:t>Today’s learning.</a:t>
-            </a:r>
-          </a:p>
-          <a:p xmlns:a="http://schemas.openxmlformats.org/drawingml/2006/main">
-            <a:r>
-              <a:t/>
-            </a:r>
-          </a:p>
-          <a:p xmlns:a="http://schemas.openxmlformats.org/drawingml/2006/main">
-            <a:r>
-              <a:t>REFERENCES</a:t>
-            </a:r>
-          </a:p>
-          <a:p xmlns:a="http://schemas.openxmlformats.org/drawingml/2006/main">
-            <a:r>
-              <a:t/>
+          <a:p>
+            <a:r>
+              <a:t>Continue to</a:t>
+            </a:r>
+          </a:p>
+          <a:p>
+            <a:r>
+              <a:t>Today’s learning</a:t>
             </a:r>
           </a:p>
         </p:txBody>
@@ -565,7 +550,7 @@
         <p:nvSpPr>
           <p:cNvPr id="4" name="Slide Number Placeholder 3"/>
           <p:cNvSpPr>
-            <a:spLocks xmlns:a="http://schemas.openxmlformats.org/drawingml/2006/main" noGrp="1"/>
+            <a:spLocks noGrp="1"/>
           </p:cNvSpPr>
           <p:nvPr>
             <p:ph type="sldNum" idx="5"/>
@@ -573,21 +558,21 @@
         </p:nvSpPr>
         <p:spPr/>
         <p:txBody>
-          <a:bodyPr xmlns:a="http://schemas.openxmlformats.org/drawingml/2006/main"/>
-          <a:lstStyle xmlns:a="http://schemas.openxmlformats.org/drawingml/2006/main"/>
-          <a:p xmlns:a="http://schemas.openxmlformats.org/drawingml/2006/main"/>
+          <a:bodyPr/>
+          <a:lstStyle/>
+          <a:p/>
         </p:txBody>
       </p:sp>
     </p:spTree>
   </p:cSld>
   <p:clrMapOvr>
-    <a:masterClrMapping xmlns:a="http://schemas.openxmlformats.org/drawingml/2006/main"/>
+    <a:masterClrMapping/>
   </p:clrMapOvr>
 </p:notes>
 </file>
 
 <file path=ppt/notesSlides/notesSlide10.xml><?xml version="1.0" encoding="utf-8"?>
-<p:notes xmlns:p="http://schemas.openxmlformats.org/presentationml/2006/main">
+<p:notes xmlns:a="http://schemas.openxmlformats.org/drawingml/2006/main" xmlns:p="http://schemas.openxmlformats.org/presentationml/2006/main">
   <p:cSld>
     <p:spTree>
       <p:nvGrpSpPr>
@@ -596,13 +581,13 @@
         <p:nvPr/>
       </p:nvGrpSpPr>
       <p:grpSpPr>
-        <a:xfrm xmlns:a="http://schemas.openxmlformats.org/drawingml/2006/main"/>
+        <a:xfrm/>
       </p:grpSpPr>
       <p:sp>
         <p:nvSpPr>
           <p:cNvPr id="2" name="Slide Image Placeholder 1"/>
           <p:cNvSpPr>
-            <a:spLocks xmlns:a="http://schemas.openxmlformats.org/drawingml/2006/main" noGrp="1"/>
+            <a:spLocks noGrp="1"/>
           </p:cNvSpPr>
           <p:nvPr>
             <p:ph type="sldImg" idx="0"/>
@@ -614,7 +599,7 @@
         <p:nvSpPr>
           <p:cNvPr id="3" name="Notes Placeholder 2"/>
           <p:cNvSpPr>
-            <a:spLocks xmlns:a="http://schemas.openxmlformats.org/drawingml/2006/main" noGrp="1"/>
+            <a:spLocks noGrp="1"/>
           </p:cNvSpPr>
           <p:nvPr>
             <p:ph type="body" idx="1"/>
@@ -622,126 +607,111 @@
         </p:nvSpPr>
         <p:spPr/>
         <p:txBody>
-          <a:bodyPr xmlns:a="http://schemas.openxmlformats.org/drawingml/2006/main"/>
-          <a:lstStyle xmlns:a="http://schemas.openxmlformats.org/drawingml/2006/main"/>
-          <a:p xmlns:a="http://schemas.openxmlformats.org/drawingml/2006/main">
-            <a:r>
-              <a:t>PURPOSE</a:t>
-            </a:r>
-          </a:p>
-          <a:p xmlns:a="http://schemas.openxmlformats.org/drawingml/2006/main">
+          <a:bodyPr/>
+          <a:lstStyle/>
+          <a:p>
             <a:r>
               <a:t>Your evidence</a:t>
             </a:r>
           </a:p>
-          <a:p xmlns:a="http://schemas.openxmlformats.org/drawingml/2006/main">
+          <a:p>
+            <a:r>
+              <a:t>CML3111, Week 7, slide 10</a:t>
+            </a:r>
+          </a:p>
+          <a:p>
             <a:r>
               <a:t/>
             </a:r>
           </a:p>
-          <a:p xmlns:a="http://schemas.openxmlformats.org/drawingml/2006/main">
-            <a:r>
-              <a:t>CONNECT</a:t>
-            </a:r>
-          </a:p>
-          <a:p xmlns:a="http://schemas.openxmlformats.org/drawingml/2006/main">
-            <a:r>
-              <a:t>Previous slide: Preparation checkpoint.</a:t>
-            </a:r>
-          </a:p>
-          <a:p xmlns:a="http://schemas.openxmlformats.org/drawingml/2006/main">
+          <a:p>
+            <a:r>
+              <a:t>Explanation to give</a:t>
+            </a:r>
+          </a:p>
+          <a:p>
+            <a:r>
+              <a:t>Show the offline save location and reopen the file before test day. Identify both the code cells and the markdown cell headed My written evidence.</a:t>
+            </a:r>
+          </a:p>
+          <a:p>
             <a:r>
               <a:t/>
             </a:r>
           </a:p>
-          <a:p xmlns:a="http://schemas.openxmlformats.org/drawingml/2006/main">
-            <a:r>
-              <a:t>EXPLAIN</a:t>
-            </a:r>
-          </a:p>
-          <a:p xmlns:a="http://schemas.openxmlformats.org/drawingml/2006/main">
+          <a:p>
+            <a:r>
+              <a:t>Worked illustration / lecturer answer</a:t>
+            </a:r>
+          </a:p>
+          <a:p>
+            <a:r>
+              <a:t>Use a separate practice notebook for rehearsal. Students should locate the actual .ipynb on disk rather than rely on a browser tab or cloud link.</a:t>
+            </a:r>
+          </a:p>
+          <a:p>
+            <a:r>
+              <a:t/>
+            </a:r>
+          </a:p>
+          <a:p>
+            <a:r>
+              <a:t>Misconception to address</a:t>
+            </a:r>
+          </a:p>
+          <a:p>
+            <a:r>
+              <a:t>During the assessed period, report technical failures immediately and follow the invigilator’s instructions. Do not introduce new modelling code or online resources.</a:t>
+            </a:r>
+          </a:p>
+          <a:p>
+            <a:r>
+              <a:t/>
+            </a:r>
+          </a:p>
+          <a:p>
+            <a:r>
+              <a:t>On this slide</a:t>
+            </a:r>
+          </a:p>
+          <a:p>
             <a:r>
               <a:t>Use the official TEST1 brief, interfaces and rubric.</a:t>
             </a:r>
           </a:p>
-          <a:p xmlns:a="http://schemas.openxmlformats.org/drawingml/2006/main">
+          <a:p>
             <a:r>
               <a:t/>
             </a:r>
           </a:p>
-          <a:p xmlns:a="http://schemas.openxmlformats.org/drawingml/2006/main">
+          <a:p>
             <a:r>
               <a:t>The assessed period has 120 practical minutes and 25 typed reasoning minutes.</a:t>
             </a:r>
           </a:p>
-          <a:p xmlns:a="http://schemas.openxmlformats.org/drawingml/2006/main">
+          <a:p>
             <a:r>
               <a:t/>
             </a:r>
           </a:p>
-          <a:p xmlns:a="http://schemas.openxmlformats.org/drawingml/2006/main">
+          <a:p>
             <a:r>
               <a:t>Your lecturer will issue the test packet and collection instructions.</a:t>
             </a:r>
           </a:p>
-          <a:p xmlns:a="http://schemas.openxmlformats.org/drawingml/2006/main">
+          <a:p>
             <a:r>
               <a:t/>
             </a:r>
           </a:p>
-          <a:p xmlns:a="http://schemas.openxmlformats.org/drawingml/2006/main">
-            <a:r>
-              <a:t>LECTURER CUE</a:t>
-            </a:r>
-          </a:p>
-          <a:p xmlns:a="http://schemas.openxmlformats.org/drawingml/2006/main">
-            <a:r>
-              <a:t>Read the specific public requirement shown on this slide. Explain the input, output and evidence before independent work; do not work the assessed answer for the class.</a:t>
-            </a:r>
-          </a:p>
-          <a:p xmlns:a="http://schemas.openxmlformats.org/drawingml/2006/main">
-            <a:r>
-              <a:t/>
-            </a:r>
-          </a:p>
-          <a:p xmlns:a="http://schemas.openxmlformats.org/drawingml/2006/main">
-            <a:r>
-              <a:t>TEACHING MODE</a:t>
-            </a:r>
-          </a:p>
-          <a:p xmlns:a="http://schemas.openxmlformats.org/drawingml/2006/main">
-            <a:r>
-              <a:t>Demonstrate first. Read each new symbol aloud, trace the values and compare the shown output. Learners repeat worked examples individually after class.</a:t>
-            </a:r>
-          </a:p>
-          <a:p xmlns:a="http://schemas.openxmlformats.org/drawingml/2006/main">
-            <a:r>
-              <a:t/>
-            </a:r>
-          </a:p>
-          <a:p xmlns:a="http://schemas.openxmlformats.org/drawingml/2006/main">
-            <a:r>
-              <a:t>NEXT</a:t>
-            </a:r>
-          </a:p>
-          <a:p xmlns:a="http://schemas.openxmlformats.org/drawingml/2006/main">
-            <a:r>
-              <a:t>Practical Test 1.</a:t>
-            </a:r>
-          </a:p>
-          <a:p xmlns:a="http://schemas.openxmlformats.org/drawingml/2006/main">
-            <a:r>
-              <a:t/>
-            </a:r>
-          </a:p>
-          <a:p xmlns:a="http://schemas.openxmlformats.org/drawingml/2006/main">
-            <a:r>
-              <a:t>REFERENCES</a:t>
-            </a:r>
-          </a:p>
-          <a:p xmlns:a="http://schemas.openxmlformats.org/drawingml/2006/main">
-            <a:r>
-              <a:t/>
+          <a:p>
+            <a:r>
+              <a:t>Continue to</a:t>
+            </a:r>
+          </a:p>
+          <a:p>
+            <a:r>
+              <a:t>Practical Test 1</a:t>
             </a:r>
           </a:p>
         </p:txBody>
@@ -750,7 +720,7 @@
         <p:nvSpPr>
           <p:cNvPr id="4" name="Slide Number Placeholder 3"/>
           <p:cNvSpPr>
-            <a:spLocks xmlns:a="http://schemas.openxmlformats.org/drawingml/2006/main" noGrp="1"/>
+            <a:spLocks noGrp="1"/>
           </p:cNvSpPr>
           <p:nvPr>
             <p:ph type="sldNum" idx="5"/>
@@ -758,21 +728,21 @@
         </p:nvSpPr>
         <p:spPr/>
         <p:txBody>
-          <a:bodyPr xmlns:a="http://schemas.openxmlformats.org/drawingml/2006/main"/>
-          <a:lstStyle xmlns:a="http://schemas.openxmlformats.org/drawingml/2006/main"/>
-          <a:p xmlns:a="http://schemas.openxmlformats.org/drawingml/2006/main"/>
+          <a:bodyPr/>
+          <a:lstStyle/>
+          <a:p/>
         </p:txBody>
       </p:sp>
     </p:spTree>
   </p:cSld>
   <p:clrMapOvr>
-    <a:masterClrMapping xmlns:a="http://schemas.openxmlformats.org/drawingml/2006/main"/>
+    <a:masterClrMapping/>
   </p:clrMapOvr>
 </p:notes>
 </file>
 
 <file path=ppt/notesSlides/notesSlide11.xml><?xml version="1.0" encoding="utf-8"?>
-<p:notes xmlns:p="http://schemas.openxmlformats.org/presentationml/2006/main">
+<p:notes xmlns:a="http://schemas.openxmlformats.org/drawingml/2006/main" xmlns:p="http://schemas.openxmlformats.org/presentationml/2006/main">
   <p:cSld>
     <p:spTree>
       <p:nvGrpSpPr>
@@ -781,13 +751,13 @@
         <p:nvPr/>
       </p:nvGrpSpPr>
       <p:grpSpPr>
-        <a:xfrm xmlns:a="http://schemas.openxmlformats.org/drawingml/2006/main"/>
+        <a:xfrm/>
       </p:grpSpPr>
       <p:sp>
         <p:nvSpPr>
           <p:cNvPr id="2" name="Slide Image Placeholder 1"/>
           <p:cNvSpPr>
-            <a:spLocks xmlns:a="http://schemas.openxmlformats.org/drawingml/2006/main" noGrp="1"/>
+            <a:spLocks noGrp="1"/>
           </p:cNvSpPr>
           <p:nvPr>
             <p:ph type="sldImg" idx="0"/>
@@ -799,7 +769,7 @@
         <p:nvSpPr>
           <p:cNvPr id="3" name="Notes Placeholder 2"/>
           <p:cNvSpPr>
-            <a:spLocks xmlns:a="http://schemas.openxmlformats.org/drawingml/2006/main" noGrp="1"/>
+            <a:spLocks noGrp="1"/>
           </p:cNvSpPr>
           <p:nvPr>
             <p:ph type="body" idx="1"/>
@@ -807,136 +777,121 @@
         </p:nvSpPr>
         <p:spPr/>
         <p:txBody>
-          <a:bodyPr xmlns:a="http://schemas.openxmlformats.org/drawingml/2006/main"/>
-          <a:lstStyle xmlns:a="http://schemas.openxmlformats.org/drawingml/2006/main"/>
-          <a:p xmlns:a="http://schemas.openxmlformats.org/drawingml/2006/main">
-            <a:r>
-              <a:t>PURPOSE</a:t>
-            </a:r>
-          </a:p>
-          <a:p xmlns:a="http://schemas.openxmlformats.org/drawingml/2006/main">
+          <a:bodyPr/>
+          <a:lstStyle/>
+          <a:p>
             <a:r>
               <a:t>Practical Test 1</a:t>
             </a:r>
           </a:p>
-          <a:p xmlns:a="http://schemas.openxmlformats.org/drawingml/2006/main">
+          <a:p>
+            <a:r>
+              <a:t>CML3111, Week 7, slide 11</a:t>
+            </a:r>
+          </a:p>
+          <a:p>
             <a:r>
               <a:t/>
             </a:r>
           </a:p>
-          <a:p xmlns:a="http://schemas.openxmlformats.org/drawingml/2006/main">
-            <a:r>
-              <a:t>CONNECT</a:t>
-            </a:r>
-          </a:p>
-          <a:p xmlns:a="http://schemas.openxmlformats.org/drawingml/2006/main">
-            <a:r>
-              <a:t>Previous slide: Your evidence.</a:t>
-            </a:r>
-          </a:p>
-          <a:p xmlns:a="http://schemas.openxmlformats.org/drawingml/2006/main">
+          <a:p>
+            <a:r>
+              <a:t>Explanation to give</a:t>
+            </a:r>
+          </a:p>
+          <a:p>
+            <a:r>
+              <a:t>Show the actual markdown answer cell headed My written evidence. This is where the learner explains the choices and the supplied scenario in their own words.</a:t>
+            </a:r>
+          </a:p>
+          <a:p>
             <a:r>
               <a:t/>
             </a:r>
           </a:p>
-          <a:p xmlns:a="http://schemas.openxmlformats.org/drawingml/2006/main">
-            <a:r>
-              <a:t>EXPLAIN</a:t>
-            </a:r>
-          </a:p>
-          <a:p xmlns:a="http://schemas.openxmlformats.org/drawingml/2006/main">
+          <a:p>
+            <a:r>
+              <a:t>Worked illustration / lecturer answer</a:t>
+            </a:r>
+          </a:p>
+          <a:p>
+            <a:r>
+              <a:t>A useful explanation connects a decision to a named result and its limitation: for example, why a training-only median avoids using evaluation information. Describe supplied scenario figures as supplied, not as measurements the learner produced.</a:t>
+            </a:r>
+          </a:p>
+          <a:p>
+            <a:r>
+              <a:t/>
+            </a:r>
+          </a:p>
+          <a:p>
+            <a:r>
+              <a:t>Misconception to address</a:t>
+            </a:r>
+          </a:p>
+          <a:p>
+            <a:r>
+              <a:t>Prompts and copied code comments do not substitute for the learner’s reasoning. Weekly work and tests use the notebook; projects also require their separate readable report.</a:t>
+            </a:r>
+          </a:p>
+          <a:p>
+            <a:r>
+              <a:t/>
+            </a:r>
+          </a:p>
+          <a:p>
+            <a:r>
+              <a:t>On this slide</a:t>
+            </a:r>
+          </a:p>
+          <a:p>
             <a:r>
               <a:t>Write your own explanation in the markdown cell headed `## My written evidence`.</a:t>
             </a:r>
           </a:p>
-          <a:p xmlns:a="http://schemas.openxmlformats.org/drawingml/2006/main">
+          <a:p>
             <a:r>
               <a:t/>
             </a:r>
           </a:p>
-          <a:p xmlns:a="http://schemas.openxmlformats.org/drawingml/2006/main">
+          <a:p>
             <a:r>
               <a:t>Keep that heading.</a:t>
             </a:r>
           </a:p>
-          <a:p xmlns:a="http://schemas.openxmlformats.org/drawingml/2006/main">
+          <a:p>
             <a:r>
               <a:t/>
             </a:r>
           </a:p>
-          <a:p xmlns:a="http://schemas.openxmlformats.org/drawingml/2006/main">
+          <a:p>
             <a:r>
               <a:t>Task prompts and code comments are excluded from reasoning marks.</a:t>
             </a:r>
           </a:p>
-          <a:p xmlns:a="http://schemas.openxmlformats.org/drawingml/2006/main">
+          <a:p>
             <a:r>
               <a:t/>
             </a:r>
           </a:p>
-          <a:p xmlns:a="http://schemas.openxmlformats.org/drawingml/2006/main">
+          <a:p>
             <a:r>
               <a:t>Complete every original rubric criterion below, not just the checked functions.</a:t>
             </a:r>
           </a:p>
-          <a:p xmlns:a="http://schemas.openxmlformats.org/drawingml/2006/main">
+          <a:p>
             <a:r>
               <a:t/>
             </a:r>
           </a:p>
-          <a:p xmlns:a="http://schemas.openxmlformats.org/drawingml/2006/main">
-            <a:r>
-              <a:t>LECTURER CUE</a:t>
-            </a:r>
-          </a:p>
-          <a:p xmlns:a="http://schemas.openxmlformats.org/drawingml/2006/main">
-            <a:r>
-              <a:t>Read the specific public requirement shown on this slide. Explain the input, output and evidence before independent work; do not work the assessed answer for the class.</a:t>
-            </a:r>
-          </a:p>
-          <a:p xmlns:a="http://schemas.openxmlformats.org/drawingml/2006/main">
-            <a:r>
-              <a:t/>
-            </a:r>
-          </a:p>
-          <a:p xmlns:a="http://schemas.openxmlformats.org/drawingml/2006/main">
-            <a:r>
-              <a:t>TEACHING MODE</a:t>
-            </a:r>
-          </a:p>
-          <a:p xmlns:a="http://schemas.openxmlformats.org/drawingml/2006/main">
-            <a:r>
-              <a:t>Demonstrate first. Read each new symbol aloud, trace the values and compare the shown output. Learners repeat worked examples individually after class.</a:t>
-            </a:r>
-          </a:p>
-          <a:p xmlns:a="http://schemas.openxmlformats.org/drawingml/2006/main">
-            <a:r>
-              <a:t/>
-            </a:r>
-          </a:p>
-          <a:p xmlns:a="http://schemas.openxmlformats.org/drawingml/2006/main">
-            <a:r>
-              <a:t>NEXT</a:t>
-            </a:r>
-          </a:p>
-          <a:p xmlns:a="http://schemas.openxmlformats.org/drawingml/2006/main">
-            <a:r>
-              <a:t>Practical Test 1 continued.</a:t>
-            </a:r>
-          </a:p>
-          <a:p xmlns:a="http://schemas.openxmlformats.org/drawingml/2006/main">
-            <a:r>
-              <a:t/>
-            </a:r>
-          </a:p>
-          <a:p xmlns:a="http://schemas.openxmlformats.org/drawingml/2006/main">
-            <a:r>
-              <a:t>REFERENCES</a:t>
-            </a:r>
-          </a:p>
-          <a:p xmlns:a="http://schemas.openxmlformats.org/drawingml/2006/main">
-            <a:r>
-              <a:t/>
+          <a:p>
+            <a:r>
+              <a:t>Continue to</a:t>
+            </a:r>
+          </a:p>
+          <a:p>
+            <a:r>
+              <a:t>Practical Test 1 continued</a:t>
             </a:r>
           </a:p>
         </p:txBody>
@@ -945,7 +900,7 @@
         <p:nvSpPr>
           <p:cNvPr id="4" name="Slide Number Placeholder 3"/>
           <p:cNvSpPr>
-            <a:spLocks xmlns:a="http://schemas.openxmlformats.org/drawingml/2006/main" noGrp="1"/>
+            <a:spLocks noGrp="1"/>
           </p:cNvSpPr>
           <p:nvPr>
             <p:ph type="sldNum" idx="5"/>
@@ -953,21 +908,21 @@
         </p:nvSpPr>
         <p:spPr/>
         <p:txBody>
-          <a:bodyPr xmlns:a="http://schemas.openxmlformats.org/drawingml/2006/main"/>
-          <a:lstStyle xmlns:a="http://schemas.openxmlformats.org/drawingml/2006/main"/>
-          <a:p xmlns:a="http://schemas.openxmlformats.org/drawingml/2006/main"/>
+          <a:bodyPr/>
+          <a:lstStyle/>
+          <a:p/>
         </p:txBody>
       </p:sp>
     </p:spTree>
   </p:cSld>
   <p:clrMapOvr>
-    <a:masterClrMapping xmlns:a="http://schemas.openxmlformats.org/drawingml/2006/main"/>
+    <a:masterClrMapping/>
   </p:clrMapOvr>
 </p:notes>
 </file>
 
 <file path=ppt/notesSlides/notesSlide12.xml><?xml version="1.0" encoding="utf-8"?>
-<p:notes xmlns:p="http://schemas.openxmlformats.org/presentationml/2006/main">
+<p:notes xmlns:a="http://schemas.openxmlformats.org/drawingml/2006/main" xmlns:p="http://schemas.openxmlformats.org/presentationml/2006/main">
   <p:cSld>
     <p:spTree>
       <p:nvGrpSpPr>
@@ -976,13 +931,13 @@
         <p:nvPr/>
       </p:nvGrpSpPr>
       <p:grpSpPr>
-        <a:xfrm xmlns:a="http://schemas.openxmlformats.org/drawingml/2006/main"/>
+        <a:xfrm/>
       </p:grpSpPr>
       <p:sp>
         <p:nvSpPr>
           <p:cNvPr id="2" name="Slide Image Placeholder 1"/>
           <p:cNvSpPr>
-            <a:spLocks xmlns:a="http://schemas.openxmlformats.org/drawingml/2006/main" noGrp="1"/>
+            <a:spLocks noGrp="1"/>
           </p:cNvSpPr>
           <p:nvPr>
             <p:ph type="sldImg" idx="0"/>
@@ -994,7 +949,7 @@
         <p:nvSpPr>
           <p:cNvPr id="3" name="Notes Placeholder 2"/>
           <p:cNvSpPr>
-            <a:spLocks xmlns:a="http://schemas.openxmlformats.org/drawingml/2006/main" noGrp="1"/>
+            <a:spLocks noGrp="1"/>
           </p:cNvSpPr>
           <p:nvPr>
             <p:ph type="body" idx="1"/>
@@ -1002,136 +957,121 @@
         </p:nvSpPr>
         <p:spPr/>
         <p:txBody>
-          <a:bodyPr xmlns:a="http://schemas.openxmlformats.org/drawingml/2006/main"/>
-          <a:lstStyle xmlns:a="http://schemas.openxmlformats.org/drawingml/2006/main"/>
-          <a:p xmlns:a="http://schemas.openxmlformats.org/drawingml/2006/main">
-            <a:r>
-              <a:t>PURPOSE</a:t>
-            </a:r>
-          </a:p>
-          <a:p xmlns:a="http://schemas.openxmlformats.org/drawingml/2006/main">
+          <a:bodyPr/>
+          <a:lstStyle/>
+          <a:p>
             <a:r>
               <a:t>Practical Test 1 continued</a:t>
             </a:r>
           </a:p>
-          <a:p xmlns:a="http://schemas.openxmlformats.org/drawingml/2006/main">
+          <a:p>
+            <a:r>
+              <a:t>CML3111, Week 7, slide 12</a:t>
+            </a:r>
+          </a:p>
+          <a:p>
             <a:r>
               <a:t/>
             </a:r>
           </a:p>
-          <a:p xmlns:a="http://schemas.openxmlformats.org/drawingml/2006/main">
-            <a:r>
-              <a:t>CONNECT</a:t>
-            </a:r>
-          </a:p>
-          <a:p xmlns:a="http://schemas.openxmlformats.org/drawingml/2006/main">
-            <a:r>
-              <a:t>Previous slide: Practical Test 1.</a:t>
-            </a:r>
-          </a:p>
-          <a:p xmlns:a="http://schemas.openxmlformats.org/drawingml/2006/main">
+          <a:p>
+            <a:r>
+              <a:t>Explanation to give</a:t>
+            </a:r>
+          </a:p>
+          <a:p>
+            <a:r>
+              <a:t>A chart must answer a stated question and show the actual data result. Explain what one mark represents and label both the quantity and unit before stating the finding.</a:t>
+            </a:r>
+          </a:p>
+          <a:p>
             <a:r>
               <a:t/>
             </a:r>
           </a:p>
-          <a:p xmlns:a="http://schemas.openxmlformats.org/drawingml/2006/main">
-            <a:r>
-              <a:t>EXPLAIN</a:t>
-            </a:r>
-          </a:p>
-          <a:p xmlns:a="http://schemas.openxmlformats.org/drawingml/2006/main">
+          <a:p>
+            <a:r>
+              <a:t>Worked illustration / lecturer answer</a:t>
+            </a:r>
+          </a:p>
+          <a:p>
+            <a:r>
+              <a:t>A useful caption names the group or sample, the observed difference and the relevant unit. A limitation states what the plotted observations cannot establish, such as causation or performance at a new site.</a:t>
+            </a:r>
+          </a:p>
+          <a:p>
+            <a:r>
+              <a:t/>
+            </a:r>
+          </a:p>
+          <a:p>
+            <a:r>
+              <a:t>Misconception to address</a:t>
+            </a:r>
+          </a:p>
+          <a:p>
+            <a:r>
+              <a:t>Text claiming “a chart was made” is not the required chart. Check the exact number and kinds required on this slide and in the assessment guide.</a:t>
+            </a:r>
+          </a:p>
+          <a:p>
+            <a:r>
+              <a:t/>
+            </a:r>
+          </a:p>
+          <a:p>
+            <a:r>
+              <a:t>On this slide</a:t>
+            </a:r>
+          </a:p>
+          <a:p>
             <a:r>
               <a:t>Include profiling, justified cleaning, question-led charts and your engineering recommendation where required.</a:t>
             </a:r>
           </a:p>
-          <a:p xmlns:a="http://schemas.openxmlformats.org/drawingml/2006/main">
+          <a:p>
             <a:r>
               <a:t/>
             </a:r>
           </a:p>
-          <a:p xmlns:a="http://schemas.openxmlformats.org/drawingml/2006/main">
+          <a:p>
             <a:r>
               <a:t>Keep raw data.</a:t>
             </a:r>
           </a:p>
-          <a:p xmlns:a="http://schemas.openxmlformats.org/drawingml/2006/main">
+          <a:p>
             <a:r>
               <a:t/>
             </a:r>
           </a:p>
-          <a:p xmlns:a="http://schemas.openxmlformats.org/drawingml/2006/main">
+          <a:p>
             <a:r>
               <a:t>State units and distinguish correlation from causation.</a:t>
             </a:r>
           </a:p>
-          <a:p xmlns:a="http://schemas.openxmlformats.org/drawingml/2006/main">
+          <a:p>
             <a:r>
               <a:t/>
             </a:r>
           </a:p>
-          <a:p xmlns:a="http://schemas.openxmlformats.org/drawingml/2006/main">
+          <a:p>
             <a:r>
               <a:t>Charts must be actual labelled figures in the notebook, not claims that charts exist.</a:t>
             </a:r>
           </a:p>
-          <a:p xmlns:a="http://schemas.openxmlformats.org/drawingml/2006/main">
+          <a:p>
             <a:r>
               <a:t/>
             </a:r>
           </a:p>
-          <a:p xmlns:a="http://schemas.openxmlformats.org/drawingml/2006/main">
-            <a:r>
-              <a:t>LECTURER CUE</a:t>
-            </a:r>
-          </a:p>
-          <a:p xmlns:a="http://schemas.openxmlformats.org/drawingml/2006/main">
-            <a:r>
-              <a:t>Read the specific public requirement shown on this slide. Explain the input, output and evidence before independent work; do not work the assessed answer for the class.</a:t>
-            </a:r>
-          </a:p>
-          <a:p xmlns:a="http://schemas.openxmlformats.org/drawingml/2006/main">
-            <a:r>
-              <a:t/>
-            </a:r>
-          </a:p>
-          <a:p xmlns:a="http://schemas.openxmlformats.org/drawingml/2006/main">
-            <a:r>
-              <a:t>TEACHING MODE</a:t>
-            </a:r>
-          </a:p>
-          <a:p xmlns:a="http://schemas.openxmlformats.org/drawingml/2006/main">
-            <a:r>
-              <a:t>Demonstrate first. Read each new symbol aloud, trace the values and compare the shown output. Learners repeat worked examples individually after class.</a:t>
-            </a:r>
-          </a:p>
-          <a:p xmlns:a="http://schemas.openxmlformats.org/drawingml/2006/main">
-            <a:r>
-              <a:t/>
-            </a:r>
-          </a:p>
-          <a:p xmlns:a="http://schemas.openxmlformats.org/drawingml/2006/main">
-            <a:r>
-              <a:t>NEXT</a:t>
-            </a:r>
-          </a:p>
-          <a:p xmlns:a="http://schemas.openxmlformats.org/drawingml/2006/main">
-            <a:r>
-              <a:t>Practical Test 1 continued.</a:t>
-            </a:r>
-          </a:p>
-          <a:p xmlns:a="http://schemas.openxmlformats.org/drawingml/2006/main">
-            <a:r>
-              <a:t/>
-            </a:r>
-          </a:p>
-          <a:p xmlns:a="http://schemas.openxmlformats.org/drawingml/2006/main">
-            <a:r>
-              <a:t>REFERENCES</a:t>
-            </a:r>
-          </a:p>
-          <a:p xmlns:a="http://schemas.openxmlformats.org/drawingml/2006/main">
-            <a:r>
-              <a:t/>
+          <a:p>
+            <a:r>
+              <a:t>Continue to</a:t>
+            </a:r>
+          </a:p>
+          <a:p>
+            <a:r>
+              <a:t>Practical Test 1 continued</a:t>
             </a:r>
           </a:p>
         </p:txBody>
@@ -1140,7 +1080,7 @@
         <p:nvSpPr>
           <p:cNvPr id="4" name="Slide Number Placeholder 3"/>
           <p:cNvSpPr>
-            <a:spLocks xmlns:a="http://schemas.openxmlformats.org/drawingml/2006/main" noGrp="1"/>
+            <a:spLocks noGrp="1"/>
           </p:cNvSpPr>
           <p:nvPr>
             <p:ph type="sldNum" idx="5"/>
@@ -1148,21 +1088,21 @@
         </p:nvSpPr>
         <p:spPr/>
         <p:txBody>
-          <a:bodyPr xmlns:a="http://schemas.openxmlformats.org/drawingml/2006/main"/>
-          <a:lstStyle xmlns:a="http://schemas.openxmlformats.org/drawingml/2006/main"/>
-          <a:p xmlns:a="http://schemas.openxmlformats.org/drawingml/2006/main"/>
+          <a:bodyPr/>
+          <a:lstStyle/>
+          <a:p/>
         </p:txBody>
       </p:sp>
     </p:spTree>
   </p:cSld>
   <p:clrMapOvr>
-    <a:masterClrMapping xmlns:a="http://schemas.openxmlformats.org/drawingml/2006/main"/>
+    <a:masterClrMapping/>
   </p:clrMapOvr>
 </p:notes>
 </file>
 
 <file path=ppt/notesSlides/notesSlide13.xml><?xml version="1.0" encoding="utf-8"?>
-<p:notes xmlns:p="http://schemas.openxmlformats.org/presentationml/2006/main">
+<p:notes xmlns:a="http://schemas.openxmlformats.org/drawingml/2006/main" xmlns:p="http://schemas.openxmlformats.org/presentationml/2006/main">
   <p:cSld>
     <p:spTree>
       <p:nvGrpSpPr>
@@ -1171,13 +1111,13 @@
         <p:nvPr/>
       </p:nvGrpSpPr>
       <p:grpSpPr>
-        <a:xfrm xmlns:a="http://schemas.openxmlformats.org/drawingml/2006/main"/>
+        <a:xfrm/>
       </p:grpSpPr>
       <p:sp>
         <p:nvSpPr>
           <p:cNvPr id="2" name="Slide Image Placeholder 1"/>
           <p:cNvSpPr>
-            <a:spLocks xmlns:a="http://schemas.openxmlformats.org/drawingml/2006/main" noGrp="1"/>
+            <a:spLocks noGrp="1"/>
           </p:cNvSpPr>
           <p:nvPr>
             <p:ph type="sldImg" idx="0"/>
@@ -1189,7 +1129,7 @@
         <p:nvSpPr>
           <p:cNvPr id="3" name="Notes Placeholder 2"/>
           <p:cNvSpPr>
-            <a:spLocks xmlns:a="http://schemas.openxmlformats.org/drawingml/2006/main" noGrp="1"/>
+            <a:spLocks noGrp="1"/>
           </p:cNvSpPr>
           <p:nvPr>
             <p:ph type="body" idx="1"/>
@@ -1197,136 +1137,121 @@
         </p:nvSpPr>
         <p:spPr/>
         <p:txBody>
-          <a:bodyPr xmlns:a="http://schemas.openxmlformats.org/drawingml/2006/main"/>
-          <a:lstStyle xmlns:a="http://schemas.openxmlformats.org/drawingml/2006/main"/>
-          <a:p xmlns:a="http://schemas.openxmlformats.org/drawingml/2006/main">
-            <a:r>
-              <a:t>PURPOSE</a:t>
-            </a:r>
-          </a:p>
-          <a:p xmlns:a="http://schemas.openxmlformats.org/drawingml/2006/main">
+          <a:bodyPr/>
+          <a:lstStyle/>
+          <a:p>
             <a:r>
               <a:t>Practical Test 1 continued</a:t>
             </a:r>
           </a:p>
-          <a:p xmlns:a="http://schemas.openxmlformats.org/drawingml/2006/main">
+          <a:p>
+            <a:r>
+              <a:t>CML3111, Week 7, slide 13</a:t>
+            </a:r>
+          </a:p>
+          <a:p>
             <a:r>
               <a:t/>
             </a:r>
           </a:p>
-          <a:p xmlns:a="http://schemas.openxmlformats.org/drawingml/2006/main">
-            <a:r>
-              <a:t>CONNECT</a:t>
-            </a:r>
-          </a:p>
-          <a:p xmlns:a="http://schemas.openxmlformats.org/drawingml/2006/main">
-            <a:r>
-              <a:t>Previous slide: Practical Test 1 continued.</a:t>
-            </a:r>
-          </a:p>
-          <a:p xmlns:a="http://schemas.openxmlformats.org/drawingml/2006/main">
+          <a:p>
+            <a:r>
+              <a:t>Explanation to give</a:t>
+            </a:r>
+          </a:p>
+          <a:p>
+            <a:r>
+              <a:t>Describe the received table before changing it: its rows, columns, units and defects. Then explain each cleaning rule and preserve the original data.</a:t>
+            </a:r>
+          </a:p>
+          <a:p>
             <a:r>
               <a:t/>
             </a:r>
           </a:p>
-          <a:p xmlns:a="http://schemas.openxmlformats.org/drawingml/2006/main">
-            <a:r>
-              <a:t>EXPLAIN</a:t>
-            </a:r>
-          </a:p>
-          <a:p xmlns:a="http://schemas.openxmlformats.org/drawingml/2006/main">
+          <a:p>
+            <a:r>
+              <a:t>Worked illustration / lecturer answer</a:t>
+            </a:r>
+          </a:p>
+          <a:p>
+            <a:r>
+              <a:t>A duplicate record ID and repeated equipment ID are different situations. Removing the former under a stated rule may be correct while removing the latter could discard legitimate observations.</a:t>
+            </a:r>
+          </a:p>
+          <a:p>
+            <a:r>
+              <a:t/>
+            </a:r>
+          </a:p>
+          <a:p>
+            <a:r>
+              <a:t>Misconception to address</a:t>
+            </a:r>
+          </a:p>
+          <a:p>
+            <a:r>
+              <a:t>A correct output without a justification may not satisfy the reasoning criterion. Use the task’s exact rules rather than choosing whichever cleaning makes results look attractive.</a:t>
+            </a:r>
+          </a:p>
+          <a:p>
+            <a:r>
+              <a:t/>
+            </a:r>
+          </a:p>
+          <a:p>
+            <a:r>
+              <a:t>On this slide</a:t>
+            </a:r>
+          </a:p>
+          <a:p>
             <a:r>
               <a:t>Include captions and readable written evidence in the notebook.</a:t>
             </a:r>
           </a:p>
-          <a:p xmlns:a="http://schemas.openxmlformats.org/drawingml/2006/main">
+          <a:p>
             <a:r>
               <a:t/>
             </a:r>
           </a:p>
-          <a:p xmlns:a="http://schemas.openxmlformats.org/drawingml/2006/main">
+          <a:p>
             <a:r>
               <a:t>Loading &amp; profiling (15.0 total): Data loaded correctly; shape, types and summary produced; the dataset is described accurately in the student's own words.</a:t>
             </a:r>
           </a:p>
-          <a:p xmlns:a="http://schemas.openxmlformats.org/drawingml/2006/main">
+          <a:p>
             <a:r>
               <a:t/>
             </a:r>
           </a:p>
-          <a:p xmlns:a="http://schemas.openxmlformats.org/drawingml/2006/main">
+          <a:p>
             <a:r>
               <a:t>Cleaning decisions &amp; justification (20.0 total): Defects found.</a:t>
             </a:r>
           </a:p>
-          <a:p xmlns:a="http://schemas.openxmlformats.org/drawingml/2006/main">
+          <a:p>
             <a:r>
               <a:t/>
             </a:r>
           </a:p>
-          <a:p xmlns:a="http://schemas.openxmlformats.org/drawingml/2006/main">
+          <a:p>
             <a:r>
               <a:t>Each handling decision stated AND justified.</a:t>
             </a:r>
           </a:p>
-          <a:p xmlns:a="http://schemas.openxmlformats.org/drawingml/2006/main">
+          <a:p>
             <a:r>
               <a:t/>
             </a:r>
           </a:p>
-          <a:p xmlns:a="http://schemas.openxmlformats.org/drawingml/2006/main">
-            <a:r>
-              <a:t>LECTURER CUE</a:t>
-            </a:r>
-          </a:p>
-          <a:p xmlns:a="http://schemas.openxmlformats.org/drawingml/2006/main">
-            <a:r>
-              <a:t>Read the specific public requirement shown on this slide. Explain the input, output and evidence before independent work; do not work the assessed answer for the class.</a:t>
-            </a:r>
-          </a:p>
-          <a:p xmlns:a="http://schemas.openxmlformats.org/drawingml/2006/main">
-            <a:r>
-              <a:t/>
-            </a:r>
-          </a:p>
-          <a:p xmlns:a="http://schemas.openxmlformats.org/drawingml/2006/main">
-            <a:r>
-              <a:t>TEACHING MODE</a:t>
-            </a:r>
-          </a:p>
-          <a:p xmlns:a="http://schemas.openxmlformats.org/drawingml/2006/main">
-            <a:r>
-              <a:t>Demonstrate first. Read each new symbol aloud, trace the values and compare the shown output. Learners repeat worked examples individually after class.</a:t>
-            </a:r>
-          </a:p>
-          <a:p xmlns:a="http://schemas.openxmlformats.org/drawingml/2006/main">
-            <a:r>
-              <a:t/>
-            </a:r>
-          </a:p>
-          <a:p xmlns:a="http://schemas.openxmlformats.org/drawingml/2006/main">
-            <a:r>
-              <a:t>NEXT</a:t>
-            </a:r>
-          </a:p>
-          <a:p xmlns:a="http://schemas.openxmlformats.org/drawingml/2006/main">
-            <a:r>
-              <a:t>Practical Test 1 continued.</a:t>
-            </a:r>
-          </a:p>
-          <a:p xmlns:a="http://schemas.openxmlformats.org/drawingml/2006/main">
-            <a:r>
-              <a:t/>
-            </a:r>
-          </a:p>
-          <a:p xmlns:a="http://schemas.openxmlformats.org/drawingml/2006/main">
-            <a:r>
-              <a:t>REFERENCES</a:t>
-            </a:r>
-          </a:p>
-          <a:p xmlns:a="http://schemas.openxmlformats.org/drawingml/2006/main">
-            <a:r>
-              <a:t/>
+          <a:p>
+            <a:r>
+              <a:t>Continue to</a:t>
+            </a:r>
+          </a:p>
+          <a:p>
+            <a:r>
+              <a:t>Practical Test 1 continued</a:t>
             </a:r>
           </a:p>
         </p:txBody>
@@ -1335,7 +1260,7 @@
         <p:nvSpPr>
           <p:cNvPr id="4" name="Slide Number Placeholder 3"/>
           <p:cNvSpPr>
-            <a:spLocks xmlns:a="http://schemas.openxmlformats.org/drawingml/2006/main" noGrp="1"/>
+            <a:spLocks noGrp="1"/>
           </p:cNvSpPr>
           <p:nvPr>
             <p:ph type="sldNum" idx="5"/>
@@ -1343,21 +1268,21 @@
         </p:nvSpPr>
         <p:spPr/>
         <p:txBody>
-          <a:bodyPr xmlns:a="http://schemas.openxmlformats.org/drawingml/2006/main"/>
-          <a:lstStyle xmlns:a="http://schemas.openxmlformats.org/drawingml/2006/main"/>
-          <a:p xmlns:a="http://schemas.openxmlformats.org/drawingml/2006/main"/>
+          <a:bodyPr/>
+          <a:lstStyle/>
+          <a:p/>
         </p:txBody>
       </p:sp>
     </p:spTree>
   </p:cSld>
   <p:clrMapOvr>
-    <a:masterClrMapping xmlns:a="http://schemas.openxmlformats.org/drawingml/2006/main"/>
+    <a:masterClrMapping/>
   </p:clrMapOvr>
 </p:notes>
 </file>
 
 <file path=ppt/notesSlides/notesSlide14.xml><?xml version="1.0" encoding="utf-8"?>
-<p:notes xmlns:p="http://schemas.openxmlformats.org/presentationml/2006/main">
+<p:notes xmlns:a="http://schemas.openxmlformats.org/drawingml/2006/main" xmlns:p="http://schemas.openxmlformats.org/presentationml/2006/main">
   <p:cSld>
     <p:spTree>
       <p:nvGrpSpPr>
@@ -1366,13 +1291,13 @@
         <p:nvPr/>
       </p:nvGrpSpPr>
       <p:grpSpPr>
-        <a:xfrm xmlns:a="http://schemas.openxmlformats.org/drawingml/2006/main"/>
+        <a:xfrm/>
       </p:grpSpPr>
       <p:sp>
         <p:nvSpPr>
           <p:cNvPr id="2" name="Slide Image Placeholder 1"/>
           <p:cNvSpPr>
-            <a:spLocks xmlns:a="http://schemas.openxmlformats.org/drawingml/2006/main" noGrp="1"/>
+            <a:spLocks noGrp="1"/>
           </p:cNvSpPr>
           <p:nvPr>
             <p:ph type="sldImg" idx="0"/>
@@ -1384,7 +1309,7 @@
         <p:nvSpPr>
           <p:cNvPr id="3" name="Notes Placeholder 2"/>
           <p:cNvSpPr>
-            <a:spLocks xmlns:a="http://schemas.openxmlformats.org/drawingml/2006/main" noGrp="1"/>
+            <a:spLocks noGrp="1"/>
           </p:cNvSpPr>
           <p:nvPr>
             <p:ph type="body" idx="1"/>
@@ -1392,136 +1317,121 @@
         </p:nvSpPr>
         <p:spPr/>
         <p:txBody>
-          <a:bodyPr xmlns:a="http://schemas.openxmlformats.org/drawingml/2006/main"/>
-          <a:lstStyle xmlns:a="http://schemas.openxmlformats.org/drawingml/2006/main"/>
-          <a:p xmlns:a="http://schemas.openxmlformats.org/drawingml/2006/main">
-            <a:r>
-              <a:t>PURPOSE</a:t>
-            </a:r>
-          </a:p>
-          <a:p xmlns:a="http://schemas.openxmlformats.org/drawingml/2006/main">
+          <a:bodyPr/>
+          <a:lstStyle/>
+          <a:p>
             <a:r>
               <a:t>Practical Test 1 continued</a:t>
             </a:r>
           </a:p>
-          <a:p xmlns:a="http://schemas.openxmlformats.org/drawingml/2006/main">
+          <a:p>
+            <a:r>
+              <a:t>CML3111, Week 7, slide 14</a:t>
+            </a:r>
+          </a:p>
+          <a:p>
             <a:r>
               <a:t/>
             </a:r>
           </a:p>
-          <a:p xmlns:a="http://schemas.openxmlformats.org/drawingml/2006/main">
-            <a:r>
-              <a:t>CONNECT</a:t>
-            </a:r>
-          </a:p>
-          <a:p xmlns:a="http://schemas.openxmlformats.org/drawingml/2006/main">
-            <a:r>
-              <a:t>Previous slide: Practical Test 1 continued.</a:t>
-            </a:r>
-          </a:p>
-          <a:p xmlns:a="http://schemas.openxmlformats.org/drawingml/2006/main">
+          <a:p>
+            <a:r>
+              <a:t>Explanation to give</a:t>
+            </a:r>
+          </a:p>
+          <a:p>
+            <a:r>
+              <a:t>A chart must answer a stated question and show the actual data result. Explain what one mark represents and label both the quantity and unit before stating the finding.</a:t>
+            </a:r>
+          </a:p>
+          <a:p>
             <a:r>
               <a:t/>
             </a:r>
           </a:p>
-          <a:p xmlns:a="http://schemas.openxmlformats.org/drawingml/2006/main">
-            <a:r>
-              <a:t>EXPLAIN</a:t>
-            </a:r>
-          </a:p>
-          <a:p xmlns:a="http://schemas.openxmlformats.org/drawingml/2006/main">
+          <a:p>
+            <a:r>
+              <a:t>Worked illustration / lecturer answer</a:t>
+            </a:r>
+          </a:p>
+          <a:p>
+            <a:r>
+              <a:t>A useful caption names the group or sample, the observed difference and the relevant unit. A limitation states what the plotted observations cannot establish, such as causation or performance at a new site.</a:t>
+            </a:r>
+          </a:p>
+          <a:p>
+            <a:r>
+              <a:t/>
+            </a:r>
+          </a:p>
+          <a:p>
+            <a:r>
+              <a:t>Misconception to address</a:t>
+            </a:r>
+          </a:p>
+          <a:p>
+            <a:r>
+              <a:t>Text claiming “a chart was made” is not the required chart. Check the exact number and kinds required on this slide and in the assessment guide.</a:t>
+            </a:r>
+          </a:p>
+          <a:p>
+            <a:r>
+              <a:t/>
+            </a:r>
+          </a:p>
+          <a:p>
+            <a:r>
+              <a:t>On this slide</a:t>
+            </a:r>
+          </a:p>
+          <a:p>
             <a:r>
               <a:t>Marks are for the justification - an unjustified correct fix scores roughly half.</a:t>
             </a:r>
           </a:p>
-          <a:p xmlns:a="http://schemas.openxmlformats.org/drawingml/2006/main">
+          <a:p>
             <a:r>
               <a:t/>
             </a:r>
           </a:p>
-          <a:p xmlns:a="http://schemas.openxmlformats.org/drawingml/2006/main">
+          <a:p>
             <a:r>
               <a:t>Visualisation (20.0 total): Three charts, each captioned with the question it answers.</a:t>
             </a:r>
           </a:p>
-          <a:p xmlns:a="http://schemas.openxmlformats.org/drawingml/2006/main">
+          <a:p>
             <a:r>
               <a:t/>
             </a:r>
           </a:p>
-          <a:p xmlns:a="http://schemas.openxmlformats.org/drawingml/2006/main">
+          <a:p>
             <a:r>
               <a:t>Correct chart type.</a:t>
             </a:r>
           </a:p>
-          <a:p xmlns:a="http://schemas.openxmlformats.org/drawingml/2006/main">
+          <a:p>
             <a:r>
               <a:t/>
             </a:r>
           </a:p>
-          <a:p xmlns:a="http://schemas.openxmlformats.org/drawingml/2006/main">
+          <a:p>
             <a:r>
               <a:t>Axes labelled with units.</a:t>
             </a:r>
           </a:p>
-          <a:p xmlns:a="http://schemas.openxmlformats.org/drawingml/2006/main">
+          <a:p>
             <a:r>
               <a:t/>
             </a:r>
           </a:p>
-          <a:p xmlns:a="http://schemas.openxmlformats.org/drawingml/2006/main">
-            <a:r>
-              <a:t>LECTURER CUE</a:t>
-            </a:r>
-          </a:p>
-          <a:p xmlns:a="http://schemas.openxmlformats.org/drawingml/2006/main">
-            <a:r>
-              <a:t>Read the specific public requirement shown on this slide. Explain the input, output and evidence before independent work; do not work the assessed answer for the class.</a:t>
-            </a:r>
-          </a:p>
-          <a:p xmlns:a="http://schemas.openxmlformats.org/drawingml/2006/main">
-            <a:r>
-              <a:t/>
-            </a:r>
-          </a:p>
-          <a:p xmlns:a="http://schemas.openxmlformats.org/drawingml/2006/main">
-            <a:r>
-              <a:t>TEACHING MODE</a:t>
-            </a:r>
-          </a:p>
-          <a:p xmlns:a="http://schemas.openxmlformats.org/drawingml/2006/main">
-            <a:r>
-              <a:t>Demonstrate first. Read each new symbol aloud, trace the values and compare the shown output. Learners repeat worked examples individually after class.</a:t>
-            </a:r>
-          </a:p>
-          <a:p xmlns:a="http://schemas.openxmlformats.org/drawingml/2006/main">
-            <a:r>
-              <a:t/>
-            </a:r>
-          </a:p>
-          <a:p xmlns:a="http://schemas.openxmlformats.org/drawingml/2006/main">
-            <a:r>
-              <a:t>NEXT</a:t>
-            </a:r>
-          </a:p>
-          <a:p xmlns:a="http://schemas.openxmlformats.org/drawingml/2006/main">
-            <a:r>
-              <a:t>Practical Test 1 continued.</a:t>
-            </a:r>
-          </a:p>
-          <a:p xmlns:a="http://schemas.openxmlformats.org/drawingml/2006/main">
-            <a:r>
-              <a:t/>
-            </a:r>
-          </a:p>
-          <a:p xmlns:a="http://schemas.openxmlformats.org/drawingml/2006/main">
-            <a:r>
-              <a:t>REFERENCES</a:t>
-            </a:r>
-          </a:p>
-          <a:p xmlns:a="http://schemas.openxmlformats.org/drawingml/2006/main">
-            <a:r>
-              <a:t/>
+          <a:p>
+            <a:r>
+              <a:t>Continue to</a:t>
+            </a:r>
+          </a:p>
+          <a:p>
+            <a:r>
+              <a:t>Practical Test 1 continued</a:t>
             </a:r>
           </a:p>
         </p:txBody>
@@ -1530,7 +1440,7 @@
         <p:nvSpPr>
           <p:cNvPr id="4" name="Slide Number Placeholder 3"/>
           <p:cNvSpPr>
-            <a:spLocks xmlns:a="http://schemas.openxmlformats.org/drawingml/2006/main" noGrp="1"/>
+            <a:spLocks noGrp="1"/>
           </p:cNvSpPr>
           <p:nvPr>
             <p:ph type="sldNum" idx="5"/>
@@ -1538,21 +1448,21 @@
         </p:nvSpPr>
         <p:spPr/>
         <p:txBody>
-          <a:bodyPr xmlns:a="http://schemas.openxmlformats.org/drawingml/2006/main"/>
-          <a:lstStyle xmlns:a="http://schemas.openxmlformats.org/drawingml/2006/main"/>
-          <a:p xmlns:a="http://schemas.openxmlformats.org/drawingml/2006/main"/>
+          <a:bodyPr/>
+          <a:lstStyle/>
+          <a:p/>
         </p:txBody>
       </p:sp>
     </p:spTree>
   </p:cSld>
   <p:clrMapOvr>
-    <a:masterClrMapping xmlns:a="http://schemas.openxmlformats.org/drawingml/2006/main"/>
+    <a:masterClrMapping/>
   </p:clrMapOvr>
 </p:notes>
 </file>
 
 <file path=ppt/notesSlides/notesSlide15.xml><?xml version="1.0" encoding="utf-8"?>
-<p:notes xmlns:p="http://schemas.openxmlformats.org/presentationml/2006/main">
+<p:notes xmlns:a="http://schemas.openxmlformats.org/drawingml/2006/main" xmlns:p="http://schemas.openxmlformats.org/presentationml/2006/main">
   <p:cSld>
     <p:spTree>
       <p:nvGrpSpPr>
@@ -1561,13 +1471,13 @@
         <p:nvPr/>
       </p:nvGrpSpPr>
       <p:grpSpPr>
-        <a:xfrm xmlns:a="http://schemas.openxmlformats.org/drawingml/2006/main"/>
+        <a:xfrm/>
       </p:grpSpPr>
       <p:sp>
         <p:nvSpPr>
           <p:cNvPr id="2" name="Slide Image Placeholder 1"/>
           <p:cNvSpPr>
-            <a:spLocks xmlns:a="http://schemas.openxmlformats.org/drawingml/2006/main" noGrp="1"/>
+            <a:spLocks noGrp="1"/>
           </p:cNvSpPr>
           <p:nvPr>
             <p:ph type="sldImg" idx="0"/>
@@ -1579,7 +1489,7 @@
         <p:nvSpPr>
           <p:cNvPr id="3" name="Notes Placeholder 2"/>
           <p:cNvSpPr>
-            <a:spLocks xmlns:a="http://schemas.openxmlformats.org/drawingml/2006/main" noGrp="1"/>
+            <a:spLocks noGrp="1"/>
           </p:cNvSpPr>
           <p:nvPr>
             <p:ph type="body" idx="1"/>
@@ -1587,136 +1497,121 @@
         </p:nvSpPr>
         <p:spPr/>
         <p:txBody>
-          <a:bodyPr xmlns:a="http://schemas.openxmlformats.org/drawingml/2006/main"/>
-          <a:lstStyle xmlns:a="http://schemas.openxmlformats.org/drawingml/2006/main"/>
-          <a:p xmlns:a="http://schemas.openxmlformats.org/drawingml/2006/main">
-            <a:r>
-              <a:t>PURPOSE</a:t>
-            </a:r>
-          </a:p>
-          <a:p xmlns:a="http://schemas.openxmlformats.org/drawingml/2006/main">
+          <a:bodyPr/>
+          <a:lstStyle/>
+          <a:p>
             <a:r>
               <a:t>Practical Test 1 continued</a:t>
             </a:r>
           </a:p>
-          <a:p xmlns:a="http://schemas.openxmlformats.org/drawingml/2006/main">
+          <a:p>
+            <a:r>
+              <a:t>CML3111, Week 7, slide 15</a:t>
+            </a:r>
+          </a:p>
+          <a:p>
             <a:r>
               <a:t/>
             </a:r>
           </a:p>
-          <a:p xmlns:a="http://schemas.openxmlformats.org/drawingml/2006/main">
-            <a:r>
-              <a:t>CONNECT</a:t>
-            </a:r>
-          </a:p>
-          <a:p xmlns:a="http://schemas.openxmlformats.org/drawingml/2006/main">
-            <a:r>
-              <a:t>Previous slide: Practical Test 1 continued.</a:t>
-            </a:r>
-          </a:p>
-          <a:p xmlns:a="http://schemas.openxmlformats.org/drawingml/2006/main">
+          <a:p>
+            <a:r>
+              <a:t>Explanation to give</a:t>
+            </a:r>
+          </a:p>
+          <a:p>
+            <a:r>
+              <a:t>Explain the decision, the evidence supporting it and what would change that decision. The reader should be able to find the result cited in the notebook.</a:t>
+            </a:r>
+          </a:p>
+          <a:p>
             <a:r>
               <a:t/>
             </a:r>
           </a:p>
-          <a:p xmlns:a="http://schemas.openxmlformats.org/drawingml/2006/main">
-            <a:r>
-              <a:t>EXPLAIN</a:t>
-            </a:r>
-          </a:p>
-          <a:p xmlns:a="http://schemas.openxmlformats.org/drawingml/2006/main">
+          <a:p>
+            <a:r>
+              <a:t>Worked illustration / lecturer answer</a:t>
+            </a:r>
+          </a:p>
+          <a:p>
+            <a:r>
+              <a:t>For example, a model may justify further testing at a second site while not yet justifying deployment. Name the missing operating range or equipment group that the next data collection should cover.</a:t>
+            </a:r>
+          </a:p>
+          <a:p>
+            <a:r>
+              <a:t/>
+            </a:r>
+          </a:p>
+          <a:p>
+            <a:r>
+              <a:t>Misconception to address</a:t>
+            </a:r>
+          </a:p>
+          <a:p>
+            <a:r>
+              <a:t>During test Part B, type the explanation offline without executing code. Save it in the collected notebook; later upload must not extend the assessed work period.</a:t>
+            </a:r>
+          </a:p>
+          <a:p>
+            <a:r>
+              <a:t/>
+            </a:r>
+          </a:p>
+          <a:p>
+            <a:r>
+              <a:t>On this slide</a:t>
+            </a:r>
+          </a:p>
+          <a:p>
             <a:r>
               <a:t>No decoration without purpose.</a:t>
             </a:r>
           </a:p>
-          <a:p xmlns:a="http://schemas.openxmlformats.org/drawingml/2006/main">
+          <a:p>
             <a:r>
               <a:t/>
             </a:r>
           </a:p>
-          <a:p xmlns:a="http://schemas.openxmlformats.org/drawingml/2006/main">
+          <a:p>
             <a:r>
               <a:t>Findings (20.0 total): Five findings, supported by evidence from the data, stated with correct magnitudes and units.</a:t>
             </a:r>
           </a:p>
-          <a:p xmlns:a="http://schemas.openxmlformats.org/drawingml/2006/main">
+          <a:p>
             <a:r>
               <a:t/>
             </a:r>
           </a:p>
-          <a:p xmlns:a="http://schemas.openxmlformats.org/drawingml/2006/main">
+          <a:p>
             <a:r>
               <a:t>A wrong number loses the mark even if the method was right.</a:t>
             </a:r>
           </a:p>
-          <a:p xmlns:a="http://schemas.openxmlformats.org/drawingml/2006/main">
+          <a:p>
             <a:r>
               <a:t/>
             </a:r>
           </a:p>
-          <a:p xmlns:a="http://schemas.openxmlformats.org/drawingml/2006/main">
+          <a:p>
             <a:r>
               <a:t>Engineering interpretation (15.0 total): One recommendation that an engineer could act on, plus a clear statement of what further data would be needed.</a:t>
             </a:r>
           </a:p>
-          <a:p xmlns:a="http://schemas.openxmlformats.org/drawingml/2006/main">
+          <a:p>
             <a:r>
               <a:t/>
             </a:r>
           </a:p>
-          <a:p xmlns:a="http://schemas.openxmlformats.org/drawingml/2006/main">
-            <a:r>
-              <a:t>LECTURER CUE</a:t>
-            </a:r>
-          </a:p>
-          <a:p xmlns:a="http://schemas.openxmlformats.org/drawingml/2006/main">
-            <a:r>
-              <a:t>Read the specific public requirement shown on this slide. Explain the input, output and evidence before independent work; do not work the assessed answer for the class.</a:t>
-            </a:r>
-          </a:p>
-          <a:p xmlns:a="http://schemas.openxmlformats.org/drawingml/2006/main">
-            <a:r>
-              <a:t/>
-            </a:r>
-          </a:p>
-          <a:p xmlns:a="http://schemas.openxmlformats.org/drawingml/2006/main">
-            <a:r>
-              <a:t>TEACHING MODE</a:t>
-            </a:r>
-          </a:p>
-          <a:p xmlns:a="http://schemas.openxmlformats.org/drawingml/2006/main">
-            <a:r>
-              <a:t>Demonstrate first. Read each new symbol aloud, trace the values and compare the shown output. Learners repeat worked examples individually after class.</a:t>
-            </a:r>
-          </a:p>
-          <a:p xmlns:a="http://schemas.openxmlformats.org/drawingml/2006/main">
-            <a:r>
-              <a:t/>
-            </a:r>
-          </a:p>
-          <a:p xmlns:a="http://schemas.openxmlformats.org/drawingml/2006/main">
-            <a:r>
-              <a:t>NEXT</a:t>
-            </a:r>
-          </a:p>
-          <a:p xmlns:a="http://schemas.openxmlformats.org/drawingml/2006/main">
-            <a:r>
-              <a:t>Practical Test 1 continued.</a:t>
-            </a:r>
-          </a:p>
-          <a:p xmlns:a="http://schemas.openxmlformats.org/drawingml/2006/main">
-            <a:r>
-              <a:t/>
-            </a:r>
-          </a:p>
-          <a:p xmlns:a="http://schemas.openxmlformats.org/drawingml/2006/main">
-            <a:r>
-              <a:t>REFERENCES</a:t>
-            </a:r>
-          </a:p>
-          <a:p xmlns:a="http://schemas.openxmlformats.org/drawingml/2006/main">
-            <a:r>
-              <a:t/>
+          <a:p>
+            <a:r>
+              <a:t>Continue to</a:t>
+            </a:r>
+          </a:p>
+          <a:p>
+            <a:r>
+              <a:t>Practical Test 1 continued</a:t>
             </a:r>
           </a:p>
         </p:txBody>
@@ -1725,7 +1620,7 @@
         <p:nvSpPr>
           <p:cNvPr id="4" name="Slide Number Placeholder 3"/>
           <p:cNvSpPr>
-            <a:spLocks xmlns:a="http://schemas.openxmlformats.org/drawingml/2006/main" noGrp="1"/>
+            <a:spLocks noGrp="1"/>
           </p:cNvSpPr>
           <p:nvPr>
             <p:ph type="sldNum" idx="5"/>
@@ -1733,21 +1628,21 @@
         </p:nvSpPr>
         <p:spPr/>
         <p:txBody>
-          <a:bodyPr xmlns:a="http://schemas.openxmlformats.org/drawingml/2006/main"/>
-          <a:lstStyle xmlns:a="http://schemas.openxmlformats.org/drawingml/2006/main"/>
-          <a:p xmlns:a="http://schemas.openxmlformats.org/drawingml/2006/main"/>
+          <a:bodyPr/>
+          <a:lstStyle/>
+          <a:p/>
         </p:txBody>
       </p:sp>
     </p:spTree>
   </p:cSld>
   <p:clrMapOvr>
-    <a:masterClrMapping xmlns:a="http://schemas.openxmlformats.org/drawingml/2006/main"/>
+    <a:masterClrMapping/>
   </p:clrMapOvr>
 </p:notes>
 </file>
 
 <file path=ppt/notesSlides/notesSlide16.xml><?xml version="1.0" encoding="utf-8"?>
-<p:notes xmlns:p="http://schemas.openxmlformats.org/presentationml/2006/main">
+<p:notes xmlns:a="http://schemas.openxmlformats.org/drawingml/2006/main" xmlns:p="http://schemas.openxmlformats.org/presentationml/2006/main">
   <p:cSld>
     <p:spTree>
       <p:nvGrpSpPr>
@@ -1756,13 +1651,13 @@
         <p:nvPr/>
       </p:nvGrpSpPr>
       <p:grpSpPr>
-        <a:xfrm xmlns:a="http://schemas.openxmlformats.org/drawingml/2006/main"/>
+        <a:xfrm/>
       </p:grpSpPr>
       <p:sp>
         <p:nvSpPr>
           <p:cNvPr id="2" name="Slide Image Placeholder 1"/>
           <p:cNvSpPr>
-            <a:spLocks xmlns:a="http://schemas.openxmlformats.org/drawingml/2006/main" noGrp="1"/>
+            <a:spLocks noGrp="1"/>
           </p:cNvSpPr>
           <p:nvPr>
             <p:ph type="sldImg" idx="0"/>
@@ -1774,7 +1669,7 @@
         <p:nvSpPr>
           <p:cNvPr id="3" name="Notes Placeholder 2"/>
           <p:cNvSpPr>
-            <a:spLocks xmlns:a="http://schemas.openxmlformats.org/drawingml/2006/main" noGrp="1"/>
+            <a:spLocks noGrp="1"/>
           </p:cNvSpPr>
           <p:nvPr>
             <p:ph type="body" idx="1"/>
@@ -1782,136 +1677,121 @@
         </p:nvSpPr>
         <p:spPr/>
         <p:txBody>
-          <a:bodyPr xmlns:a="http://schemas.openxmlformats.org/drawingml/2006/main"/>
-          <a:lstStyle xmlns:a="http://schemas.openxmlformats.org/drawingml/2006/main"/>
-          <a:p xmlns:a="http://schemas.openxmlformats.org/drawingml/2006/main">
-            <a:r>
-              <a:t>PURPOSE</a:t>
-            </a:r>
-          </a:p>
-          <a:p xmlns:a="http://schemas.openxmlformats.org/drawingml/2006/main">
+          <a:bodyPr/>
+          <a:lstStyle/>
+          <a:p>
             <a:r>
               <a:t>Practical Test 1 continued</a:t>
             </a:r>
           </a:p>
-          <a:p xmlns:a="http://schemas.openxmlformats.org/drawingml/2006/main">
+          <a:p>
+            <a:r>
+              <a:t>CML3111, Week 7, slide 16</a:t>
+            </a:r>
+          </a:p>
+          <a:p>
             <a:r>
               <a:t/>
             </a:r>
           </a:p>
-          <a:p xmlns:a="http://schemas.openxmlformats.org/drawingml/2006/main">
-            <a:r>
-              <a:t>CONNECT</a:t>
-            </a:r>
-          </a:p>
-          <a:p xmlns:a="http://schemas.openxmlformats.org/drawingml/2006/main">
-            <a:r>
-              <a:t>Previous slide: Practical Test 1 continued.</a:t>
-            </a:r>
-          </a:p>
-          <a:p xmlns:a="http://schemas.openxmlformats.org/drawingml/2006/main">
+          <a:p>
+            <a:r>
+              <a:t>Explanation to give</a:t>
+            </a:r>
+          </a:p>
+          <a:p>
+            <a:r>
+              <a:t>Reproducibility means a clean run using the delivered files, documented dependencies and stated instructions produces the reported results.</a:t>
+            </a:r>
+          </a:p>
+          <a:p>
             <a:r>
               <a:t/>
             </a:r>
           </a:p>
-          <a:p xmlns:a="http://schemas.openxmlformats.org/drawingml/2006/main">
-            <a:r>
-              <a:t>EXPLAIN</a:t>
-            </a:r>
-          </a:p>
-          <a:p xmlns:a="http://schemas.openxmlformats.org/drawingml/2006/main">
+          <a:p>
+            <a:r>
+              <a:t>Worked illustration / lecturer answer</a:t>
+            </a:r>
+          </a:p>
+          <a:p>
+            <a:r>
+              <a:t>Use an actual fresh-runtime check. Correct a path or missing setup step that the check reveals, then save the successful notebook and instructions.</a:t>
+            </a:r>
+          </a:p>
+          <a:p>
+            <a:r>
+              <a:t/>
+            </a:r>
+          </a:p>
+          <a:p>
+            <a:r>
+              <a:t>Misconception to address</a:t>
+            </a:r>
+          </a:p>
+          <a:p>
+            <a:r>
+              <a:t>Saved figures can remain visible after code breaks. Their presence alone is not a successful rerun.</a:t>
+            </a:r>
+          </a:p>
+          <a:p>
+            <a:r>
+              <a:t/>
+            </a:r>
+          </a:p>
+          <a:p>
+            <a:r>
+              <a:t>On this slide</a:t>
+            </a:r>
+          </a:p>
+          <a:p>
             <a:r>
               <a:t>Clarity &amp; reproducibility (10.0 total): Notebook runs top to bottom.</a:t>
             </a:r>
           </a:p>
-          <a:p xmlns:a="http://schemas.openxmlformats.org/drawingml/2006/main">
+          <a:p>
             <a:r>
               <a:t/>
             </a:r>
           </a:p>
-          <a:p xmlns:a="http://schemas.openxmlformats.org/drawingml/2006/main">
+          <a:p>
             <a:r>
               <a:t>Logical order.</a:t>
             </a:r>
           </a:p>
-          <a:p xmlns:a="http://schemas.openxmlformats.org/drawingml/2006/main">
+          <a:p>
             <a:r>
               <a:t/>
             </a:r>
           </a:p>
-          <a:p xmlns:a="http://schemas.openxmlformats.org/drawingml/2006/main">
+          <a:p>
             <a:r>
               <a:t>Markdown explains intent.</a:t>
             </a:r>
           </a:p>
-          <a:p xmlns:a="http://schemas.openxmlformats.org/drawingml/2006/main">
+          <a:p>
             <a:r>
               <a:t/>
             </a:r>
           </a:p>
-          <a:p xmlns:a="http://schemas.openxmlformats.org/drawingml/2006/main">
+          <a:p>
             <a:r>
               <a:t>No dead code.</a:t>
             </a:r>
           </a:p>
-          <a:p xmlns:a="http://schemas.openxmlformats.org/drawingml/2006/main">
+          <a:p>
             <a:r>
               <a:t/>
             </a:r>
           </a:p>
-          <a:p xmlns:a="http://schemas.openxmlformats.org/drawingml/2006/main">
-            <a:r>
-              <a:t>LECTURER CUE</a:t>
-            </a:r>
-          </a:p>
-          <a:p xmlns:a="http://schemas.openxmlformats.org/drawingml/2006/main">
-            <a:r>
-              <a:t>Read the specific public requirement shown on this slide. Explain the input, output and evidence before independent work; do not work the assessed answer for the class.</a:t>
-            </a:r>
-          </a:p>
-          <a:p xmlns:a="http://schemas.openxmlformats.org/drawingml/2006/main">
-            <a:r>
-              <a:t/>
-            </a:r>
-          </a:p>
-          <a:p xmlns:a="http://schemas.openxmlformats.org/drawingml/2006/main">
-            <a:r>
-              <a:t>TEACHING MODE</a:t>
-            </a:r>
-          </a:p>
-          <a:p xmlns:a="http://schemas.openxmlformats.org/drawingml/2006/main">
-            <a:r>
-              <a:t>Demonstrate first. Read each new symbol aloud, trace the values and compare the shown output. Learners repeat worked examples individually after class.</a:t>
-            </a:r>
-          </a:p>
-          <a:p xmlns:a="http://schemas.openxmlformats.org/drawingml/2006/main">
-            <a:r>
-              <a:t/>
-            </a:r>
-          </a:p>
-          <a:p xmlns:a="http://schemas.openxmlformats.org/drawingml/2006/main">
-            <a:r>
-              <a:t>NEXT</a:t>
-            </a:r>
-          </a:p>
-          <a:p xmlns:a="http://schemas.openxmlformats.org/drawingml/2006/main">
-            <a:r>
-              <a:t>Practical Test 1 continued.</a:t>
-            </a:r>
-          </a:p>
-          <a:p xmlns:a="http://schemas.openxmlformats.org/drawingml/2006/main">
-            <a:r>
-              <a:t/>
-            </a:r>
-          </a:p>
-          <a:p xmlns:a="http://schemas.openxmlformats.org/drawingml/2006/main">
-            <a:r>
-              <a:t>REFERENCES</a:t>
-            </a:r>
-          </a:p>
-          <a:p xmlns:a="http://schemas.openxmlformats.org/drawingml/2006/main">
-            <a:r>
-              <a:t/>
+          <a:p>
+            <a:r>
+              <a:t>Continue to</a:t>
+            </a:r>
+          </a:p>
+          <a:p>
+            <a:r>
+              <a:t>Practical Test 1 continued</a:t>
             </a:r>
           </a:p>
         </p:txBody>
@@ -1920,7 +1800,7 @@
         <p:nvSpPr>
           <p:cNvPr id="4" name="Slide Number Placeholder 3"/>
           <p:cNvSpPr>
-            <a:spLocks xmlns:a="http://schemas.openxmlformats.org/drawingml/2006/main" noGrp="1"/>
+            <a:spLocks noGrp="1"/>
           </p:cNvSpPr>
           <p:nvPr>
             <p:ph type="sldNum" idx="5"/>
@@ -1928,21 +1808,21 @@
         </p:nvSpPr>
         <p:spPr/>
         <p:txBody>
-          <a:bodyPr xmlns:a="http://schemas.openxmlformats.org/drawingml/2006/main"/>
-          <a:lstStyle xmlns:a="http://schemas.openxmlformats.org/drawingml/2006/main"/>
-          <a:p xmlns:a="http://schemas.openxmlformats.org/drawingml/2006/main"/>
+          <a:bodyPr/>
+          <a:lstStyle/>
+          <a:p/>
         </p:txBody>
       </p:sp>
     </p:spTree>
   </p:cSld>
   <p:clrMapOvr>
-    <a:masterClrMapping xmlns:a="http://schemas.openxmlformats.org/drawingml/2006/main"/>
+    <a:masterClrMapping/>
   </p:clrMapOvr>
 </p:notes>
 </file>
 
 <file path=ppt/notesSlides/notesSlide17.xml><?xml version="1.0" encoding="utf-8"?>
-<p:notes xmlns:p="http://schemas.openxmlformats.org/presentationml/2006/main">
+<p:notes xmlns:a="http://schemas.openxmlformats.org/drawingml/2006/main" xmlns:p="http://schemas.openxmlformats.org/presentationml/2006/main">
   <p:cSld>
     <p:spTree>
       <p:nvGrpSpPr>
@@ -1951,13 +1831,13 @@
         <p:nvPr/>
       </p:nvGrpSpPr>
       <p:grpSpPr>
-        <a:xfrm xmlns:a="http://schemas.openxmlformats.org/drawingml/2006/main"/>
+        <a:xfrm/>
       </p:grpSpPr>
       <p:sp>
         <p:nvSpPr>
           <p:cNvPr id="2" name="Slide Image Placeholder 1"/>
           <p:cNvSpPr>
-            <a:spLocks xmlns:a="http://schemas.openxmlformats.org/drawingml/2006/main" noGrp="1"/>
+            <a:spLocks noGrp="1"/>
           </p:cNvSpPr>
           <p:nvPr>
             <p:ph type="sldImg" idx="0"/>
@@ -1969,7 +1849,7 @@
         <p:nvSpPr>
           <p:cNvPr id="3" name="Notes Placeholder 2"/>
           <p:cNvSpPr>
-            <a:spLocks xmlns:a="http://schemas.openxmlformats.org/drawingml/2006/main" noGrp="1"/>
+            <a:spLocks noGrp="1"/>
           </p:cNvSpPr>
           <p:nvPr>
             <p:ph type="body" idx="1"/>
@@ -1977,136 +1857,121 @@
         </p:nvSpPr>
         <p:spPr/>
         <p:txBody>
-          <a:bodyPr xmlns:a="http://schemas.openxmlformats.org/drawingml/2006/main"/>
-          <a:lstStyle xmlns:a="http://schemas.openxmlformats.org/drawingml/2006/main"/>
-          <a:p xmlns:a="http://schemas.openxmlformats.org/drawingml/2006/main">
-            <a:r>
-              <a:t>PURPOSE</a:t>
-            </a:r>
-          </a:p>
-          <a:p xmlns:a="http://schemas.openxmlformats.org/drawingml/2006/main">
+          <a:bodyPr/>
+          <a:lstStyle/>
+          <a:p>
             <a:r>
               <a:t>Practical Test 1 continued</a:t>
             </a:r>
           </a:p>
-          <a:p xmlns:a="http://schemas.openxmlformats.org/drawingml/2006/main">
+          <a:p>
+            <a:r>
+              <a:t>CML3111, Week 7, slide 17</a:t>
+            </a:r>
+          </a:p>
+          <a:p>
             <a:r>
               <a:t/>
             </a:r>
           </a:p>
-          <a:p xmlns:a="http://schemas.openxmlformats.org/drawingml/2006/main">
-            <a:r>
-              <a:t>CONNECT</a:t>
-            </a:r>
-          </a:p>
-          <a:p xmlns:a="http://schemas.openxmlformats.org/drawingml/2006/main">
-            <a:r>
-              <a:t>Previous slide: Practical Test 1 continued.</a:t>
-            </a:r>
-          </a:p>
-          <a:p xmlns:a="http://schemas.openxmlformats.org/drawingml/2006/main">
+          <a:p>
+            <a:r>
+              <a:t>Explanation to give</a:t>
+            </a:r>
+          </a:p>
+          <a:p>
+            <a:r>
+              <a:t>This is preparation for Test 1. Rehearse opening and saving offline before the assessed period. During the test, follow the issued invigilation rules.</a:t>
+            </a:r>
+          </a:p>
+          <a:p>
             <a:r>
               <a:t/>
             </a:r>
           </a:p>
-          <a:p xmlns:a="http://schemas.openxmlformats.org/drawingml/2006/main">
-            <a:r>
-              <a:t>EXPLAIN</a:t>
-            </a:r>
-          </a:p>
-          <a:p xmlns:a="http://schemas.openxmlformats.org/drawingml/2006/main">
+          <a:p>
+            <a:r>
+              <a:t>Worked illustration / lecturer answer</a:t>
+            </a:r>
+          </a:p>
+          <a:p>
+            <a:r>
+              <a:t>The published schedule has 15 minutes of setup, 120 of practical work, 25 of typed reasoning without code execution and 20 of collection.</a:t>
+            </a:r>
+          </a:p>
+          <a:p>
+            <a:r>
+              <a:t/>
+            </a:r>
+          </a:p>
+          <a:p>
+            <a:r>
+              <a:t>Misconception to address</a:t>
+            </a:r>
+          </a:p>
+          <a:p>
+            <a:r>
+              <a:t>At the Part A boundary, follow the official snapshot procedure. During the 25-minute Part B period, students type reasoning but must not execute code. Do not change the published timing during an explanation.</a:t>
+            </a:r>
+          </a:p>
+          <a:p>
+            <a:r>
+              <a:t/>
+            </a:r>
+          </a:p>
+          <a:p>
+            <a:r>
+              <a:t>On this slide</a:t>
+            </a:r>
+          </a:p>
+          <a:p>
             <a:r>
               <a:t>Timing and Part B</a:t>
             </a:r>
           </a:p>
-          <a:p xmlns:a="http://schemas.openxmlformats.org/drawingml/2006/main">
+          <a:p>
             <a:r>
               <a:t/>
             </a:r>
           </a:p>
-          <a:p xmlns:a="http://schemas.openxmlformats.org/drawingml/2006/main">
+          <a:p>
             <a:r>
               <a:t>15 minutes setup, 120 minutes practical, 25 minutes typed offline reasoning with code execution prohibited, 20 minutes collection.</a:t>
             </a:r>
           </a:p>
-          <a:p xmlns:a="http://schemas.openxmlformats.org/drawingml/2006/main">
+          <a:p>
             <a:r>
               <a:t/>
             </a:r>
           </a:p>
-          <a:p xmlns:a="http://schemas.openxmlformats.org/drawingml/2006/main">
+          <a:p>
             <a:r>
               <a:t>No internet, messaging or AI.</a:t>
             </a:r>
           </a:p>
-          <a:p xmlns:a="http://schemas.openxmlformats.org/drawingml/2006/main">
+          <a:p>
             <a:r>
               <a:t/>
             </a:r>
           </a:p>
-          <a:p xmlns:a="http://schemas.openxmlformats.org/drawingml/2006/main">
+          <a:p>
             <a:r>
               <a:t>Answer: Why your main cleaning/model choice?</a:t>
             </a:r>
           </a:p>
-          <a:p xmlns:a="http://schemas.openxmlformats.org/drawingml/2006/main">
+          <a:p>
             <a:r>
               <a:t/>
             </a:r>
           </a:p>
-          <a:p xmlns:a="http://schemas.openxmlformats.org/drawingml/2006/main">
-            <a:r>
-              <a:t>LECTURER CUE</a:t>
-            </a:r>
-          </a:p>
-          <a:p xmlns:a="http://schemas.openxmlformats.org/drawingml/2006/main">
-            <a:r>
-              <a:t>Read the specific public requirement shown on this slide. Explain the input, output and evidence before independent work; do not work the assessed answer for the class.</a:t>
-            </a:r>
-          </a:p>
-          <a:p xmlns:a="http://schemas.openxmlformats.org/drawingml/2006/main">
-            <a:r>
-              <a:t/>
-            </a:r>
-          </a:p>
-          <a:p xmlns:a="http://schemas.openxmlformats.org/drawingml/2006/main">
-            <a:r>
-              <a:t>TEACHING MODE</a:t>
-            </a:r>
-          </a:p>
-          <a:p xmlns:a="http://schemas.openxmlformats.org/drawingml/2006/main">
-            <a:r>
-              <a:t>Demonstrate first. Read each new symbol aloud, trace the values and compare the shown output. Learners repeat worked examples individually after class.</a:t>
-            </a:r>
-          </a:p>
-          <a:p xmlns:a="http://schemas.openxmlformats.org/drawingml/2006/main">
-            <a:r>
-              <a:t/>
-            </a:r>
-          </a:p>
-          <a:p xmlns:a="http://schemas.openxmlformats.org/drawingml/2006/main">
-            <a:r>
-              <a:t>NEXT</a:t>
-            </a:r>
-          </a:p>
-          <a:p xmlns:a="http://schemas.openxmlformats.org/drawingml/2006/main">
-            <a:r>
-              <a:t>Practical Test 1 continued.</a:t>
-            </a:r>
-          </a:p>
-          <a:p xmlns:a="http://schemas.openxmlformats.org/drawingml/2006/main">
-            <a:r>
-              <a:t/>
-            </a:r>
-          </a:p>
-          <a:p xmlns:a="http://schemas.openxmlformats.org/drawingml/2006/main">
-            <a:r>
-              <a:t>REFERENCES</a:t>
-            </a:r>
-          </a:p>
-          <a:p xmlns:a="http://schemas.openxmlformats.org/drawingml/2006/main">
-            <a:r>
-              <a:t/>
+          <a:p>
+            <a:r>
+              <a:t>Continue to</a:t>
+            </a:r>
+          </a:p>
+          <a:p>
+            <a:r>
+              <a:t>Practical Test 1 continued</a:t>
             </a:r>
           </a:p>
         </p:txBody>
@@ -2115,7 +1980,7 @@
         <p:nvSpPr>
           <p:cNvPr id="4" name="Slide Number Placeholder 3"/>
           <p:cNvSpPr>
-            <a:spLocks xmlns:a="http://schemas.openxmlformats.org/drawingml/2006/main" noGrp="1"/>
+            <a:spLocks noGrp="1"/>
           </p:cNvSpPr>
           <p:nvPr>
             <p:ph type="sldNum" idx="5"/>
@@ -2123,21 +1988,21 @@
         </p:nvSpPr>
         <p:spPr/>
         <p:txBody>
-          <a:bodyPr xmlns:a="http://schemas.openxmlformats.org/drawingml/2006/main"/>
-          <a:lstStyle xmlns:a="http://schemas.openxmlformats.org/drawingml/2006/main"/>
-          <a:p xmlns:a="http://schemas.openxmlformats.org/drawingml/2006/main"/>
+          <a:bodyPr/>
+          <a:lstStyle/>
+          <a:p/>
         </p:txBody>
       </p:sp>
     </p:spTree>
   </p:cSld>
   <p:clrMapOvr>
-    <a:masterClrMapping xmlns:a="http://schemas.openxmlformats.org/drawingml/2006/main"/>
+    <a:masterClrMapping/>
   </p:clrMapOvr>
 </p:notes>
 </file>
 
 <file path=ppt/notesSlides/notesSlide18.xml><?xml version="1.0" encoding="utf-8"?>
-<p:notes xmlns:p="http://schemas.openxmlformats.org/presentationml/2006/main">
+<p:notes xmlns:a="http://schemas.openxmlformats.org/drawingml/2006/main" xmlns:p="http://schemas.openxmlformats.org/presentationml/2006/main">
   <p:cSld>
     <p:spTree>
       <p:nvGrpSpPr>
@@ -2146,13 +2011,13 @@
         <p:nvPr/>
       </p:nvGrpSpPr>
       <p:grpSpPr>
-        <a:xfrm xmlns:a="http://schemas.openxmlformats.org/drawingml/2006/main"/>
+        <a:xfrm/>
       </p:grpSpPr>
       <p:sp>
         <p:nvSpPr>
           <p:cNvPr id="2" name="Slide Image Placeholder 1"/>
           <p:cNvSpPr>
-            <a:spLocks xmlns:a="http://schemas.openxmlformats.org/drawingml/2006/main" noGrp="1"/>
+            <a:spLocks noGrp="1"/>
           </p:cNvSpPr>
           <p:nvPr>
             <p:ph type="sldImg" idx="0"/>
@@ -2164,7 +2029,7 @@
         <p:nvSpPr>
           <p:cNvPr id="3" name="Notes Placeholder 2"/>
           <p:cNvSpPr>
-            <a:spLocks xmlns:a="http://schemas.openxmlformats.org/drawingml/2006/main" noGrp="1"/>
+            <a:spLocks noGrp="1"/>
           </p:cNvSpPr>
           <p:nvPr>
             <p:ph type="body" idx="1"/>
@@ -2172,136 +2037,121 @@
         </p:nvSpPr>
         <p:spPr/>
         <p:txBody>
-          <a:bodyPr xmlns:a="http://schemas.openxmlformats.org/drawingml/2006/main"/>
-          <a:lstStyle xmlns:a="http://schemas.openxmlformats.org/drawingml/2006/main"/>
-          <a:p xmlns:a="http://schemas.openxmlformats.org/drawingml/2006/main">
-            <a:r>
-              <a:t>PURPOSE</a:t>
-            </a:r>
-          </a:p>
-          <a:p xmlns:a="http://schemas.openxmlformats.org/drawingml/2006/main">
+          <a:bodyPr/>
+          <a:lstStyle/>
+          <a:p>
             <a:r>
               <a:t>Practical Test 1 continued</a:t>
             </a:r>
           </a:p>
-          <a:p xmlns:a="http://schemas.openxmlformats.org/drawingml/2006/main">
+          <a:p>
+            <a:r>
+              <a:t>CML3111, Week 7, slide 18</a:t>
+            </a:r>
+          </a:p>
+          <a:p>
             <a:r>
               <a:t/>
             </a:r>
           </a:p>
-          <a:p xmlns:a="http://schemas.openxmlformats.org/drawingml/2006/main">
-            <a:r>
-              <a:t>CONNECT</a:t>
-            </a:r>
-          </a:p>
-          <a:p xmlns:a="http://schemas.openxmlformats.org/drawingml/2006/main">
-            <a:r>
-              <a:t>Previous slide: Practical Test 1 continued.</a:t>
-            </a:r>
-          </a:p>
-          <a:p xmlns:a="http://schemas.openxmlformats.org/drawingml/2006/main">
+          <a:p>
+            <a:r>
+              <a:t>Explanation to give</a:t>
+            </a:r>
+          </a:p>
+          <a:p>
+            <a:r>
+              <a:t>A chart must answer a stated question and show the actual data result. Explain what one mark represents and label both the quantity and unit before stating the finding.</a:t>
+            </a:r>
+          </a:p>
+          <a:p>
             <a:r>
               <a:t/>
             </a:r>
           </a:p>
-          <a:p xmlns:a="http://schemas.openxmlformats.org/drawingml/2006/main">
-            <a:r>
-              <a:t>EXPLAIN</a:t>
-            </a:r>
-          </a:p>
-          <a:p xmlns:a="http://schemas.openxmlformats.org/drawingml/2006/main">
+          <a:p>
+            <a:r>
+              <a:t>Worked illustration / lecturer answer</a:t>
+            </a:r>
+          </a:p>
+          <a:p>
+            <a:r>
+              <a:t>A useful caption names the group or sample, the observed difference and the relevant unit. A limitation states what the plotted observations cannot establish, such as causation or performance at a new site.</a:t>
+            </a:r>
+          </a:p>
+          <a:p>
+            <a:r>
+              <a:t/>
+            </a:r>
+          </a:p>
+          <a:p>
+            <a:r>
+              <a:t>Misconception to address</a:t>
+            </a:r>
+          </a:p>
+          <a:p>
+            <a:r>
+              <a:t>Text claiming “a chart was made” is not the required chart. Check the exact number and kinds required on this slide and in the assessment guide.</a:t>
+            </a:r>
+          </a:p>
+          <a:p>
+            <a:r>
+              <a:t/>
+            </a:r>
+          </a:p>
+          <a:p>
+            <a:r>
+              <a:t>On this slide</a:t>
+            </a:r>
+          </a:p>
+          <a:p>
             <a:r>
               <a:t>What can your chart/metric not establish?</a:t>
             </a:r>
           </a:p>
-          <a:p xmlns:a="http://schemas.openxmlformats.org/drawingml/2006/main">
+          <a:p>
             <a:r>
               <a:t/>
             </a:r>
           </a:p>
-          <a:p xmlns:a="http://schemas.openxmlformats.org/drawingml/2006/main">
+          <a:p>
             <a:r>
               <a:t>What evidence would change your recommendation?</a:t>
             </a:r>
           </a:p>
-          <a:p xmlns:a="http://schemas.openxmlformats.org/drawingml/2006/main">
+          <a:p>
             <a:r>
               <a:t/>
             </a:r>
           </a:p>
-          <a:p xmlns:a="http://schemas.openxmlformats.org/drawingml/2006/main">
+          <a:p>
             <a:r>
               <a:t>What further data is required?</a:t>
             </a:r>
           </a:p>
-          <a:p xmlns:a="http://schemas.openxmlformats.org/drawingml/2006/main">
+          <a:p>
             <a:r>
               <a:t/>
             </a:r>
           </a:p>
-          <a:p xmlns:a="http://schemas.openxmlformats.org/drawingml/2006/main">
+          <a:p>
             <a:r>
               <a:t>Invigilated offline collection is authoritative; Google upload is a later transport step and must not impose an internet requirement during the test.</a:t>
             </a:r>
           </a:p>
-          <a:p xmlns:a="http://schemas.openxmlformats.org/drawingml/2006/main">
+          <a:p>
             <a:r>
               <a:t/>
             </a:r>
           </a:p>
-          <a:p xmlns:a="http://schemas.openxmlformats.org/drawingml/2006/main">
-            <a:r>
-              <a:t>LECTURER CUE</a:t>
-            </a:r>
-          </a:p>
-          <a:p xmlns:a="http://schemas.openxmlformats.org/drawingml/2006/main">
-            <a:r>
-              <a:t>Read the specific public requirement shown on this slide. Explain the input, output and evidence before independent work; do not work the assessed answer for the class.</a:t>
-            </a:r>
-          </a:p>
-          <a:p xmlns:a="http://schemas.openxmlformats.org/drawingml/2006/main">
-            <a:r>
-              <a:t/>
-            </a:r>
-          </a:p>
-          <a:p xmlns:a="http://schemas.openxmlformats.org/drawingml/2006/main">
-            <a:r>
-              <a:t>TEACHING MODE</a:t>
-            </a:r>
-          </a:p>
-          <a:p xmlns:a="http://schemas.openxmlformats.org/drawingml/2006/main">
-            <a:r>
-              <a:t>Demonstrate first. Read each new symbol aloud, trace the values and compare the shown output. Learners repeat worked examples individually after class.</a:t>
-            </a:r>
-          </a:p>
-          <a:p xmlns:a="http://schemas.openxmlformats.org/drawingml/2006/main">
-            <a:r>
-              <a:t/>
-            </a:r>
-          </a:p>
-          <a:p xmlns:a="http://schemas.openxmlformats.org/drawingml/2006/main">
-            <a:r>
-              <a:t>NEXT</a:t>
-            </a:r>
-          </a:p>
-          <a:p xmlns:a="http://schemas.openxmlformats.org/drawingml/2006/main">
-            <a:r>
-              <a:t>Practical Test 1 submission.</a:t>
-            </a:r>
-          </a:p>
-          <a:p xmlns:a="http://schemas.openxmlformats.org/drawingml/2006/main">
-            <a:r>
-              <a:t/>
-            </a:r>
-          </a:p>
-          <a:p xmlns:a="http://schemas.openxmlformats.org/drawingml/2006/main">
-            <a:r>
-              <a:t>REFERENCES</a:t>
-            </a:r>
-          </a:p>
-          <a:p xmlns:a="http://schemas.openxmlformats.org/drawingml/2006/main">
-            <a:r>
-              <a:t/>
+          <a:p>
+            <a:r>
+              <a:t>Continue to</a:t>
+            </a:r>
+          </a:p>
+          <a:p>
+            <a:r>
+              <a:t>Practical Test 1 submission</a:t>
             </a:r>
           </a:p>
         </p:txBody>
@@ -2310,7 +2160,7 @@
         <p:nvSpPr>
           <p:cNvPr id="4" name="Slide Number Placeholder 3"/>
           <p:cNvSpPr>
-            <a:spLocks xmlns:a="http://schemas.openxmlformats.org/drawingml/2006/main" noGrp="1"/>
+            <a:spLocks noGrp="1"/>
           </p:cNvSpPr>
           <p:nvPr>
             <p:ph type="sldNum" idx="5"/>
@@ -2318,21 +2168,21 @@
         </p:nvSpPr>
         <p:spPr/>
         <p:txBody>
-          <a:bodyPr xmlns:a="http://schemas.openxmlformats.org/drawingml/2006/main"/>
-          <a:lstStyle xmlns:a="http://schemas.openxmlformats.org/drawingml/2006/main"/>
-          <a:p xmlns:a="http://schemas.openxmlformats.org/drawingml/2006/main"/>
+          <a:bodyPr/>
+          <a:lstStyle/>
+          <a:p/>
         </p:txBody>
       </p:sp>
     </p:spTree>
   </p:cSld>
   <p:clrMapOvr>
-    <a:masterClrMapping xmlns:a="http://schemas.openxmlformats.org/drawingml/2006/main"/>
+    <a:masterClrMapping/>
   </p:clrMapOvr>
 </p:notes>
 </file>
 
 <file path=ppt/notesSlides/notesSlide19.xml><?xml version="1.0" encoding="utf-8"?>
-<p:notes xmlns:p="http://schemas.openxmlformats.org/presentationml/2006/main">
+<p:notes xmlns:a="http://schemas.openxmlformats.org/drawingml/2006/main" xmlns:p="http://schemas.openxmlformats.org/presentationml/2006/main">
   <p:cSld>
     <p:spTree>
       <p:nvGrpSpPr>
@@ -2341,13 +2191,13 @@
         <p:nvPr/>
       </p:nvGrpSpPr>
       <p:grpSpPr>
-        <a:xfrm xmlns:a="http://schemas.openxmlformats.org/drawingml/2006/main"/>
+        <a:xfrm/>
       </p:grpSpPr>
       <p:sp>
         <p:nvSpPr>
           <p:cNvPr id="2" name="Slide Image Placeholder 1"/>
           <p:cNvSpPr>
-            <a:spLocks xmlns:a="http://schemas.openxmlformats.org/drawingml/2006/main" noGrp="1"/>
+            <a:spLocks noGrp="1"/>
           </p:cNvSpPr>
           <p:nvPr>
             <p:ph type="sldImg" idx="0"/>
@@ -2359,7 +2209,7 @@
         <p:nvSpPr>
           <p:cNvPr id="3" name="Notes Placeholder 2"/>
           <p:cNvSpPr>
-            <a:spLocks xmlns:a="http://schemas.openxmlformats.org/drawingml/2006/main" noGrp="1"/>
+            <a:spLocks noGrp="1"/>
           </p:cNvSpPr>
           <p:nvPr>
             <p:ph type="body" idx="1"/>
@@ -2367,136 +2217,121 @@
         </p:nvSpPr>
         <p:spPr/>
         <p:txBody>
-          <a:bodyPr xmlns:a="http://schemas.openxmlformats.org/drawingml/2006/main"/>
-          <a:lstStyle xmlns:a="http://schemas.openxmlformats.org/drawingml/2006/main"/>
-          <a:p xmlns:a="http://schemas.openxmlformats.org/drawingml/2006/main">
-            <a:r>
-              <a:t>PURPOSE</a:t>
-            </a:r>
-          </a:p>
-          <a:p xmlns:a="http://schemas.openxmlformats.org/drawingml/2006/main">
+          <a:bodyPr/>
+          <a:lstStyle/>
+          <a:p>
             <a:r>
               <a:t>Practical Test 1 submission</a:t>
             </a:r>
           </a:p>
-          <a:p xmlns:a="http://schemas.openxmlformats.org/drawingml/2006/main">
+          <a:p>
+            <a:r>
+              <a:t>CML3111, Week 7, slide 19</a:t>
+            </a:r>
+          </a:p>
+          <a:p>
             <a:r>
               <a:t/>
             </a:r>
           </a:p>
-          <a:p xmlns:a="http://schemas.openxmlformats.org/drawingml/2006/main">
-            <a:r>
-              <a:t>CONNECT</a:t>
-            </a:r>
-          </a:p>
-          <a:p xmlns:a="http://schemas.openxmlformats.org/drawingml/2006/main">
-            <a:r>
-              <a:t>Previous slide: Practical Test 1 continued.</a:t>
-            </a:r>
-          </a:p>
-          <a:p xmlns:a="http://schemas.openxmlformats.org/drawingml/2006/main">
+          <a:p>
+            <a:r>
+              <a:t>Explanation to give</a:t>
+            </a:r>
+          </a:p>
+          <a:p>
+            <a:r>
+              <a:t>This slide hands over CML3111 TEST1. Show the exact form title before uploading. The required packet is one completed .ipynb notebook.</a:t>
+            </a:r>
+          </a:p>
+          <a:p>
             <a:r>
               <a:t/>
             </a:r>
           </a:p>
-          <a:p xmlns:a="http://schemas.openxmlformats.org/drawingml/2006/main">
-            <a:r>
-              <a:t>EXPLAIN</a:t>
-            </a:r>
-          </a:p>
-          <a:p xmlns:a="http://schemas.openxmlformats.org/drawingml/2006/main">
+          <a:p>
+            <a:r>
+              <a:t>Worked illustration / lecturer answer</a:t>
+            </a:r>
+          </a:p>
+          <a:p>
+            <a:r>
+              <a:t>For TEST1/TEST2, save Part B under My written evidence. Collect the complete notebook offline under invigilation; the later form upload only transports that collected version.</a:t>
+            </a:r>
+          </a:p>
+          <a:p>
+            <a:r>
+              <a:t/>
+            </a:r>
+          </a:p>
+          <a:p>
+            <a:r>
+              <a:t>Misconception to address</a:t>
+            </a:r>
+          </a:p>
+          <a:p>
+            <a:r>
+              <a:t>Students enter their own Student Registration Number as required freeform text. They wait for filenames to appear, press Submit and keep the confirmation. A file saved in Drive or GitHub is not itself a form submission.</a:t>
+            </a:r>
+          </a:p>
+          <a:p>
+            <a:r>
+              <a:t/>
+            </a:r>
+          </a:p>
+          <a:p>
+            <a:r>
+              <a:t>On this slide</a:t>
+            </a:r>
+          </a:p>
+          <a:p>
             <a:r>
               <a:t>Offline invigilated collection is authoritative.</a:t>
             </a:r>
           </a:p>
-          <a:p xmlns:a="http://schemas.openxmlformats.org/drawingml/2006/main">
+          <a:p>
             <a:r>
               <a:t/>
             </a:r>
           </a:p>
-          <a:p xmlns:a="http://schemas.openxmlformats.org/drawingml/2006/main">
+          <a:p>
             <a:r>
               <a:t>Google upload is a later transport step.</a:t>
             </a:r>
           </a:p>
-          <a:p xmlns:a="http://schemas.openxmlformats.org/drawingml/2006/main">
+          <a:p>
             <a:r>
               <a:t/>
             </a:r>
           </a:p>
-          <a:p xmlns:a="http://schemas.openxmlformats.org/drawingml/2006/main">
+          <a:p>
             <a:r>
               <a:t>Save one notebook with Part B under My written evidence.</a:t>
             </a:r>
           </a:p>
-          <a:p xmlns:a="http://schemas.openxmlformats.org/drawingml/2006/main">
+          <a:p>
             <a:r>
               <a:t/>
             </a:r>
           </a:p>
-          <a:p xmlns:a="http://schemas.openxmlformats.org/drawingml/2006/main">
+          <a:p>
             <a:r>
               <a:t>No internet, messaging or AI during the test.</a:t>
             </a:r>
           </a:p>
-          <a:p xmlns:a="http://schemas.openxmlformats.org/drawingml/2006/main">
+          <a:p>
             <a:r>
               <a:t/>
             </a:r>
           </a:p>
-          <a:p xmlns:a="http://schemas.openxmlformats.org/drawingml/2006/main">
-            <a:r>
-              <a:t>LECTURER CUE</a:t>
-            </a:r>
-          </a:p>
-          <a:p xmlns:a="http://schemas.openxmlformats.org/drawingml/2006/main">
-            <a:r>
-              <a:t>Read the specific public requirement shown on this slide. Explain the input, output and evidence before independent work; do not work the assessed answer for the class.</a:t>
-            </a:r>
-          </a:p>
-          <a:p xmlns:a="http://schemas.openxmlformats.org/drawingml/2006/main">
-            <a:r>
-              <a:t/>
-            </a:r>
-          </a:p>
-          <a:p xmlns:a="http://schemas.openxmlformats.org/drawingml/2006/main">
-            <a:r>
-              <a:t>TEACHING MODE</a:t>
-            </a:r>
-          </a:p>
-          <a:p xmlns:a="http://schemas.openxmlformats.org/drawingml/2006/main">
-            <a:r>
-              <a:t>Demonstrate first. Read each new symbol aloud, trace the values and compare the shown output. Learners repeat worked examples individually after class.</a:t>
-            </a:r>
-          </a:p>
-          <a:p xmlns:a="http://schemas.openxmlformats.org/drawingml/2006/main">
-            <a:r>
-              <a:t/>
-            </a:r>
-          </a:p>
-          <a:p xmlns:a="http://schemas.openxmlformats.org/drawingml/2006/main">
-            <a:r>
-              <a:t>NEXT</a:t>
-            </a:r>
-          </a:p>
-          <a:p xmlns:a="http://schemas.openxmlformats.org/drawingml/2006/main">
-            <a:r>
-              <a:t>Before you leave.</a:t>
-            </a:r>
-          </a:p>
-          <a:p xmlns:a="http://schemas.openxmlformats.org/drawingml/2006/main">
-            <a:r>
-              <a:t/>
-            </a:r>
-          </a:p>
-          <a:p xmlns:a="http://schemas.openxmlformats.org/drawingml/2006/main">
-            <a:r>
-              <a:t>REFERENCES</a:t>
-            </a:r>
-          </a:p>
-          <a:p xmlns:a="http://schemas.openxmlformats.org/drawingml/2006/main">
-            <a:r>
-              <a:t/>
+          <a:p>
+            <a:r>
+              <a:t>Continue to</a:t>
+            </a:r>
+          </a:p>
+          <a:p>
+            <a:r>
+              <a:t>Revision and submission checklist</a:t>
             </a:r>
           </a:p>
         </p:txBody>
@@ -2505,7 +2340,7 @@
         <p:nvSpPr>
           <p:cNvPr id="4" name="Slide Number Placeholder 3"/>
           <p:cNvSpPr>
-            <a:spLocks xmlns:a="http://schemas.openxmlformats.org/drawingml/2006/main" noGrp="1"/>
+            <a:spLocks noGrp="1"/>
           </p:cNvSpPr>
           <p:nvPr>
             <p:ph type="sldNum" idx="5"/>
@@ -2513,21 +2348,21 @@
         </p:nvSpPr>
         <p:spPr/>
         <p:txBody>
-          <a:bodyPr xmlns:a="http://schemas.openxmlformats.org/drawingml/2006/main"/>
-          <a:lstStyle xmlns:a="http://schemas.openxmlformats.org/drawingml/2006/main"/>
-          <a:p xmlns:a="http://schemas.openxmlformats.org/drawingml/2006/main"/>
+          <a:bodyPr/>
+          <a:lstStyle/>
+          <a:p/>
         </p:txBody>
       </p:sp>
     </p:spTree>
   </p:cSld>
   <p:clrMapOvr>
-    <a:masterClrMapping xmlns:a="http://schemas.openxmlformats.org/drawingml/2006/main"/>
+    <a:masterClrMapping/>
   </p:clrMapOvr>
 </p:notes>
 </file>
 
 <file path=ppt/notesSlides/notesSlide2.xml><?xml version="1.0" encoding="utf-8"?>
-<p:notes xmlns:p="http://schemas.openxmlformats.org/presentationml/2006/main">
+<p:notes xmlns:a="http://schemas.openxmlformats.org/drawingml/2006/main" xmlns:p="http://schemas.openxmlformats.org/presentationml/2006/main">
   <p:cSld>
     <p:spTree>
       <p:nvGrpSpPr>
@@ -2536,13 +2371,13 @@
         <p:nvPr/>
       </p:nvGrpSpPr>
       <p:grpSpPr>
-        <a:xfrm xmlns:a="http://schemas.openxmlformats.org/drawingml/2006/main"/>
+        <a:xfrm/>
       </p:grpSpPr>
       <p:sp>
         <p:nvSpPr>
           <p:cNvPr id="2" name="Slide Image Placeholder 1"/>
           <p:cNvSpPr>
-            <a:spLocks xmlns:a="http://schemas.openxmlformats.org/drawingml/2006/main" noGrp="1"/>
+            <a:spLocks noGrp="1"/>
           </p:cNvSpPr>
           <p:nvPr>
             <p:ph type="sldImg" idx="0"/>
@@ -2554,7 +2389,7 @@
         <p:nvSpPr>
           <p:cNvPr id="3" name="Notes Placeholder 2"/>
           <p:cNvSpPr>
-            <a:spLocks xmlns:a="http://schemas.openxmlformats.org/drawingml/2006/main" noGrp="1"/>
+            <a:spLocks noGrp="1"/>
           </p:cNvSpPr>
           <p:nvPr>
             <p:ph type="body" idx="1"/>
@@ -2562,116 +2397,101 @@
         </p:nvSpPr>
         <p:spPr/>
         <p:txBody>
-          <a:bodyPr xmlns:a="http://schemas.openxmlformats.org/drawingml/2006/main"/>
-          <a:lstStyle xmlns:a="http://schemas.openxmlformats.org/drawingml/2006/main"/>
-          <a:p xmlns:a="http://schemas.openxmlformats.org/drawingml/2006/main">
-            <a:r>
-              <a:t>PURPOSE</a:t>
-            </a:r>
-          </a:p>
-          <a:p xmlns:a="http://schemas.openxmlformats.org/drawingml/2006/main">
+          <a:bodyPr/>
+          <a:lstStyle/>
+          <a:p>
             <a:r>
               <a:t>Today’s learning</a:t>
             </a:r>
           </a:p>
-          <a:p xmlns:a="http://schemas.openxmlformats.org/drawingml/2006/main">
+          <a:p>
+            <a:r>
+              <a:t>CML3111, Week 7, slide 2</a:t>
+            </a:r>
+          </a:p>
+          <a:p>
             <a:r>
               <a:t/>
             </a:r>
           </a:p>
-          <a:p xmlns:a="http://schemas.openxmlformats.org/drawingml/2006/main">
-            <a:r>
-              <a:t>CONNECT</a:t>
-            </a:r>
-          </a:p>
-          <a:p xmlns:a="http://schemas.openxmlformats.org/drawingml/2006/main">
-            <a:r>
-              <a:t>Previous slide: Preparing for Practical Test 1.</a:t>
-            </a:r>
-          </a:p>
-          <a:p xmlns:a="http://schemas.openxmlformats.org/drawingml/2006/main">
+          <a:p>
+            <a:r>
+              <a:t>Explanation to give</a:t>
+            </a:r>
+          </a:p>
+          <a:p>
+            <a:r>
+              <a:t>This is preparation for Test 1. Rehearse opening and saving offline before the assessed period. During the test, follow the issued invigilation rules.</a:t>
+            </a:r>
+          </a:p>
+          <a:p>
             <a:r>
               <a:t/>
             </a:r>
           </a:p>
-          <a:p xmlns:a="http://schemas.openxmlformats.org/drawingml/2006/main">
-            <a:r>
-              <a:t>EXPLAIN</a:t>
-            </a:r>
-          </a:p>
-          <a:p xmlns:a="http://schemas.openxmlformats.org/drawingml/2006/main">
+          <a:p>
+            <a:r>
+              <a:t>Worked illustration / lecturer answer</a:t>
+            </a:r>
+          </a:p>
+          <a:p>
+            <a:r>
+              <a:t>The published schedule has 15 minutes of setup, 120 of practical work, 25 of typed reasoning without code execution and 20 of collection.</a:t>
+            </a:r>
+          </a:p>
+          <a:p>
+            <a:r>
+              <a:t/>
+            </a:r>
+          </a:p>
+          <a:p>
+            <a:r>
+              <a:t>Misconception to address</a:t>
+            </a:r>
+          </a:p>
+          <a:p>
+            <a:r>
+              <a:t>At the end, check the specific outcome shown here using a small previously demonstrated example. A completed file without an explanation is not evidence of understanding.</a:t>
+            </a:r>
+          </a:p>
+          <a:p>
+            <a:r>
+              <a:t/>
+            </a:r>
+          </a:p>
+          <a:p>
+            <a:r>
+              <a:t>On this slide</a:t>
+            </a:r>
+          </a:p>
+          <a:p>
             <a:r>
               <a:t>Rehearse saving and reopening the required files.</a:t>
             </a:r>
           </a:p>
-          <a:p xmlns:a="http://schemas.openxmlformats.org/drawingml/2006/main">
+          <a:p>
             <a:r>
               <a:t/>
             </a:r>
           </a:p>
-          <a:p xmlns:a="http://schemas.openxmlformats.org/drawingml/2006/main">
+          <a:p>
             <a:r>
               <a:t>Check the published test rules before the session.</a:t>
             </a:r>
           </a:p>
-          <a:p xmlns:a="http://schemas.openxmlformats.org/drawingml/2006/main">
+          <a:p>
             <a:r>
               <a:t/>
             </a:r>
           </a:p>
-          <a:p xmlns:a="http://schemas.openxmlformats.org/drawingml/2006/main">
-            <a:r>
-              <a:t>LECTURER CUE</a:t>
-            </a:r>
-          </a:p>
-          <a:p xmlns:a="http://schemas.openxmlformats.org/drawingml/2006/main">
-            <a:r>
-              <a:t>Read the specific public requirement shown on this slide. Explain the input, output and evidence before independent work; do not work the assessed answer for the class.</a:t>
-            </a:r>
-          </a:p>
-          <a:p xmlns:a="http://schemas.openxmlformats.org/drawingml/2006/main">
-            <a:r>
-              <a:t/>
-            </a:r>
-          </a:p>
-          <a:p xmlns:a="http://schemas.openxmlformats.org/drawingml/2006/main">
-            <a:r>
-              <a:t>TEACHING MODE</a:t>
-            </a:r>
-          </a:p>
-          <a:p xmlns:a="http://schemas.openxmlformats.org/drawingml/2006/main">
-            <a:r>
-              <a:t>Demonstrate first. Read each new symbol aloud, trace the values and compare the shown output. Learners repeat worked examples individually after class.</a:t>
-            </a:r>
-          </a:p>
-          <a:p xmlns:a="http://schemas.openxmlformats.org/drawingml/2006/main">
-            <a:r>
-              <a:t/>
-            </a:r>
-          </a:p>
-          <a:p xmlns:a="http://schemas.openxmlformats.org/drawingml/2006/main">
-            <a:r>
-              <a:t>NEXT</a:t>
-            </a:r>
-          </a:p>
-          <a:p xmlns:a="http://schemas.openxmlformats.org/drawingml/2006/main">
-            <a:r>
-              <a:t>Connection to the previous lesson.</a:t>
-            </a:r>
-          </a:p>
-          <a:p xmlns:a="http://schemas.openxmlformats.org/drawingml/2006/main">
-            <a:r>
-              <a:t/>
-            </a:r>
-          </a:p>
-          <a:p xmlns:a="http://schemas.openxmlformats.org/drawingml/2006/main">
-            <a:r>
-              <a:t>REFERENCES</a:t>
-            </a:r>
-          </a:p>
-          <a:p xmlns:a="http://schemas.openxmlformats.org/drawingml/2006/main">
-            <a:r>
-              <a:t/>
+          <a:p>
+            <a:r>
+              <a:t>Continue to</a:t>
+            </a:r>
+          </a:p>
+          <a:p>
+            <a:r>
+              <a:t>Connection to the previous lesson</a:t>
             </a:r>
           </a:p>
         </p:txBody>
@@ -2680,7 +2500,7 @@
         <p:nvSpPr>
           <p:cNvPr id="4" name="Slide Number Placeholder 3"/>
           <p:cNvSpPr>
-            <a:spLocks xmlns:a="http://schemas.openxmlformats.org/drawingml/2006/main" noGrp="1"/>
+            <a:spLocks noGrp="1"/>
           </p:cNvSpPr>
           <p:nvPr>
             <p:ph type="sldNum" idx="5"/>
@@ -2688,21 +2508,21 @@
         </p:nvSpPr>
         <p:spPr/>
         <p:txBody>
-          <a:bodyPr xmlns:a="http://schemas.openxmlformats.org/drawingml/2006/main"/>
-          <a:lstStyle xmlns:a="http://schemas.openxmlformats.org/drawingml/2006/main"/>
-          <a:p xmlns:a="http://schemas.openxmlformats.org/drawingml/2006/main"/>
+          <a:bodyPr/>
+          <a:lstStyle/>
+          <a:p/>
         </p:txBody>
       </p:sp>
     </p:spTree>
   </p:cSld>
   <p:clrMapOvr>
-    <a:masterClrMapping xmlns:a="http://schemas.openxmlformats.org/drawingml/2006/main"/>
+    <a:masterClrMapping/>
   </p:clrMapOvr>
 </p:notes>
 </file>
 
 <file path=ppt/notesSlides/notesSlide20.xml><?xml version="1.0" encoding="utf-8"?>
-<p:notes xmlns:p="http://schemas.openxmlformats.org/presentationml/2006/main">
+<p:notes xmlns:a="http://schemas.openxmlformats.org/drawingml/2006/main" xmlns:p="http://schemas.openxmlformats.org/presentationml/2006/main">
   <p:cSld>
     <p:spTree>
       <p:nvGrpSpPr>
@@ -2711,13 +2531,13 @@
         <p:nvPr/>
       </p:nvGrpSpPr>
       <p:grpSpPr>
-        <a:xfrm xmlns:a="http://schemas.openxmlformats.org/drawingml/2006/main"/>
+        <a:xfrm/>
       </p:grpSpPr>
       <p:sp>
         <p:nvSpPr>
           <p:cNvPr id="2" name="Slide Image Placeholder 1"/>
           <p:cNvSpPr>
-            <a:spLocks xmlns:a="http://schemas.openxmlformats.org/drawingml/2006/main" noGrp="1"/>
+            <a:spLocks noGrp="1"/>
           </p:cNvSpPr>
           <p:nvPr>
             <p:ph type="sldImg" idx="0"/>
@@ -2729,7 +2549,7 @@
         <p:nvSpPr>
           <p:cNvPr id="3" name="Notes Placeholder 2"/>
           <p:cNvSpPr>
-            <a:spLocks xmlns:a="http://schemas.openxmlformats.org/drawingml/2006/main" noGrp="1"/>
+            <a:spLocks noGrp="1"/>
           </p:cNvSpPr>
           <p:nvPr>
             <p:ph type="body" idx="1"/>
@@ -2737,125 +2557,95 @@
         </p:nvSpPr>
         <p:spPr/>
         <p:txBody>
-          <a:bodyPr xmlns:a="http://schemas.openxmlformats.org/drawingml/2006/main"/>
-          <a:lstStyle xmlns:a="http://schemas.openxmlformats.org/drawingml/2006/main"/>
-          <a:p xmlns:a="http://schemas.openxmlformats.org/drawingml/2006/main">
-            <a:r>
-              <a:t>PURPOSE</a:t>
-            </a:r>
-          </a:p>
-          <a:p xmlns:a="http://schemas.openxmlformats.org/drawingml/2006/main">
+          <a:bodyPr/>
+          <a:lstStyle/>
+          <a:p>
             <a:r>
               <a:t>Revision and submission checklist</a:t>
             </a:r>
           </a:p>
-          <a:p xmlns:a="http://schemas.openxmlformats.org/drawingml/2006/main">
+          <a:p>
+            <a:r>
+              <a:t>CML3111, Week 7, slide 20</a:t>
+            </a:r>
+          </a:p>
+          <a:p>
             <a:r>
               <a:t/>
             </a:r>
           </a:p>
-          <a:p xmlns:a="http://schemas.openxmlformats.org/drawingml/2006/main">
-            <a:r>
-              <a:t>CONNECT</a:t>
-            </a:r>
-          </a:p>
-          <a:p xmlns:a="http://schemas.openxmlformats.org/drawingml/2006/main">
-            <a:r>
-              <a:t>Previous slide: Practical Test 1 submission.</a:t>
-            </a:r>
-          </a:p>
-          <a:p xmlns:a="http://schemas.openxmlformats.org/drawingml/2006/main">
+          <a:p>
+            <a:r>
+              <a:t>Explanation to give</a:t>
+            </a:r>
+          </a:p>
+          <a:p>
+            <a:r>
+              <a:t>This is preparation for Test 1. Rehearse opening and saving offline before the assessed period. During the test, follow the issued invigilation rules.</a:t>
+            </a:r>
+          </a:p>
+          <a:p>
             <a:r>
               <a:t/>
             </a:r>
           </a:p>
-          <a:p xmlns:a="http://schemas.openxmlformats.org/drawingml/2006/main">
-            <a:r>
-              <a:t>EXPLAIN</a:t>
-            </a:r>
-          </a:p>
-          <a:p xmlns:a="http://schemas.openxmlformats.org/drawingml/2006/main">
+          <a:p>
+            <a:r>
+              <a:t>Worked illustration / lecturer answer</a:t>
+            </a:r>
+          </a:p>
+          <a:p>
+            <a:r>
+              <a:t>The published schedule has 15 minutes of setup, 120 of practical work, 25 of typed reasoning without code execution and 20 of collection.</a:t>
+            </a:r>
+          </a:p>
+          <a:p>
+            <a:r>
+              <a:t/>
+            </a:r>
+          </a:p>
+          <a:p>
+            <a:r>
+              <a:t>Misconception to address</a:t>
+            </a:r>
+          </a:p>
+          <a:p>
+            <a:r>
+              <a:t>Close by identifying the actual saved file and its correct submission route. Read the live deadline. For current weekly notebook tasks, students upload their own work, not the practice notebook, ZIP or grading files.</a:t>
+            </a:r>
+          </a:p>
+          <a:p>
+            <a:r>
+              <a:t/>
+            </a:r>
+          </a:p>
+          <a:p>
+            <a:r>
+              <a:t>On this slide</a:t>
+            </a:r>
+          </a:p>
+          <a:p>
             <a:r>
               <a:t>You can reopen your notebook and find code and typed reasoning without help.</a:t>
             </a:r>
           </a:p>
-          <a:p xmlns:a="http://schemas.openxmlformats.org/drawingml/2006/main">
+          <a:p>
             <a:r>
               <a:t/>
             </a:r>
           </a:p>
-          <a:p xmlns:a="http://schemas.openxmlformats.org/drawingml/2006/main">
+          <a:p>
             <a:r>
               <a:t>Save your work and check the required submission files.</a:t>
             </a:r>
           </a:p>
-          <a:p xmlns:a="http://schemas.openxmlformats.org/drawingml/2006/main">
-            <a:r>
-              <a:t/>
-            </a:r>
-          </a:p>
-          <a:p xmlns:a="http://schemas.openxmlformats.org/drawingml/2006/main">
-            <a:r>
-              <a:t>LECTURER CUE</a:t>
-            </a:r>
-          </a:p>
-          <a:p xmlns:a="http://schemas.openxmlformats.org/drawingml/2006/main">
-            <a:r>
-              <a:t>Read the specific public requirement shown on this slide. Explain the input, output and evidence before independent work; do not work the assessed answer for the class.</a:t>
-            </a:r>
-          </a:p>
-          <a:p xmlns:a="http://schemas.openxmlformats.org/drawingml/2006/main">
-            <a:r>
-              <a:t/>
-            </a:r>
-          </a:p>
-          <a:p xmlns:a="http://schemas.openxmlformats.org/drawingml/2006/main">
-            <a:r>
-              <a:t>TEACHING MODE</a:t>
-            </a:r>
-          </a:p>
-          <a:p xmlns:a="http://schemas.openxmlformats.org/drawingml/2006/main">
-            <a:r>
-              <a:t>Demonstrate first. Read each new symbol aloud, trace the values and compare the shown output. Learners repeat worked examples individually after class.</a:t>
-            </a:r>
-          </a:p>
-          <a:p xmlns:a="http://schemas.openxmlformats.org/drawingml/2006/main">
-            <a:r>
-              <a:t/>
-            </a:r>
-          </a:p>
-          <a:p xmlns:a="http://schemas.openxmlformats.org/drawingml/2006/main">
-            <a:r>
-              <a:t>NEXT</a:t>
-            </a:r>
-          </a:p>
-          <a:p xmlns:a="http://schemas.openxmlformats.org/drawingml/2006/main">
-            <a:r>
-              <a:t>independent revision and the issued task.</a:t>
-            </a:r>
-          </a:p>
-          <a:p xmlns:a="http://schemas.openxmlformats.org/drawingml/2006/main">
-            <a:r>
-              <a:t/>
-            </a:r>
-          </a:p>
-          <a:p xmlns:a="http://schemas.openxmlformats.org/drawingml/2006/main">
-            <a:r>
-              <a:t>REFERENCES</a:t>
-            </a:r>
-          </a:p>
-          <a:p xmlns:a="http://schemas.openxmlformats.org/drawingml/2006/main">
-            <a:r>
-              <a:t/>
-            </a:r>
-          </a:p>
         </p:txBody>
       </p:sp>
       <p:sp>
         <p:nvSpPr>
           <p:cNvPr id="4" name="Slide Number Placeholder 3"/>
           <p:cNvSpPr>
-            <a:spLocks xmlns:a="http://schemas.openxmlformats.org/drawingml/2006/main" noGrp="1"/>
+            <a:spLocks noGrp="1"/>
           </p:cNvSpPr>
           <p:nvPr>
             <p:ph type="sldNum" idx="5"/>
@@ -2863,21 +2653,21 @@
         </p:nvSpPr>
         <p:spPr/>
         <p:txBody>
-          <a:bodyPr xmlns:a="http://schemas.openxmlformats.org/drawingml/2006/main"/>
-          <a:lstStyle xmlns:a="http://schemas.openxmlformats.org/drawingml/2006/main"/>
-          <a:p xmlns:a="http://schemas.openxmlformats.org/drawingml/2006/main"/>
+          <a:bodyPr/>
+          <a:lstStyle/>
+          <a:p/>
         </p:txBody>
       </p:sp>
     </p:spTree>
   </p:cSld>
   <p:clrMapOvr>
-    <a:masterClrMapping xmlns:a="http://schemas.openxmlformats.org/drawingml/2006/main"/>
+    <a:masterClrMapping/>
   </p:clrMapOvr>
 </p:notes>
 </file>
 
 <file path=ppt/notesSlides/notesSlide3.xml><?xml version="1.0" encoding="utf-8"?>
-<p:notes xmlns:p="http://schemas.openxmlformats.org/presentationml/2006/main">
+<p:notes xmlns:a="http://schemas.openxmlformats.org/drawingml/2006/main" xmlns:p="http://schemas.openxmlformats.org/presentationml/2006/main">
   <p:cSld>
     <p:spTree>
       <p:nvGrpSpPr>
@@ -2886,13 +2676,13 @@
         <p:nvPr/>
       </p:nvGrpSpPr>
       <p:grpSpPr>
-        <a:xfrm xmlns:a="http://schemas.openxmlformats.org/drawingml/2006/main"/>
+        <a:xfrm/>
       </p:grpSpPr>
       <p:sp>
         <p:nvSpPr>
           <p:cNvPr id="2" name="Slide Image Placeholder 1"/>
           <p:cNvSpPr>
-            <a:spLocks xmlns:a="http://schemas.openxmlformats.org/drawingml/2006/main" noGrp="1"/>
+            <a:spLocks noGrp="1"/>
           </p:cNvSpPr>
           <p:nvPr>
             <p:ph type="sldImg" idx="0"/>
@@ -2904,7 +2694,7 @@
         <p:nvSpPr>
           <p:cNvPr id="3" name="Notes Placeholder 2"/>
           <p:cNvSpPr>
-            <a:spLocks xmlns:a="http://schemas.openxmlformats.org/drawingml/2006/main" noGrp="1"/>
+            <a:spLocks noGrp="1"/>
           </p:cNvSpPr>
           <p:nvPr>
             <p:ph type="body" idx="1"/>
@@ -2912,106 +2702,91 @@
         </p:nvSpPr>
         <p:spPr/>
         <p:txBody>
-          <a:bodyPr xmlns:a="http://schemas.openxmlformats.org/drawingml/2006/main"/>
-          <a:lstStyle xmlns:a="http://schemas.openxmlformats.org/drawingml/2006/main"/>
-          <a:p xmlns:a="http://schemas.openxmlformats.org/drawingml/2006/main">
-            <a:r>
-              <a:t>PURPOSE</a:t>
-            </a:r>
-          </a:p>
-          <a:p xmlns:a="http://schemas.openxmlformats.org/drawingml/2006/main">
+          <a:bodyPr/>
+          <a:lstStyle/>
+          <a:p>
             <a:r>
               <a:t>Connection to the previous lesson</a:t>
             </a:r>
           </a:p>
-          <a:p xmlns:a="http://schemas.openxmlformats.org/drawingml/2006/main">
+          <a:p>
+            <a:r>
+              <a:t>CML3111, Week 7, slide 3</a:t>
+            </a:r>
+          </a:p>
+          <a:p>
             <a:r>
               <a:t/>
             </a:r>
           </a:p>
-          <a:p xmlns:a="http://schemas.openxmlformats.org/drawingml/2006/main">
-            <a:r>
-              <a:t>CONNECT</a:t>
-            </a:r>
-          </a:p>
-          <a:p xmlns:a="http://schemas.openxmlformats.org/drawingml/2006/main">
-            <a:r>
-              <a:t>Previous slide: Today’s learning.</a:t>
-            </a:r>
-          </a:p>
-          <a:p xmlns:a="http://schemas.openxmlformats.org/drawingml/2006/main">
+          <a:p>
+            <a:r>
+              <a:t>Explanation to give</a:t>
+            </a:r>
+          </a:p>
+          <a:p>
+            <a:r>
+              <a:t>This is preparation for Test 1. Rehearse opening and saving offline before the assessed period. During the test, follow the issued invigilation rules.</a:t>
+            </a:r>
+          </a:p>
+          <a:p>
             <a:r>
               <a:t/>
             </a:r>
           </a:p>
-          <a:p xmlns:a="http://schemas.openxmlformats.org/drawingml/2006/main">
-            <a:r>
-              <a:t>EXPLAIN</a:t>
-            </a:r>
-          </a:p>
-          <a:p xmlns:a="http://schemas.openxmlformats.org/drawingml/2006/main">
+          <a:p>
+            <a:r>
+              <a:t>Worked illustration / lecturer answer</a:t>
+            </a:r>
+          </a:p>
+          <a:p>
+            <a:r>
+              <a:t>The published schedule has 15 minutes of setup, 120 of practical work, 25 of typed reasoning without code execution and 20 of collection.</a:t>
+            </a:r>
+          </a:p>
+          <a:p>
+            <a:r>
+              <a:t/>
+            </a:r>
+          </a:p>
+          <a:p>
+            <a:r>
+              <a:t>Misconception to address</a:t>
+            </a:r>
+          </a:p>
+          <a:p>
+            <a:r>
+              <a:t>Connect this to the previous result named on this slide. Demonstrate the first step again if necessary; there is no requirement for partner work before the explanation.</a:t>
+            </a:r>
+          </a:p>
+          <a:p>
+            <a:r>
+              <a:t/>
+            </a:r>
+          </a:p>
+          <a:p>
+            <a:r>
+              <a:t>On this slide</a:t>
+            </a:r>
+          </a:p>
+          <a:p>
             <a:r>
               <a:t>Can you open the provided notebook and data on the prepared lab computer without internet?</a:t>
             </a:r>
           </a:p>
-          <a:p xmlns:a="http://schemas.openxmlformats.org/drawingml/2006/main">
+          <a:p>
             <a:r>
               <a:t/>
             </a:r>
           </a:p>
-          <a:p xmlns:a="http://schemas.openxmlformats.org/drawingml/2006/main">
-            <a:r>
-              <a:t>LECTURER CUE</a:t>
-            </a:r>
-          </a:p>
-          <a:p xmlns:a="http://schemas.openxmlformats.org/drawingml/2006/main">
-            <a:r>
-              <a:t>Read the specific public requirement shown on this slide. Explain the input, output and evidence before independent work; do not work the assessed answer for the class.</a:t>
-            </a:r>
-          </a:p>
-          <a:p xmlns:a="http://schemas.openxmlformats.org/drawingml/2006/main">
-            <a:r>
-              <a:t/>
-            </a:r>
-          </a:p>
-          <a:p xmlns:a="http://schemas.openxmlformats.org/drawingml/2006/main">
-            <a:r>
-              <a:t>TEACHING MODE</a:t>
-            </a:r>
-          </a:p>
-          <a:p xmlns:a="http://schemas.openxmlformats.org/drawingml/2006/main">
-            <a:r>
-              <a:t>Demonstrate first. Read each new symbol aloud, trace the values and compare the shown output. Learners repeat worked examples individually after class.</a:t>
-            </a:r>
-          </a:p>
-          <a:p xmlns:a="http://schemas.openxmlformats.org/drawingml/2006/main">
-            <a:r>
-              <a:t/>
-            </a:r>
-          </a:p>
-          <a:p xmlns:a="http://schemas.openxmlformats.org/drawingml/2006/main">
-            <a:r>
-              <a:t>NEXT</a:t>
-            </a:r>
-          </a:p>
-          <a:p xmlns:a="http://schemas.openxmlformats.org/drawingml/2006/main">
-            <a:r>
-              <a:t>Rehearse before test day.</a:t>
-            </a:r>
-          </a:p>
-          <a:p xmlns:a="http://schemas.openxmlformats.org/drawingml/2006/main">
-            <a:r>
-              <a:t/>
-            </a:r>
-          </a:p>
-          <a:p xmlns:a="http://schemas.openxmlformats.org/drawingml/2006/main">
-            <a:r>
-              <a:t>REFERENCES</a:t>
-            </a:r>
-          </a:p>
-          <a:p xmlns:a="http://schemas.openxmlformats.org/drawingml/2006/main">
-            <a:r>
-              <a:t/>
+          <a:p>
+            <a:r>
+              <a:t>Continue to</a:t>
+            </a:r>
+          </a:p>
+          <a:p>
+            <a:r>
+              <a:t>Rehearse before test day</a:t>
             </a:r>
           </a:p>
         </p:txBody>
@@ -3020,7 +2795,7 @@
         <p:nvSpPr>
           <p:cNvPr id="4" name="Slide Number Placeholder 3"/>
           <p:cNvSpPr>
-            <a:spLocks xmlns:a="http://schemas.openxmlformats.org/drawingml/2006/main" noGrp="1"/>
+            <a:spLocks noGrp="1"/>
           </p:cNvSpPr>
           <p:nvPr>
             <p:ph type="sldNum" idx="5"/>
@@ -3028,21 +2803,21 @@
         </p:nvSpPr>
         <p:spPr/>
         <p:txBody>
-          <a:bodyPr xmlns:a="http://schemas.openxmlformats.org/drawingml/2006/main"/>
-          <a:lstStyle xmlns:a="http://schemas.openxmlformats.org/drawingml/2006/main"/>
-          <a:p xmlns:a="http://schemas.openxmlformats.org/drawingml/2006/main"/>
+          <a:bodyPr/>
+          <a:lstStyle/>
+          <a:p/>
         </p:txBody>
       </p:sp>
     </p:spTree>
   </p:cSld>
   <p:clrMapOvr>
-    <a:masterClrMapping xmlns:a="http://schemas.openxmlformats.org/drawingml/2006/main"/>
+    <a:masterClrMapping/>
   </p:clrMapOvr>
 </p:notes>
 </file>
 
 <file path=ppt/notesSlides/notesSlide4.xml><?xml version="1.0" encoding="utf-8"?>
-<p:notes xmlns:p="http://schemas.openxmlformats.org/presentationml/2006/main">
+<p:notes xmlns:a="http://schemas.openxmlformats.org/drawingml/2006/main" xmlns:p="http://schemas.openxmlformats.org/presentationml/2006/main">
   <p:cSld>
     <p:spTree>
       <p:nvGrpSpPr>
@@ -3051,13 +2826,13 @@
         <p:nvPr/>
       </p:nvGrpSpPr>
       <p:grpSpPr>
-        <a:xfrm xmlns:a="http://schemas.openxmlformats.org/drawingml/2006/main"/>
+        <a:xfrm/>
       </p:grpSpPr>
       <p:sp>
         <p:nvSpPr>
           <p:cNvPr id="2" name="Slide Image Placeholder 1"/>
           <p:cNvSpPr>
-            <a:spLocks xmlns:a="http://schemas.openxmlformats.org/drawingml/2006/main" noGrp="1"/>
+            <a:spLocks noGrp="1"/>
           </p:cNvSpPr>
           <p:nvPr>
             <p:ph type="sldImg" idx="0"/>
@@ -3069,7 +2844,7 @@
         <p:nvSpPr>
           <p:cNvPr id="3" name="Notes Placeholder 2"/>
           <p:cNvSpPr>
-            <a:spLocks xmlns:a="http://schemas.openxmlformats.org/drawingml/2006/main" noGrp="1"/>
+            <a:spLocks noGrp="1"/>
           </p:cNvSpPr>
           <p:nvPr>
             <p:ph type="body" idx="1"/>
@@ -3077,126 +2852,111 @@
         </p:nvSpPr>
         <p:spPr/>
         <p:txBody>
-          <a:bodyPr xmlns:a="http://schemas.openxmlformats.org/drawingml/2006/main"/>
-          <a:lstStyle xmlns:a="http://schemas.openxmlformats.org/drawingml/2006/main"/>
-          <a:p xmlns:a="http://schemas.openxmlformats.org/drawingml/2006/main">
-            <a:r>
-              <a:t>PURPOSE</a:t>
-            </a:r>
-          </a:p>
-          <a:p xmlns:a="http://schemas.openxmlformats.org/drawingml/2006/main">
+          <a:bodyPr/>
+          <a:lstStyle/>
+          <a:p>
             <a:r>
               <a:t>Rehearse before test day</a:t>
             </a:r>
           </a:p>
-          <a:p xmlns:a="http://schemas.openxmlformats.org/drawingml/2006/main">
+          <a:p>
+            <a:r>
+              <a:t>CML3111, Week 7, slide 4</a:t>
+            </a:r>
+          </a:p>
+          <a:p>
             <a:r>
               <a:t/>
             </a:r>
           </a:p>
-          <a:p xmlns:a="http://schemas.openxmlformats.org/drawingml/2006/main">
-            <a:r>
-              <a:t>CONNECT</a:t>
-            </a:r>
-          </a:p>
-          <a:p xmlns:a="http://schemas.openxmlformats.org/drawingml/2006/main">
-            <a:r>
-              <a:t>Previous slide: Connection to the previous lesson.</a:t>
-            </a:r>
-          </a:p>
-          <a:p xmlns:a="http://schemas.openxmlformats.org/drawingml/2006/main">
+          <a:p>
+            <a:r>
+              <a:t>Explanation to give</a:t>
+            </a:r>
+          </a:p>
+          <a:p>
+            <a:r>
+              <a:t>Show the offline save location and reopen the file before test day. Identify both the code cells and the markdown cell headed My written evidence.</a:t>
+            </a:r>
+          </a:p>
+          <a:p>
             <a:r>
               <a:t/>
             </a:r>
           </a:p>
-          <a:p xmlns:a="http://schemas.openxmlformats.org/drawingml/2006/main">
-            <a:r>
-              <a:t>EXPLAIN</a:t>
-            </a:r>
-          </a:p>
-          <a:p xmlns:a="http://schemas.openxmlformats.org/drawingml/2006/main">
+          <a:p>
+            <a:r>
+              <a:t>Worked illustration / lecturer answer</a:t>
+            </a:r>
+          </a:p>
+          <a:p>
+            <a:r>
+              <a:t>Use a separate practice notebook for rehearsal. Students should locate the actual .ipynb on disk rather than rely on a browser tab or cloud link.</a:t>
+            </a:r>
+          </a:p>
+          <a:p>
+            <a:r>
+              <a:t/>
+            </a:r>
+          </a:p>
+          <a:p>
+            <a:r>
+              <a:t>Misconception to address</a:t>
+            </a:r>
+          </a:p>
+          <a:p>
+            <a:r>
+              <a:t>During the assessed period, report technical failures immediately and follow the invigilator’s instructions. Do not introduce new modelling code or online resources.</a:t>
+            </a:r>
+          </a:p>
+          <a:p>
+            <a:r>
+              <a:t/>
+            </a:r>
+          </a:p>
+          <a:p>
+            <a:r>
+              <a:t>On this slide</a:t>
+            </a:r>
+          </a:p>
+          <a:p>
             <a:r>
               <a:t>Use the separate practice notebook before the timed session.</a:t>
             </a:r>
           </a:p>
-          <a:p xmlns:a="http://schemas.openxmlformats.org/drawingml/2006/main">
+          <a:p>
             <a:r>
               <a:t/>
             </a:r>
           </a:p>
-          <a:p xmlns:a="http://schemas.openxmlformats.org/drawingml/2006/main">
+          <a:p>
             <a:r>
               <a:t>Open the supplied data and run a familiar calculation.</a:t>
             </a:r>
           </a:p>
-          <a:p xmlns:a="http://schemas.openxmlformats.org/drawingml/2006/main">
+          <a:p>
             <a:r>
               <a:t/>
             </a:r>
           </a:p>
-          <a:p xmlns:a="http://schemas.openxmlformats.org/drawingml/2006/main">
+          <a:p>
             <a:r>
               <a:t>The test packet and permitted resources are issued by the lecturer.</a:t>
             </a:r>
           </a:p>
-          <a:p xmlns:a="http://schemas.openxmlformats.org/drawingml/2006/main">
+          <a:p>
             <a:r>
               <a:t/>
             </a:r>
           </a:p>
-          <a:p xmlns:a="http://schemas.openxmlformats.org/drawingml/2006/main">
-            <a:r>
-              <a:t>LECTURER CUE</a:t>
-            </a:r>
-          </a:p>
-          <a:p xmlns:a="http://schemas.openxmlformats.org/drawingml/2006/main">
-            <a:r>
-              <a:t>Read the specific public requirement shown on this slide. Explain the input, output and evidence before independent work; do not work the assessed answer for the class.</a:t>
-            </a:r>
-          </a:p>
-          <a:p xmlns:a="http://schemas.openxmlformats.org/drawingml/2006/main">
-            <a:r>
-              <a:t/>
-            </a:r>
-          </a:p>
-          <a:p xmlns:a="http://schemas.openxmlformats.org/drawingml/2006/main">
-            <a:r>
-              <a:t>TEACHING MODE</a:t>
-            </a:r>
-          </a:p>
-          <a:p xmlns:a="http://schemas.openxmlformats.org/drawingml/2006/main">
-            <a:r>
-              <a:t>Demonstrate first. Read each new symbol aloud, trace the values and compare the shown output. Learners repeat worked examples individually after class.</a:t>
-            </a:r>
-          </a:p>
-          <a:p xmlns:a="http://schemas.openxmlformats.org/drawingml/2006/main">
-            <a:r>
-              <a:t/>
-            </a:r>
-          </a:p>
-          <a:p xmlns:a="http://schemas.openxmlformats.org/drawingml/2006/main">
-            <a:r>
-              <a:t>NEXT</a:t>
-            </a:r>
-          </a:p>
-          <a:p xmlns:a="http://schemas.openxmlformats.org/drawingml/2006/main">
-            <a:r>
-              <a:t>Save the complete notebook.</a:t>
-            </a:r>
-          </a:p>
-          <a:p xmlns:a="http://schemas.openxmlformats.org/drawingml/2006/main">
-            <a:r>
-              <a:t/>
-            </a:r>
-          </a:p>
-          <a:p xmlns:a="http://schemas.openxmlformats.org/drawingml/2006/main">
-            <a:r>
-              <a:t>REFERENCES</a:t>
-            </a:r>
-          </a:p>
-          <a:p xmlns:a="http://schemas.openxmlformats.org/drawingml/2006/main">
-            <a:r>
-              <a:t/>
+          <a:p>
+            <a:r>
+              <a:t>Continue to</a:t>
+            </a:r>
+          </a:p>
+          <a:p>
+            <a:r>
+              <a:t>Save the complete notebook</a:t>
             </a:r>
           </a:p>
         </p:txBody>
@@ -3205,7 +2965,7 @@
         <p:nvSpPr>
           <p:cNvPr id="4" name="Slide Number Placeholder 3"/>
           <p:cNvSpPr>
-            <a:spLocks xmlns:a="http://schemas.openxmlformats.org/drawingml/2006/main" noGrp="1"/>
+            <a:spLocks noGrp="1"/>
           </p:cNvSpPr>
           <p:nvPr>
             <p:ph type="sldNum" idx="5"/>
@@ -3213,21 +2973,21 @@
         </p:nvSpPr>
         <p:spPr/>
         <p:txBody>
-          <a:bodyPr xmlns:a="http://schemas.openxmlformats.org/drawingml/2006/main"/>
-          <a:lstStyle xmlns:a="http://schemas.openxmlformats.org/drawingml/2006/main"/>
-          <a:p xmlns:a="http://schemas.openxmlformats.org/drawingml/2006/main"/>
+          <a:bodyPr/>
+          <a:lstStyle/>
+          <a:p/>
         </p:txBody>
       </p:sp>
     </p:spTree>
   </p:cSld>
   <p:clrMapOvr>
-    <a:masterClrMapping xmlns:a="http://schemas.openxmlformats.org/drawingml/2006/main"/>
+    <a:masterClrMapping/>
   </p:clrMapOvr>
 </p:notes>
 </file>
 
 <file path=ppt/notesSlides/notesSlide5.xml><?xml version="1.0" encoding="utf-8"?>
-<p:notes xmlns:p="http://schemas.openxmlformats.org/presentationml/2006/main">
+<p:notes xmlns:a="http://schemas.openxmlformats.org/drawingml/2006/main" xmlns:p="http://schemas.openxmlformats.org/presentationml/2006/main">
   <p:cSld>
     <p:spTree>
       <p:nvGrpSpPr>
@@ -3236,13 +2996,13 @@
         <p:nvPr/>
       </p:nvGrpSpPr>
       <p:grpSpPr>
-        <a:xfrm xmlns:a="http://schemas.openxmlformats.org/drawingml/2006/main"/>
+        <a:xfrm/>
       </p:grpSpPr>
       <p:sp>
         <p:nvSpPr>
           <p:cNvPr id="2" name="Slide Image Placeholder 1"/>
           <p:cNvSpPr>
-            <a:spLocks xmlns:a="http://schemas.openxmlformats.org/drawingml/2006/main" noGrp="1"/>
+            <a:spLocks noGrp="1"/>
           </p:cNvSpPr>
           <p:nvPr>
             <p:ph type="sldImg" idx="0"/>
@@ -3254,7 +3014,7 @@
         <p:nvSpPr>
           <p:cNvPr id="3" name="Notes Placeholder 2"/>
           <p:cNvSpPr>
-            <a:spLocks xmlns:a="http://schemas.openxmlformats.org/drawingml/2006/main" noGrp="1"/>
+            <a:spLocks noGrp="1"/>
           </p:cNvSpPr>
           <p:nvPr>
             <p:ph type="body" idx="1"/>
@@ -3262,126 +3022,111 @@
         </p:nvSpPr>
         <p:spPr/>
         <p:txBody>
-          <a:bodyPr xmlns:a="http://schemas.openxmlformats.org/drawingml/2006/main"/>
-          <a:lstStyle xmlns:a="http://schemas.openxmlformats.org/drawingml/2006/main"/>
-          <a:p xmlns:a="http://schemas.openxmlformats.org/drawingml/2006/main">
-            <a:r>
-              <a:t>PURPOSE</a:t>
-            </a:r>
-          </a:p>
-          <a:p xmlns:a="http://schemas.openxmlformats.org/drawingml/2006/main">
+          <a:bodyPr/>
+          <a:lstStyle/>
+          <a:p>
             <a:r>
               <a:t>Save the complete notebook</a:t>
             </a:r>
           </a:p>
-          <a:p xmlns:a="http://schemas.openxmlformats.org/drawingml/2006/main">
+          <a:p>
+            <a:r>
+              <a:t>CML3111, Week 7, slide 5</a:t>
+            </a:r>
+          </a:p>
+          <a:p>
             <a:r>
               <a:t/>
             </a:r>
           </a:p>
-          <a:p xmlns:a="http://schemas.openxmlformats.org/drawingml/2006/main">
-            <a:r>
-              <a:t>CONNECT</a:t>
-            </a:r>
-          </a:p>
-          <a:p xmlns:a="http://schemas.openxmlformats.org/drawingml/2006/main">
-            <a:r>
-              <a:t>Previous slide: Rehearse before test day.</a:t>
-            </a:r>
-          </a:p>
-          <a:p xmlns:a="http://schemas.openxmlformats.org/drawingml/2006/main">
+          <a:p>
+            <a:r>
+              <a:t>Explanation to give</a:t>
+            </a:r>
+          </a:p>
+          <a:p>
+            <a:r>
+              <a:t>Show the offline save location and reopen the file before test day. Identify both the code cells and the markdown cell headed My written evidence.</a:t>
+            </a:r>
+          </a:p>
+          <a:p>
             <a:r>
               <a:t/>
             </a:r>
           </a:p>
-          <a:p xmlns:a="http://schemas.openxmlformats.org/drawingml/2006/main">
-            <a:r>
-              <a:t>EXPLAIN</a:t>
-            </a:r>
-          </a:p>
-          <a:p xmlns:a="http://schemas.openxmlformats.org/drawingml/2006/main">
+          <a:p>
+            <a:r>
+              <a:t>Worked illustration / lecturer answer</a:t>
+            </a:r>
+          </a:p>
+          <a:p>
+            <a:r>
+              <a:t>Use a separate practice notebook for rehearsal. Students should locate the actual .ipynb on disk rather than rely on a browser tab or cloud link.</a:t>
+            </a:r>
+          </a:p>
+          <a:p>
+            <a:r>
+              <a:t/>
+            </a:r>
+          </a:p>
+          <a:p>
+            <a:r>
+              <a:t>Misconception to address</a:t>
+            </a:r>
+          </a:p>
+          <a:p>
+            <a:r>
+              <a:t>During the assessed period, report technical failures immediately and follow the invigilator’s instructions. Do not introduce new modelling code or online resources.</a:t>
+            </a:r>
+          </a:p>
+          <a:p>
+            <a:r>
+              <a:t/>
+            </a:r>
+          </a:p>
+          <a:p>
+            <a:r>
+              <a:t>On this slide</a:t>
+            </a:r>
+          </a:p>
+          <a:p>
             <a:r>
               <a:t>Type Part B under My written evidence in the notebook.</a:t>
             </a:r>
           </a:p>
-          <a:p xmlns:a="http://schemas.openxmlformats.org/drawingml/2006/main">
+          <a:p>
             <a:r>
               <a:t/>
             </a:r>
           </a:p>
-          <a:p xmlns:a="http://schemas.openxmlformats.org/drawingml/2006/main">
+          <a:p>
             <a:r>
               <a:t>Locate the complete notebook in the designated local folder.</a:t>
             </a:r>
           </a:p>
-          <a:p xmlns:a="http://schemas.openxmlformats.org/drawingml/2006/main">
+          <a:p>
             <a:r>
               <a:t/>
             </a:r>
           </a:p>
-          <a:p xmlns:a="http://schemas.openxmlformats.org/drawingml/2006/main">
+          <a:p>
             <a:r>
               <a:t>Reopen it to check that code and written answers were saved.</a:t>
             </a:r>
           </a:p>
-          <a:p xmlns:a="http://schemas.openxmlformats.org/drawingml/2006/main">
+          <a:p>
             <a:r>
               <a:t/>
             </a:r>
           </a:p>
-          <a:p xmlns:a="http://schemas.openxmlformats.org/drawingml/2006/main">
-            <a:r>
-              <a:t>LECTURER CUE</a:t>
-            </a:r>
-          </a:p>
-          <a:p xmlns:a="http://schemas.openxmlformats.org/drawingml/2006/main">
-            <a:r>
-              <a:t>Read the specific public requirement shown on this slide. Explain the input, output and evidence before independent work; do not work the assessed answer for the class.</a:t>
-            </a:r>
-          </a:p>
-          <a:p xmlns:a="http://schemas.openxmlformats.org/drawingml/2006/main">
-            <a:r>
-              <a:t/>
-            </a:r>
-          </a:p>
-          <a:p xmlns:a="http://schemas.openxmlformats.org/drawingml/2006/main">
-            <a:r>
-              <a:t>TEACHING MODE</a:t>
-            </a:r>
-          </a:p>
-          <a:p xmlns:a="http://schemas.openxmlformats.org/drawingml/2006/main">
-            <a:r>
-              <a:t>Demonstrate first. Read each new symbol aloud, trace the values and compare the shown output. Learners repeat worked examples individually after class.</a:t>
-            </a:r>
-          </a:p>
-          <a:p xmlns:a="http://schemas.openxmlformats.org/drawingml/2006/main">
-            <a:r>
-              <a:t/>
-            </a:r>
-          </a:p>
-          <a:p xmlns:a="http://schemas.openxmlformats.org/drawingml/2006/main">
-            <a:r>
-              <a:t>NEXT</a:t>
-            </a:r>
-          </a:p>
-          <a:p xmlns:a="http://schemas.openxmlformats.org/drawingml/2006/main">
-            <a:r>
-              <a:t>Follow the published test procedure.</a:t>
-            </a:r>
-          </a:p>
-          <a:p xmlns:a="http://schemas.openxmlformats.org/drawingml/2006/main">
-            <a:r>
-              <a:t/>
-            </a:r>
-          </a:p>
-          <a:p xmlns:a="http://schemas.openxmlformats.org/drawingml/2006/main">
-            <a:r>
-              <a:t>REFERENCES</a:t>
-            </a:r>
-          </a:p>
-          <a:p xmlns:a="http://schemas.openxmlformats.org/drawingml/2006/main">
-            <a:r>
-              <a:t/>
+          <a:p>
+            <a:r>
+              <a:t>Continue to</a:t>
+            </a:r>
+          </a:p>
+          <a:p>
+            <a:r>
+              <a:t>Follow the published test procedure</a:t>
             </a:r>
           </a:p>
         </p:txBody>
@@ -3390,7 +3135,7 @@
         <p:nvSpPr>
           <p:cNvPr id="4" name="Slide Number Placeholder 3"/>
           <p:cNvSpPr>
-            <a:spLocks xmlns:a="http://schemas.openxmlformats.org/drawingml/2006/main" noGrp="1"/>
+            <a:spLocks noGrp="1"/>
           </p:cNvSpPr>
           <p:nvPr>
             <p:ph type="sldNum" idx="5"/>
@@ -3398,21 +3143,21 @@
         </p:nvSpPr>
         <p:spPr/>
         <p:txBody>
-          <a:bodyPr xmlns:a="http://schemas.openxmlformats.org/drawingml/2006/main"/>
-          <a:lstStyle xmlns:a="http://schemas.openxmlformats.org/drawingml/2006/main"/>
-          <a:p xmlns:a="http://schemas.openxmlformats.org/drawingml/2006/main"/>
+          <a:bodyPr/>
+          <a:lstStyle/>
+          <a:p/>
         </p:txBody>
       </p:sp>
     </p:spTree>
   </p:cSld>
   <p:clrMapOvr>
-    <a:masterClrMapping xmlns:a="http://schemas.openxmlformats.org/drawingml/2006/main"/>
+    <a:masterClrMapping/>
   </p:clrMapOvr>
 </p:notes>
 </file>
 
 <file path=ppt/notesSlides/notesSlide6.xml><?xml version="1.0" encoding="utf-8"?>
-<p:notes xmlns:p="http://schemas.openxmlformats.org/presentationml/2006/main">
+<p:notes xmlns:a="http://schemas.openxmlformats.org/drawingml/2006/main" xmlns:p="http://schemas.openxmlformats.org/presentationml/2006/main">
   <p:cSld>
     <p:spTree>
       <p:nvGrpSpPr>
@@ -3421,13 +3166,13 @@
         <p:nvPr/>
       </p:nvGrpSpPr>
       <p:grpSpPr>
-        <a:xfrm xmlns:a="http://schemas.openxmlformats.org/drawingml/2006/main"/>
+        <a:xfrm/>
       </p:grpSpPr>
       <p:sp>
         <p:nvSpPr>
           <p:cNvPr id="2" name="Slide Image Placeholder 1"/>
           <p:cNvSpPr>
-            <a:spLocks xmlns:a="http://schemas.openxmlformats.org/drawingml/2006/main" noGrp="1"/>
+            <a:spLocks noGrp="1"/>
           </p:cNvSpPr>
           <p:nvPr>
             <p:ph type="sldImg" idx="0"/>
@@ -3439,7 +3184,7 @@
         <p:nvSpPr>
           <p:cNvPr id="3" name="Notes Placeholder 2"/>
           <p:cNvSpPr>
-            <a:spLocks xmlns:a="http://schemas.openxmlformats.org/drawingml/2006/main" noGrp="1"/>
+            <a:spLocks noGrp="1"/>
           </p:cNvSpPr>
           <p:nvPr>
             <p:ph type="body" idx="1"/>
@@ -3447,126 +3192,111 @@
         </p:nvSpPr>
         <p:spPr/>
         <p:txBody>
-          <a:bodyPr xmlns:a="http://schemas.openxmlformats.org/drawingml/2006/main"/>
-          <a:lstStyle xmlns:a="http://schemas.openxmlformats.org/drawingml/2006/main"/>
-          <a:p xmlns:a="http://schemas.openxmlformats.org/drawingml/2006/main">
-            <a:r>
-              <a:t>PURPOSE</a:t>
-            </a:r>
-          </a:p>
-          <a:p xmlns:a="http://schemas.openxmlformats.org/drawingml/2006/main">
+          <a:bodyPr/>
+          <a:lstStyle/>
+          <a:p>
             <a:r>
               <a:t>Follow the published test procedure</a:t>
             </a:r>
           </a:p>
-          <a:p xmlns:a="http://schemas.openxmlformats.org/drawingml/2006/main">
+          <a:p>
+            <a:r>
+              <a:t>CML3111, Week 7, slide 6</a:t>
+            </a:r>
+          </a:p>
+          <a:p>
             <a:r>
               <a:t/>
             </a:r>
           </a:p>
-          <a:p xmlns:a="http://schemas.openxmlformats.org/drawingml/2006/main">
-            <a:r>
-              <a:t>CONNECT</a:t>
-            </a:r>
-          </a:p>
-          <a:p xmlns:a="http://schemas.openxmlformats.org/drawingml/2006/main">
-            <a:r>
-              <a:t>Previous slide: Save the complete notebook.</a:t>
-            </a:r>
-          </a:p>
-          <a:p xmlns:a="http://schemas.openxmlformats.org/drawingml/2006/main">
+          <a:p>
+            <a:r>
+              <a:t>Explanation to give</a:t>
+            </a:r>
+          </a:p>
+          <a:p>
+            <a:r>
+              <a:t>Show the offline save location and reopen the file before test day. Identify both the code cells and the markdown cell headed My written evidence.</a:t>
+            </a:r>
+          </a:p>
+          <a:p>
             <a:r>
               <a:t/>
             </a:r>
           </a:p>
-          <a:p xmlns:a="http://schemas.openxmlformats.org/drawingml/2006/main">
-            <a:r>
-              <a:t>EXPLAIN</a:t>
-            </a:r>
-          </a:p>
-          <a:p xmlns:a="http://schemas.openxmlformats.org/drawingml/2006/main">
+          <a:p>
+            <a:r>
+              <a:t>Worked illustration / lecturer answer</a:t>
+            </a:r>
+          </a:p>
+          <a:p>
+            <a:r>
+              <a:t>Use a separate practice notebook for rehearsal. Students should locate the actual .ipynb on disk rather than rely on a browser tab or cloud link.</a:t>
+            </a:r>
+          </a:p>
+          <a:p>
+            <a:r>
+              <a:t/>
+            </a:r>
+          </a:p>
+          <a:p>
+            <a:r>
+              <a:t>Misconception to address</a:t>
+            </a:r>
+          </a:p>
+          <a:p>
+            <a:r>
+              <a:t>During the assessed period, report technical failures immediately and follow the invigilator’s instructions. Do not introduce new modelling code or online resources.</a:t>
+            </a:r>
+          </a:p>
+          <a:p>
+            <a:r>
+              <a:t/>
+            </a:r>
+          </a:p>
+          <a:p>
+            <a:r>
+              <a:t>On this slide</a:t>
+            </a:r>
+          </a:p>
+          <a:p>
             <a:r>
               <a:t>Read the briefing before starting assessed work.</a:t>
             </a:r>
           </a:p>
-          <a:p xmlns:a="http://schemas.openxmlformats.org/drawingml/2006/main">
+          <a:p>
             <a:r>
               <a:t/>
             </a:r>
           </a:p>
-          <a:p xmlns:a="http://schemas.openxmlformats.org/drawingml/2006/main">
+          <a:p>
             <a:r>
               <a:t>Use only the resources permitted for that part of the test.</a:t>
             </a:r>
           </a:p>
-          <a:p xmlns:a="http://schemas.openxmlformats.org/drawingml/2006/main">
+          <a:p>
             <a:r>
               <a:t/>
             </a:r>
           </a:p>
-          <a:p xmlns:a="http://schemas.openxmlformats.org/drawingml/2006/main">
+          <a:p>
             <a:r>
               <a:t>Report a technical failure to the invigilator immediately.</a:t>
             </a:r>
           </a:p>
-          <a:p xmlns:a="http://schemas.openxmlformats.org/drawingml/2006/main">
+          <a:p>
             <a:r>
               <a:t/>
             </a:r>
           </a:p>
-          <a:p xmlns:a="http://schemas.openxmlformats.org/drawingml/2006/main">
-            <a:r>
-              <a:t>LECTURER CUE</a:t>
-            </a:r>
-          </a:p>
-          <a:p xmlns:a="http://schemas.openxmlformats.org/drawingml/2006/main">
-            <a:r>
-              <a:t>Read the specific public requirement shown on this slide. Explain the input, output and evidence before independent work; do not work the assessed answer for the class.</a:t>
-            </a:r>
-          </a:p>
-          <a:p xmlns:a="http://schemas.openxmlformats.org/drawingml/2006/main">
-            <a:r>
-              <a:t/>
-            </a:r>
-          </a:p>
-          <a:p xmlns:a="http://schemas.openxmlformats.org/drawingml/2006/main">
-            <a:r>
-              <a:t>TEACHING MODE</a:t>
-            </a:r>
-          </a:p>
-          <a:p xmlns:a="http://schemas.openxmlformats.org/drawingml/2006/main">
-            <a:r>
-              <a:t>Demonstrate first. Read each new symbol aloud, trace the values and compare the shown output. Learners repeat worked examples individually after class.</a:t>
-            </a:r>
-          </a:p>
-          <a:p xmlns:a="http://schemas.openxmlformats.org/drawingml/2006/main">
-            <a:r>
-              <a:t/>
-            </a:r>
-          </a:p>
-          <a:p xmlns:a="http://schemas.openxmlformats.org/drawingml/2006/main">
-            <a:r>
-              <a:t>NEXT</a:t>
-            </a:r>
-          </a:p>
-          <a:p xmlns:a="http://schemas.openxmlformats.org/drawingml/2006/main">
-            <a:r>
-              <a:t>Practice before test day.</a:t>
-            </a:r>
-          </a:p>
-          <a:p xmlns:a="http://schemas.openxmlformats.org/drawingml/2006/main">
-            <a:r>
-              <a:t/>
-            </a:r>
-          </a:p>
-          <a:p xmlns:a="http://schemas.openxmlformats.org/drawingml/2006/main">
-            <a:r>
-              <a:t>REFERENCES</a:t>
-            </a:r>
-          </a:p>
-          <a:p xmlns:a="http://schemas.openxmlformats.org/drawingml/2006/main">
-            <a:r>
-              <a:t/>
+          <a:p>
+            <a:r>
+              <a:t>Continue to</a:t>
+            </a:r>
+          </a:p>
+          <a:p>
+            <a:r>
+              <a:t>Practice before test day</a:t>
             </a:r>
           </a:p>
         </p:txBody>
@@ -3575,7 +3305,7 @@
         <p:nvSpPr>
           <p:cNvPr id="4" name="Slide Number Placeholder 3"/>
           <p:cNvSpPr>
-            <a:spLocks xmlns:a="http://schemas.openxmlformats.org/drawingml/2006/main" noGrp="1"/>
+            <a:spLocks noGrp="1"/>
           </p:cNvSpPr>
           <p:nvPr>
             <p:ph type="sldNum" idx="5"/>
@@ -3583,21 +3313,21 @@
         </p:nvSpPr>
         <p:spPr/>
         <p:txBody>
-          <a:bodyPr xmlns:a="http://schemas.openxmlformats.org/drawingml/2006/main"/>
-          <a:lstStyle xmlns:a="http://schemas.openxmlformats.org/drawingml/2006/main"/>
-          <a:p xmlns:a="http://schemas.openxmlformats.org/drawingml/2006/main"/>
+          <a:bodyPr/>
+          <a:lstStyle/>
+          <a:p/>
         </p:txBody>
       </p:sp>
     </p:spTree>
   </p:cSld>
   <p:clrMapOvr>
-    <a:masterClrMapping xmlns:a="http://schemas.openxmlformats.org/drawingml/2006/main"/>
+    <a:masterClrMapping/>
   </p:clrMapOvr>
 </p:notes>
 </file>
 
 <file path=ppt/notesSlides/notesSlide7.xml><?xml version="1.0" encoding="utf-8"?>
-<p:notes xmlns:p="http://schemas.openxmlformats.org/presentationml/2006/main">
+<p:notes xmlns:a="http://schemas.openxmlformats.org/drawingml/2006/main" xmlns:p="http://schemas.openxmlformats.org/presentationml/2006/main">
   <p:cSld>
     <p:spTree>
       <p:nvGrpSpPr>
@@ -3606,13 +3336,13 @@
         <p:nvPr/>
       </p:nvGrpSpPr>
       <p:grpSpPr>
-        <a:xfrm xmlns:a="http://schemas.openxmlformats.org/drawingml/2006/main"/>
+        <a:xfrm/>
       </p:grpSpPr>
       <p:sp>
         <p:nvSpPr>
           <p:cNvPr id="2" name="Slide Image Placeholder 1"/>
           <p:cNvSpPr>
-            <a:spLocks xmlns:a="http://schemas.openxmlformats.org/drawingml/2006/main" noGrp="1"/>
+            <a:spLocks noGrp="1"/>
           </p:cNvSpPr>
           <p:nvPr>
             <p:ph type="sldImg" idx="0"/>
@@ -3624,7 +3354,7 @@
         <p:nvSpPr>
           <p:cNvPr id="3" name="Notes Placeholder 2"/>
           <p:cNvSpPr>
-            <a:spLocks xmlns:a="http://schemas.openxmlformats.org/drawingml/2006/main" noGrp="1"/>
+            <a:spLocks noGrp="1"/>
           </p:cNvSpPr>
           <p:nvPr>
             <p:ph type="body" idx="1"/>
@@ -3632,161 +3362,141 @@
         </p:nvSpPr>
         <p:spPr/>
         <p:txBody>
-          <a:bodyPr xmlns:a="http://schemas.openxmlformats.org/drawingml/2006/main"/>
-          <a:lstStyle xmlns:a="http://schemas.openxmlformats.org/drawingml/2006/main"/>
-          <a:p xmlns:a="http://schemas.openxmlformats.org/drawingml/2006/main">
-            <a:r>
-              <a:t>PURPOSE</a:t>
-            </a:r>
-          </a:p>
-          <a:p xmlns:a="http://schemas.openxmlformats.org/drawingml/2006/main">
+          <a:bodyPr/>
+          <a:lstStyle/>
+          <a:p>
             <a:r>
               <a:t>Practice before test day</a:t>
             </a:r>
           </a:p>
-          <a:p xmlns:a="http://schemas.openxmlformats.org/drawingml/2006/main">
+          <a:p>
+            <a:r>
+              <a:t>CML3111, Week 7, slide 7</a:t>
+            </a:r>
+          </a:p>
+          <a:p>
             <a:r>
               <a:t/>
             </a:r>
           </a:p>
-          <a:p xmlns:a="http://schemas.openxmlformats.org/drawingml/2006/main">
-            <a:r>
-              <a:t>CONNECT</a:t>
-            </a:r>
-          </a:p>
-          <a:p xmlns:a="http://schemas.openxmlformats.org/drawingml/2006/main">
-            <a:r>
-              <a:t>Previous slide: Follow the published test procedure.</a:t>
-            </a:r>
-          </a:p>
-          <a:p xmlns:a="http://schemas.openxmlformats.org/drawingml/2006/main">
+          <a:p>
+            <a:r>
+              <a:t>Explanation to give</a:t>
+            </a:r>
+          </a:p>
+          <a:p>
+            <a:r>
+              <a:t>Rehearse this small calculation before the assessed session. The list has three values, so len returns 3. Add 3+5+7 to obtain 15, then divide by 3.</a:t>
+            </a:r>
+          </a:p>
+          <a:p>
             <a:r>
               <a:t/>
             </a:r>
           </a:p>
-          <a:p xmlns:a="http://schemas.openxmlformats.org/drawingml/2006/main">
-            <a:r>
-              <a:t>EXPLAIN</a:t>
-            </a:r>
-          </a:p>
-          <a:p xmlns:a="http://schemas.openxmlformats.org/drawingml/2006/main">
-            <a:r>
-              <a:t>Read the code in this order:</a:t>
-            </a:r>
-          </a:p>
-          <a:p xmlns:a="http://schemas.openxmlformats.org/drawingml/2006/main">
+          <a:p>
+            <a:r>
+              <a:t>Worked illustration / lecturer answer</a:t>
+            </a:r>
+          </a:p>
+          <a:p>
+            <a:r>
+              <a:t>The displayed output is 3 followed by 5.0. Explain why the mean is a floating-point result even though the inputs are integers.</a:t>
+            </a:r>
+          </a:p>
+          <a:p>
+            <a:r>
+              <a:t/>
+            </a:r>
+          </a:p>
+          <a:p>
+            <a:r>
+              <a:t>Misconception to address</a:t>
+            </a:r>
+          </a:p>
+          <a:p>
+            <a:r>
+              <a:t>This is a preparation example, not a test answer. During Part B of the actual test, code execution is prohibited.</a:t>
+            </a:r>
+          </a:p>
+          <a:p>
+            <a:r>
+              <a:t/>
+            </a:r>
+          </a:p>
+          <a:p>
+            <a:r>
+              <a:t>Read the displayed code line by line</a:t>
+            </a:r>
+          </a:p>
+          <a:p>
             <a:r>
               <a:t>values = [3, 5, 7]</a:t>
             </a:r>
           </a:p>
-          <a:p xmlns:a="http://schemas.openxmlformats.org/drawingml/2006/main">
+          <a:p>
+            <a:r>
+              <a:t>Evaluate the complete right-hand expression first, then assign its result to the name or selected field on the left.</a:t>
+            </a:r>
+          </a:p>
+          <a:p>
+            <a:r>
+              <a:t/>
+            </a:r>
+          </a:p>
+          <a:p>
             <a:r>
               <a:t>print(len(values))</a:t>
             </a:r>
           </a:p>
-          <a:p xmlns:a="http://schemas.openxmlformats.org/drawingml/2006/main">
+          <a:p>
+            <a:r>
+              <a:t>Evaluate the expression inside the parentheses and display it. Displaying is separate from returning a function result.</a:t>
+            </a:r>
+          </a:p>
+          <a:p>
+            <a:r>
+              <a:t/>
+            </a:r>
+          </a:p>
+          <a:p>
             <a:r>
               <a:t>print(sum(values) / len(values))</a:t>
             </a:r>
           </a:p>
-          <a:p xmlns:a="http://schemas.openxmlformats.org/drawingml/2006/main">
+          <a:p>
+            <a:r>
+              <a:t>Evaluate the expression inside the parentheses and display it. Displaying is separate from returning a function result.</a:t>
+            </a:r>
+          </a:p>
+          <a:p>
             <a:r>
               <a:t/>
             </a:r>
           </a:p>
-          <a:p xmlns:a="http://schemas.openxmlformats.org/drawingml/2006/main">
-            <a:r>
-              <a:t>print displays a value below the cell.</a:t>
-            </a:r>
-          </a:p>
-          <a:p xmlns:a="http://schemas.openxmlformats.org/drawingml/2006/main">
+          <a:p>
+            <a:r>
+              <a:t>Result / continuity</a:t>
+            </a:r>
+          </a:p>
+          <a:p>
+            <a:r>
+              <a:t>Read top to bottom. Run the complete example in the matching practice notebook.</a:t>
+            </a:r>
+          </a:p>
+          <a:p>
             <a:r>
               <a:t/>
             </a:r>
           </a:p>
-          <a:p xmlns:a="http://schemas.openxmlformats.org/drawingml/2006/main">
-            <a:r>
-              <a:t>Square brackets create a list or select an item.</a:t>
-            </a:r>
-          </a:p>
-          <a:p xmlns:a="http://schemas.openxmlformats.org/drawingml/2006/main">
-            <a:r>
-              <a:t/>
-            </a:r>
-          </a:p>
-          <a:p xmlns:a="http://schemas.openxmlformats.org/drawingml/2006/main">
-            <a:r>
-              <a:t>= assigns the value on the right to the name on the left.</a:t>
-            </a:r>
-          </a:p>
-          <a:p xmlns:a="http://schemas.openxmlformats.org/drawingml/2006/main">
-            <a:r>
-              <a:t/>
-            </a:r>
-          </a:p>
-          <a:p xmlns:a="http://schemas.openxmlformats.org/drawingml/2006/main">
-            <a:r>
-              <a:t>Read top to bottom. Run the complete example in the matching practice notebook.</a:t>
-            </a:r>
-          </a:p>
-          <a:p xmlns:a="http://schemas.openxmlformats.org/drawingml/2006/main">
-            <a:r>
-              <a:t/>
-            </a:r>
-          </a:p>
-          <a:p xmlns:a="http://schemas.openxmlformats.org/drawingml/2006/main">
-            <a:r>
-              <a:t>LECTURER CUE</a:t>
-            </a:r>
-          </a:p>
-          <a:p xmlns:a="http://schemas.openxmlformats.org/drawingml/2006/main">
-            <a:r>
-              <a:t>Read the specific public requirement shown on this slide. Explain the input, output and evidence before independent work; do not work the assessed answer for the class.</a:t>
-            </a:r>
-          </a:p>
-          <a:p xmlns:a="http://schemas.openxmlformats.org/drawingml/2006/main">
-            <a:r>
-              <a:t/>
-            </a:r>
-          </a:p>
-          <a:p xmlns:a="http://schemas.openxmlformats.org/drawingml/2006/main">
-            <a:r>
-              <a:t>TEACHING MODE</a:t>
-            </a:r>
-          </a:p>
-          <a:p xmlns:a="http://schemas.openxmlformats.org/drawingml/2006/main">
-            <a:r>
-              <a:t>Demonstrate first. Read each new symbol aloud, trace the values and compare the shown output. Learners repeat worked examples individually after class.</a:t>
-            </a:r>
-          </a:p>
-          <a:p xmlns:a="http://schemas.openxmlformats.org/drawingml/2006/main">
-            <a:r>
-              <a:t/>
-            </a:r>
-          </a:p>
-          <a:p xmlns:a="http://schemas.openxmlformats.org/drawingml/2006/main">
-            <a:r>
-              <a:t>NEXT</a:t>
-            </a:r>
-          </a:p>
-          <a:p xmlns:a="http://schemas.openxmlformats.org/drawingml/2006/main">
-            <a:r>
-              <a:t>Test session.</a:t>
-            </a:r>
-          </a:p>
-          <a:p xmlns:a="http://schemas.openxmlformats.org/drawingml/2006/main">
-            <a:r>
-              <a:t/>
-            </a:r>
-          </a:p>
-          <a:p xmlns:a="http://schemas.openxmlformats.org/drawingml/2006/main">
-            <a:r>
-              <a:t>REFERENCES</a:t>
-            </a:r>
-          </a:p>
-          <a:p xmlns:a="http://schemas.openxmlformats.org/drawingml/2006/main">
-            <a:r>
-              <a:t/>
+          <a:p>
+            <a:r>
+              <a:t>Continue to</a:t>
+            </a:r>
+          </a:p>
+          <a:p>
+            <a:r>
+              <a:t>Test session</a:t>
             </a:r>
           </a:p>
         </p:txBody>
@@ -3795,7 +3505,7 @@
         <p:nvSpPr>
           <p:cNvPr id="4" name="Slide Number Placeholder 3"/>
           <p:cNvSpPr>
-            <a:spLocks xmlns:a="http://schemas.openxmlformats.org/drawingml/2006/main" noGrp="1"/>
+            <a:spLocks noGrp="1"/>
           </p:cNvSpPr>
           <p:nvPr>
             <p:ph type="sldNum" idx="5"/>
@@ -3803,21 +3513,21 @@
         </p:nvSpPr>
         <p:spPr/>
         <p:txBody>
-          <a:bodyPr xmlns:a="http://schemas.openxmlformats.org/drawingml/2006/main"/>
-          <a:lstStyle xmlns:a="http://schemas.openxmlformats.org/drawingml/2006/main"/>
-          <a:p xmlns:a="http://schemas.openxmlformats.org/drawingml/2006/main"/>
+          <a:bodyPr/>
+          <a:lstStyle/>
+          <a:p/>
         </p:txBody>
       </p:sp>
     </p:spTree>
   </p:cSld>
   <p:clrMapOvr>
-    <a:masterClrMapping xmlns:a="http://schemas.openxmlformats.org/drawingml/2006/main"/>
+    <a:masterClrMapping/>
   </p:clrMapOvr>
 </p:notes>
 </file>
 
 <file path=ppt/notesSlides/notesSlide8.xml><?xml version="1.0" encoding="utf-8"?>
-<p:notes xmlns:p="http://schemas.openxmlformats.org/presentationml/2006/main">
+<p:notes xmlns:a="http://schemas.openxmlformats.org/drawingml/2006/main" xmlns:p="http://schemas.openxmlformats.org/presentationml/2006/main">
   <p:cSld>
     <p:spTree>
       <p:nvGrpSpPr>
@@ -3826,13 +3536,13 @@
         <p:nvPr/>
       </p:nvGrpSpPr>
       <p:grpSpPr>
-        <a:xfrm xmlns:a="http://schemas.openxmlformats.org/drawingml/2006/main"/>
+        <a:xfrm/>
       </p:grpSpPr>
       <p:sp>
         <p:nvSpPr>
           <p:cNvPr id="2" name="Slide Image Placeholder 1"/>
           <p:cNvSpPr>
-            <a:spLocks xmlns:a="http://schemas.openxmlformats.org/drawingml/2006/main" noGrp="1"/>
+            <a:spLocks noGrp="1"/>
           </p:cNvSpPr>
           <p:nvPr>
             <p:ph type="sldImg" idx="0"/>
@@ -3844,7 +3554,7 @@
         <p:nvSpPr>
           <p:cNvPr id="3" name="Notes Placeholder 2"/>
           <p:cNvSpPr>
-            <a:spLocks xmlns:a="http://schemas.openxmlformats.org/drawingml/2006/main" noGrp="1"/>
+            <a:spLocks noGrp="1"/>
           </p:cNvSpPr>
           <p:nvPr>
             <p:ph type="body" idx="1"/>
@@ -3852,136 +3562,121 @@
         </p:nvSpPr>
         <p:spPr/>
         <p:txBody>
-          <a:bodyPr xmlns:a="http://schemas.openxmlformats.org/drawingml/2006/main"/>
-          <a:lstStyle xmlns:a="http://schemas.openxmlformats.org/drawingml/2006/main"/>
-          <a:p xmlns:a="http://schemas.openxmlformats.org/drawingml/2006/main">
-            <a:r>
-              <a:t>PURPOSE</a:t>
-            </a:r>
-          </a:p>
-          <a:p xmlns:a="http://schemas.openxmlformats.org/drawingml/2006/main">
+          <a:bodyPr/>
+          <a:lstStyle/>
+          <a:p>
             <a:r>
               <a:t>Test session</a:t>
             </a:r>
           </a:p>
-          <a:p xmlns:a="http://schemas.openxmlformats.org/drawingml/2006/main">
+          <a:p>
+            <a:r>
+              <a:t>CML3111, Week 7, slide 8</a:t>
+            </a:r>
+          </a:p>
+          <a:p>
             <a:r>
               <a:t/>
             </a:r>
           </a:p>
-          <a:p xmlns:a="http://schemas.openxmlformats.org/drawingml/2006/main">
-            <a:r>
-              <a:t>CONNECT</a:t>
-            </a:r>
-          </a:p>
-          <a:p xmlns:a="http://schemas.openxmlformats.org/drawingml/2006/main">
-            <a:r>
-              <a:t>Previous slide: Practice before test day.</a:t>
-            </a:r>
-          </a:p>
-          <a:p xmlns:a="http://schemas.openxmlformats.org/drawingml/2006/main">
+          <a:p>
+            <a:r>
+              <a:t>Explanation to give</a:t>
+            </a:r>
+          </a:p>
+          <a:p>
+            <a:r>
+              <a:t>This is preparation for Test 1. Rehearse opening and saving offline before the assessed period. During the test, follow the issued invigilation rules.</a:t>
+            </a:r>
+          </a:p>
+          <a:p>
             <a:r>
               <a:t/>
             </a:r>
           </a:p>
-          <a:p xmlns:a="http://schemas.openxmlformats.org/drawingml/2006/main">
-            <a:r>
-              <a:t>EXPLAIN</a:t>
-            </a:r>
-          </a:p>
-          <a:p xmlns:a="http://schemas.openxmlformats.org/drawingml/2006/main">
+          <a:p>
+            <a:r>
+              <a:t>Worked illustration / lecturer answer</a:t>
+            </a:r>
+          </a:p>
+          <a:p>
+            <a:r>
+              <a:t>The published schedule has 15 minutes of setup, 120 of practical work, 25 of typed reasoning without code execution and 20 of collection.</a:t>
+            </a:r>
+          </a:p>
+          <a:p>
+            <a:r>
+              <a:t/>
+            </a:r>
+          </a:p>
+          <a:p>
+            <a:r>
+              <a:t>Misconception to address</a:t>
+            </a:r>
+          </a:p>
+          <a:p>
+            <a:r>
+              <a:t>At the Part A boundary, follow the official snapshot procedure. During the 25-minute Part B period, students type reasoning but must not execute code. Do not change the published timing during an explanation.</a:t>
+            </a:r>
+          </a:p>
+          <a:p>
+            <a:r>
+              <a:t/>
+            </a:r>
+          </a:p>
+          <a:p>
+            <a:r>
+              <a:t>On this slide</a:t>
+            </a:r>
+          </a:p>
+          <a:p>
             <a:r>
               <a:t>00–15 minutes: briefing and file check.</a:t>
             </a:r>
           </a:p>
-          <a:p xmlns:a="http://schemas.openxmlformats.org/drawingml/2006/main">
+          <a:p>
             <a:r>
               <a:t/>
             </a:r>
           </a:p>
-          <a:p xmlns:a="http://schemas.openxmlformats.org/drawingml/2006/main">
+          <a:p>
             <a:r>
               <a:t>15–135 minutes: individual practical work.</a:t>
             </a:r>
           </a:p>
-          <a:p xmlns:a="http://schemas.openxmlformats.org/drawingml/2006/main">
+          <a:p>
             <a:r>
               <a:t/>
             </a:r>
           </a:p>
-          <a:p xmlns:a="http://schemas.openxmlformats.org/drawingml/2006/main">
+          <a:p>
             <a:r>
               <a:t>135–160 minutes: typed offline reasoning, with code execution prohibited.</a:t>
             </a:r>
           </a:p>
-          <a:p xmlns:a="http://schemas.openxmlformats.org/drawingml/2006/main">
+          <a:p>
             <a:r>
               <a:t/>
             </a:r>
           </a:p>
-          <a:p xmlns:a="http://schemas.openxmlformats.org/drawingml/2006/main">
+          <a:p>
             <a:r>
               <a:t>160–180 minutes: save and hand in through invigilated offline collection.</a:t>
             </a:r>
           </a:p>
-          <a:p xmlns:a="http://schemas.openxmlformats.org/drawingml/2006/main">
+          <a:p>
             <a:r>
               <a:t/>
             </a:r>
           </a:p>
-          <a:p xmlns:a="http://schemas.openxmlformats.org/drawingml/2006/main">
-            <a:r>
-              <a:t>LECTURER CUE</a:t>
-            </a:r>
-          </a:p>
-          <a:p xmlns:a="http://schemas.openxmlformats.org/drawingml/2006/main">
-            <a:r>
-              <a:t>Read the specific public requirement shown on this slide. Explain the input, output and evidence before independent work; do not work the assessed answer for the class.</a:t>
-            </a:r>
-          </a:p>
-          <a:p xmlns:a="http://schemas.openxmlformats.org/drawingml/2006/main">
-            <a:r>
-              <a:t/>
-            </a:r>
-          </a:p>
-          <a:p xmlns:a="http://schemas.openxmlformats.org/drawingml/2006/main">
-            <a:r>
-              <a:t>TEACHING MODE</a:t>
-            </a:r>
-          </a:p>
-          <a:p xmlns:a="http://schemas.openxmlformats.org/drawingml/2006/main">
-            <a:r>
-              <a:t>Demonstrate first. Read each new symbol aloud, trace the values and compare the shown output. Learners repeat worked examples individually after class.</a:t>
-            </a:r>
-          </a:p>
-          <a:p xmlns:a="http://schemas.openxmlformats.org/drawingml/2006/main">
-            <a:r>
-              <a:t/>
-            </a:r>
-          </a:p>
-          <a:p xmlns:a="http://schemas.openxmlformats.org/drawingml/2006/main">
-            <a:r>
-              <a:t>NEXT</a:t>
-            </a:r>
-          </a:p>
-          <a:p xmlns:a="http://schemas.openxmlformats.org/drawingml/2006/main">
-            <a:r>
-              <a:t>Preparation checkpoint.</a:t>
-            </a:r>
-          </a:p>
-          <a:p xmlns:a="http://schemas.openxmlformats.org/drawingml/2006/main">
-            <a:r>
-              <a:t/>
-            </a:r>
-          </a:p>
-          <a:p xmlns:a="http://schemas.openxmlformats.org/drawingml/2006/main">
-            <a:r>
-              <a:t>REFERENCES</a:t>
-            </a:r>
-          </a:p>
-          <a:p xmlns:a="http://schemas.openxmlformats.org/drawingml/2006/main">
-            <a:r>
-              <a:t/>
+          <a:p>
+            <a:r>
+              <a:t>Continue to</a:t>
+            </a:r>
+          </a:p>
+          <a:p>
+            <a:r>
+              <a:t>Preparation checkpoint</a:t>
             </a:r>
           </a:p>
         </p:txBody>
@@ -3990,7 +3685,7 @@
         <p:nvSpPr>
           <p:cNvPr id="4" name="Slide Number Placeholder 3"/>
           <p:cNvSpPr>
-            <a:spLocks xmlns:a="http://schemas.openxmlformats.org/drawingml/2006/main" noGrp="1"/>
+            <a:spLocks noGrp="1"/>
           </p:cNvSpPr>
           <p:nvPr>
             <p:ph type="sldNum" idx="5"/>
@@ -3998,21 +3693,21 @@
         </p:nvSpPr>
         <p:spPr/>
         <p:txBody>
-          <a:bodyPr xmlns:a="http://schemas.openxmlformats.org/drawingml/2006/main"/>
-          <a:lstStyle xmlns:a="http://schemas.openxmlformats.org/drawingml/2006/main"/>
-          <a:p xmlns:a="http://schemas.openxmlformats.org/drawingml/2006/main"/>
+          <a:bodyPr/>
+          <a:lstStyle/>
+          <a:p/>
         </p:txBody>
       </p:sp>
     </p:spTree>
   </p:cSld>
   <p:clrMapOvr>
-    <a:masterClrMapping xmlns:a="http://schemas.openxmlformats.org/drawingml/2006/main"/>
+    <a:masterClrMapping/>
   </p:clrMapOvr>
 </p:notes>
 </file>
 
 <file path=ppt/notesSlides/notesSlide9.xml><?xml version="1.0" encoding="utf-8"?>
-<p:notes xmlns:p="http://schemas.openxmlformats.org/presentationml/2006/main">
+<p:notes xmlns:a="http://schemas.openxmlformats.org/drawingml/2006/main" xmlns:p="http://schemas.openxmlformats.org/presentationml/2006/main">
   <p:cSld>
     <p:spTree>
       <p:nvGrpSpPr>
@@ -4021,13 +3716,13 @@
         <p:nvPr/>
       </p:nvGrpSpPr>
       <p:grpSpPr>
-        <a:xfrm xmlns:a="http://schemas.openxmlformats.org/drawingml/2006/main"/>
+        <a:xfrm/>
       </p:grpSpPr>
       <p:sp>
         <p:nvSpPr>
           <p:cNvPr id="2" name="Slide Image Placeholder 1"/>
           <p:cNvSpPr>
-            <a:spLocks xmlns:a="http://schemas.openxmlformats.org/drawingml/2006/main" noGrp="1"/>
+            <a:spLocks noGrp="1"/>
           </p:cNvSpPr>
           <p:nvPr>
             <p:ph type="sldImg" idx="0"/>
@@ -4039,7 +3734,7 @@
         <p:nvSpPr>
           <p:cNvPr id="3" name="Notes Placeholder 2"/>
           <p:cNvSpPr>
-            <a:spLocks xmlns:a="http://schemas.openxmlformats.org/drawingml/2006/main" noGrp="1"/>
+            <a:spLocks noGrp="1"/>
           </p:cNvSpPr>
           <p:nvPr>
             <p:ph type="body" idx="1"/>
@@ -4047,116 +3742,101 @@
         </p:nvSpPr>
         <p:spPr/>
         <p:txBody>
-          <a:bodyPr xmlns:a="http://schemas.openxmlformats.org/drawingml/2006/main"/>
-          <a:lstStyle xmlns:a="http://schemas.openxmlformats.org/drawingml/2006/main"/>
-          <a:p xmlns:a="http://schemas.openxmlformats.org/drawingml/2006/main">
-            <a:r>
-              <a:t>PURPOSE</a:t>
-            </a:r>
-          </a:p>
-          <a:p xmlns:a="http://schemas.openxmlformats.org/drawingml/2006/main">
+          <a:bodyPr/>
+          <a:lstStyle/>
+          <a:p>
             <a:r>
               <a:t>Preparation checkpoint</a:t>
             </a:r>
           </a:p>
-          <a:p xmlns:a="http://schemas.openxmlformats.org/drawingml/2006/main">
+          <a:p>
+            <a:r>
+              <a:t>CML3111, Week 7, slide 9</a:t>
+            </a:r>
+          </a:p>
+          <a:p>
             <a:r>
               <a:t/>
             </a:r>
           </a:p>
-          <a:p xmlns:a="http://schemas.openxmlformats.org/drawingml/2006/main">
-            <a:r>
-              <a:t>CONNECT</a:t>
-            </a:r>
-          </a:p>
-          <a:p xmlns:a="http://schemas.openxmlformats.org/drawingml/2006/main">
-            <a:r>
-              <a:t>Previous slide: Test session.</a:t>
-            </a:r>
-          </a:p>
-          <a:p xmlns:a="http://schemas.openxmlformats.org/drawingml/2006/main">
+          <a:p>
+            <a:r>
+              <a:t>Explanation to give</a:t>
+            </a:r>
+          </a:p>
+          <a:p>
+            <a:r>
+              <a:t>Show the offline save location and reopen the file before test day. Identify both the code cells and the markdown cell headed My written evidence.</a:t>
+            </a:r>
+          </a:p>
+          <a:p>
             <a:r>
               <a:t/>
             </a:r>
           </a:p>
-          <a:p xmlns:a="http://schemas.openxmlformats.org/drawingml/2006/main">
-            <a:r>
-              <a:t>EXPLAIN</a:t>
-            </a:r>
-          </a:p>
-          <a:p xmlns:a="http://schemas.openxmlformats.org/drawingml/2006/main">
+          <a:p>
+            <a:r>
+              <a:t>Worked illustration / lecturer answer</a:t>
+            </a:r>
+          </a:p>
+          <a:p>
+            <a:r>
+              <a:t>Use a separate practice notebook for rehearsal. Students should locate the actual .ipynb on disk rather than rely on a browser tab or cloud link.</a:t>
+            </a:r>
+          </a:p>
+          <a:p>
+            <a:r>
+              <a:t/>
+            </a:r>
+          </a:p>
+          <a:p>
+            <a:r>
+              <a:t>Misconception to address</a:t>
+            </a:r>
+          </a:p>
+          <a:p>
+            <a:r>
+              <a:t>During the assessed period, report technical failures immediately and follow the invigilator’s instructions. Do not introduce new modelling code or online resources.</a:t>
+            </a:r>
+          </a:p>
+          <a:p>
+            <a:r>
+              <a:t/>
+            </a:r>
+          </a:p>
+          <a:p>
+            <a:r>
+              <a:t>On this slide</a:t>
+            </a:r>
+          </a:p>
+          <a:p>
             <a:r>
               <a:t>Every learner completes the offline save-and-reopen rehearsal.</a:t>
             </a:r>
           </a:p>
-          <a:p xmlns:a="http://schemas.openxmlformats.org/drawingml/2006/main">
+          <a:p>
             <a:r>
               <a:t/>
             </a:r>
           </a:p>
-          <a:p xmlns:a="http://schemas.openxmlformats.org/drawingml/2006/main">
+          <a:p>
             <a:r>
               <a:t>Escalate lab-access failures before the test.</a:t>
             </a:r>
           </a:p>
-          <a:p xmlns:a="http://schemas.openxmlformats.org/drawingml/2006/main">
+          <a:p>
             <a:r>
               <a:t/>
             </a:r>
           </a:p>
-          <a:p xmlns:a="http://schemas.openxmlformats.org/drawingml/2006/main">
-            <a:r>
-              <a:t>LECTURER CUE</a:t>
-            </a:r>
-          </a:p>
-          <a:p xmlns:a="http://schemas.openxmlformats.org/drawingml/2006/main">
-            <a:r>
-              <a:t>Read the specific public requirement shown on this slide. Explain the input, output and evidence before independent work; do not work the assessed answer for the class.</a:t>
-            </a:r>
-          </a:p>
-          <a:p xmlns:a="http://schemas.openxmlformats.org/drawingml/2006/main">
-            <a:r>
-              <a:t/>
-            </a:r>
-          </a:p>
-          <a:p xmlns:a="http://schemas.openxmlformats.org/drawingml/2006/main">
-            <a:r>
-              <a:t>TEACHING MODE</a:t>
-            </a:r>
-          </a:p>
-          <a:p xmlns:a="http://schemas.openxmlformats.org/drawingml/2006/main">
-            <a:r>
-              <a:t>Demonstrate first. Read each new symbol aloud, trace the values and compare the shown output. Learners repeat worked examples individually after class.</a:t>
-            </a:r>
-          </a:p>
-          <a:p xmlns:a="http://schemas.openxmlformats.org/drawingml/2006/main">
-            <a:r>
-              <a:t/>
-            </a:r>
-          </a:p>
-          <a:p xmlns:a="http://schemas.openxmlformats.org/drawingml/2006/main">
-            <a:r>
-              <a:t>NEXT</a:t>
-            </a:r>
-          </a:p>
-          <a:p xmlns:a="http://schemas.openxmlformats.org/drawingml/2006/main">
-            <a:r>
-              <a:t>Your evidence.</a:t>
-            </a:r>
-          </a:p>
-          <a:p xmlns:a="http://schemas.openxmlformats.org/drawingml/2006/main">
-            <a:r>
-              <a:t/>
-            </a:r>
-          </a:p>
-          <a:p xmlns:a="http://schemas.openxmlformats.org/drawingml/2006/main">
-            <a:r>
-              <a:t>REFERENCES</a:t>
-            </a:r>
-          </a:p>
-          <a:p xmlns:a="http://schemas.openxmlformats.org/drawingml/2006/main">
-            <a:r>
-              <a:t/>
+          <a:p>
+            <a:r>
+              <a:t>Continue to</a:t>
+            </a:r>
+          </a:p>
+          <a:p>
+            <a:r>
+              <a:t>Your evidence</a:t>
             </a:r>
           </a:p>
         </p:txBody>
@@ -4165,7 +3845,7 @@
         <p:nvSpPr>
           <p:cNvPr id="4" name="Slide Number Placeholder 3"/>
           <p:cNvSpPr>
-            <a:spLocks xmlns:a="http://schemas.openxmlformats.org/drawingml/2006/main" noGrp="1"/>
+            <a:spLocks noGrp="1"/>
           </p:cNvSpPr>
           <p:nvPr>
             <p:ph type="sldNum" idx="5"/>
@@ -4173,15 +3853,15 @@
         </p:nvSpPr>
         <p:spPr/>
         <p:txBody>
-          <a:bodyPr xmlns:a="http://schemas.openxmlformats.org/drawingml/2006/main"/>
-          <a:lstStyle xmlns:a="http://schemas.openxmlformats.org/drawingml/2006/main"/>
-          <a:p xmlns:a="http://schemas.openxmlformats.org/drawingml/2006/main"/>
+          <a:bodyPr/>
+          <a:lstStyle/>
+          <a:p/>
         </p:txBody>
       </p:sp>
     </p:spTree>
   </p:cSld>
   <p:clrMapOvr>
-    <a:masterClrMapping xmlns:a="http://schemas.openxmlformats.org/drawingml/2006/main"/>
+    <a:masterClrMapping/>
   </p:clrMapOvr>
 </p:notes>
 </file>
@@ -14206,11 +13886,11 @@
 </file>
 
 <file path=ppt/slides/slide20.xml><?xml version="1.0" encoding="utf-8"?>
-<p:sld xmlns:p="http://schemas.openxmlformats.org/presentationml/2006/main">
+<p:sld xmlns:a="http://schemas.openxmlformats.org/drawingml/2006/main" xmlns:ns2="http://schemas.microsoft.com/office/drawing/2014/main" xmlns:ns3="http://schemas.microsoft.com/office/powerpoint/2010/main" xmlns:p="http://schemas.openxmlformats.org/presentationml/2006/main">
   <p:cSld>
     <p:bg>
       <p:bgPr>
-        <a:solidFill xmlns:a="http://schemas.openxmlformats.org/drawingml/2006/main">
+        <a:solidFill>
           <a:srgbClr val="1C3144"/>
         </a:solidFill>
       </p:bgPr>
@@ -14222,41 +13902,41 @@
         <p:nvPr/>
       </p:nvGrpSpPr>
       <p:grpSpPr>
-        <a:xfrm xmlns:a="http://schemas.openxmlformats.org/drawingml/2006/main"/>
+        <a:xfrm/>
       </p:grpSpPr>
       <p:sp>
         <p:nvSpPr>
           <p:cNvPr id="7" name="">
-            <a:extLst xmlns:a="http://schemas.openxmlformats.org/drawingml/2006/main">
-              <a:ext uri="{FF2B5EF4-FFF2-40B4-BE49-F238E27FC236}">
-                <a16:creationId xmlns:a16="http://schemas.microsoft.com/office/drawing/2014/main" id="{5B6FA372-DBE7-4925-9CD4-9B29982D6B14}"/>
-              </a:ext>
-            </a:extLst>
-          </p:cNvPr>
-          <p:cNvSpPr>
-            <a:spLocks xmlns:a="http://schemas.openxmlformats.org/drawingml/2006/main" noGrp="1"/>
-          </p:cNvSpPr>
-          <p:nvPr/>
-        </p:nvSpPr>
-        <p:spPr>
-          <a:xfrm xmlns:a="http://schemas.openxmlformats.org/drawingml/2006/main">
+            <a:extLst>
+              <a:ext uri="{FF2B5EF4-FFF2-40B4-BE49-F238E27FC236}">
+                <ns2:creationId id="{5B6FA372-DBE7-4925-9CD4-9B29982D6B14}"/>
+              </a:ext>
+            </a:extLst>
+          </p:cNvPr>
+          <p:cNvSpPr>
+            <a:spLocks noGrp="1"/>
+          </p:cNvSpPr>
+          <p:nvPr/>
+        </p:nvSpPr>
+        <p:spPr>
+          <a:xfrm>
             <a:off x="590550" y="180975"/>
             <a:ext cx="11049000" cy="285750"/>
           </a:xfrm>
-          <a:prstGeom xmlns:a="http://schemas.openxmlformats.org/drawingml/2006/main" prst="rect">
-            <a:avLst/>
-          </a:prstGeom>
-          <a:noFill xmlns:a="http://schemas.openxmlformats.org/drawingml/2006/main"/>
-          <a:ln xmlns:a="http://schemas.openxmlformats.org/drawingml/2006/main" w="0">
-            <a:noFill/>
-          </a:ln>
-        </p:spPr>
-        <p:txBody>
-          <a:bodyPr xmlns:a="http://schemas.openxmlformats.org/drawingml/2006/main">
+          <a:prstGeom prst="rect">
+            <a:avLst/>
+          </a:prstGeom>
+          <a:noFill/>
+          <a:ln w="0">
+            <a:noFill/>
+          </a:ln>
+        </p:spPr>
+        <p:txBody>
+          <a:bodyPr>
             <a:noAutofit/>
           </a:bodyPr>
-          <a:lstStyle xmlns:a="http://schemas.openxmlformats.org/drawingml/2006/main"/>
-          <a:p xmlns:a="http://schemas.openxmlformats.org/drawingml/2006/main">
+          <a:lstStyle/>
+          <a:p>
             <a:pPr>
               <a:defRPr sz="1500" b="1">
                 <a:solidFill>
@@ -14284,36 +13964,36 @@
       <p:sp>
         <p:nvSpPr>
           <p:cNvPr id="2" name="">
-            <a:extLst xmlns:a="http://schemas.openxmlformats.org/drawingml/2006/main">
-              <a:ext uri="{FF2B5EF4-FFF2-40B4-BE49-F238E27FC236}">
-                <a16:creationId xmlns:a16="http://schemas.microsoft.com/office/drawing/2014/main" id="{F317DBF2-8D1E-4FCD-A82F-6380AC2D0C71}"/>
-              </a:ext>
-            </a:extLst>
-          </p:cNvPr>
-          <p:cNvSpPr>
-            <a:spLocks xmlns:a="http://schemas.openxmlformats.org/drawingml/2006/main" noGrp="1"/>
-          </p:cNvSpPr>
-          <p:nvPr/>
-        </p:nvSpPr>
-        <p:spPr>
-          <a:xfrm xmlns:a="http://schemas.openxmlformats.org/drawingml/2006/main">
+            <a:extLst>
+              <a:ext uri="{FF2B5EF4-FFF2-40B4-BE49-F238E27FC236}">
+                <ns2:creationId id="{F317DBF2-8D1E-4FCD-A82F-6380AC2D0C71}"/>
+              </a:ext>
+            </a:extLst>
+          </p:cNvPr>
+          <p:cNvSpPr>
+            <a:spLocks noGrp="1"/>
+          </p:cNvSpPr>
+          <p:nvPr/>
+        </p:nvSpPr>
+        <p:spPr>
+          <a:xfrm>
             <a:off x="590550" y="523875"/>
             <a:ext cx="11049000" cy="809625"/>
           </a:xfrm>
-          <a:prstGeom xmlns:a="http://schemas.openxmlformats.org/drawingml/2006/main" prst="rect">
-            <a:avLst/>
-          </a:prstGeom>
-          <a:noFill xmlns:a="http://schemas.openxmlformats.org/drawingml/2006/main"/>
-          <a:ln xmlns:a="http://schemas.openxmlformats.org/drawingml/2006/main" w="0">
-            <a:noFill/>
-          </a:ln>
-        </p:spPr>
-        <p:txBody>
-          <a:bodyPr xmlns:a="http://schemas.openxmlformats.org/drawingml/2006/main">
+          <a:prstGeom prst="rect">
+            <a:avLst/>
+          </a:prstGeom>
+          <a:noFill/>
+          <a:ln w="0">
+            <a:noFill/>
+          </a:ln>
+        </p:spPr>
+        <p:txBody>
+          <a:bodyPr>
             <a:noAutofit/>
           </a:bodyPr>
-          <a:lstStyle xmlns:a="http://schemas.openxmlformats.org/drawingml/2006/main"/>
-          <a:p xmlns:a="http://schemas.openxmlformats.org/drawingml/2006/main">
+          <a:lstStyle/>
+          <a:p>
             <a:pPr>
               <a:defRPr sz="3150" b="1">
                 <a:solidFill>
@@ -14341,36 +14021,36 @@
       <p:sp>
         <p:nvSpPr>
           <p:cNvPr id="3" name="">
-            <a:extLst xmlns:a="http://schemas.openxmlformats.org/drawingml/2006/main">
-              <a:ext uri="{FF2B5EF4-FFF2-40B4-BE49-F238E27FC236}">
-                <a16:creationId xmlns:a16="http://schemas.microsoft.com/office/drawing/2014/main" id="{F95BE6B9-E581-4A3B-AF01-532194B72709}"/>
-              </a:ext>
-            </a:extLst>
-          </p:cNvPr>
-          <p:cNvSpPr>
-            <a:spLocks xmlns:a="http://schemas.openxmlformats.org/drawingml/2006/main" noGrp="1"/>
-          </p:cNvSpPr>
-          <p:nvPr/>
-        </p:nvSpPr>
-        <p:spPr>
-          <a:xfrm xmlns:a="http://schemas.openxmlformats.org/drawingml/2006/main">
+            <a:extLst>
+              <a:ext uri="{FF2B5EF4-FFF2-40B4-BE49-F238E27FC236}">
+                <ns2:creationId id="{F95BE6B9-E581-4A3B-AF01-532194B72709}"/>
+              </a:ext>
+            </a:extLst>
+          </p:cNvPr>
+          <p:cNvSpPr>
+            <a:spLocks noGrp="1"/>
+          </p:cNvSpPr>
+          <p:nvPr/>
+        </p:nvSpPr>
+        <p:spPr>
+          <a:xfrm>
             <a:off x="619125" y="1619250"/>
             <a:ext cx="2857500" cy="495300"/>
           </a:xfrm>
-          <a:prstGeom xmlns:a="http://schemas.openxmlformats.org/drawingml/2006/main" prst="rect">
-            <a:avLst/>
-          </a:prstGeom>
-          <a:noFill xmlns:a="http://schemas.openxmlformats.org/drawingml/2006/main"/>
-          <a:ln xmlns:a="http://schemas.openxmlformats.org/drawingml/2006/main" w="0">
-            <a:noFill/>
-          </a:ln>
-        </p:spPr>
-        <p:txBody>
-          <a:bodyPr xmlns:a="http://schemas.openxmlformats.org/drawingml/2006/main">
+          <a:prstGeom prst="rect">
+            <a:avLst/>
+          </a:prstGeom>
+          <a:noFill/>
+          <a:ln w="0">
+            <a:noFill/>
+          </a:ln>
+        </p:spPr>
+        <p:txBody>
+          <a:bodyPr>
             <a:noAutofit/>
           </a:bodyPr>
-          <a:lstStyle xmlns:a="http://schemas.openxmlformats.org/drawingml/2006/main"/>
-          <a:p xmlns:a="http://schemas.openxmlformats.org/drawingml/2006/main">
+          <a:lstStyle/>
+          <a:p>
             <a:pPr>
               <a:defRPr sz="1950" b="1">
                 <a:solidFill>
@@ -14398,36 +14078,36 @@
       <p:sp>
         <p:nvSpPr>
           <p:cNvPr id="4" name="">
-            <a:extLst xmlns:a="http://schemas.openxmlformats.org/drawingml/2006/main">
-              <a:ext uri="{FF2B5EF4-FFF2-40B4-BE49-F238E27FC236}">
-                <a16:creationId xmlns:a16="http://schemas.microsoft.com/office/drawing/2014/main" id="{E50EADA8-5E0A-4D14-B48B-9FD7DF9D3696}"/>
-              </a:ext>
-            </a:extLst>
-          </p:cNvPr>
-          <p:cNvSpPr>
-            <a:spLocks xmlns:a="http://schemas.openxmlformats.org/drawingml/2006/main" noGrp="1"/>
-          </p:cNvSpPr>
-          <p:nvPr/>
-        </p:nvSpPr>
-        <p:spPr>
-          <a:xfrm xmlns:a="http://schemas.openxmlformats.org/drawingml/2006/main">
+            <a:extLst>
+              <a:ext uri="{FF2B5EF4-FFF2-40B4-BE49-F238E27FC236}">
+                <ns2:creationId id="{E50EADA8-5E0A-4D14-B48B-9FD7DF9D3696}"/>
+              </a:ext>
+            </a:extLst>
+          </p:cNvPr>
+          <p:cNvSpPr>
+            <a:spLocks noGrp="1"/>
+          </p:cNvSpPr>
+          <p:nvPr/>
+        </p:nvSpPr>
+        <p:spPr>
+          <a:xfrm>
             <a:off x="619125" y="2295525"/>
             <a:ext cx="10810875" cy="3095625"/>
           </a:xfrm>
-          <a:prstGeom xmlns:a="http://schemas.openxmlformats.org/drawingml/2006/main" prst="rect">
-            <a:avLst/>
-          </a:prstGeom>
-          <a:noFill xmlns:a="http://schemas.openxmlformats.org/drawingml/2006/main"/>
-          <a:ln xmlns:a="http://schemas.openxmlformats.org/drawingml/2006/main" w="0">
-            <a:noFill/>
-          </a:ln>
-        </p:spPr>
-        <p:txBody>
-          <a:bodyPr xmlns:a="http://schemas.openxmlformats.org/drawingml/2006/main">
+          <a:prstGeom prst="rect">
+            <a:avLst/>
+          </a:prstGeom>
+          <a:noFill/>
+          <a:ln w="0">
+            <a:noFill/>
+          </a:ln>
+        </p:spPr>
+        <p:txBody>
+          <a:bodyPr>
             <a:noAutofit/>
           </a:bodyPr>
-          <a:lstStyle xmlns:a="http://schemas.openxmlformats.org/drawingml/2006/main"/>
-          <a:p xmlns:a="http://schemas.openxmlformats.org/drawingml/2006/main">
+          <a:lstStyle/>
+          <a:p>
             <a:pPr>
               <a:defRPr sz="2850" b="0">
                 <a:solidFill>
@@ -14450,12 +14130,12 @@
               <a:t>You can reopen your notebook and find code and typed reasoning without help.</a:t>
             </a:r>
           </a:p>
-          <a:p xmlns:a="http://schemas.openxmlformats.org/drawingml/2006/main">
+          <a:p>
             <a:r>
               <a:t/>
             </a:r>
           </a:p>
-          <a:p xmlns:a="http://schemas.openxmlformats.org/drawingml/2006/main">
+          <a:p>
             <a:pPr>
               <a:defRPr sz="2850" b="0">
                 <a:solidFill>
@@ -14483,36 +14163,36 @@
       <p:sp>
         <p:nvSpPr>
           <p:cNvPr id="5" name="">
-            <a:extLst xmlns:a="http://schemas.openxmlformats.org/drawingml/2006/main">
-              <a:ext uri="{FF2B5EF4-FFF2-40B4-BE49-F238E27FC236}">
-                <a16:creationId xmlns:a16="http://schemas.microsoft.com/office/drawing/2014/main" id="{07524098-018A-4472-AB85-D7D0B06E0EEF}"/>
-              </a:ext>
-            </a:extLst>
-          </p:cNvPr>
-          <p:cNvSpPr>
-            <a:spLocks xmlns:a="http://schemas.openxmlformats.org/drawingml/2006/main" noGrp="1"/>
-          </p:cNvSpPr>
-          <p:nvPr/>
-        </p:nvSpPr>
-        <p:spPr>
-          <a:xfrm xmlns:a="http://schemas.openxmlformats.org/drawingml/2006/main">
+            <a:extLst>
+              <a:ext uri="{FF2B5EF4-FFF2-40B4-BE49-F238E27FC236}">
+                <ns2:creationId id="{07524098-018A-4472-AB85-D7D0B06E0EEF}"/>
+              </a:ext>
+            </a:extLst>
+          </p:cNvPr>
+          <p:cNvSpPr>
+            <a:spLocks noGrp="1"/>
+          </p:cNvSpPr>
+          <p:nvPr/>
+        </p:nvSpPr>
+        <p:spPr>
+          <a:xfrm>
             <a:off x="619125" y="5791200"/>
             <a:ext cx="10810875" cy="542925"/>
           </a:xfrm>
-          <a:prstGeom xmlns:a="http://schemas.openxmlformats.org/drawingml/2006/main" prst="rect">
-            <a:avLst/>
-          </a:prstGeom>
-          <a:noFill xmlns:a="http://schemas.openxmlformats.org/drawingml/2006/main"/>
-          <a:ln xmlns:a="http://schemas.openxmlformats.org/drawingml/2006/main" w="0">
-            <a:noFill/>
-          </a:ln>
-        </p:spPr>
-        <p:txBody>
-          <a:bodyPr xmlns:a="http://schemas.openxmlformats.org/drawingml/2006/main">
+          <a:prstGeom prst="rect">
+            <a:avLst/>
+          </a:prstGeom>
+          <a:noFill/>
+          <a:ln w="0">
+            <a:noFill/>
+          </a:ln>
+        </p:spPr>
+        <p:txBody>
+          <a:bodyPr>
             <a:noAutofit/>
           </a:bodyPr>
-          <a:lstStyle xmlns:a="http://schemas.openxmlformats.org/drawingml/2006/main"/>
-          <a:p xmlns:a="http://schemas.openxmlformats.org/drawingml/2006/main">
+          <a:lstStyle/>
+          <a:p>
             <a:pPr>
               <a:defRPr sz="1800" b="0">
                 <a:solidFill>
@@ -14532,7 +14212,7 @@
                 <a:ea typeface="Calibri"/>
                 <a:cs typeface="Calibri"/>
               </a:rPr>
-              <a:t>Point to your evidence. Save your work.</a:t>
+              <a:t>Check your answers against the example, then save your work.</a:t>
             </a:r>
           </a:p>
         </p:txBody>
@@ -14540,36 +14220,36 @@
       <p:sp>
         <p:nvSpPr>
           <p:cNvPr id="6" name="">
-            <a:extLst xmlns:a="http://schemas.openxmlformats.org/drawingml/2006/main">
-              <a:ext uri="{FF2B5EF4-FFF2-40B4-BE49-F238E27FC236}">
-                <a16:creationId xmlns:a16="http://schemas.microsoft.com/office/drawing/2014/main" id="{2200F817-64E2-45EF-A9DE-5ABAB551544A}"/>
-              </a:ext>
-            </a:extLst>
-          </p:cNvPr>
-          <p:cNvSpPr>
-            <a:spLocks xmlns:a="http://schemas.openxmlformats.org/drawingml/2006/main" noGrp="1"/>
-          </p:cNvSpPr>
-          <p:nvPr/>
-        </p:nvSpPr>
-        <p:spPr>
-          <a:xfrm xmlns:a="http://schemas.openxmlformats.org/drawingml/2006/main">
+            <a:extLst>
+              <a:ext uri="{FF2B5EF4-FFF2-40B4-BE49-F238E27FC236}">
+                <ns2:creationId id="{2200F817-64E2-45EF-A9DE-5ABAB551544A}"/>
+              </a:ext>
+            </a:extLst>
+          </p:cNvPr>
+          <p:cNvSpPr>
+            <a:spLocks noGrp="1"/>
+          </p:cNvSpPr>
+          <p:nvPr/>
+        </p:nvSpPr>
+        <p:spPr>
+          <a:xfrm>
             <a:off x="590550" y="6524625"/>
             <a:ext cx="10810875" cy="219075"/>
           </a:xfrm>
-          <a:prstGeom xmlns:a="http://schemas.openxmlformats.org/drawingml/2006/main" prst="rect">
-            <a:avLst/>
-          </a:prstGeom>
-          <a:noFill xmlns:a="http://schemas.openxmlformats.org/drawingml/2006/main"/>
-          <a:ln xmlns:a="http://schemas.openxmlformats.org/drawingml/2006/main" w="0">
-            <a:noFill/>
-          </a:ln>
-        </p:spPr>
-        <p:txBody>
-          <a:bodyPr xmlns:a="http://schemas.openxmlformats.org/drawingml/2006/main">
+          <a:prstGeom prst="rect">
+            <a:avLst/>
+          </a:prstGeom>
+          <a:noFill/>
+          <a:ln w="0">
+            <a:noFill/>
+          </a:ln>
+        </p:spPr>
+        <p:txBody>
+          <a:bodyPr>
             <a:noAutofit/>
           </a:bodyPr>
-          <a:lstStyle xmlns:a="http://schemas.openxmlformats.org/drawingml/2006/main"/>
-          <a:p xmlns:a="http://schemas.openxmlformats.org/drawingml/2006/main">
+          <a:lstStyle/>
+          <a:p>
             <a:pPr>
               <a:defRPr sz="1200" b="0">
                 <a:solidFill>
@@ -14597,7 +14277,7 @@
     </p:spTree>
     <p:extLst>
       <p:ext uri="{BB962C8B-B14F-4D97-AF65-F5344CB8AC3E}">
-        <p14:creationId xmlns:p14="http://schemas.microsoft.com/office/powerpoint/2010/main" val="1414892683"/>
+        <ns3:creationId val="1414892683"/>
       </p:ext>
     </p:extLst>
   </p:cSld>
